--- a/week-3/Week_03_SADP_Creational_Patterns_details.pptx
+++ b/week-3/Week_03_SADP_Creational_Patterns_details.pptx
@@ -5,7 +5,7 @@
     <p:sldMasterId id="2147483648" r:id="rId1"/>
   </p:sldMasterIdLst>
   <p:notesMasterIdLst>
-    <p:notesMasterId r:id="rId32"/>
+    <p:notesMasterId r:id="rId36"/>
   </p:notesMasterIdLst>
   <p:sldIdLst>
     <p:sldId id="256" r:id="rId2"/>
@@ -16,28 +16,32 @@
     <p:sldId id="261" r:id="rId7"/>
     <p:sldId id="262" r:id="rId8"/>
     <p:sldId id="263" r:id="rId9"/>
-    <p:sldId id="264" r:id="rId10"/>
-    <p:sldId id="265" r:id="rId11"/>
-    <p:sldId id="266" r:id="rId12"/>
-    <p:sldId id="267" r:id="rId13"/>
-    <p:sldId id="268" r:id="rId14"/>
-    <p:sldId id="269" r:id="rId15"/>
-    <p:sldId id="270" r:id="rId16"/>
-    <p:sldId id="271" r:id="rId17"/>
-    <p:sldId id="272" r:id="rId18"/>
-    <p:sldId id="273" r:id="rId19"/>
-    <p:sldId id="274" r:id="rId20"/>
-    <p:sldId id="275" r:id="rId21"/>
-    <p:sldId id="276" r:id="rId22"/>
-    <p:sldId id="277" r:id="rId23"/>
-    <p:sldId id="278" r:id="rId24"/>
-    <p:sldId id="279" r:id="rId25"/>
-    <p:sldId id="280" r:id="rId26"/>
-    <p:sldId id="281" r:id="rId27"/>
-    <p:sldId id="282" r:id="rId28"/>
-    <p:sldId id="283" r:id="rId29"/>
-    <p:sldId id="284" r:id="rId30"/>
-    <p:sldId id="285" r:id="rId31"/>
+    <p:sldId id="286" r:id="rId10"/>
+    <p:sldId id="264" r:id="rId11"/>
+    <p:sldId id="265" r:id="rId12"/>
+    <p:sldId id="266" r:id="rId13"/>
+    <p:sldId id="267" r:id="rId14"/>
+    <p:sldId id="268" r:id="rId15"/>
+    <p:sldId id="287" r:id="rId16"/>
+    <p:sldId id="269" r:id="rId17"/>
+    <p:sldId id="270" r:id="rId18"/>
+    <p:sldId id="271" r:id="rId19"/>
+    <p:sldId id="272" r:id="rId20"/>
+    <p:sldId id="273" r:id="rId21"/>
+    <p:sldId id="274" r:id="rId22"/>
+    <p:sldId id="288" r:id="rId23"/>
+    <p:sldId id="275" r:id="rId24"/>
+    <p:sldId id="276" r:id="rId25"/>
+    <p:sldId id="277" r:id="rId26"/>
+    <p:sldId id="289" r:id="rId27"/>
+    <p:sldId id="278" r:id="rId28"/>
+    <p:sldId id="279" r:id="rId29"/>
+    <p:sldId id="280" r:id="rId30"/>
+    <p:sldId id="281" r:id="rId31"/>
+    <p:sldId id="282" r:id="rId32"/>
+    <p:sldId id="283" r:id="rId33"/>
+    <p:sldId id="284" r:id="rId34"/>
+    <p:sldId id="285" r:id="rId35"/>
   </p:sldIdLst>
   <p:sldSz cx="9144000" cy="6858000" type="screen4x3"/>
   <p:notesSz cx="6858000" cy="9144000"/>
@@ -415,7 +419,7 @@
           <a:p>
             <a:fld id="{F7021451-1387-4CA6-816F-3879F97B5CBC}" type="slidenum">
               <a:rPr lang="en-US"/>
-              <a:t>10</a:t>
+              <a:t>11</a:t>
             </a:fld>
             <a:endParaRPr lang="en-US"/>
           </a:p>
@@ -499,7 +503,7 @@
           <a:p>
             <a:fld id="{F7021451-1387-4CA6-816F-3879F97B5CBC}" type="slidenum">
               <a:rPr lang="en-US"/>
-              <a:t>11</a:t>
+              <a:t>12</a:t>
             </a:fld>
             <a:endParaRPr lang="en-US"/>
           </a:p>
@@ -583,7 +587,7 @@
           <a:p>
             <a:fld id="{F7021451-1387-4CA6-816F-3879F97B5CBC}" type="slidenum">
               <a:rPr lang="en-US"/>
-              <a:t>12</a:t>
+              <a:t>13</a:t>
             </a:fld>
             <a:endParaRPr lang="en-US"/>
           </a:p>
@@ -667,7 +671,7 @@
           <a:p>
             <a:fld id="{F7021451-1387-4CA6-816F-3879F97B5CBC}" type="slidenum">
               <a:rPr lang="en-US"/>
-              <a:t>13</a:t>
+              <a:t>14</a:t>
             </a:fld>
             <a:endParaRPr lang="en-US"/>
           </a:p>
@@ -751,7 +755,7 @@
           <a:p>
             <a:fld id="{F7021451-1387-4CA6-816F-3879F97B5CBC}" type="slidenum">
               <a:rPr lang="en-US"/>
-              <a:t>14</a:t>
+              <a:t>16</a:t>
             </a:fld>
             <a:endParaRPr lang="en-US"/>
           </a:p>
@@ -835,7 +839,7 @@
           <a:p>
             <a:fld id="{F7021451-1387-4CA6-816F-3879F97B5CBC}" type="slidenum">
               <a:rPr lang="en-US"/>
-              <a:t>15</a:t>
+              <a:t>17</a:t>
             </a:fld>
             <a:endParaRPr lang="en-US"/>
           </a:p>
@@ -919,7 +923,7 @@
           <a:p>
             <a:fld id="{F7021451-1387-4CA6-816F-3879F97B5CBC}" type="slidenum">
               <a:rPr lang="en-US"/>
-              <a:t>16</a:t>
+              <a:t>18</a:t>
             </a:fld>
             <a:endParaRPr lang="en-US"/>
           </a:p>
@@ -1003,7 +1007,7 @@
           <a:p>
             <a:fld id="{F7021451-1387-4CA6-816F-3879F97B5CBC}" type="slidenum">
               <a:rPr lang="en-US"/>
-              <a:t>17</a:t>
+              <a:t>19</a:t>
             </a:fld>
             <a:endParaRPr lang="en-US"/>
           </a:p>
@@ -1087,7 +1091,7 @@
           <a:p>
             <a:fld id="{F7021451-1387-4CA6-816F-3879F97B5CBC}" type="slidenum">
               <a:rPr lang="en-US"/>
-              <a:t>18</a:t>
+              <a:t>20</a:t>
             </a:fld>
             <a:endParaRPr lang="en-US"/>
           </a:p>
@@ -1171,7 +1175,7 @@
           <a:p>
             <a:fld id="{F7021451-1387-4CA6-816F-3879F97B5CBC}" type="slidenum">
               <a:rPr lang="en-US"/>
-              <a:t>19</a:t>
+              <a:t>21</a:t>
             </a:fld>
             <a:endParaRPr lang="en-US"/>
           </a:p>
@@ -1339,7 +1343,7 @@
           <a:p>
             <a:fld id="{F7021451-1387-4CA6-816F-3879F97B5CBC}" type="slidenum">
               <a:rPr lang="en-US"/>
-              <a:t>20</a:t>
+              <a:t>23</a:t>
             </a:fld>
             <a:endParaRPr lang="en-US"/>
           </a:p>
@@ -1423,7 +1427,7 @@
           <a:p>
             <a:fld id="{F7021451-1387-4CA6-816F-3879F97B5CBC}" type="slidenum">
               <a:rPr lang="en-US"/>
-              <a:t>21</a:t>
+              <a:t>24</a:t>
             </a:fld>
             <a:endParaRPr lang="en-US"/>
           </a:p>
@@ -1507,7 +1511,7 @@
           <a:p>
             <a:fld id="{F7021451-1387-4CA6-816F-3879F97B5CBC}" type="slidenum">
               <a:rPr lang="en-US"/>
-              <a:t>22</a:t>
+              <a:t>25</a:t>
             </a:fld>
             <a:endParaRPr lang="en-US"/>
           </a:p>
@@ -1591,7 +1595,7 @@
           <a:p>
             <a:fld id="{F7021451-1387-4CA6-816F-3879F97B5CBC}" type="slidenum">
               <a:rPr lang="en-US"/>
-              <a:t>23</a:t>
+              <a:t>27</a:t>
             </a:fld>
             <a:endParaRPr lang="en-US"/>
           </a:p>
@@ -1675,7 +1679,7 @@
           <a:p>
             <a:fld id="{F7021451-1387-4CA6-816F-3879F97B5CBC}" type="slidenum">
               <a:rPr lang="en-US"/>
-              <a:t>24</a:t>
+              <a:t>28</a:t>
             </a:fld>
             <a:endParaRPr lang="en-US"/>
           </a:p>
@@ -1759,7 +1763,7 @@
           <a:p>
             <a:fld id="{F7021451-1387-4CA6-816F-3879F97B5CBC}" type="slidenum">
               <a:rPr lang="en-US"/>
-              <a:t>25</a:t>
+              <a:t>29</a:t>
             </a:fld>
             <a:endParaRPr lang="en-US"/>
           </a:p>
@@ -1843,7 +1847,7 @@
           <a:p>
             <a:fld id="{F7021451-1387-4CA6-816F-3879F97B5CBC}" type="slidenum">
               <a:rPr lang="en-US"/>
-              <a:t>26</a:t>
+              <a:t>30</a:t>
             </a:fld>
             <a:endParaRPr lang="en-US"/>
           </a:p>
@@ -1927,7 +1931,7 @@
           <a:p>
             <a:fld id="{F7021451-1387-4CA6-816F-3879F97B5CBC}" type="slidenum">
               <a:rPr lang="en-US"/>
-              <a:t>27</a:t>
+              <a:t>31</a:t>
             </a:fld>
             <a:endParaRPr lang="en-US"/>
           </a:p>
@@ -2011,7 +2015,7 @@
           <a:p>
             <a:fld id="{F7021451-1387-4CA6-816F-3879F97B5CBC}" type="slidenum">
               <a:rPr lang="en-US"/>
-              <a:t>28</a:t>
+              <a:t>32</a:t>
             </a:fld>
             <a:endParaRPr lang="en-US"/>
           </a:p>
@@ -2095,7 +2099,7 @@
           <a:p>
             <a:fld id="{F7021451-1387-4CA6-816F-3879F97B5CBC}" type="slidenum">
               <a:rPr lang="en-US"/>
-              <a:t>29</a:t>
+              <a:t>33</a:t>
             </a:fld>
             <a:endParaRPr lang="en-US"/>
           </a:p>
@@ -2263,7 +2267,7 @@
           <a:p>
             <a:fld id="{F7021451-1387-4CA6-816F-3879F97B5CBC}" type="slidenum">
               <a:rPr lang="en-US"/>
-              <a:t>30</a:t>
+              <a:t>34</a:t>
             </a:fld>
             <a:endParaRPr lang="en-US"/>
           </a:p>
@@ -2767,7 +2771,7 @@
           <a:p>
             <a:fld id="{F7021451-1387-4CA6-816F-3879F97B5CBC}" type="slidenum">
               <a:rPr lang="en-US"/>
-              <a:t>9</a:t>
+              <a:t>10</a:t>
             </a:fld>
             <a:endParaRPr lang="en-US"/>
           </a:p>
@@ -4027,6 +4031,660 @@
 
 <file path=ppt/slides/slide10.xml><?xml version="1.0" encoding="utf-8"?>
 <p:sld xmlns:a="http://schemas.openxmlformats.org/drawingml/2006/main" xmlns:r="http://schemas.openxmlformats.org/officeDocument/2006/relationships" xmlns:p="http://schemas.openxmlformats.org/presentationml/2006/main">
+  <p:cSld name="Slide 9">
+    <p:bg>
+      <p:bgPr>
+        <a:solidFill>
+          <a:srgbClr val="FFFFFF"/>
+        </a:solidFill>
+        <a:effectLst/>
+      </p:bgPr>
+    </p:bg>
+    <p:spTree>
+      <p:nvGrpSpPr>
+        <p:cNvPr id="1" name=""/>
+        <p:cNvGrpSpPr/>
+        <p:nvPr/>
+      </p:nvGrpSpPr>
+      <p:grpSpPr>
+        <a:xfrm>
+          <a:off x="0" y="0"/>
+          <a:ext cx="0" cy="0"/>
+          <a:chOff x="0" y="0"/>
+          <a:chExt cx="0" cy="0"/>
+        </a:xfrm>
+      </p:grpSpPr>
+      <p:sp>
+        <p:nvSpPr>
+          <p:cNvPr id="2" name="Shape 0"/>
+          <p:cNvSpPr/>
+          <p:nvPr/>
+        </p:nvSpPr>
+        <p:spPr>
+          <a:xfrm>
+            <a:off x="0" y="0"/>
+            <a:ext cx="9144000" cy="932688"/>
+          </a:xfrm>
+          <a:prstGeom prst="rect">
+            <a:avLst/>
+          </a:prstGeom>
+          <a:solidFill>
+            <a:srgbClr val="23242B"/>
+          </a:solidFill>
+          <a:ln/>
+        </p:spPr>
+        <p:txBody>
+          <a:bodyPr/>
+          <a:lstStyle/>
+          <a:p>
+            <a:endParaRPr lang="en-US"/>
+          </a:p>
+        </p:txBody>
+      </p:sp>
+      <p:sp>
+        <p:nvSpPr>
+          <p:cNvPr id="3" name="Shape 1"/>
+          <p:cNvSpPr/>
+          <p:nvPr/>
+        </p:nvSpPr>
+        <p:spPr>
+          <a:xfrm>
+            <a:off x="4114800" y="0"/>
+            <a:ext cx="5029200" cy="932688"/>
+          </a:xfrm>
+          <a:prstGeom prst="rect">
+            <a:avLst/>
+          </a:prstGeom>
+          <a:solidFill>
+            <a:srgbClr val="4A4C57">
+              <a:alpha val="45000"/>
+            </a:srgbClr>
+          </a:solidFill>
+          <a:ln/>
+        </p:spPr>
+        <p:txBody>
+          <a:bodyPr/>
+          <a:lstStyle/>
+          <a:p>
+            <a:endParaRPr lang="en-US"/>
+          </a:p>
+        </p:txBody>
+      </p:sp>
+      <p:pic>
+        <p:nvPicPr>
+          <p:cNvPr id="4" name="Image 0" descr="/home/claude/aiub_logo.png"/>
+          <p:cNvPicPr>
+            <a:picLocks noChangeAspect="1"/>
+          </p:cNvPicPr>
+          <p:nvPr/>
+        </p:nvPicPr>
+        <p:blipFill>
+          <a:blip r:embed="rId3"/>
+          <a:stretch>
+            <a:fillRect/>
+          </a:stretch>
+        </p:blipFill>
+        <p:spPr>
+          <a:xfrm>
+            <a:off x="8211312" y="118872"/>
+            <a:ext cx="694944" cy="694944"/>
+          </a:xfrm>
+          <a:prstGeom prst="rect">
+            <a:avLst/>
+          </a:prstGeom>
+        </p:spPr>
+      </p:pic>
+      <p:sp>
+        <p:nvSpPr>
+          <p:cNvPr id="5" name="Text 2"/>
+          <p:cNvSpPr/>
+          <p:nvPr/>
+        </p:nvSpPr>
+        <p:spPr>
+          <a:xfrm>
+            <a:off x="502920" y="0"/>
+            <a:ext cx="8001000" cy="932688"/>
+          </a:xfrm>
+          <a:prstGeom prst="rect">
+            <a:avLst/>
+          </a:prstGeom>
+          <a:noFill/>
+          <a:ln/>
+        </p:spPr>
+        <p:txBody>
+          <a:bodyPr wrap="square" rtlCol="0" anchor="ctr"/>
+          <a:lstStyle/>
+          <a:p>
+            <a:pPr marL="0" indent="0" algn="l">
+              <a:buNone/>
+            </a:pPr>
+            <a:r>
+              <a:rPr lang="en-US" sz="2500" dirty="0">
+                <a:solidFill>
+                  <a:srgbClr val="FFFFFF"/>
+                </a:solidFill>
+                <a:latin typeface="Cambria" pitchFamily="34" charset="0"/>
+                <a:ea typeface="Cambria" pitchFamily="34" charset="-122"/>
+                <a:cs typeface="Cambria" pitchFamily="34" charset="-120"/>
+              </a:rPr>
+              <a:t>Singleton — Thread-safe TypeScript</a:t>
+            </a:r>
+            <a:endParaRPr lang="en-US" sz="2500" dirty="0"/>
+          </a:p>
+        </p:txBody>
+      </p:sp>
+      <p:sp>
+        <p:nvSpPr>
+          <p:cNvPr id="6" name="Text 3"/>
+          <p:cNvSpPr/>
+          <p:nvPr/>
+        </p:nvSpPr>
+        <p:spPr>
+          <a:xfrm>
+            <a:off x="502920" y="6547104"/>
+            <a:ext cx="5943600" cy="237744"/>
+          </a:xfrm>
+          <a:prstGeom prst="rect">
+            <a:avLst/>
+          </a:prstGeom>
+          <a:noFill/>
+          <a:ln/>
+        </p:spPr>
+        <p:txBody>
+          <a:bodyPr wrap="square" rtlCol="0" anchor="ctr"/>
+          <a:lstStyle/>
+          <a:p>
+            <a:pPr marL="0" indent="0" algn="l">
+              <a:buNone/>
+            </a:pPr>
+            <a:r>
+              <a:rPr lang="en-US" sz="800" dirty="0">
+                <a:solidFill>
+                  <a:srgbClr val="9A9CA3"/>
+                </a:solidFill>
+                <a:latin typeface="Calibri" pitchFamily="34" charset="0"/>
+                <a:ea typeface="Calibri" pitchFamily="34" charset="-122"/>
+                <a:cs typeface="Calibri" pitchFamily="34" charset="-120"/>
+              </a:rPr>
+              <a:t>CSC 4273  ·  Software Architecture &amp; Design Patterns  ·  AIUB</a:t>
+            </a:r>
+            <a:endParaRPr lang="en-US" sz="800" dirty="0"/>
+          </a:p>
+        </p:txBody>
+      </p:sp>
+      <p:sp>
+        <p:nvSpPr>
+          <p:cNvPr id="7" name="Text 4"/>
+          <p:cNvSpPr/>
+          <p:nvPr/>
+        </p:nvSpPr>
+        <p:spPr>
+          <a:xfrm>
+            <a:off x="7132320" y="6547104"/>
+            <a:ext cx="1508760" cy="237744"/>
+          </a:xfrm>
+          <a:prstGeom prst="rect">
+            <a:avLst/>
+          </a:prstGeom>
+          <a:noFill/>
+          <a:ln/>
+        </p:spPr>
+        <p:txBody>
+          <a:bodyPr wrap="square" rtlCol="0" anchor="ctr"/>
+          <a:lstStyle/>
+          <a:p>
+            <a:pPr marL="0" indent="0" algn="r">
+              <a:buNone/>
+            </a:pPr>
+            <a:r>
+              <a:rPr lang="en-US" sz="800" dirty="0">
+                <a:solidFill>
+                  <a:srgbClr val="9A9CA3"/>
+                </a:solidFill>
+                <a:latin typeface="Calibri" pitchFamily="34" charset="0"/>
+                <a:ea typeface="Calibri" pitchFamily="34" charset="-122"/>
+                <a:cs typeface="Calibri" pitchFamily="34" charset="-120"/>
+              </a:rPr>
+              <a:t>Week 3</a:t>
+            </a:r>
+            <a:endParaRPr lang="en-US" sz="800" dirty="0"/>
+          </a:p>
+        </p:txBody>
+      </p:sp>
+      <p:sp>
+        <p:nvSpPr>
+          <p:cNvPr id="8" name="Shape 5"/>
+          <p:cNvSpPr/>
+          <p:nvPr/>
+        </p:nvSpPr>
+        <p:spPr>
+          <a:xfrm>
+            <a:off x="502920" y="1133856"/>
+            <a:ext cx="8138160" cy="4206240"/>
+          </a:xfrm>
+          <a:prstGeom prst="roundRect">
+            <a:avLst>
+              <a:gd name="adj" fmla="val 1304"/>
+            </a:avLst>
+          </a:prstGeom>
+          <a:solidFill>
+            <a:srgbClr val="F5F5F7"/>
+          </a:solidFill>
+          <a:ln w="12700">
+            <a:solidFill>
+              <a:srgbClr val="D9DBE2"/>
+            </a:solidFill>
+            <a:prstDash val="solid"/>
+          </a:ln>
+        </p:spPr>
+        <p:txBody>
+          <a:bodyPr/>
+          <a:lstStyle/>
+          <a:p>
+            <a:endParaRPr lang="en-US"/>
+          </a:p>
+        </p:txBody>
+      </p:sp>
+      <p:sp>
+        <p:nvSpPr>
+          <p:cNvPr id="9" name="Text 6"/>
+          <p:cNvSpPr/>
+          <p:nvPr/>
+        </p:nvSpPr>
+        <p:spPr>
+          <a:xfrm>
+            <a:off x="667512" y="1225296"/>
+            <a:ext cx="7808976" cy="4023360"/>
+          </a:xfrm>
+          <a:prstGeom prst="rect">
+            <a:avLst/>
+          </a:prstGeom>
+          <a:noFill/>
+          <a:ln/>
+        </p:spPr>
+        <p:txBody>
+          <a:bodyPr wrap="square" rtlCol="0" anchor="t"/>
+          <a:lstStyle/>
+          <a:p>
+            <a:pPr marL="0" indent="0">
+              <a:lnSpc>
+                <a:spcPct val="100000"/>
+              </a:lnSpc>
+              <a:buNone/>
+            </a:pPr>
+            <a:r>
+              <a:rPr lang="en-US" sz="1400" dirty="0">
+                <a:solidFill>
+                  <a:srgbClr val="1E1E22"/>
+                </a:solidFill>
+                <a:latin typeface="Consolas" pitchFamily="34" charset="0"/>
+                <a:ea typeface="Consolas" pitchFamily="34" charset="-122"/>
+                <a:cs typeface="Consolas" pitchFamily="34" charset="-120"/>
+              </a:rPr>
+              <a:t>class DatabaseConnection {</a:t>
+            </a:r>
+            <a:endParaRPr lang="en-US" sz="1400" dirty="0"/>
+          </a:p>
+          <a:p>
+            <a:pPr marL="0" indent="0">
+              <a:lnSpc>
+                <a:spcPct val="100000"/>
+              </a:lnSpc>
+              <a:buNone/>
+            </a:pPr>
+            <a:r>
+              <a:rPr lang="en-US" sz="1400" dirty="0">
+                <a:solidFill>
+                  <a:srgbClr val="1E1E22"/>
+                </a:solidFill>
+                <a:latin typeface="Consolas" pitchFamily="34" charset="0"/>
+                <a:ea typeface="Consolas" pitchFamily="34" charset="-122"/>
+                <a:cs typeface="Consolas" pitchFamily="34" charset="-120"/>
+              </a:rPr>
+              <a:t>  private static instance: DatabaseConnection | null = null;</a:t>
+            </a:r>
+            <a:endParaRPr lang="en-US" sz="1400" dirty="0"/>
+          </a:p>
+          <a:p>
+            <a:pPr marL="0" indent="0">
+              <a:lnSpc>
+                <a:spcPct val="100000"/>
+              </a:lnSpc>
+              <a:buNone/>
+            </a:pPr>
+            <a:r>
+              <a:rPr lang="en-US" sz="1400" dirty="0">
+                <a:solidFill>
+                  <a:srgbClr val="1E1E22"/>
+                </a:solidFill>
+                <a:latin typeface="Consolas" pitchFamily="34" charset="0"/>
+                <a:ea typeface="Consolas" pitchFamily="34" charset="-122"/>
+                <a:cs typeface="Consolas" pitchFamily="34" charset="-120"/>
+              </a:rPr>
+              <a:t>  private constructor(private readonly url: string) {}</a:t>
+            </a:r>
+            <a:endParaRPr lang="en-US" sz="1400" dirty="0"/>
+          </a:p>
+          <a:p>
+            <a:pPr marL="0" indent="0">
+              <a:lnSpc>
+                <a:spcPct val="100000"/>
+              </a:lnSpc>
+              <a:buNone/>
+            </a:pPr>
+            <a:r>
+              <a:rPr lang="en-US" sz="1400" dirty="0">
+                <a:solidFill>
+                  <a:srgbClr val="1E1E22"/>
+                </a:solidFill>
+                <a:latin typeface="Consolas" pitchFamily="34" charset="0"/>
+                <a:ea typeface="Consolas" pitchFamily="34" charset="-122"/>
+                <a:cs typeface="Consolas" pitchFamily="34" charset="-120"/>
+              </a:rPr>
+              <a:t> </a:t>
+            </a:r>
+            <a:endParaRPr lang="en-US" sz="1400" dirty="0"/>
+          </a:p>
+          <a:p>
+            <a:pPr marL="0" indent="0">
+              <a:lnSpc>
+                <a:spcPct val="100000"/>
+              </a:lnSpc>
+              <a:buNone/>
+            </a:pPr>
+            <a:r>
+              <a:rPr lang="en-US" sz="1400" dirty="0">
+                <a:solidFill>
+                  <a:srgbClr val="1E1E22"/>
+                </a:solidFill>
+                <a:latin typeface="Consolas" pitchFamily="34" charset="0"/>
+                <a:ea typeface="Consolas" pitchFamily="34" charset="-122"/>
+                <a:cs typeface="Consolas" pitchFamily="34" charset="-120"/>
+              </a:rPr>
+              <a:t>  static getInstance(url: string): DatabaseConnection {</a:t>
+            </a:r>
+            <a:endParaRPr lang="en-US" sz="1400" dirty="0"/>
+          </a:p>
+          <a:p>
+            <a:pPr marL="0" indent="0">
+              <a:lnSpc>
+                <a:spcPct val="100000"/>
+              </a:lnSpc>
+              <a:buNone/>
+            </a:pPr>
+            <a:r>
+              <a:rPr lang="en-US" sz="1400" dirty="0">
+                <a:solidFill>
+                  <a:srgbClr val="1E1E22"/>
+                </a:solidFill>
+                <a:latin typeface="Consolas" pitchFamily="34" charset="0"/>
+                <a:ea typeface="Consolas" pitchFamily="34" charset="-122"/>
+                <a:cs typeface="Consolas" pitchFamily="34" charset="-120"/>
+              </a:rPr>
+              <a:t>    if (!DatabaseConnection.instance) {</a:t>
+            </a:r>
+            <a:endParaRPr lang="en-US" sz="1400" dirty="0"/>
+          </a:p>
+          <a:p>
+            <a:pPr marL="0" indent="0">
+              <a:lnSpc>
+                <a:spcPct val="100000"/>
+              </a:lnSpc>
+              <a:buNone/>
+            </a:pPr>
+            <a:r>
+              <a:rPr lang="en-US" sz="1400" dirty="0">
+                <a:solidFill>
+                  <a:srgbClr val="1E1E22"/>
+                </a:solidFill>
+                <a:latin typeface="Consolas" pitchFamily="34" charset="0"/>
+                <a:ea typeface="Consolas" pitchFamily="34" charset="-122"/>
+                <a:cs typeface="Consolas" pitchFamily="34" charset="-120"/>
+              </a:rPr>
+              <a:t>      DatabaseConnection.instance = new DatabaseConnection(url);</a:t>
+            </a:r>
+            <a:endParaRPr lang="en-US" sz="1400" dirty="0"/>
+          </a:p>
+          <a:p>
+            <a:pPr marL="0" indent="0">
+              <a:lnSpc>
+                <a:spcPct val="100000"/>
+              </a:lnSpc>
+              <a:buNone/>
+            </a:pPr>
+            <a:r>
+              <a:rPr lang="en-US" sz="1400" dirty="0">
+                <a:solidFill>
+                  <a:srgbClr val="1E1E22"/>
+                </a:solidFill>
+                <a:latin typeface="Consolas" pitchFamily="34" charset="0"/>
+                <a:ea typeface="Consolas" pitchFamily="34" charset="-122"/>
+                <a:cs typeface="Consolas" pitchFamily="34" charset="-120"/>
+              </a:rPr>
+              <a:t>    }</a:t>
+            </a:r>
+            <a:endParaRPr lang="en-US" sz="1400" dirty="0"/>
+          </a:p>
+          <a:p>
+            <a:pPr marL="0" indent="0">
+              <a:lnSpc>
+                <a:spcPct val="100000"/>
+              </a:lnSpc>
+              <a:buNone/>
+            </a:pPr>
+            <a:r>
+              <a:rPr lang="en-US" sz="1400" dirty="0">
+                <a:solidFill>
+                  <a:srgbClr val="1E1E22"/>
+                </a:solidFill>
+                <a:latin typeface="Consolas" pitchFamily="34" charset="0"/>
+                <a:ea typeface="Consolas" pitchFamily="34" charset="-122"/>
+                <a:cs typeface="Consolas" pitchFamily="34" charset="-120"/>
+              </a:rPr>
+              <a:t>    return DatabaseConnection.instance;       // same object every time</a:t>
+            </a:r>
+            <a:endParaRPr lang="en-US" sz="1400" dirty="0"/>
+          </a:p>
+          <a:p>
+            <a:pPr marL="0" indent="0">
+              <a:lnSpc>
+                <a:spcPct val="100000"/>
+              </a:lnSpc>
+              <a:buNone/>
+            </a:pPr>
+            <a:r>
+              <a:rPr lang="en-US" sz="1400" dirty="0">
+                <a:solidFill>
+                  <a:srgbClr val="1E1E22"/>
+                </a:solidFill>
+                <a:latin typeface="Consolas" pitchFamily="34" charset="0"/>
+                <a:ea typeface="Consolas" pitchFamily="34" charset="-122"/>
+                <a:cs typeface="Consolas" pitchFamily="34" charset="-120"/>
+              </a:rPr>
+              <a:t>  }</a:t>
+            </a:r>
+            <a:endParaRPr lang="en-US" sz="1400" dirty="0"/>
+          </a:p>
+          <a:p>
+            <a:pPr marL="0" indent="0">
+              <a:lnSpc>
+                <a:spcPct val="100000"/>
+              </a:lnSpc>
+              <a:buNone/>
+            </a:pPr>
+            <a:r>
+              <a:rPr lang="en-US" sz="1400" dirty="0">
+                <a:solidFill>
+                  <a:srgbClr val="1E1E22"/>
+                </a:solidFill>
+                <a:latin typeface="Consolas" pitchFamily="34" charset="0"/>
+                <a:ea typeface="Consolas" pitchFamily="34" charset="-122"/>
+                <a:cs typeface="Consolas" pitchFamily="34" charset="-120"/>
+              </a:rPr>
+              <a:t>}</a:t>
+            </a:r>
+            <a:endParaRPr lang="en-US" sz="1400" dirty="0"/>
+          </a:p>
+          <a:p>
+            <a:pPr marL="0" indent="0">
+              <a:lnSpc>
+                <a:spcPct val="100000"/>
+              </a:lnSpc>
+              <a:buNone/>
+            </a:pPr>
+            <a:r>
+              <a:rPr lang="en-US" sz="1400" dirty="0">
+                <a:solidFill>
+                  <a:srgbClr val="1E1E22"/>
+                </a:solidFill>
+                <a:latin typeface="Consolas" pitchFamily="34" charset="0"/>
+                <a:ea typeface="Consolas" pitchFamily="34" charset="-122"/>
+                <a:cs typeface="Consolas" pitchFamily="34" charset="-120"/>
+              </a:rPr>
+              <a:t> </a:t>
+            </a:r>
+            <a:endParaRPr lang="en-US" sz="1400" dirty="0"/>
+          </a:p>
+          <a:p>
+            <a:pPr marL="0" indent="0">
+              <a:lnSpc>
+                <a:spcPct val="100000"/>
+              </a:lnSpc>
+              <a:buNone/>
+            </a:pPr>
+            <a:r>
+              <a:rPr lang="en-US" sz="1400" dirty="0">
+                <a:solidFill>
+                  <a:srgbClr val="1E1E22"/>
+                </a:solidFill>
+                <a:latin typeface="Consolas" pitchFamily="34" charset="0"/>
+                <a:ea typeface="Consolas" pitchFamily="34" charset="-122"/>
+                <a:cs typeface="Consolas" pitchFamily="34" charset="-120"/>
+              </a:rPr>
+              <a:t>const db1 = DatabaseConnection.getInstance('postgres://localhost/db');</a:t>
+            </a:r>
+            <a:endParaRPr lang="en-US" sz="1400" dirty="0"/>
+          </a:p>
+          <a:p>
+            <a:pPr marL="0" indent="0">
+              <a:lnSpc>
+                <a:spcPct val="100000"/>
+              </a:lnSpc>
+              <a:buNone/>
+            </a:pPr>
+            <a:r>
+              <a:rPr lang="en-US" sz="1400" dirty="0">
+                <a:solidFill>
+                  <a:srgbClr val="1E1E22"/>
+                </a:solidFill>
+                <a:latin typeface="Consolas" pitchFamily="34" charset="0"/>
+                <a:ea typeface="Consolas" pitchFamily="34" charset="-122"/>
+                <a:cs typeface="Consolas" pitchFamily="34" charset="-120"/>
+              </a:rPr>
+              <a:t>const db2 = DatabaseConnection.getInstance('postgres://localhost/db');</a:t>
+            </a:r>
+            <a:endParaRPr lang="en-US" sz="1400" dirty="0"/>
+          </a:p>
+          <a:p>
+            <a:pPr marL="0" indent="0">
+              <a:lnSpc>
+                <a:spcPct val="100000"/>
+              </a:lnSpc>
+              <a:buNone/>
+            </a:pPr>
+            <a:r>
+              <a:rPr lang="en-US" sz="1400" dirty="0">
+                <a:solidFill>
+                  <a:srgbClr val="1E7A34"/>
+                </a:solidFill>
+                <a:latin typeface="Consolas" pitchFamily="34" charset="0"/>
+                <a:ea typeface="Consolas" pitchFamily="34" charset="-122"/>
+                <a:cs typeface="Consolas" pitchFamily="34" charset="-120"/>
+              </a:rPr>
+              <a:t>console.log(db1 === db2);   // true — reference equality, ONE object</a:t>
+            </a:r>
+            <a:endParaRPr lang="en-US" sz="1400" dirty="0"/>
+          </a:p>
+        </p:txBody>
+      </p:sp>
+      <p:sp>
+        <p:nvSpPr>
+          <p:cNvPr id="10" name="Text 7"/>
+          <p:cNvSpPr/>
+          <p:nvPr/>
+        </p:nvSpPr>
+        <p:spPr>
+          <a:xfrm>
+            <a:off x="502920" y="5449824"/>
+            <a:ext cx="8138160" cy="1060704"/>
+          </a:xfrm>
+          <a:prstGeom prst="rect">
+            <a:avLst/>
+          </a:prstGeom>
+          <a:noFill/>
+          <a:ln/>
+        </p:spPr>
+        <p:txBody>
+          <a:bodyPr wrap="square" rtlCol="0" anchor="t"/>
+          <a:lstStyle/>
+          <a:p>
+            <a:pPr marL="0" indent="0">
+              <a:spcAft>
+                <a:spcPts val="300"/>
+              </a:spcAft>
+              <a:buNone/>
+            </a:pPr>
+            <a:r>
+              <a:rPr lang="en-US" sz="1200" dirty="0">
+                <a:solidFill>
+                  <a:srgbClr val="1A1A1A"/>
+                </a:solidFill>
+                <a:latin typeface="Calibri" pitchFamily="34" charset="0"/>
+                <a:ea typeface="Calibri" pitchFamily="34" charset="-122"/>
+                <a:cs typeface="Calibri" pitchFamily="34" charset="-120"/>
+              </a:rPr>
+              <a:t>Node.js is single-threaded, so the simple null check is enough (no double-checked</a:t>
+            </a:r>
+            <a:r>
+              <a:rPr lang="en-US" sz="1200" dirty="0"/>
+              <a:t> </a:t>
+            </a:r>
+            <a:r>
+              <a:rPr lang="en-US" sz="1200" dirty="0">
+                <a:solidFill>
+                  <a:srgbClr val="242852"/>
+                </a:solidFill>
+                <a:latin typeface="Calibri" pitchFamily="34" charset="0"/>
+                <a:ea typeface="Calibri" pitchFamily="34" charset="-122"/>
+                <a:cs typeface="Calibri" pitchFamily="34" charset="-120"/>
+              </a:rPr>
+              <a:t>locking)</a:t>
+            </a:r>
+            <a:r>
+              <a:rPr lang="en-US" sz="1200" b="1" dirty="0">
+                <a:solidFill>
+                  <a:srgbClr val="242852"/>
+                </a:solidFill>
+                <a:latin typeface="Calibri" pitchFamily="34" charset="0"/>
+                <a:ea typeface="Calibri" pitchFamily="34" charset="-122"/>
+                <a:cs typeface="Calibri" pitchFamily="34" charset="-120"/>
+              </a:rPr>
+              <a:t>. Add a static resetForTesting() — in tests only — to clear the instance.</a:t>
+            </a:r>
+            <a:endParaRPr lang="en-US" sz="1200" dirty="0"/>
+          </a:p>
+        </p:txBody>
+      </p:sp>
+    </p:spTree>
+  </p:cSld>
+  <p:clrMapOvr>
+    <a:masterClrMapping/>
+  </p:clrMapOvr>
+</p:sld>
+</file>
+
+<file path=ppt/slides/slide11.xml><?xml version="1.0" encoding="utf-8"?>
+<p:sld xmlns:a="http://schemas.openxmlformats.org/drawingml/2006/main" xmlns:r="http://schemas.openxmlformats.org/officeDocument/2006/relationships" xmlns:p="http://schemas.openxmlformats.org/presentationml/2006/main">
   <p:cSld name="Slide 10">
     <p:bg>
       <p:bgPr>
@@ -4659,7 +5317,7 @@
 </p:sld>
 </file>
 
-<file path=ppt/slides/slide11.xml><?xml version="1.0" encoding="utf-8"?>
+<file path=ppt/slides/slide12.xml><?xml version="1.0" encoding="utf-8"?>
 <p:sld xmlns:a="http://schemas.openxmlformats.org/drawingml/2006/main" xmlns:r="http://schemas.openxmlformats.org/officeDocument/2006/relationships" xmlns:p="http://schemas.openxmlformats.org/presentationml/2006/main">
   <p:cSld name="Slide 11">
     <p:bg>
@@ -5280,15 +5938,26 @@
               <a:t> </a:t>
             </a:r>
             <a:r>
-              <a:rPr lang="en-US" sz="1150" b="1" dirty="0">
-                <a:solidFill>
-                  <a:srgbClr val="242852"/>
+              <a:rPr lang="en-US" sz="1150" dirty="0">
+                <a:solidFill>
+                  <a:srgbClr val="C00000"/>
                 </a:solidFill>
                 <a:latin typeface="Calibri" pitchFamily="34" charset="0"/>
                 <a:ea typeface="Calibri" pitchFamily="34" charset="-122"/>
                 <a:cs typeface="Calibri" pitchFamily="34" charset="-120"/>
               </a:rPr>
-              <a:t>connections, every call fails. One shared pool with max:20 keeps us safely under the cap.</a:t>
+              <a:t>connections</a:t>
+            </a:r>
+            <a:r>
+              <a:rPr lang="en-US" sz="1150" b="1" dirty="0">
+                <a:solidFill>
+                  <a:srgbClr val="242852"/>
+                </a:solidFill>
+                <a:latin typeface="Calibri" pitchFamily="34" charset="0"/>
+                <a:ea typeface="Calibri" pitchFamily="34" charset="-122"/>
+                <a:cs typeface="Calibri" pitchFamily="34" charset="-120"/>
+              </a:rPr>
+              <a:t>, every call fails. One shared pool with max:20 keeps us safely under the cap.</a:t>
             </a:r>
             <a:endParaRPr lang="en-US" sz="1150" dirty="0"/>
           </a:p>
@@ -5302,7 +5971,7 @@
 </p:sld>
 </file>
 
-<file path=ppt/slides/slide12.xml><?xml version="1.0" encoding="utf-8"?>
+<file path=ppt/slides/slide13.xml><?xml version="1.0" encoding="utf-8"?>
 <p:sld xmlns:a="http://schemas.openxmlformats.org/drawingml/2006/main" xmlns:r="http://schemas.openxmlformats.org/officeDocument/2006/relationships" xmlns:p="http://schemas.openxmlformats.org/presentationml/2006/main">
   <p:cSld name="Slide 12">
     <p:bg>
@@ -5916,7 +6585,7 @@
 </p:sld>
 </file>
 
-<file path=ppt/slides/slide13.xml><?xml version="1.0" encoding="utf-8"?>
+<file path=ppt/slides/slide14.xml><?xml version="1.0" encoding="utf-8"?>
 <p:sld xmlns:a="http://schemas.openxmlformats.org/drawingml/2006/main" xmlns:r="http://schemas.openxmlformats.org/officeDocument/2006/relationships" xmlns:p="http://schemas.openxmlformats.org/presentationml/2006/main">
   <p:cSld name="Slide 13">
     <p:bg>
@@ -6315,7 +6984,929 @@
 </p:sld>
 </file>
 
-<file path=ppt/slides/slide14.xml><?xml version="1.0" encoding="utf-8"?>
+<file path=ppt/slides/slide15.xml><?xml version="1.0" encoding="utf-8"?>
+<p:sld xmlns:a="http://schemas.openxmlformats.org/drawingml/2006/main" xmlns:r="http://schemas.openxmlformats.org/officeDocument/2006/relationships" xmlns:p="http://schemas.openxmlformats.org/presentationml/2006/main">
+  <p:cSld>
+    <p:spTree>
+      <p:nvGrpSpPr>
+        <p:cNvPr id="1" name=""/>
+        <p:cNvGrpSpPr/>
+        <p:nvPr/>
+      </p:nvGrpSpPr>
+      <p:grpSpPr>
+        <a:xfrm>
+          <a:off x="0" y="0"/>
+          <a:ext cx="0" cy="0"/>
+          <a:chOff x="0" y="0"/>
+          <a:chExt cx="0" cy="0"/>
+        </a:xfrm>
+      </p:grpSpPr>
+      <p:sp>
+        <p:nvSpPr>
+          <p:cNvPr id="2" name="Rectangle 1"/>
+          <p:cNvSpPr/>
+          <p:nvPr/>
+        </p:nvSpPr>
+        <p:spPr>
+          <a:xfrm>
+            <a:off x="0" y="0"/>
+            <a:ext cx="9144000" cy="932688"/>
+          </a:xfrm>
+          <a:prstGeom prst="rect">
+            <a:avLst/>
+          </a:prstGeom>
+          <a:solidFill>
+            <a:srgbClr val="23242B"/>
+          </a:solidFill>
+          <a:ln>
+            <a:noFill/>
+          </a:ln>
+          <a:effectLst/>
+        </p:spPr>
+        <p:style>
+          <a:lnRef idx="1">
+            <a:schemeClr val="accent1"/>
+          </a:lnRef>
+          <a:fillRef idx="3">
+            <a:schemeClr val="accent1"/>
+          </a:fillRef>
+          <a:effectRef idx="2">
+            <a:schemeClr val="accent1"/>
+          </a:effectRef>
+          <a:fontRef idx="minor">
+            <a:schemeClr val="lt1"/>
+          </a:fontRef>
+        </p:style>
+        <p:txBody>
+          <a:bodyPr rtlCol="0" anchor="ctr"/>
+          <a:lstStyle/>
+          <a:p>
+            <a:pPr algn="ctr"/>
+            <a:endParaRPr/>
+          </a:p>
+        </p:txBody>
+      </p:sp>
+      <p:sp>
+        <p:nvSpPr>
+          <p:cNvPr id="3" name="Rectangle 2"/>
+          <p:cNvSpPr/>
+          <p:nvPr/>
+        </p:nvSpPr>
+        <p:spPr>
+          <a:xfrm>
+            <a:off x="4114800" y="0"/>
+            <a:ext cx="5029200" cy="932688"/>
+          </a:xfrm>
+          <a:prstGeom prst="rect">
+            <a:avLst/>
+          </a:prstGeom>
+          <a:solidFill>
+            <a:srgbClr val="4A4C57"/>
+          </a:solidFill>
+          <a:ln>
+            <a:noFill/>
+          </a:ln>
+          <a:effectLst/>
+        </p:spPr>
+        <p:style>
+          <a:lnRef idx="1">
+            <a:schemeClr val="accent1"/>
+          </a:lnRef>
+          <a:fillRef idx="3">
+            <a:schemeClr val="accent1"/>
+          </a:fillRef>
+          <a:effectRef idx="2">
+            <a:schemeClr val="accent1"/>
+          </a:effectRef>
+          <a:fontRef idx="minor">
+            <a:schemeClr val="lt1"/>
+          </a:fontRef>
+        </p:style>
+        <p:txBody>
+          <a:bodyPr rtlCol="0" anchor="ctr"/>
+          <a:lstStyle/>
+          <a:p>
+            <a:pPr algn="ctr"/>
+            <a:endParaRPr/>
+          </a:p>
+        </p:txBody>
+      </p:sp>
+      <p:pic>
+        <p:nvPicPr>
+          <p:cNvPr id="4" name="Picture 3" descr="image.png"/>
+          <p:cNvPicPr>
+            <a:picLocks noChangeAspect="1"/>
+          </p:cNvPicPr>
+          <p:nvPr/>
+        </p:nvPicPr>
+        <p:blipFill>
+          <a:blip r:embed="rId2"/>
+          <a:stretch>
+            <a:fillRect/>
+          </a:stretch>
+        </p:blipFill>
+        <p:spPr>
+          <a:xfrm>
+            <a:off x="8211312" y="118872"/>
+            <a:ext cx="694944" cy="694944"/>
+          </a:xfrm>
+          <a:prstGeom prst="rect">
+            <a:avLst/>
+          </a:prstGeom>
+        </p:spPr>
+      </p:pic>
+      <p:sp>
+        <p:nvSpPr>
+          <p:cNvPr id="5" name="TextBox 4"/>
+          <p:cNvSpPr txBox="1"/>
+          <p:nvPr/>
+        </p:nvSpPr>
+        <p:spPr>
+          <a:xfrm>
+            <a:off x="502920" y="0"/>
+            <a:ext cx="7406640" cy="932688"/>
+          </a:xfrm>
+          <a:prstGeom prst="rect">
+            <a:avLst/>
+          </a:prstGeom>
+          <a:noFill/>
+        </p:spPr>
+        <p:txBody>
+          <a:bodyPr wrap="square" lIns="45720" tIns="18288" rIns="45720" bIns="18288" anchor="ctr">
+            <a:spAutoFit/>
+          </a:bodyPr>
+          <a:lstStyle/>
+          <a:p>
+            <a:pPr algn="l"/>
+            <a:r>
+              <a:rPr sz="2300" b="0" i="0">
+                <a:solidFill>
+                  <a:srgbClr val="FFFFFF"/>
+                </a:solidFill>
+                <a:latin typeface="Calibri"/>
+              </a:rPr>
+              <a:t>Factory Method — a subclass picks the product</a:t>
+            </a:r>
+          </a:p>
+          <a:p>
+            <a:pPr algn="l"/>
+            <a:r>
+              <a:rPr sz="1100" b="0" i="1">
+                <a:solidFill>
+                  <a:srgbClr val="CADCFC"/>
+                </a:solidFill>
+                <a:latin typeface="Calibri"/>
+              </a:rPr>
+              <a:t>logistics: road division → truck, sea division → ship</a:t>
+            </a:r>
+          </a:p>
+        </p:txBody>
+      </p:sp>
+      <p:sp>
+        <p:nvSpPr>
+          <p:cNvPr id="6" name="TextBox 5"/>
+          <p:cNvSpPr txBox="1"/>
+          <p:nvPr/>
+        </p:nvSpPr>
+        <p:spPr>
+          <a:xfrm>
+            <a:off x="502920" y="6547104"/>
+            <a:ext cx="5943600" cy="237744"/>
+          </a:xfrm>
+          <a:prstGeom prst="rect">
+            <a:avLst/>
+          </a:prstGeom>
+          <a:noFill/>
+        </p:spPr>
+        <p:txBody>
+          <a:bodyPr wrap="square" lIns="45720" tIns="18288" rIns="45720" bIns="18288" anchor="ctr">
+            <a:spAutoFit/>
+          </a:bodyPr>
+          <a:lstStyle/>
+          <a:p>
+            <a:pPr algn="l"/>
+            <a:r>
+              <a:rPr sz="800" b="0" i="0">
+                <a:solidFill>
+                  <a:srgbClr val="9A9CA3"/>
+                </a:solidFill>
+                <a:latin typeface="Calibri"/>
+              </a:rPr>
+              <a:t>CSC 4273   ·   Software Architecture &amp; Design Patterns   ·   AIUB</a:t>
+            </a:r>
+          </a:p>
+        </p:txBody>
+      </p:sp>
+      <p:sp>
+        <p:nvSpPr>
+          <p:cNvPr id="7" name="TextBox 6"/>
+          <p:cNvSpPr txBox="1"/>
+          <p:nvPr/>
+        </p:nvSpPr>
+        <p:spPr>
+          <a:xfrm>
+            <a:off x="7132320" y="6547104"/>
+            <a:ext cx="1508760" cy="237744"/>
+          </a:xfrm>
+          <a:prstGeom prst="rect">
+            <a:avLst/>
+          </a:prstGeom>
+          <a:noFill/>
+        </p:spPr>
+        <p:txBody>
+          <a:bodyPr wrap="square" lIns="45720" tIns="18288" rIns="45720" bIns="18288" anchor="ctr">
+            <a:spAutoFit/>
+          </a:bodyPr>
+          <a:lstStyle/>
+          <a:p>
+            <a:pPr algn="r"/>
+            <a:r>
+              <a:rPr sz="800" b="0" i="0">
+                <a:solidFill>
+                  <a:srgbClr val="9A9CA3"/>
+                </a:solidFill>
+                <a:latin typeface="Calibri"/>
+              </a:rPr>
+              <a:t>Week 3</a:t>
+            </a:r>
+          </a:p>
+        </p:txBody>
+      </p:sp>
+      <p:sp>
+        <p:nvSpPr>
+          <p:cNvPr id="8" name="Rounded Rectangle 7"/>
+          <p:cNvSpPr/>
+          <p:nvPr/>
+        </p:nvSpPr>
+        <p:spPr>
+          <a:xfrm>
+            <a:off x="640080" y="1463040"/>
+            <a:ext cx="3108960" cy="822960"/>
+          </a:xfrm>
+          <a:prstGeom prst="roundRect">
+            <a:avLst>
+              <a:gd name="adj" fmla="val 8000"/>
+            </a:avLst>
+          </a:prstGeom>
+          <a:solidFill>
+            <a:srgbClr val="E1F5EE"/>
+          </a:solidFill>
+          <a:ln w="28575">
+            <a:solidFill>
+              <a:srgbClr val="0F6E56"/>
+            </a:solidFill>
+          </a:ln>
+          <a:effectLst/>
+        </p:spPr>
+        <p:style>
+          <a:lnRef idx="1">
+            <a:schemeClr val="accent1"/>
+          </a:lnRef>
+          <a:fillRef idx="3">
+            <a:schemeClr val="accent1"/>
+          </a:fillRef>
+          <a:effectRef idx="2">
+            <a:schemeClr val="accent1"/>
+          </a:effectRef>
+          <a:fontRef idx="minor">
+            <a:schemeClr val="lt1"/>
+          </a:fontRef>
+        </p:style>
+        <p:txBody>
+          <a:bodyPr wrap="square" lIns="45720" tIns="18288" rIns="45720" bIns="18288" rtlCol="0" anchor="ctr"/>
+          <a:lstStyle/>
+          <a:p>
+            <a:pPr algn="ctr"/>
+            <a:r>
+              <a:rPr sz="1300" b="1" i="0">
+                <a:solidFill>
+                  <a:srgbClr val="085041"/>
+                </a:solidFill>
+                <a:latin typeface="Calibri"/>
+              </a:rPr>
+              <a:t>Logistics</a:t>
+            </a:r>
+          </a:p>
+          <a:p>
+            <a:pPr algn="ctr"/>
+            <a:r>
+              <a:rPr sz="1000" b="0" i="1">
+                <a:solidFill>
+                  <a:srgbClr val="0F6E56"/>
+                </a:solidFill>
+                <a:latin typeface="Calibri"/>
+              </a:rPr>
+              <a:t>abstract creator</a:t>
+            </a:r>
+          </a:p>
+        </p:txBody>
+      </p:sp>
+      <p:sp>
+        <p:nvSpPr>
+          <p:cNvPr id="9" name="Rounded Rectangle 8"/>
+          <p:cNvSpPr/>
+          <p:nvPr/>
+        </p:nvSpPr>
+        <p:spPr>
+          <a:xfrm>
+            <a:off x="5394960" y="1463040"/>
+            <a:ext cx="3108960" cy="822960"/>
+          </a:xfrm>
+          <a:prstGeom prst="roundRect">
+            <a:avLst>
+              <a:gd name="adj" fmla="val 8000"/>
+            </a:avLst>
+          </a:prstGeom>
+          <a:solidFill>
+            <a:srgbClr val="EEEDFE"/>
+          </a:solidFill>
+          <a:ln w="28575">
+            <a:solidFill>
+              <a:srgbClr val="534AB7"/>
+            </a:solidFill>
+          </a:ln>
+          <a:effectLst/>
+        </p:spPr>
+        <p:style>
+          <a:lnRef idx="1">
+            <a:schemeClr val="accent1"/>
+          </a:lnRef>
+          <a:fillRef idx="3">
+            <a:schemeClr val="accent1"/>
+          </a:fillRef>
+          <a:effectRef idx="2">
+            <a:schemeClr val="accent1"/>
+          </a:effectRef>
+          <a:fontRef idx="minor">
+            <a:schemeClr val="lt1"/>
+          </a:fontRef>
+        </p:style>
+        <p:txBody>
+          <a:bodyPr wrap="square" lIns="45720" tIns="18288" rIns="45720" bIns="18288" rtlCol="0" anchor="ctr"/>
+          <a:lstStyle/>
+          <a:p>
+            <a:pPr algn="ctr"/>
+            <a:r>
+              <a:rPr sz="1300" b="1" i="0">
+                <a:solidFill>
+                  <a:srgbClr val="3C3489"/>
+                </a:solidFill>
+                <a:latin typeface="Calibri"/>
+              </a:rPr>
+              <a:t>Transport</a:t>
+            </a:r>
+          </a:p>
+          <a:p>
+            <a:pPr algn="ctr"/>
+            <a:r>
+              <a:rPr sz="1000" b="0" i="1">
+                <a:solidFill>
+                  <a:srgbClr val="534AB7"/>
+                </a:solidFill>
+                <a:latin typeface="Calibri"/>
+              </a:rPr>
+              <a:t>product interface</a:t>
+            </a:r>
+          </a:p>
+        </p:txBody>
+      </p:sp>
+      <p:sp>
+        <p:nvSpPr>
+          <p:cNvPr id="10" name="TextBox 9"/>
+          <p:cNvSpPr txBox="1"/>
+          <p:nvPr/>
+        </p:nvSpPr>
+        <p:spPr>
+          <a:xfrm>
+            <a:off x="3291840" y="1517904"/>
+            <a:ext cx="2560320" cy="237744"/>
+          </a:xfrm>
+          <a:prstGeom prst="rect">
+            <a:avLst/>
+          </a:prstGeom>
+          <a:noFill/>
+        </p:spPr>
+        <p:txBody>
+          <a:bodyPr wrap="square" lIns="45720" tIns="18288" rIns="45720" bIns="18288" anchor="ctr">
+            <a:spAutoFit/>
+          </a:bodyPr>
+          <a:lstStyle/>
+          <a:p>
+            <a:pPr algn="ctr"/>
+            <a:r>
+              <a:rPr sz="950" b="0" i="1">
+                <a:solidFill>
+                  <a:srgbClr val="5A5C66"/>
+                </a:solidFill>
+                <a:latin typeface="Calibri"/>
+              </a:rPr>
+              <a:t>createTransport()</a:t>
+            </a:r>
+          </a:p>
+        </p:txBody>
+      </p:sp>
+      <p:cxnSp>
+        <p:nvCxnSpPr>
+          <p:cNvPr id="11" name="Connector 10"/>
+          <p:cNvCxnSpPr/>
+          <p:nvPr/>
+        </p:nvCxnSpPr>
+        <p:spPr>
+          <a:xfrm>
+            <a:off x="3749039" y="1874519"/>
+            <a:ext cx="1645921" cy="0"/>
+          </a:xfrm>
+          <a:prstGeom prst="line">
+            <a:avLst/>
+          </a:prstGeom>
+          <a:ln w="15875">
+            <a:solidFill>
+              <a:srgbClr val="5A5C66"/>
+            </a:solidFill>
+            <a:prstDash val="dash"/>
+            <a:tailEnd type="triangle" w="med" len="med"/>
+          </a:ln>
+          <a:effectLst/>
+        </p:spPr>
+        <p:style>
+          <a:lnRef idx="2">
+            <a:schemeClr val="accent1"/>
+          </a:lnRef>
+          <a:fillRef idx="0">
+            <a:schemeClr val="accent1"/>
+          </a:fillRef>
+          <a:effectRef idx="1">
+            <a:schemeClr val="accent1"/>
+          </a:effectRef>
+          <a:fontRef idx="minor">
+            <a:schemeClr val="tx1"/>
+          </a:fontRef>
+        </p:style>
+      </p:cxnSp>
+      <p:sp>
+        <p:nvSpPr>
+          <p:cNvPr id="12" name="TextBox 11"/>
+          <p:cNvSpPr txBox="1"/>
+          <p:nvPr/>
+        </p:nvSpPr>
+        <p:spPr>
+          <a:xfrm>
+            <a:off x="3291840" y="1938528"/>
+            <a:ext cx="2560320" cy="237744"/>
+          </a:xfrm>
+          <a:prstGeom prst="rect">
+            <a:avLst/>
+          </a:prstGeom>
+          <a:noFill/>
+        </p:spPr>
+        <p:txBody>
+          <a:bodyPr wrap="square" lIns="45720" tIns="18288" rIns="45720" bIns="18288" anchor="ctr">
+            <a:spAutoFit/>
+          </a:bodyPr>
+          <a:lstStyle/>
+          <a:p>
+            <a:pPr algn="ctr"/>
+            <a:r>
+              <a:rPr sz="950" b="0" i="1">
+                <a:solidFill>
+                  <a:srgbClr val="5A5C66"/>
+                </a:solidFill>
+                <a:latin typeface="Calibri"/>
+              </a:rPr>
+              <a:t>returns</a:t>
+            </a:r>
+          </a:p>
+        </p:txBody>
+      </p:sp>
+      <p:sp>
+        <p:nvSpPr>
+          <p:cNvPr id="13" name="Rounded Rectangle 12"/>
+          <p:cNvSpPr/>
+          <p:nvPr/>
+        </p:nvSpPr>
+        <p:spPr>
+          <a:xfrm>
+            <a:off x="640080" y="2926080"/>
+            <a:ext cx="3108960" cy="731520"/>
+          </a:xfrm>
+          <a:prstGeom prst="roundRect">
+            <a:avLst>
+              <a:gd name="adj" fmla="val 8000"/>
+            </a:avLst>
+          </a:prstGeom>
+          <a:solidFill>
+            <a:srgbClr val="E1F5EE"/>
+          </a:solidFill>
+          <a:ln w="12700">
+            <a:solidFill>
+              <a:srgbClr val="0F6E56"/>
+            </a:solidFill>
+          </a:ln>
+          <a:effectLst/>
+        </p:spPr>
+        <p:style>
+          <a:lnRef idx="1">
+            <a:schemeClr val="accent1"/>
+          </a:lnRef>
+          <a:fillRef idx="3">
+            <a:schemeClr val="accent1"/>
+          </a:fillRef>
+          <a:effectRef idx="2">
+            <a:schemeClr val="accent1"/>
+          </a:effectRef>
+          <a:fontRef idx="minor">
+            <a:schemeClr val="lt1"/>
+          </a:fontRef>
+        </p:style>
+        <p:txBody>
+          <a:bodyPr wrap="square" lIns="45720" tIns="18288" rIns="45720" bIns="18288" rtlCol="0" anchor="ctr"/>
+          <a:lstStyle/>
+          <a:p>
+            <a:pPr algn="ctr"/>
+            <a:r>
+              <a:rPr sz="1300" b="1" i="0">
+                <a:solidFill>
+                  <a:srgbClr val="085041"/>
+                </a:solidFill>
+                <a:latin typeface="Calibri"/>
+              </a:rPr>
+              <a:t>RoadLogistics</a:t>
+            </a:r>
+          </a:p>
+          <a:p>
+            <a:pPr algn="ctr"/>
+            <a:r>
+              <a:rPr sz="1000" b="0" i="1">
+                <a:solidFill>
+                  <a:srgbClr val="0F6E56"/>
+                </a:solidFill>
+                <a:latin typeface="Calibri"/>
+              </a:rPr>
+              <a:t>extends Logistics</a:t>
+            </a:r>
+          </a:p>
+        </p:txBody>
+      </p:sp>
+      <p:sp>
+        <p:nvSpPr>
+          <p:cNvPr id="14" name="Rounded Rectangle 13"/>
+          <p:cNvSpPr/>
+          <p:nvPr/>
+        </p:nvSpPr>
+        <p:spPr>
+          <a:xfrm>
+            <a:off x="640080" y="4114800"/>
+            <a:ext cx="3108960" cy="731520"/>
+          </a:xfrm>
+          <a:prstGeom prst="roundRect">
+            <a:avLst>
+              <a:gd name="adj" fmla="val 8000"/>
+            </a:avLst>
+          </a:prstGeom>
+          <a:solidFill>
+            <a:srgbClr val="E1F5EE"/>
+          </a:solidFill>
+          <a:ln w="12700">
+            <a:solidFill>
+              <a:srgbClr val="0F6E56"/>
+            </a:solidFill>
+          </a:ln>
+          <a:effectLst/>
+        </p:spPr>
+        <p:style>
+          <a:lnRef idx="1">
+            <a:schemeClr val="accent1"/>
+          </a:lnRef>
+          <a:fillRef idx="3">
+            <a:schemeClr val="accent1"/>
+          </a:fillRef>
+          <a:effectRef idx="2">
+            <a:schemeClr val="accent1"/>
+          </a:effectRef>
+          <a:fontRef idx="minor">
+            <a:schemeClr val="lt1"/>
+          </a:fontRef>
+        </p:style>
+        <p:txBody>
+          <a:bodyPr wrap="square" lIns="45720" tIns="18288" rIns="45720" bIns="18288" rtlCol="0" anchor="ctr"/>
+          <a:lstStyle/>
+          <a:p>
+            <a:pPr algn="ctr"/>
+            <a:r>
+              <a:rPr sz="1300" b="1" i="0">
+                <a:solidFill>
+                  <a:srgbClr val="085041"/>
+                </a:solidFill>
+                <a:latin typeface="Calibri"/>
+              </a:rPr>
+              <a:t>SeaLogistics</a:t>
+            </a:r>
+          </a:p>
+          <a:p>
+            <a:pPr algn="ctr"/>
+            <a:r>
+              <a:rPr sz="1000" b="0" i="1">
+                <a:solidFill>
+                  <a:srgbClr val="0F6E56"/>
+                </a:solidFill>
+                <a:latin typeface="Calibri"/>
+              </a:rPr>
+              <a:t>extends Logistics</a:t>
+            </a:r>
+          </a:p>
+        </p:txBody>
+      </p:sp>
+      <p:sp>
+        <p:nvSpPr>
+          <p:cNvPr id="15" name="Rounded Rectangle 14"/>
+          <p:cNvSpPr/>
+          <p:nvPr/>
+        </p:nvSpPr>
+        <p:spPr>
+          <a:xfrm>
+            <a:off x="5394960" y="2926080"/>
+            <a:ext cx="3108960" cy="731520"/>
+          </a:xfrm>
+          <a:prstGeom prst="roundRect">
+            <a:avLst>
+              <a:gd name="adj" fmla="val 8000"/>
+            </a:avLst>
+          </a:prstGeom>
+          <a:solidFill>
+            <a:srgbClr val="EEEDFE"/>
+          </a:solidFill>
+          <a:ln w="12700">
+            <a:solidFill>
+              <a:srgbClr val="534AB7"/>
+            </a:solidFill>
+          </a:ln>
+          <a:effectLst/>
+        </p:spPr>
+        <p:style>
+          <a:lnRef idx="1">
+            <a:schemeClr val="accent1"/>
+          </a:lnRef>
+          <a:fillRef idx="3">
+            <a:schemeClr val="accent1"/>
+          </a:fillRef>
+          <a:effectRef idx="2">
+            <a:schemeClr val="accent1"/>
+          </a:effectRef>
+          <a:fontRef idx="minor">
+            <a:schemeClr val="lt1"/>
+          </a:fontRef>
+        </p:style>
+        <p:txBody>
+          <a:bodyPr wrap="square" lIns="45720" tIns="18288" rIns="45720" bIns="18288" rtlCol="0" anchor="ctr"/>
+          <a:lstStyle/>
+          <a:p>
+            <a:pPr algn="ctr"/>
+            <a:r>
+              <a:rPr sz="1300" b="1" i="0">
+                <a:solidFill>
+                  <a:srgbClr val="3C3489"/>
+                </a:solidFill>
+                <a:latin typeface="Calibri"/>
+              </a:rPr>
+              <a:t>Truck</a:t>
+            </a:r>
+          </a:p>
+          <a:p>
+            <a:pPr algn="ctr"/>
+            <a:r>
+              <a:rPr sz="1000" b="0" i="1">
+                <a:solidFill>
+                  <a:srgbClr val="534AB7"/>
+                </a:solidFill>
+                <a:latin typeface="Calibri"/>
+              </a:rPr>
+              <a:t>a Transport</a:t>
+            </a:r>
+          </a:p>
+        </p:txBody>
+      </p:sp>
+      <p:sp>
+        <p:nvSpPr>
+          <p:cNvPr id="16" name="Rounded Rectangle 15"/>
+          <p:cNvSpPr/>
+          <p:nvPr/>
+        </p:nvSpPr>
+        <p:spPr>
+          <a:xfrm>
+            <a:off x="5394960" y="4114800"/>
+            <a:ext cx="3108960" cy="731520"/>
+          </a:xfrm>
+          <a:prstGeom prst="roundRect">
+            <a:avLst>
+              <a:gd name="adj" fmla="val 8000"/>
+            </a:avLst>
+          </a:prstGeom>
+          <a:solidFill>
+            <a:srgbClr val="EEEDFE"/>
+          </a:solidFill>
+          <a:ln w="12700">
+            <a:solidFill>
+              <a:srgbClr val="534AB7"/>
+            </a:solidFill>
+          </a:ln>
+          <a:effectLst/>
+        </p:spPr>
+        <p:style>
+          <a:lnRef idx="1">
+            <a:schemeClr val="accent1"/>
+          </a:lnRef>
+          <a:fillRef idx="3">
+            <a:schemeClr val="accent1"/>
+          </a:fillRef>
+          <a:effectRef idx="2">
+            <a:schemeClr val="accent1"/>
+          </a:effectRef>
+          <a:fontRef idx="minor">
+            <a:schemeClr val="lt1"/>
+          </a:fontRef>
+        </p:style>
+        <p:txBody>
+          <a:bodyPr wrap="square" lIns="45720" tIns="18288" rIns="45720" bIns="18288" rtlCol="0" anchor="ctr"/>
+          <a:lstStyle/>
+          <a:p>
+            <a:pPr algn="ctr"/>
+            <a:r>
+              <a:rPr sz="1300" b="1" i="0">
+                <a:solidFill>
+                  <a:srgbClr val="3C3489"/>
+                </a:solidFill>
+                <a:latin typeface="Calibri"/>
+              </a:rPr>
+              <a:t>Ship</a:t>
+            </a:r>
+          </a:p>
+          <a:p>
+            <a:pPr algn="ctr"/>
+            <a:r>
+              <a:rPr sz="1000" b="0" i="1">
+                <a:solidFill>
+                  <a:srgbClr val="534AB7"/>
+                </a:solidFill>
+                <a:latin typeface="Calibri"/>
+              </a:rPr>
+              <a:t>a Transport</a:t>
+            </a:r>
+          </a:p>
+        </p:txBody>
+      </p:sp>
+      <p:cxnSp>
+        <p:nvCxnSpPr>
+          <p:cNvPr id="17" name="Connector 16"/>
+          <p:cNvCxnSpPr/>
+          <p:nvPr/>
+        </p:nvCxnSpPr>
+        <p:spPr>
+          <a:xfrm>
+            <a:off x="3749039" y="3291840"/>
+            <a:ext cx="1645921" cy="0"/>
+          </a:xfrm>
+          <a:prstGeom prst="line">
+            <a:avLst/>
+          </a:prstGeom>
+          <a:ln w="15875">
+            <a:solidFill>
+              <a:srgbClr val="5A5C66"/>
+            </a:solidFill>
+            <a:tailEnd type="triangle" w="med" len="med"/>
+          </a:ln>
+          <a:effectLst/>
+        </p:spPr>
+        <p:style>
+          <a:lnRef idx="2">
+            <a:schemeClr val="accent1"/>
+          </a:lnRef>
+          <a:fillRef idx="0">
+            <a:schemeClr val="accent1"/>
+          </a:fillRef>
+          <a:effectRef idx="1">
+            <a:schemeClr val="accent1"/>
+          </a:effectRef>
+          <a:fontRef idx="minor">
+            <a:schemeClr val="tx1"/>
+          </a:fontRef>
+        </p:style>
+      </p:cxnSp>
+      <p:sp>
+        <p:nvSpPr>
+          <p:cNvPr id="18" name="TextBox 17"/>
+          <p:cNvSpPr txBox="1"/>
+          <p:nvPr/>
+        </p:nvSpPr>
+        <p:spPr>
+          <a:xfrm>
+            <a:off x="3749039" y="3035808"/>
+            <a:ext cx="1645920" cy="237744"/>
+          </a:xfrm>
+          <a:prstGeom prst="rect">
+            <a:avLst/>
+          </a:prstGeom>
+          <a:noFill/>
+        </p:spPr>
+        <p:txBody>
+          <a:bodyPr wrap="square" lIns="45720" tIns="18288" rIns="45720" bIns="18288" anchor="ctr">
+            <a:spAutoFit/>
+          </a:bodyPr>
+          <a:lstStyle/>
+          <a:p>
+            <a:pPr algn="ctr"/>
+            <a:r>
+              <a:rPr sz="950" b="0" i="1">
+                <a:solidFill>
+                  <a:srgbClr val="5A5C66"/>
+                </a:solidFill>
+                <a:latin typeface="Calibri"/>
+              </a:rPr>
+              <a:t>creates</a:t>
+            </a:r>
+          </a:p>
+        </p:txBody>
+      </p:sp>
+      <p:cxnSp>
+        <p:nvCxnSpPr>
+          <p:cNvPr id="19" name="Connector 18"/>
+          <p:cNvCxnSpPr/>
+          <p:nvPr/>
+        </p:nvCxnSpPr>
+        <p:spPr>
+          <a:xfrm>
+            <a:off x="3749039" y="4480560"/>
+            <a:ext cx="1645921" cy="0"/>
+          </a:xfrm>
+          <a:prstGeom prst="line">
+            <a:avLst/>
+          </a:prstGeom>
+          <a:ln w="15875">
+            <a:solidFill>
+              <a:srgbClr val="5A5C66"/>
+            </a:solidFill>
+            <a:tailEnd type="triangle" w="med" len="med"/>
+          </a:ln>
+          <a:effectLst/>
+        </p:spPr>
+        <p:style>
+          <a:lnRef idx="2">
+            <a:schemeClr val="accent1"/>
+          </a:lnRef>
+          <a:fillRef idx="0">
+            <a:schemeClr val="accent1"/>
+          </a:fillRef>
+          <a:effectRef idx="1">
+            <a:schemeClr val="accent1"/>
+          </a:effectRef>
+          <a:fontRef idx="minor">
+            <a:schemeClr val="tx1"/>
+          </a:fontRef>
+        </p:style>
+      </p:cxnSp>
+      <p:sp>
+        <p:nvSpPr>
+          <p:cNvPr id="20" name="TextBox 19"/>
+          <p:cNvSpPr txBox="1"/>
+          <p:nvPr/>
+        </p:nvSpPr>
+        <p:spPr>
+          <a:xfrm>
+            <a:off x="3749039" y="4224528"/>
+            <a:ext cx="1645920" cy="237744"/>
+          </a:xfrm>
+          <a:prstGeom prst="rect">
+            <a:avLst/>
+          </a:prstGeom>
+          <a:noFill/>
+        </p:spPr>
+        <p:txBody>
+          <a:bodyPr wrap="square" lIns="45720" tIns="18288" rIns="45720" bIns="18288" anchor="ctr">
+            <a:spAutoFit/>
+          </a:bodyPr>
+          <a:lstStyle/>
+          <a:p>
+            <a:pPr algn="ctr"/>
+            <a:r>
+              <a:rPr sz="950" b="0" i="1">
+                <a:solidFill>
+                  <a:srgbClr val="5A5C66"/>
+                </a:solidFill>
+                <a:latin typeface="Calibri"/>
+              </a:rPr>
+              <a:t>creates</a:t>
+            </a:r>
+          </a:p>
+        </p:txBody>
+      </p:sp>
+    </p:spTree>
+  </p:cSld>
+  <p:clrMapOvr>
+    <a:masterClrMapping/>
+  </p:clrMapOvr>
+</p:sld>
+</file>
+
+<file path=ppt/slides/slide16.xml><?xml version="1.0" encoding="utf-8"?>
 <p:sld xmlns:a="http://schemas.openxmlformats.org/drawingml/2006/main" xmlns:r="http://schemas.openxmlformats.org/officeDocument/2006/relationships" xmlns:p="http://schemas.openxmlformats.org/presentationml/2006/main">
   <p:cSld name="Slide 14">
     <p:bg>
@@ -7009,7 +8600,7 @@
 </p:sld>
 </file>
 
-<file path=ppt/slides/slide15.xml><?xml version="1.0" encoding="utf-8"?>
+<file path=ppt/slides/slide17.xml><?xml version="1.0" encoding="utf-8"?>
 <p:sld xmlns:a="http://schemas.openxmlformats.org/drawingml/2006/main" xmlns:r="http://schemas.openxmlformats.org/officeDocument/2006/relationships" xmlns:p="http://schemas.openxmlformats.org/presentationml/2006/main">
   <p:cSld name="Slide 15">
     <p:bg>
@@ -7657,7 +9248,7 @@
 </p:sld>
 </file>
 
-<file path=ppt/slides/slide16.xml><?xml version="1.0" encoding="utf-8"?>
+<file path=ppt/slides/slide18.xml><?xml version="1.0" encoding="utf-8"?>
 <p:sld xmlns:a="http://schemas.openxmlformats.org/drawingml/2006/main" xmlns:r="http://schemas.openxmlformats.org/officeDocument/2006/relationships" xmlns:p="http://schemas.openxmlformats.org/presentationml/2006/main">
   <p:cSld name="Slide 16">
     <p:bg>
@@ -8265,7 +9856,7 @@
 </p:sld>
 </file>
 
-<file path=ppt/slides/slide17.xml><?xml version="1.0" encoding="utf-8"?>
+<file path=ppt/slides/slide19.xml><?xml version="1.0" encoding="utf-8"?>
 <p:sld xmlns:a="http://schemas.openxmlformats.org/drawingml/2006/main" xmlns:r="http://schemas.openxmlformats.org/officeDocument/2006/relationships" xmlns:p="http://schemas.openxmlformats.org/presentationml/2006/main">
   <p:cSld name="Slide 17">
     <p:bg>
@@ -8661,1275 +10252,6 @@
             <a:endParaRPr lang="en-US" sz="1500" dirty="0">
               <a:latin typeface="Cambria" panose="02040503050406030204" pitchFamily="18" charset="0"/>
             </a:endParaRPr>
-          </a:p>
-        </p:txBody>
-      </p:sp>
-    </p:spTree>
-  </p:cSld>
-  <p:clrMapOvr>
-    <a:masterClrMapping/>
-  </p:clrMapOvr>
-</p:sld>
-</file>
-
-<file path=ppt/slides/slide18.xml><?xml version="1.0" encoding="utf-8"?>
-<p:sld xmlns:a="http://schemas.openxmlformats.org/drawingml/2006/main" xmlns:r="http://schemas.openxmlformats.org/officeDocument/2006/relationships" xmlns:p="http://schemas.openxmlformats.org/presentationml/2006/main">
-  <p:cSld name="Slide 18">
-    <p:bg>
-      <p:bgPr>
-        <a:solidFill>
-          <a:srgbClr val="FFFFFF"/>
-        </a:solidFill>
-        <a:effectLst/>
-      </p:bgPr>
-    </p:bg>
-    <p:spTree>
-      <p:nvGrpSpPr>
-        <p:cNvPr id="1" name=""/>
-        <p:cNvGrpSpPr/>
-        <p:nvPr/>
-      </p:nvGrpSpPr>
-      <p:grpSpPr>
-        <a:xfrm>
-          <a:off x="0" y="0"/>
-          <a:ext cx="0" cy="0"/>
-          <a:chOff x="0" y="0"/>
-          <a:chExt cx="0" cy="0"/>
-        </a:xfrm>
-      </p:grpSpPr>
-      <p:sp>
-        <p:nvSpPr>
-          <p:cNvPr id="2" name="Shape 0"/>
-          <p:cNvSpPr/>
-          <p:nvPr/>
-        </p:nvSpPr>
-        <p:spPr>
-          <a:xfrm>
-            <a:off x="0" y="0"/>
-            <a:ext cx="9144000" cy="932688"/>
-          </a:xfrm>
-          <a:prstGeom prst="rect">
-            <a:avLst/>
-          </a:prstGeom>
-          <a:solidFill>
-            <a:srgbClr val="23242B"/>
-          </a:solidFill>
-          <a:ln/>
-        </p:spPr>
-        <p:txBody>
-          <a:bodyPr/>
-          <a:lstStyle/>
-          <a:p>
-            <a:endParaRPr lang="en-US"/>
-          </a:p>
-        </p:txBody>
-      </p:sp>
-      <p:sp>
-        <p:nvSpPr>
-          <p:cNvPr id="3" name="Shape 1"/>
-          <p:cNvSpPr/>
-          <p:nvPr/>
-        </p:nvSpPr>
-        <p:spPr>
-          <a:xfrm>
-            <a:off x="4114800" y="0"/>
-            <a:ext cx="5029200" cy="932688"/>
-          </a:xfrm>
-          <a:prstGeom prst="rect">
-            <a:avLst/>
-          </a:prstGeom>
-          <a:solidFill>
-            <a:srgbClr val="4A4C57">
-              <a:alpha val="45000"/>
-            </a:srgbClr>
-          </a:solidFill>
-          <a:ln/>
-        </p:spPr>
-        <p:txBody>
-          <a:bodyPr/>
-          <a:lstStyle/>
-          <a:p>
-            <a:endParaRPr lang="en-US"/>
-          </a:p>
-        </p:txBody>
-      </p:sp>
-      <p:pic>
-        <p:nvPicPr>
-          <p:cNvPr id="4" name="Image 0" descr="/home/claude/aiub_logo.png"/>
-          <p:cNvPicPr>
-            <a:picLocks noChangeAspect="1"/>
-          </p:cNvPicPr>
-          <p:nvPr/>
-        </p:nvPicPr>
-        <p:blipFill>
-          <a:blip r:embed="rId3"/>
-          <a:stretch>
-            <a:fillRect/>
-          </a:stretch>
-        </p:blipFill>
-        <p:spPr>
-          <a:xfrm>
-            <a:off x="8211312" y="118872"/>
-            <a:ext cx="694944" cy="694944"/>
-          </a:xfrm>
-          <a:prstGeom prst="rect">
-            <a:avLst/>
-          </a:prstGeom>
-        </p:spPr>
-      </p:pic>
-      <p:sp>
-        <p:nvSpPr>
-          <p:cNvPr id="5" name="Text 2"/>
-          <p:cNvSpPr/>
-          <p:nvPr/>
-        </p:nvSpPr>
-        <p:spPr>
-          <a:xfrm>
-            <a:off x="502920" y="0"/>
-            <a:ext cx="8001000" cy="932688"/>
-          </a:xfrm>
-          <a:prstGeom prst="rect">
-            <a:avLst/>
-          </a:prstGeom>
-          <a:noFill/>
-          <a:ln/>
-        </p:spPr>
-        <p:txBody>
-          <a:bodyPr wrap="square" rtlCol="0" anchor="ctr"/>
-          <a:lstStyle/>
-          <a:p>
-            <a:pPr marL="0" indent="0" algn="l">
-              <a:buNone/>
-            </a:pPr>
-            <a:r>
-              <a:rPr lang="en-US" sz="2500" dirty="0">
-                <a:solidFill>
-                  <a:srgbClr val="FFFFFF"/>
-                </a:solidFill>
-                <a:latin typeface="Cambria" pitchFamily="34" charset="0"/>
-                <a:ea typeface="Cambria" pitchFamily="34" charset="-122"/>
-                <a:cs typeface="Cambria" pitchFamily="34" charset="-120"/>
-              </a:rPr>
-              <a:t>Abstract Factory — The Family-Consistency Problem</a:t>
-            </a:r>
-            <a:r>
-              <a:rPr lang="en-US" sz="1600" i="1" dirty="0">
-                <a:solidFill>
-                  <a:srgbClr val="C9CCD6"/>
-                </a:solidFill>
-                <a:latin typeface="Cambria" pitchFamily="34" charset="0"/>
-                <a:ea typeface="Cambria" pitchFamily="34" charset="-122"/>
-                <a:cs typeface="Cambria" pitchFamily="34" charset="-120"/>
-              </a:rPr>
-              <a:t>  </a:t>
-            </a:r>
-          </a:p>
-          <a:p>
-            <a:pPr marL="0" indent="0" algn="l">
-              <a:buNone/>
-            </a:pPr>
-            <a:r>
-              <a:rPr lang="en-US" sz="1600" i="1" dirty="0" err="1">
-                <a:solidFill>
-                  <a:srgbClr val="C9CCD6"/>
-                </a:solidFill>
-                <a:latin typeface="Cambria" pitchFamily="34" charset="0"/>
-                <a:ea typeface="Cambria" pitchFamily="34" charset="-122"/>
-                <a:cs typeface="Cambria" pitchFamily="34" charset="-120"/>
-              </a:rPr>
-              <a:t>GoF</a:t>
-            </a:r>
-            <a:r>
-              <a:rPr lang="en-US" sz="1600" i="1" dirty="0">
-                <a:solidFill>
-                  <a:srgbClr val="C9CCD6"/>
-                </a:solidFill>
-                <a:latin typeface="Cambria" pitchFamily="34" charset="0"/>
-                <a:ea typeface="Cambria" pitchFamily="34" charset="-122"/>
-                <a:cs typeface="Cambria" pitchFamily="34" charset="-120"/>
-              </a:rPr>
-              <a:t> Ch. 3, p. 87</a:t>
-            </a:r>
-            <a:endParaRPr lang="en-US" sz="2500" dirty="0"/>
-          </a:p>
-        </p:txBody>
-      </p:sp>
-      <p:sp>
-        <p:nvSpPr>
-          <p:cNvPr id="6" name="Text 3"/>
-          <p:cNvSpPr/>
-          <p:nvPr/>
-        </p:nvSpPr>
-        <p:spPr>
-          <a:xfrm>
-            <a:off x="502920" y="6547104"/>
-            <a:ext cx="5943600" cy="237744"/>
-          </a:xfrm>
-          <a:prstGeom prst="rect">
-            <a:avLst/>
-          </a:prstGeom>
-          <a:noFill/>
-          <a:ln/>
-        </p:spPr>
-        <p:txBody>
-          <a:bodyPr wrap="square" rtlCol="0" anchor="ctr"/>
-          <a:lstStyle/>
-          <a:p>
-            <a:pPr marL="0" indent="0" algn="l">
-              <a:buNone/>
-            </a:pPr>
-            <a:r>
-              <a:rPr lang="en-US" sz="800" dirty="0">
-                <a:solidFill>
-                  <a:srgbClr val="9A9CA3"/>
-                </a:solidFill>
-                <a:latin typeface="Calibri" pitchFamily="34" charset="0"/>
-                <a:ea typeface="Calibri" pitchFamily="34" charset="-122"/>
-                <a:cs typeface="Calibri" pitchFamily="34" charset="-120"/>
-              </a:rPr>
-              <a:t>CSC 4273  ·  Software Architecture &amp; Design Patterns  ·  AIUB</a:t>
-            </a:r>
-            <a:endParaRPr lang="en-US" sz="800" dirty="0"/>
-          </a:p>
-        </p:txBody>
-      </p:sp>
-      <p:sp>
-        <p:nvSpPr>
-          <p:cNvPr id="7" name="Text 4"/>
-          <p:cNvSpPr/>
-          <p:nvPr/>
-        </p:nvSpPr>
-        <p:spPr>
-          <a:xfrm>
-            <a:off x="7132320" y="6547104"/>
-            <a:ext cx="1508760" cy="237744"/>
-          </a:xfrm>
-          <a:prstGeom prst="rect">
-            <a:avLst/>
-          </a:prstGeom>
-          <a:noFill/>
-          <a:ln/>
-        </p:spPr>
-        <p:txBody>
-          <a:bodyPr wrap="square" rtlCol="0" anchor="ctr"/>
-          <a:lstStyle/>
-          <a:p>
-            <a:pPr marL="0" indent="0" algn="r">
-              <a:buNone/>
-            </a:pPr>
-            <a:r>
-              <a:rPr lang="en-US" sz="800" dirty="0">
-                <a:solidFill>
-                  <a:srgbClr val="9A9CA3"/>
-                </a:solidFill>
-                <a:latin typeface="Calibri" pitchFamily="34" charset="0"/>
-                <a:ea typeface="Calibri" pitchFamily="34" charset="-122"/>
-                <a:cs typeface="Calibri" pitchFamily="34" charset="-120"/>
-              </a:rPr>
-              <a:t>Week 3</a:t>
-            </a:r>
-            <a:endParaRPr lang="en-US" sz="800" dirty="0"/>
-          </a:p>
-        </p:txBody>
-      </p:sp>
-      <p:sp>
-        <p:nvSpPr>
-          <p:cNvPr id="8" name="Shape 5"/>
-          <p:cNvSpPr/>
-          <p:nvPr/>
-        </p:nvSpPr>
-        <p:spPr>
-          <a:xfrm>
-            <a:off x="502920" y="1133856"/>
-            <a:ext cx="8138160" cy="5266944"/>
-          </a:xfrm>
-          <a:prstGeom prst="roundRect">
-            <a:avLst>
-              <a:gd name="adj" fmla="val 1042"/>
-            </a:avLst>
-          </a:prstGeom>
-          <a:solidFill>
-            <a:srgbClr val="F2F3F6"/>
-          </a:solidFill>
-          <a:ln w="12700">
-            <a:solidFill>
-              <a:srgbClr val="D4D7DF"/>
-            </a:solidFill>
-            <a:prstDash val="solid"/>
-          </a:ln>
-        </p:spPr>
-        <p:txBody>
-          <a:bodyPr/>
-          <a:lstStyle/>
-          <a:p>
-            <a:endParaRPr lang="en-US"/>
-          </a:p>
-        </p:txBody>
-      </p:sp>
-      <p:sp>
-        <p:nvSpPr>
-          <p:cNvPr id="9" name="Text 6"/>
-          <p:cNvSpPr/>
-          <p:nvPr/>
-        </p:nvSpPr>
-        <p:spPr>
-          <a:xfrm>
-            <a:off x="685800" y="1261872"/>
-            <a:ext cx="7772400" cy="5010912"/>
-          </a:xfrm>
-          <a:prstGeom prst="rect">
-            <a:avLst/>
-          </a:prstGeom>
-          <a:noFill/>
-          <a:ln/>
-        </p:spPr>
-        <p:txBody>
-          <a:bodyPr wrap="square" rtlCol="0" anchor="t"/>
-          <a:lstStyle/>
-          <a:p>
-            <a:pPr marL="0" indent="0">
-              <a:lnSpc>
-                <a:spcPct val="102000"/>
-              </a:lnSpc>
-              <a:spcAft>
-                <a:spcPts val="600"/>
-              </a:spcAft>
-              <a:buNone/>
-            </a:pPr>
-            <a:r>
-              <a:rPr lang="en-US" sz="1600" dirty="0">
-                <a:solidFill>
-                  <a:srgbClr val="1A1A1A"/>
-                </a:solidFill>
-                <a:latin typeface="Calibri" pitchFamily="34" charset="0"/>
-                <a:ea typeface="Calibri" pitchFamily="34" charset="-122"/>
-                <a:cs typeface="Calibri" pitchFamily="34" charset="-120"/>
-              </a:rPr>
-              <a:t>UniRide’s matching algorithm has three components that MUST work together:</a:t>
-            </a:r>
-            <a:endParaRPr lang="en-US" sz="1600" dirty="0"/>
-          </a:p>
-          <a:p>
-            <a:pPr marL="685800" lvl="1" indent="-342900">
-              <a:lnSpc>
-                <a:spcPct val="102000"/>
-              </a:lnSpc>
-              <a:spcAft>
-                <a:spcPts val="1000"/>
-              </a:spcAft>
-              <a:buSzPct val="100000"/>
-              <a:buChar char="•"/>
-            </a:pPr>
-            <a:r>
-              <a:rPr lang="en-US" sz="1600" dirty="0">
-                <a:solidFill>
-                  <a:srgbClr val="1A1A1A"/>
-                </a:solidFill>
-                <a:latin typeface="Calibri" pitchFamily="34" charset="0"/>
-                <a:ea typeface="Calibri" pitchFamily="34" charset="-122"/>
-                <a:cs typeface="Calibri" pitchFamily="34" charset="-120"/>
-              </a:rPr>
-              <a:t>Scorer (scores each driver) · Filter (removes unqualified) · Sorter (orders results)</a:t>
-            </a:r>
-            <a:endParaRPr lang="en-US" sz="1600" dirty="0"/>
-          </a:p>
-          <a:p>
-            <a:pPr marL="0" indent="0">
-              <a:lnSpc>
-                <a:spcPct val="102000"/>
-              </a:lnSpc>
-              <a:spcAft>
-                <a:spcPts val="200"/>
-              </a:spcAft>
-              <a:buNone/>
-            </a:pPr>
-            <a:r>
-              <a:rPr lang="en-US" sz="1600" b="1" dirty="0">
-                <a:solidFill>
-                  <a:srgbClr val="C00000"/>
-                </a:solidFill>
-                <a:latin typeface="Calibri" pitchFamily="34" charset="0"/>
-                <a:ea typeface="Calibri" pitchFamily="34" charset="-122"/>
-                <a:cs typeface="Calibri" pitchFamily="34" charset="-120"/>
-              </a:rPr>
-              <a:t>PROBLEM — using a separate factory for each:</a:t>
-            </a:r>
-            <a:endParaRPr lang="en-US" sz="1600" dirty="0"/>
-          </a:p>
-          <a:p>
-            <a:pPr marL="0" lvl="1" indent="0">
-              <a:lnSpc>
-                <a:spcPct val="102000"/>
-              </a:lnSpc>
-              <a:spcAft>
-                <a:spcPts val="200"/>
-              </a:spcAft>
-              <a:buNone/>
-            </a:pPr>
-            <a:r>
-              <a:rPr lang="en-US" sz="1600" dirty="0">
-                <a:solidFill>
-                  <a:srgbClr val="1A1A1A"/>
-                </a:solidFill>
-                <a:latin typeface="Calibri" pitchFamily="34" charset="0"/>
-                <a:ea typeface="Calibri" pitchFamily="34" charset="-122"/>
-                <a:cs typeface="Calibri" pitchFamily="34" charset="-120"/>
-              </a:rPr>
-              <a:t>DistanceScorer produces scores in metres, but PriceAscendingSorter expects</a:t>
-            </a:r>
-            <a:endParaRPr lang="en-US" sz="1600" dirty="0"/>
-          </a:p>
-          <a:p>
-            <a:pPr marL="0" lvl="1" indent="0">
-              <a:lnSpc>
-                <a:spcPct val="102000"/>
-              </a:lnSpc>
-              <a:spcAft>
-                <a:spcPts val="1000"/>
-              </a:spcAft>
-              <a:buNone/>
-            </a:pPr>
-            <a:r>
-              <a:rPr lang="en-US" sz="1600" dirty="0">
-                <a:solidFill>
-                  <a:srgbClr val="1A1A1A"/>
-                </a:solidFill>
-                <a:latin typeface="Calibri" pitchFamily="34" charset="0"/>
-                <a:ea typeface="Calibri" pitchFamily="34" charset="-122"/>
-                <a:cs typeface="Calibri" pitchFamily="34" charset="-120"/>
-              </a:rPr>
-              <a:t>currency units. MISMATCH → runtime bug.</a:t>
-            </a:r>
-            <a:endParaRPr lang="en-US" sz="1600" dirty="0"/>
-          </a:p>
-          <a:p>
-            <a:pPr marL="0" indent="0">
-              <a:lnSpc>
-                <a:spcPct val="102000"/>
-              </a:lnSpc>
-              <a:spcAft>
-                <a:spcPts val="200"/>
-              </a:spcAft>
-              <a:buNone/>
-            </a:pPr>
-            <a:r>
-              <a:rPr lang="en-US" sz="1600" b="1" dirty="0">
-                <a:solidFill>
-                  <a:srgbClr val="2E7D46"/>
-                </a:solidFill>
-                <a:latin typeface="Calibri" pitchFamily="34" charset="0"/>
-                <a:ea typeface="Calibri" pitchFamily="34" charset="-122"/>
-                <a:cs typeface="Calibri" pitchFamily="34" charset="-120"/>
-              </a:rPr>
-              <a:t>ABSTRACT FACTORY SOLUTION:</a:t>
-            </a:r>
-            <a:endParaRPr lang="en-US" sz="1600" dirty="0"/>
-          </a:p>
-          <a:p>
-            <a:pPr marL="0" lvl="1" indent="0">
-              <a:lnSpc>
-                <a:spcPct val="102000"/>
-              </a:lnSpc>
-              <a:spcAft>
-                <a:spcPts val="200"/>
-              </a:spcAft>
-              <a:buNone/>
-            </a:pPr>
-            <a:r>
-              <a:rPr lang="en-US" sz="1400" dirty="0">
-                <a:solidFill>
-                  <a:srgbClr val="1A1A1A"/>
-                </a:solidFill>
-                <a:latin typeface="Consolas" pitchFamily="34" charset="0"/>
-                <a:ea typeface="Consolas" pitchFamily="34" charset="-122"/>
-                <a:cs typeface="Consolas" pitchFamily="34" charset="-120"/>
-              </a:rPr>
-              <a:t>factory = new NearestDriverMatchingFactory();</a:t>
-            </a:r>
-            <a:endParaRPr lang="en-US" sz="1600" dirty="0"/>
-          </a:p>
-          <a:p>
-            <a:pPr marL="0" lvl="1" indent="0">
-              <a:lnSpc>
-                <a:spcPct val="102000"/>
-              </a:lnSpc>
-              <a:spcAft>
-                <a:spcPts val="200"/>
-              </a:spcAft>
-              <a:buNone/>
-            </a:pPr>
-            <a:r>
-              <a:rPr lang="en-US" sz="1400" dirty="0">
-                <a:solidFill>
-                  <a:srgbClr val="1A1A1A"/>
-                </a:solidFill>
-                <a:latin typeface="Consolas" pitchFamily="34" charset="0"/>
-                <a:ea typeface="Consolas" pitchFamily="34" charset="-122"/>
-                <a:cs typeface="Consolas" pitchFamily="34" charset="-120"/>
-              </a:rPr>
-              <a:t>scorer = factory.createScorer();  filter = factory.createFilter();</a:t>
-            </a:r>
-            <a:endParaRPr lang="en-US" sz="1600" dirty="0"/>
-          </a:p>
-          <a:p>
-            <a:pPr marL="0" lvl="1" indent="0">
-              <a:lnSpc>
-                <a:spcPct val="102000"/>
-              </a:lnSpc>
-              <a:spcAft>
-                <a:spcPts val="1000"/>
-              </a:spcAft>
-              <a:buNone/>
-            </a:pPr>
-            <a:r>
-              <a:rPr lang="en-US" sz="1400" dirty="0">
-                <a:solidFill>
-                  <a:srgbClr val="1A1A1A"/>
-                </a:solidFill>
-                <a:latin typeface="Consolas" pitchFamily="34" charset="0"/>
-                <a:ea typeface="Consolas" pitchFamily="34" charset="-122"/>
-                <a:cs typeface="Consolas" pitchFamily="34" charset="-120"/>
-              </a:rPr>
-              <a:t>sorter = factory.createSorter();   // all three speak metres</a:t>
-            </a:r>
-            <a:endParaRPr lang="en-US" sz="1600" dirty="0"/>
-          </a:p>
-          <a:p>
-            <a:pPr marL="0" indent="0">
-              <a:lnSpc>
-                <a:spcPct val="102000"/>
-              </a:lnSpc>
-              <a:spcAft>
-                <a:spcPts val="200"/>
-              </a:spcAft>
-              <a:buNone/>
-            </a:pPr>
-            <a:r>
-              <a:rPr lang="en-US" sz="1600" b="1" dirty="0">
-                <a:solidFill>
-                  <a:srgbClr val="242852"/>
-                </a:solidFill>
-                <a:latin typeface="Calibri" pitchFamily="34" charset="0"/>
-                <a:ea typeface="Calibri" pitchFamily="34" charset="-122"/>
-                <a:cs typeface="Calibri" pitchFamily="34" charset="-120"/>
-              </a:rPr>
-              <a:t>The factory GUARANTEES all members of the family are compatible. Swap to</a:t>
-            </a:r>
-            <a:r>
-              <a:rPr lang="en-US" sz="1600" dirty="0"/>
-              <a:t> </a:t>
-            </a:r>
-            <a:r>
-              <a:rPr lang="en-US" sz="1600" b="1" dirty="0" err="1">
-                <a:solidFill>
-                  <a:srgbClr val="242852"/>
-                </a:solidFill>
-                <a:latin typeface="Calibri" pitchFamily="34" charset="0"/>
-                <a:ea typeface="Calibri" pitchFamily="34" charset="-122"/>
-                <a:cs typeface="Calibri" pitchFamily="34" charset="-120"/>
-              </a:rPr>
-              <a:t>HighestRatedMatchingFactory</a:t>
-            </a:r>
-            <a:r>
-              <a:rPr lang="en-US" sz="1600" b="1" dirty="0">
-                <a:solidFill>
-                  <a:srgbClr val="242852"/>
-                </a:solidFill>
-                <a:latin typeface="Calibri" pitchFamily="34" charset="0"/>
-                <a:ea typeface="Calibri" pitchFamily="34" charset="-122"/>
-                <a:cs typeface="Calibri" pitchFamily="34" charset="-120"/>
-              </a:rPr>
-              <a:t> — all three are replaced consistently. No mismatches.</a:t>
-            </a:r>
-            <a:endParaRPr lang="en-US" sz="1600" dirty="0"/>
-          </a:p>
-        </p:txBody>
-      </p:sp>
-    </p:spTree>
-  </p:cSld>
-  <p:clrMapOvr>
-    <a:masterClrMapping/>
-  </p:clrMapOvr>
-</p:sld>
-</file>
-
-<file path=ppt/slides/slide19.xml><?xml version="1.0" encoding="utf-8"?>
-<p:sld xmlns:a="http://schemas.openxmlformats.org/drawingml/2006/main" xmlns:r="http://schemas.openxmlformats.org/officeDocument/2006/relationships" xmlns:p="http://schemas.openxmlformats.org/presentationml/2006/main">
-  <p:cSld name="Slide 19">
-    <p:bg>
-      <p:bgPr>
-        <a:solidFill>
-          <a:srgbClr val="FFFFFF"/>
-        </a:solidFill>
-        <a:effectLst/>
-      </p:bgPr>
-    </p:bg>
-    <p:spTree>
-      <p:nvGrpSpPr>
-        <p:cNvPr id="1" name=""/>
-        <p:cNvGrpSpPr/>
-        <p:nvPr/>
-      </p:nvGrpSpPr>
-      <p:grpSpPr>
-        <a:xfrm>
-          <a:off x="0" y="0"/>
-          <a:ext cx="0" cy="0"/>
-          <a:chOff x="0" y="0"/>
-          <a:chExt cx="0" cy="0"/>
-        </a:xfrm>
-      </p:grpSpPr>
-      <p:sp>
-        <p:nvSpPr>
-          <p:cNvPr id="2" name="Shape 0"/>
-          <p:cNvSpPr/>
-          <p:nvPr/>
-        </p:nvSpPr>
-        <p:spPr>
-          <a:xfrm>
-            <a:off x="0" y="0"/>
-            <a:ext cx="9144000" cy="932688"/>
-          </a:xfrm>
-          <a:prstGeom prst="rect">
-            <a:avLst/>
-          </a:prstGeom>
-          <a:solidFill>
-            <a:srgbClr val="23242B"/>
-          </a:solidFill>
-          <a:ln/>
-        </p:spPr>
-        <p:txBody>
-          <a:bodyPr/>
-          <a:lstStyle/>
-          <a:p>
-            <a:endParaRPr lang="en-US"/>
-          </a:p>
-        </p:txBody>
-      </p:sp>
-      <p:sp>
-        <p:nvSpPr>
-          <p:cNvPr id="3" name="Shape 1"/>
-          <p:cNvSpPr/>
-          <p:nvPr/>
-        </p:nvSpPr>
-        <p:spPr>
-          <a:xfrm>
-            <a:off x="4114800" y="0"/>
-            <a:ext cx="5029200" cy="932688"/>
-          </a:xfrm>
-          <a:prstGeom prst="rect">
-            <a:avLst/>
-          </a:prstGeom>
-          <a:solidFill>
-            <a:srgbClr val="4A4C57">
-              <a:alpha val="45000"/>
-            </a:srgbClr>
-          </a:solidFill>
-          <a:ln/>
-        </p:spPr>
-        <p:txBody>
-          <a:bodyPr/>
-          <a:lstStyle/>
-          <a:p>
-            <a:endParaRPr lang="en-US"/>
-          </a:p>
-        </p:txBody>
-      </p:sp>
-      <p:pic>
-        <p:nvPicPr>
-          <p:cNvPr id="4" name="Image 0" descr="/home/claude/aiub_logo.png"/>
-          <p:cNvPicPr>
-            <a:picLocks noChangeAspect="1"/>
-          </p:cNvPicPr>
-          <p:nvPr/>
-        </p:nvPicPr>
-        <p:blipFill>
-          <a:blip r:embed="rId3"/>
-          <a:stretch>
-            <a:fillRect/>
-          </a:stretch>
-        </p:blipFill>
-        <p:spPr>
-          <a:xfrm>
-            <a:off x="8211312" y="118872"/>
-            <a:ext cx="694944" cy="694944"/>
-          </a:xfrm>
-          <a:prstGeom prst="rect">
-            <a:avLst/>
-          </a:prstGeom>
-        </p:spPr>
-      </p:pic>
-      <p:sp>
-        <p:nvSpPr>
-          <p:cNvPr id="5" name="Text 2"/>
-          <p:cNvSpPr/>
-          <p:nvPr/>
-        </p:nvSpPr>
-        <p:spPr>
-          <a:xfrm>
-            <a:off x="502920" y="0"/>
-            <a:ext cx="8001000" cy="932688"/>
-          </a:xfrm>
-          <a:prstGeom prst="rect">
-            <a:avLst/>
-          </a:prstGeom>
-          <a:noFill/>
-          <a:ln/>
-        </p:spPr>
-        <p:txBody>
-          <a:bodyPr wrap="square" rtlCol="0" anchor="ctr"/>
-          <a:lstStyle/>
-          <a:p>
-            <a:pPr marL="0" indent="0" algn="l">
-              <a:buNone/>
-            </a:pPr>
-            <a:r>
-              <a:rPr lang="en-US" sz="2500" dirty="0">
-                <a:solidFill>
-                  <a:srgbClr val="FFFFFF"/>
-                </a:solidFill>
-                <a:latin typeface="Cambria" pitchFamily="34" charset="0"/>
-                <a:ea typeface="Cambria" pitchFamily="34" charset="-122"/>
-                <a:cs typeface="Cambria" pitchFamily="34" charset="-120"/>
-              </a:rPr>
-              <a:t>Abstract Factory — Structure (UI Factory)</a:t>
-            </a:r>
-            <a:endParaRPr lang="en-US" sz="2500" dirty="0"/>
-          </a:p>
-        </p:txBody>
-      </p:sp>
-      <p:sp>
-        <p:nvSpPr>
-          <p:cNvPr id="6" name="Text 3"/>
-          <p:cNvSpPr/>
-          <p:nvPr/>
-        </p:nvSpPr>
-        <p:spPr>
-          <a:xfrm>
-            <a:off x="502920" y="6547104"/>
-            <a:ext cx="5943600" cy="237744"/>
-          </a:xfrm>
-          <a:prstGeom prst="rect">
-            <a:avLst/>
-          </a:prstGeom>
-          <a:noFill/>
-          <a:ln/>
-        </p:spPr>
-        <p:txBody>
-          <a:bodyPr wrap="square" rtlCol="0" anchor="ctr"/>
-          <a:lstStyle/>
-          <a:p>
-            <a:pPr marL="0" indent="0" algn="l">
-              <a:buNone/>
-            </a:pPr>
-            <a:r>
-              <a:rPr lang="en-US" sz="800" dirty="0">
-                <a:solidFill>
-                  <a:srgbClr val="9A9CA3"/>
-                </a:solidFill>
-                <a:latin typeface="Calibri" pitchFamily="34" charset="0"/>
-                <a:ea typeface="Calibri" pitchFamily="34" charset="-122"/>
-                <a:cs typeface="Calibri" pitchFamily="34" charset="-120"/>
-              </a:rPr>
-              <a:t>CSC 4273  ·  Software Architecture &amp; Design Patterns  ·  AIUB</a:t>
-            </a:r>
-            <a:endParaRPr lang="en-US" sz="800" dirty="0"/>
-          </a:p>
-        </p:txBody>
-      </p:sp>
-      <p:sp>
-        <p:nvSpPr>
-          <p:cNvPr id="7" name="Text 4"/>
-          <p:cNvSpPr/>
-          <p:nvPr/>
-        </p:nvSpPr>
-        <p:spPr>
-          <a:xfrm>
-            <a:off x="7132320" y="6547104"/>
-            <a:ext cx="1508760" cy="237744"/>
-          </a:xfrm>
-          <a:prstGeom prst="rect">
-            <a:avLst/>
-          </a:prstGeom>
-          <a:noFill/>
-          <a:ln/>
-        </p:spPr>
-        <p:txBody>
-          <a:bodyPr wrap="square" rtlCol="0" anchor="ctr"/>
-          <a:lstStyle/>
-          <a:p>
-            <a:pPr marL="0" indent="0" algn="r">
-              <a:buNone/>
-            </a:pPr>
-            <a:r>
-              <a:rPr lang="en-US" sz="800" dirty="0">
-                <a:solidFill>
-                  <a:srgbClr val="9A9CA3"/>
-                </a:solidFill>
-                <a:latin typeface="Calibri" pitchFamily="34" charset="0"/>
-                <a:ea typeface="Calibri" pitchFamily="34" charset="-122"/>
-                <a:cs typeface="Calibri" pitchFamily="34" charset="-120"/>
-              </a:rPr>
-              <a:t>Week 3</a:t>
-            </a:r>
-            <a:endParaRPr lang="en-US" sz="800" dirty="0"/>
-          </a:p>
-        </p:txBody>
-      </p:sp>
-      <p:sp>
-        <p:nvSpPr>
-          <p:cNvPr id="8" name="Shape 5"/>
-          <p:cNvSpPr/>
-          <p:nvPr/>
-        </p:nvSpPr>
-        <p:spPr>
-          <a:xfrm>
-            <a:off x="502920" y="1133856"/>
-            <a:ext cx="8138160" cy="4663440"/>
-          </a:xfrm>
-          <a:prstGeom prst="roundRect">
-            <a:avLst>
-              <a:gd name="adj" fmla="val 1176"/>
-            </a:avLst>
-          </a:prstGeom>
-          <a:solidFill>
-            <a:srgbClr val="F5F5F7"/>
-          </a:solidFill>
-          <a:ln w="12700">
-            <a:solidFill>
-              <a:srgbClr val="D9DBE2"/>
-            </a:solidFill>
-            <a:prstDash val="solid"/>
-          </a:ln>
-        </p:spPr>
-        <p:txBody>
-          <a:bodyPr/>
-          <a:lstStyle/>
-          <a:p>
-            <a:endParaRPr lang="en-US"/>
-          </a:p>
-        </p:txBody>
-      </p:sp>
-      <p:sp>
-        <p:nvSpPr>
-          <p:cNvPr id="9" name="Text 6"/>
-          <p:cNvSpPr/>
-          <p:nvPr/>
-        </p:nvSpPr>
-        <p:spPr>
-          <a:xfrm>
-            <a:off x="667512" y="1225296"/>
-            <a:ext cx="7808976" cy="4480560"/>
-          </a:xfrm>
-          <a:prstGeom prst="rect">
-            <a:avLst/>
-          </a:prstGeom>
-          <a:noFill/>
-          <a:ln/>
-        </p:spPr>
-        <p:txBody>
-          <a:bodyPr wrap="square" rtlCol="0" anchor="t"/>
-          <a:lstStyle/>
-          <a:p>
-            <a:pPr marL="0" indent="0">
-              <a:lnSpc>
-                <a:spcPct val="100000"/>
-              </a:lnSpc>
-              <a:buNone/>
-            </a:pPr>
-            <a:r>
-              <a:rPr lang="en-US" sz="1400" b="1" dirty="0">
-                <a:solidFill>
-                  <a:srgbClr val="1E7A34"/>
-                </a:solidFill>
-                <a:latin typeface="Consolas" pitchFamily="34" charset="0"/>
-                <a:ea typeface="Consolas" pitchFamily="34" charset="-122"/>
-                <a:cs typeface="Consolas" pitchFamily="34" charset="-120"/>
-              </a:rPr>
-              <a:t>interface Button   { render(): void; }      // ABSTRACT PRODUCTS</a:t>
-            </a:r>
-            <a:endParaRPr lang="en-US" sz="1400" dirty="0"/>
-          </a:p>
-          <a:p>
-            <a:pPr marL="0" indent="0">
-              <a:lnSpc>
-                <a:spcPct val="100000"/>
-              </a:lnSpc>
-              <a:buNone/>
-            </a:pPr>
-            <a:r>
-              <a:rPr lang="en-US" sz="1400" dirty="0">
-                <a:solidFill>
-                  <a:srgbClr val="1E1E22"/>
-                </a:solidFill>
-                <a:latin typeface="Consolas" pitchFamily="34" charset="0"/>
-                <a:ea typeface="Consolas" pitchFamily="34" charset="-122"/>
-                <a:cs typeface="Consolas" pitchFamily="34" charset="-120"/>
-              </a:rPr>
-              <a:t>interface Checkbox { check(): void; }</a:t>
-            </a:r>
-            <a:endParaRPr lang="en-US" sz="1400" dirty="0"/>
-          </a:p>
-          <a:p>
-            <a:pPr marL="0" indent="0">
-              <a:lnSpc>
-                <a:spcPct val="100000"/>
-              </a:lnSpc>
-              <a:buNone/>
-            </a:pPr>
-            <a:r>
-              <a:rPr lang="en-US" sz="1400" dirty="0">
-                <a:solidFill>
-                  <a:srgbClr val="1E1E22"/>
-                </a:solidFill>
-                <a:latin typeface="Consolas" pitchFamily="34" charset="0"/>
-                <a:ea typeface="Consolas" pitchFamily="34" charset="-122"/>
-                <a:cs typeface="Consolas" pitchFamily="34" charset="-120"/>
-              </a:rPr>
-              <a:t>class MacButton implements Button   { render() { /* Mac */ } }</a:t>
-            </a:r>
-            <a:endParaRPr lang="en-US" sz="1400" dirty="0"/>
-          </a:p>
-          <a:p>
-            <a:pPr marL="0" indent="0">
-              <a:lnSpc>
-                <a:spcPct val="100000"/>
-              </a:lnSpc>
-              <a:buNone/>
-            </a:pPr>
-            <a:r>
-              <a:rPr lang="en-US" sz="1400" dirty="0">
-                <a:solidFill>
-                  <a:srgbClr val="1E1E22"/>
-                </a:solidFill>
-                <a:latin typeface="Consolas" pitchFamily="34" charset="0"/>
-                <a:ea typeface="Consolas" pitchFamily="34" charset="-122"/>
-                <a:cs typeface="Consolas" pitchFamily="34" charset="-120"/>
-              </a:rPr>
-              <a:t>class MacCheckbox implements Checkbox { check() { /* Mac */ } }</a:t>
-            </a:r>
-            <a:endParaRPr lang="en-US" sz="1400" dirty="0"/>
-          </a:p>
-          <a:p>
-            <a:pPr marL="0" indent="0">
-              <a:lnSpc>
-                <a:spcPct val="100000"/>
-              </a:lnSpc>
-              <a:buNone/>
-            </a:pPr>
-            <a:r>
-              <a:rPr lang="en-US" sz="1400" dirty="0">
-                <a:solidFill>
-                  <a:srgbClr val="1E1E22"/>
-                </a:solidFill>
-                <a:latin typeface="Consolas" pitchFamily="34" charset="0"/>
-                <a:ea typeface="Consolas" pitchFamily="34" charset="-122"/>
-                <a:cs typeface="Consolas" pitchFamily="34" charset="-120"/>
-              </a:rPr>
-              <a:t>class WinButton implements Button   { render() { /* Win */ } }</a:t>
-            </a:r>
-            <a:endParaRPr lang="en-US" sz="1400" dirty="0"/>
-          </a:p>
-          <a:p>
-            <a:pPr marL="0" indent="0">
-              <a:lnSpc>
-                <a:spcPct val="100000"/>
-              </a:lnSpc>
-              <a:buNone/>
-            </a:pPr>
-            <a:r>
-              <a:rPr lang="en-US" sz="1400" dirty="0">
-                <a:solidFill>
-                  <a:srgbClr val="1E1E22"/>
-                </a:solidFill>
-                <a:latin typeface="Consolas" pitchFamily="34" charset="0"/>
-                <a:ea typeface="Consolas" pitchFamily="34" charset="-122"/>
-                <a:cs typeface="Consolas" pitchFamily="34" charset="-120"/>
-              </a:rPr>
-              <a:t>class WinCheckbox implements Checkbox { check() { /* Win */ } }</a:t>
-            </a:r>
-            <a:endParaRPr lang="en-US" sz="1400" dirty="0"/>
-          </a:p>
-          <a:p>
-            <a:pPr marL="0" indent="0">
-              <a:lnSpc>
-                <a:spcPct val="100000"/>
-              </a:lnSpc>
-              <a:buNone/>
-            </a:pPr>
-            <a:r>
-              <a:rPr lang="en-US" sz="1400" dirty="0">
-                <a:solidFill>
-                  <a:srgbClr val="1E1E22"/>
-                </a:solidFill>
-                <a:latin typeface="Consolas" pitchFamily="34" charset="0"/>
-                <a:ea typeface="Consolas" pitchFamily="34" charset="-122"/>
-                <a:cs typeface="Consolas" pitchFamily="34" charset="-120"/>
-              </a:rPr>
-              <a:t> </a:t>
-            </a:r>
-            <a:endParaRPr lang="en-US" sz="1400" dirty="0"/>
-          </a:p>
-          <a:p>
-            <a:pPr marL="0" indent="0">
-              <a:lnSpc>
-                <a:spcPct val="100000"/>
-              </a:lnSpc>
-              <a:buNone/>
-            </a:pPr>
-            <a:r>
-              <a:rPr lang="en-US" sz="1400" b="1" dirty="0">
-                <a:solidFill>
-                  <a:srgbClr val="1E7A34"/>
-                </a:solidFill>
-                <a:latin typeface="Consolas" pitchFamily="34" charset="0"/>
-                <a:ea typeface="Consolas" pitchFamily="34" charset="-122"/>
-                <a:cs typeface="Consolas" pitchFamily="34" charset="-120"/>
-              </a:rPr>
-              <a:t>interface UIFactory {                        // ABSTRACT FACTORY</a:t>
-            </a:r>
-            <a:endParaRPr lang="en-US" sz="1400" dirty="0"/>
-          </a:p>
-          <a:p>
-            <a:pPr marL="0" indent="0">
-              <a:lnSpc>
-                <a:spcPct val="100000"/>
-              </a:lnSpc>
-              <a:buNone/>
-            </a:pPr>
-            <a:r>
-              <a:rPr lang="en-US" sz="1400" dirty="0">
-                <a:solidFill>
-                  <a:srgbClr val="1E1E22"/>
-                </a:solidFill>
-                <a:latin typeface="Consolas" pitchFamily="34" charset="0"/>
-                <a:ea typeface="Consolas" pitchFamily="34" charset="-122"/>
-                <a:cs typeface="Consolas" pitchFamily="34" charset="-120"/>
-              </a:rPr>
-              <a:t>  createButton(): Button;</a:t>
-            </a:r>
-            <a:endParaRPr lang="en-US" sz="1400" dirty="0"/>
-          </a:p>
-          <a:p>
-            <a:pPr marL="0" indent="0">
-              <a:lnSpc>
-                <a:spcPct val="100000"/>
-              </a:lnSpc>
-              <a:buNone/>
-            </a:pPr>
-            <a:r>
-              <a:rPr lang="en-US" sz="1400" dirty="0">
-                <a:solidFill>
-                  <a:srgbClr val="1E1E22"/>
-                </a:solidFill>
-                <a:latin typeface="Consolas" pitchFamily="34" charset="0"/>
-                <a:ea typeface="Consolas" pitchFamily="34" charset="-122"/>
-                <a:cs typeface="Consolas" pitchFamily="34" charset="-120"/>
-              </a:rPr>
-              <a:t>  createCheckbox(): Checkbox;</a:t>
-            </a:r>
-            <a:endParaRPr lang="en-US" sz="1400" dirty="0"/>
-          </a:p>
-          <a:p>
-            <a:pPr marL="0" indent="0">
-              <a:lnSpc>
-                <a:spcPct val="100000"/>
-              </a:lnSpc>
-              <a:buNone/>
-            </a:pPr>
-            <a:r>
-              <a:rPr lang="en-US" sz="1400" dirty="0">
-                <a:solidFill>
-                  <a:srgbClr val="1E1E22"/>
-                </a:solidFill>
-                <a:latin typeface="Consolas" pitchFamily="34" charset="0"/>
-                <a:ea typeface="Consolas" pitchFamily="34" charset="-122"/>
-                <a:cs typeface="Consolas" pitchFamily="34" charset="-120"/>
-              </a:rPr>
-              <a:t>}</a:t>
-            </a:r>
-            <a:endParaRPr lang="en-US" sz="1400" dirty="0"/>
-          </a:p>
-          <a:p>
-            <a:pPr marL="0" indent="0">
-              <a:lnSpc>
-                <a:spcPct val="100000"/>
-              </a:lnSpc>
-              <a:buNone/>
-            </a:pPr>
-            <a:r>
-              <a:rPr lang="en-US" sz="1400" dirty="0">
-                <a:solidFill>
-                  <a:srgbClr val="1E1E22"/>
-                </a:solidFill>
-                <a:latin typeface="Consolas" pitchFamily="34" charset="0"/>
-                <a:ea typeface="Consolas" pitchFamily="34" charset="-122"/>
-                <a:cs typeface="Consolas" pitchFamily="34" charset="-120"/>
-              </a:rPr>
-              <a:t>class MacFactory implements UIFactory { /* Mac family */ }</a:t>
-            </a:r>
-            <a:endParaRPr lang="en-US" sz="1400" dirty="0"/>
-          </a:p>
-          <a:p>
-            <a:pPr marL="0" indent="0">
-              <a:lnSpc>
-                <a:spcPct val="100000"/>
-              </a:lnSpc>
-              <a:buNone/>
-            </a:pPr>
-            <a:r>
-              <a:rPr lang="en-US" sz="1400" dirty="0">
-                <a:solidFill>
-                  <a:srgbClr val="1E1E22"/>
-                </a:solidFill>
-                <a:latin typeface="Consolas" pitchFamily="34" charset="0"/>
-                <a:ea typeface="Consolas" pitchFamily="34" charset="-122"/>
-                <a:cs typeface="Consolas" pitchFamily="34" charset="-120"/>
-              </a:rPr>
-              <a:t>class WinFactory implements UIFactory { /* Win family */ }</a:t>
-            </a:r>
-            <a:endParaRPr lang="en-US" sz="1400" dirty="0"/>
-          </a:p>
-          <a:p>
-            <a:pPr marL="0" indent="0">
-              <a:lnSpc>
-                <a:spcPct val="100000"/>
-              </a:lnSpc>
-              <a:buNone/>
-            </a:pPr>
-            <a:r>
-              <a:rPr lang="en-US" sz="1400" dirty="0">
-                <a:solidFill>
-                  <a:srgbClr val="1E1E22"/>
-                </a:solidFill>
-                <a:latin typeface="Consolas" pitchFamily="34" charset="0"/>
-                <a:ea typeface="Consolas" pitchFamily="34" charset="-122"/>
-                <a:cs typeface="Consolas" pitchFamily="34" charset="-120"/>
-              </a:rPr>
-              <a:t> </a:t>
-            </a:r>
-            <a:endParaRPr lang="en-US" sz="1400" dirty="0"/>
-          </a:p>
-          <a:p>
-            <a:pPr marL="0" indent="0">
-              <a:lnSpc>
-                <a:spcPct val="100000"/>
-              </a:lnSpc>
-              <a:buNone/>
-            </a:pPr>
-            <a:r>
-              <a:rPr lang="en-US" sz="1400" b="1" dirty="0">
-                <a:solidFill>
-                  <a:srgbClr val="1E7A34"/>
-                </a:solidFill>
-                <a:latin typeface="Consolas" pitchFamily="34" charset="0"/>
-                <a:ea typeface="Consolas" pitchFamily="34" charset="-122"/>
-                <a:cs typeface="Consolas" pitchFamily="34" charset="-120"/>
-              </a:rPr>
-              <a:t>function renderUI(f: UIFactory) {            // CLIENT</a:t>
-            </a:r>
-            <a:endParaRPr lang="en-US" sz="1400" dirty="0"/>
-          </a:p>
-          <a:p>
-            <a:pPr marL="0" indent="0">
-              <a:lnSpc>
-                <a:spcPct val="100000"/>
-              </a:lnSpc>
-              <a:buNone/>
-            </a:pPr>
-            <a:r>
-              <a:rPr lang="en-US" sz="1400" dirty="0">
-                <a:solidFill>
-                  <a:srgbClr val="1E1E22"/>
-                </a:solidFill>
-                <a:latin typeface="Consolas" pitchFamily="34" charset="0"/>
-                <a:ea typeface="Consolas" pitchFamily="34" charset="-122"/>
-                <a:cs typeface="Consolas" pitchFamily="34" charset="-120"/>
-              </a:rPr>
-              <a:t>  f.createButton().render(); f.createCheckbox().check();</a:t>
-            </a:r>
-            <a:endParaRPr lang="en-US" sz="1400" dirty="0"/>
-          </a:p>
-          <a:p>
-            <a:pPr marL="0" indent="0">
-              <a:lnSpc>
-                <a:spcPct val="100000"/>
-              </a:lnSpc>
-              <a:buNone/>
-            </a:pPr>
-            <a:r>
-              <a:rPr lang="en-US" sz="1400" dirty="0">
-                <a:solidFill>
-                  <a:srgbClr val="1E1E22"/>
-                </a:solidFill>
-                <a:latin typeface="Consolas" pitchFamily="34" charset="0"/>
-                <a:ea typeface="Consolas" pitchFamily="34" charset="-122"/>
-                <a:cs typeface="Consolas" pitchFamily="34" charset="-120"/>
-              </a:rPr>
-              <a:t>}</a:t>
-            </a:r>
-            <a:endParaRPr lang="en-US" sz="1400" dirty="0"/>
-          </a:p>
-        </p:txBody>
-      </p:sp>
-      <p:sp>
-        <p:nvSpPr>
-          <p:cNvPr id="10" name="Text 7"/>
-          <p:cNvSpPr/>
-          <p:nvPr/>
-        </p:nvSpPr>
-        <p:spPr>
-          <a:xfrm>
-            <a:off x="502920" y="5907024"/>
-            <a:ext cx="8138160" cy="603504"/>
-          </a:xfrm>
-          <a:prstGeom prst="rect">
-            <a:avLst/>
-          </a:prstGeom>
-          <a:noFill/>
-          <a:ln/>
-        </p:spPr>
-        <p:txBody>
-          <a:bodyPr wrap="square" rtlCol="0" anchor="t"/>
-          <a:lstStyle/>
-          <a:p>
-            <a:pPr marL="0" indent="0">
-              <a:spcAft>
-                <a:spcPts val="300"/>
-              </a:spcAft>
-              <a:buNone/>
-            </a:pPr>
-            <a:r>
-              <a:rPr lang="en-US" sz="1150" dirty="0">
-                <a:solidFill>
-                  <a:srgbClr val="1A1A1A"/>
-                </a:solidFill>
-                <a:latin typeface="Calibri" pitchFamily="34" charset="0"/>
-                <a:ea typeface="Calibri" pitchFamily="34" charset="-122"/>
-                <a:cs typeface="Calibri" pitchFamily="34" charset="-120"/>
-              </a:rPr>
-              <a:t>Pass MacFactory → full Mac experience; WinFactory → full Win experience. You can</a:t>
-            </a:r>
-            <a:endParaRPr lang="en-US" sz="1150" dirty="0"/>
-          </a:p>
-          <a:p>
-            <a:pPr marL="0" indent="0">
-              <a:spcAft>
-                <a:spcPts val="300"/>
-              </a:spcAft>
-              <a:buNone/>
-            </a:pPr>
-            <a:r>
-              <a:rPr lang="en-US" sz="1150" b="1" dirty="0">
-                <a:solidFill>
-                  <a:srgbClr val="242852"/>
-                </a:solidFill>
-                <a:latin typeface="Calibri" pitchFamily="34" charset="0"/>
-                <a:ea typeface="Calibri" pitchFamily="34" charset="-122"/>
-                <a:cs typeface="Calibri" pitchFamily="34" charset="-120"/>
-              </a:rPr>
-              <a:t>NEVER get a MacButton with a WinCheckbox — the factory builds the whole family.</a:t>
-            </a:r>
-            <a:endParaRPr lang="en-US" sz="1150" dirty="0"/>
           </a:p>
         </p:txBody>
       </p:sp>
@@ -10351,6 +10673,2264 @@
 
 <file path=ppt/slides/slide20.xml><?xml version="1.0" encoding="utf-8"?>
 <p:sld xmlns:a="http://schemas.openxmlformats.org/drawingml/2006/main" xmlns:r="http://schemas.openxmlformats.org/officeDocument/2006/relationships" xmlns:p="http://schemas.openxmlformats.org/presentationml/2006/main">
+  <p:cSld name="Slide 18">
+    <p:bg>
+      <p:bgPr>
+        <a:solidFill>
+          <a:srgbClr val="FFFFFF"/>
+        </a:solidFill>
+        <a:effectLst/>
+      </p:bgPr>
+    </p:bg>
+    <p:spTree>
+      <p:nvGrpSpPr>
+        <p:cNvPr id="1" name=""/>
+        <p:cNvGrpSpPr/>
+        <p:nvPr/>
+      </p:nvGrpSpPr>
+      <p:grpSpPr>
+        <a:xfrm>
+          <a:off x="0" y="0"/>
+          <a:ext cx="0" cy="0"/>
+          <a:chOff x="0" y="0"/>
+          <a:chExt cx="0" cy="0"/>
+        </a:xfrm>
+      </p:grpSpPr>
+      <p:sp>
+        <p:nvSpPr>
+          <p:cNvPr id="2" name="Shape 0"/>
+          <p:cNvSpPr/>
+          <p:nvPr/>
+        </p:nvSpPr>
+        <p:spPr>
+          <a:xfrm>
+            <a:off x="0" y="0"/>
+            <a:ext cx="9144000" cy="932688"/>
+          </a:xfrm>
+          <a:prstGeom prst="rect">
+            <a:avLst/>
+          </a:prstGeom>
+          <a:solidFill>
+            <a:srgbClr val="23242B"/>
+          </a:solidFill>
+          <a:ln/>
+        </p:spPr>
+        <p:txBody>
+          <a:bodyPr/>
+          <a:lstStyle/>
+          <a:p>
+            <a:endParaRPr lang="en-US"/>
+          </a:p>
+        </p:txBody>
+      </p:sp>
+      <p:sp>
+        <p:nvSpPr>
+          <p:cNvPr id="3" name="Shape 1"/>
+          <p:cNvSpPr/>
+          <p:nvPr/>
+        </p:nvSpPr>
+        <p:spPr>
+          <a:xfrm>
+            <a:off x="4114800" y="0"/>
+            <a:ext cx="5029200" cy="932688"/>
+          </a:xfrm>
+          <a:prstGeom prst="rect">
+            <a:avLst/>
+          </a:prstGeom>
+          <a:solidFill>
+            <a:srgbClr val="4A4C57">
+              <a:alpha val="45000"/>
+            </a:srgbClr>
+          </a:solidFill>
+          <a:ln/>
+        </p:spPr>
+        <p:txBody>
+          <a:bodyPr/>
+          <a:lstStyle/>
+          <a:p>
+            <a:endParaRPr lang="en-US"/>
+          </a:p>
+        </p:txBody>
+      </p:sp>
+      <p:pic>
+        <p:nvPicPr>
+          <p:cNvPr id="4" name="Image 0" descr="/home/claude/aiub_logo.png"/>
+          <p:cNvPicPr>
+            <a:picLocks noChangeAspect="1"/>
+          </p:cNvPicPr>
+          <p:nvPr/>
+        </p:nvPicPr>
+        <p:blipFill>
+          <a:blip r:embed="rId3"/>
+          <a:stretch>
+            <a:fillRect/>
+          </a:stretch>
+        </p:blipFill>
+        <p:spPr>
+          <a:xfrm>
+            <a:off x="8211312" y="118872"/>
+            <a:ext cx="694944" cy="694944"/>
+          </a:xfrm>
+          <a:prstGeom prst="rect">
+            <a:avLst/>
+          </a:prstGeom>
+        </p:spPr>
+      </p:pic>
+      <p:sp>
+        <p:nvSpPr>
+          <p:cNvPr id="5" name="Text 2"/>
+          <p:cNvSpPr/>
+          <p:nvPr/>
+        </p:nvSpPr>
+        <p:spPr>
+          <a:xfrm>
+            <a:off x="502920" y="0"/>
+            <a:ext cx="8001000" cy="932688"/>
+          </a:xfrm>
+          <a:prstGeom prst="rect">
+            <a:avLst/>
+          </a:prstGeom>
+          <a:noFill/>
+          <a:ln/>
+        </p:spPr>
+        <p:txBody>
+          <a:bodyPr wrap="square" rtlCol="0" anchor="ctr"/>
+          <a:lstStyle/>
+          <a:p>
+            <a:pPr marL="0" indent="0" algn="l">
+              <a:buNone/>
+            </a:pPr>
+            <a:r>
+              <a:rPr lang="en-US" sz="2500" dirty="0">
+                <a:solidFill>
+                  <a:srgbClr val="FFFFFF"/>
+                </a:solidFill>
+                <a:latin typeface="Cambria" pitchFamily="34" charset="0"/>
+                <a:ea typeface="Cambria" pitchFamily="34" charset="-122"/>
+                <a:cs typeface="Cambria" pitchFamily="34" charset="-120"/>
+              </a:rPr>
+              <a:t>Abstract Factory — The Family-Consistency Problem</a:t>
+            </a:r>
+            <a:r>
+              <a:rPr lang="en-US" sz="1600" i="1" dirty="0">
+                <a:solidFill>
+                  <a:srgbClr val="C9CCD6"/>
+                </a:solidFill>
+                <a:latin typeface="Cambria" pitchFamily="34" charset="0"/>
+                <a:ea typeface="Cambria" pitchFamily="34" charset="-122"/>
+                <a:cs typeface="Cambria" pitchFamily="34" charset="-120"/>
+              </a:rPr>
+              <a:t>  </a:t>
+            </a:r>
+          </a:p>
+          <a:p>
+            <a:pPr marL="0" indent="0" algn="l">
+              <a:buNone/>
+            </a:pPr>
+            <a:r>
+              <a:rPr lang="en-US" sz="1600" i="1" dirty="0" err="1">
+                <a:solidFill>
+                  <a:srgbClr val="C9CCD6"/>
+                </a:solidFill>
+                <a:latin typeface="Cambria" pitchFamily="34" charset="0"/>
+                <a:ea typeface="Cambria" pitchFamily="34" charset="-122"/>
+                <a:cs typeface="Cambria" pitchFamily="34" charset="-120"/>
+              </a:rPr>
+              <a:t>GoF</a:t>
+            </a:r>
+            <a:r>
+              <a:rPr lang="en-US" sz="1600" i="1" dirty="0">
+                <a:solidFill>
+                  <a:srgbClr val="C9CCD6"/>
+                </a:solidFill>
+                <a:latin typeface="Cambria" pitchFamily="34" charset="0"/>
+                <a:ea typeface="Cambria" pitchFamily="34" charset="-122"/>
+                <a:cs typeface="Cambria" pitchFamily="34" charset="-120"/>
+              </a:rPr>
+              <a:t> Ch. 3, p. 87</a:t>
+            </a:r>
+            <a:endParaRPr lang="en-US" sz="2500" dirty="0"/>
+          </a:p>
+        </p:txBody>
+      </p:sp>
+      <p:sp>
+        <p:nvSpPr>
+          <p:cNvPr id="6" name="Text 3"/>
+          <p:cNvSpPr/>
+          <p:nvPr/>
+        </p:nvSpPr>
+        <p:spPr>
+          <a:xfrm>
+            <a:off x="502920" y="6547104"/>
+            <a:ext cx="5943600" cy="237744"/>
+          </a:xfrm>
+          <a:prstGeom prst="rect">
+            <a:avLst/>
+          </a:prstGeom>
+          <a:noFill/>
+          <a:ln/>
+        </p:spPr>
+        <p:txBody>
+          <a:bodyPr wrap="square" rtlCol="0" anchor="ctr"/>
+          <a:lstStyle/>
+          <a:p>
+            <a:pPr marL="0" indent="0" algn="l">
+              <a:buNone/>
+            </a:pPr>
+            <a:r>
+              <a:rPr lang="en-US" sz="800" dirty="0">
+                <a:solidFill>
+                  <a:srgbClr val="9A9CA3"/>
+                </a:solidFill>
+                <a:latin typeface="Calibri" pitchFamily="34" charset="0"/>
+                <a:ea typeface="Calibri" pitchFamily="34" charset="-122"/>
+                <a:cs typeface="Calibri" pitchFamily="34" charset="-120"/>
+              </a:rPr>
+              <a:t>CSC 4273  ·  Software Architecture &amp; Design Patterns  ·  AIUB</a:t>
+            </a:r>
+            <a:endParaRPr lang="en-US" sz="800" dirty="0"/>
+          </a:p>
+        </p:txBody>
+      </p:sp>
+      <p:sp>
+        <p:nvSpPr>
+          <p:cNvPr id="7" name="Text 4"/>
+          <p:cNvSpPr/>
+          <p:nvPr/>
+        </p:nvSpPr>
+        <p:spPr>
+          <a:xfrm>
+            <a:off x="7132320" y="6547104"/>
+            <a:ext cx="1508760" cy="237744"/>
+          </a:xfrm>
+          <a:prstGeom prst="rect">
+            <a:avLst/>
+          </a:prstGeom>
+          <a:noFill/>
+          <a:ln/>
+        </p:spPr>
+        <p:txBody>
+          <a:bodyPr wrap="square" rtlCol="0" anchor="ctr"/>
+          <a:lstStyle/>
+          <a:p>
+            <a:pPr marL="0" indent="0" algn="r">
+              <a:buNone/>
+            </a:pPr>
+            <a:r>
+              <a:rPr lang="en-US" sz="800" dirty="0">
+                <a:solidFill>
+                  <a:srgbClr val="9A9CA3"/>
+                </a:solidFill>
+                <a:latin typeface="Calibri" pitchFamily="34" charset="0"/>
+                <a:ea typeface="Calibri" pitchFamily="34" charset="-122"/>
+                <a:cs typeface="Calibri" pitchFamily="34" charset="-120"/>
+              </a:rPr>
+              <a:t>Week 3</a:t>
+            </a:r>
+            <a:endParaRPr lang="en-US" sz="800" dirty="0"/>
+          </a:p>
+        </p:txBody>
+      </p:sp>
+      <p:sp>
+        <p:nvSpPr>
+          <p:cNvPr id="8" name="Shape 5"/>
+          <p:cNvSpPr/>
+          <p:nvPr/>
+        </p:nvSpPr>
+        <p:spPr>
+          <a:xfrm>
+            <a:off x="502920" y="1133856"/>
+            <a:ext cx="8138160" cy="5266944"/>
+          </a:xfrm>
+          <a:prstGeom prst="roundRect">
+            <a:avLst>
+              <a:gd name="adj" fmla="val 1042"/>
+            </a:avLst>
+          </a:prstGeom>
+          <a:solidFill>
+            <a:srgbClr val="F2F3F6"/>
+          </a:solidFill>
+          <a:ln w="12700">
+            <a:solidFill>
+              <a:srgbClr val="D4D7DF"/>
+            </a:solidFill>
+            <a:prstDash val="solid"/>
+          </a:ln>
+        </p:spPr>
+        <p:txBody>
+          <a:bodyPr/>
+          <a:lstStyle/>
+          <a:p>
+            <a:endParaRPr lang="en-US"/>
+          </a:p>
+        </p:txBody>
+      </p:sp>
+      <p:sp>
+        <p:nvSpPr>
+          <p:cNvPr id="9" name="Text 6"/>
+          <p:cNvSpPr/>
+          <p:nvPr/>
+        </p:nvSpPr>
+        <p:spPr>
+          <a:xfrm>
+            <a:off x="685800" y="1261872"/>
+            <a:ext cx="7772400" cy="5010912"/>
+          </a:xfrm>
+          <a:prstGeom prst="rect">
+            <a:avLst/>
+          </a:prstGeom>
+          <a:noFill/>
+          <a:ln/>
+        </p:spPr>
+        <p:txBody>
+          <a:bodyPr wrap="square" rtlCol="0" anchor="t"/>
+          <a:lstStyle/>
+          <a:p>
+            <a:pPr marL="0" indent="0">
+              <a:lnSpc>
+                <a:spcPct val="102000"/>
+              </a:lnSpc>
+              <a:spcAft>
+                <a:spcPts val="600"/>
+              </a:spcAft>
+              <a:buNone/>
+            </a:pPr>
+            <a:r>
+              <a:rPr lang="en-US" sz="1600" dirty="0">
+                <a:solidFill>
+                  <a:srgbClr val="1A1A1A"/>
+                </a:solidFill>
+                <a:latin typeface="Calibri" pitchFamily="34" charset="0"/>
+                <a:ea typeface="Calibri" pitchFamily="34" charset="-122"/>
+                <a:cs typeface="Calibri" pitchFamily="34" charset="-120"/>
+              </a:rPr>
+              <a:t>UniRide’s matching algorithm has three components that MUST work together:</a:t>
+            </a:r>
+            <a:endParaRPr lang="en-US" sz="1600" dirty="0"/>
+          </a:p>
+          <a:p>
+            <a:pPr marL="685800" lvl="1" indent="-342900">
+              <a:lnSpc>
+                <a:spcPct val="102000"/>
+              </a:lnSpc>
+              <a:spcAft>
+                <a:spcPts val="1000"/>
+              </a:spcAft>
+              <a:buSzPct val="100000"/>
+              <a:buChar char="•"/>
+            </a:pPr>
+            <a:r>
+              <a:rPr lang="en-US" sz="1600" dirty="0">
+                <a:solidFill>
+                  <a:srgbClr val="1A1A1A"/>
+                </a:solidFill>
+                <a:latin typeface="Calibri" pitchFamily="34" charset="0"/>
+                <a:ea typeface="Calibri" pitchFamily="34" charset="-122"/>
+                <a:cs typeface="Calibri" pitchFamily="34" charset="-120"/>
+              </a:rPr>
+              <a:t>Scorer (scores each driver) · Filter (removes unqualified) · Sorter (orders results)</a:t>
+            </a:r>
+            <a:endParaRPr lang="en-US" sz="1600" dirty="0"/>
+          </a:p>
+          <a:p>
+            <a:pPr marL="0" indent="0">
+              <a:lnSpc>
+                <a:spcPct val="102000"/>
+              </a:lnSpc>
+              <a:spcAft>
+                <a:spcPts val="200"/>
+              </a:spcAft>
+              <a:buNone/>
+            </a:pPr>
+            <a:r>
+              <a:rPr lang="en-US" sz="1600" b="1" dirty="0">
+                <a:solidFill>
+                  <a:srgbClr val="C00000"/>
+                </a:solidFill>
+                <a:latin typeface="Calibri" pitchFamily="34" charset="0"/>
+                <a:ea typeface="Calibri" pitchFamily="34" charset="-122"/>
+                <a:cs typeface="Calibri" pitchFamily="34" charset="-120"/>
+              </a:rPr>
+              <a:t>PROBLEM — using a separate factory for each:</a:t>
+            </a:r>
+            <a:endParaRPr lang="en-US" sz="1600" dirty="0"/>
+          </a:p>
+          <a:p>
+            <a:pPr marL="0" lvl="1" indent="0">
+              <a:lnSpc>
+                <a:spcPct val="102000"/>
+              </a:lnSpc>
+              <a:spcAft>
+                <a:spcPts val="200"/>
+              </a:spcAft>
+              <a:buNone/>
+            </a:pPr>
+            <a:r>
+              <a:rPr lang="en-US" sz="1600" dirty="0">
+                <a:solidFill>
+                  <a:srgbClr val="1A1A1A"/>
+                </a:solidFill>
+                <a:latin typeface="Calibri" pitchFamily="34" charset="0"/>
+                <a:ea typeface="Calibri" pitchFamily="34" charset="-122"/>
+                <a:cs typeface="Calibri" pitchFamily="34" charset="-120"/>
+              </a:rPr>
+              <a:t>DistanceScorer produces scores in metres, but PriceAscendingSorter expects</a:t>
+            </a:r>
+            <a:endParaRPr lang="en-US" sz="1600" dirty="0"/>
+          </a:p>
+          <a:p>
+            <a:pPr marL="0" lvl="1" indent="0">
+              <a:lnSpc>
+                <a:spcPct val="102000"/>
+              </a:lnSpc>
+              <a:spcAft>
+                <a:spcPts val="1000"/>
+              </a:spcAft>
+              <a:buNone/>
+            </a:pPr>
+            <a:r>
+              <a:rPr lang="en-US" sz="1600" dirty="0">
+                <a:solidFill>
+                  <a:srgbClr val="1A1A1A"/>
+                </a:solidFill>
+                <a:latin typeface="Calibri" pitchFamily="34" charset="0"/>
+                <a:ea typeface="Calibri" pitchFamily="34" charset="-122"/>
+                <a:cs typeface="Calibri" pitchFamily="34" charset="-120"/>
+              </a:rPr>
+              <a:t>currency units. MISMATCH → runtime bug.</a:t>
+            </a:r>
+            <a:endParaRPr lang="en-US" sz="1600" dirty="0"/>
+          </a:p>
+          <a:p>
+            <a:pPr marL="0" indent="0">
+              <a:lnSpc>
+                <a:spcPct val="102000"/>
+              </a:lnSpc>
+              <a:spcAft>
+                <a:spcPts val="200"/>
+              </a:spcAft>
+              <a:buNone/>
+            </a:pPr>
+            <a:r>
+              <a:rPr lang="en-US" sz="1600" b="1" dirty="0">
+                <a:solidFill>
+                  <a:srgbClr val="2E7D46"/>
+                </a:solidFill>
+                <a:latin typeface="Calibri" pitchFamily="34" charset="0"/>
+                <a:ea typeface="Calibri" pitchFamily="34" charset="-122"/>
+                <a:cs typeface="Calibri" pitchFamily="34" charset="-120"/>
+              </a:rPr>
+              <a:t>ABSTRACT FACTORY SOLUTION:</a:t>
+            </a:r>
+            <a:endParaRPr lang="en-US" sz="1600" dirty="0"/>
+          </a:p>
+          <a:p>
+            <a:pPr marL="0" lvl="1" indent="0">
+              <a:lnSpc>
+                <a:spcPct val="102000"/>
+              </a:lnSpc>
+              <a:spcAft>
+                <a:spcPts val="200"/>
+              </a:spcAft>
+              <a:buNone/>
+            </a:pPr>
+            <a:r>
+              <a:rPr lang="en-US" sz="1400" dirty="0">
+                <a:solidFill>
+                  <a:srgbClr val="1A1A1A"/>
+                </a:solidFill>
+                <a:latin typeface="Consolas" pitchFamily="34" charset="0"/>
+                <a:ea typeface="Consolas" pitchFamily="34" charset="-122"/>
+                <a:cs typeface="Consolas" pitchFamily="34" charset="-120"/>
+              </a:rPr>
+              <a:t>factory = new NearestDriverMatchingFactory();</a:t>
+            </a:r>
+            <a:endParaRPr lang="en-US" sz="1600" dirty="0"/>
+          </a:p>
+          <a:p>
+            <a:pPr marL="0" lvl="1" indent="0">
+              <a:lnSpc>
+                <a:spcPct val="102000"/>
+              </a:lnSpc>
+              <a:spcAft>
+                <a:spcPts val="200"/>
+              </a:spcAft>
+              <a:buNone/>
+            </a:pPr>
+            <a:r>
+              <a:rPr lang="en-US" sz="1400" dirty="0">
+                <a:solidFill>
+                  <a:srgbClr val="1A1A1A"/>
+                </a:solidFill>
+                <a:latin typeface="Consolas" pitchFamily="34" charset="0"/>
+                <a:ea typeface="Consolas" pitchFamily="34" charset="-122"/>
+                <a:cs typeface="Consolas" pitchFamily="34" charset="-120"/>
+              </a:rPr>
+              <a:t>scorer = factory.createScorer();  </a:t>
+            </a:r>
+          </a:p>
+          <a:p>
+            <a:pPr marL="0" lvl="1" indent="0">
+              <a:lnSpc>
+                <a:spcPct val="102000"/>
+              </a:lnSpc>
+              <a:spcAft>
+                <a:spcPts val="200"/>
+              </a:spcAft>
+              <a:buNone/>
+            </a:pPr>
+            <a:r>
+              <a:rPr lang="en-US" sz="1400" dirty="0">
+                <a:solidFill>
+                  <a:srgbClr val="1A1A1A"/>
+                </a:solidFill>
+                <a:latin typeface="Consolas" pitchFamily="34" charset="0"/>
+                <a:ea typeface="Consolas" pitchFamily="34" charset="-122"/>
+                <a:cs typeface="Consolas" pitchFamily="34" charset="-120"/>
+              </a:rPr>
+              <a:t>filter = factory.createFilter();</a:t>
+            </a:r>
+            <a:endParaRPr lang="en-US" sz="1600" dirty="0"/>
+          </a:p>
+          <a:p>
+            <a:pPr marL="0" lvl="1" indent="0">
+              <a:lnSpc>
+                <a:spcPct val="102000"/>
+              </a:lnSpc>
+              <a:spcAft>
+                <a:spcPts val="1000"/>
+              </a:spcAft>
+              <a:buNone/>
+            </a:pPr>
+            <a:r>
+              <a:rPr lang="en-US" sz="1400" dirty="0">
+                <a:solidFill>
+                  <a:srgbClr val="1A1A1A"/>
+                </a:solidFill>
+                <a:latin typeface="Consolas" pitchFamily="34" charset="0"/>
+                <a:ea typeface="Consolas" pitchFamily="34" charset="-122"/>
+                <a:cs typeface="Consolas" pitchFamily="34" charset="-120"/>
+              </a:rPr>
+              <a:t>sorter = factory.createSorter();   // all three speak metres</a:t>
+            </a:r>
+            <a:endParaRPr lang="en-US" sz="1600" dirty="0"/>
+          </a:p>
+          <a:p>
+            <a:pPr marL="0" indent="0">
+              <a:lnSpc>
+                <a:spcPct val="102000"/>
+              </a:lnSpc>
+              <a:spcAft>
+                <a:spcPts val="200"/>
+              </a:spcAft>
+              <a:buNone/>
+            </a:pPr>
+            <a:r>
+              <a:rPr lang="en-US" sz="1600" b="1" dirty="0">
+                <a:solidFill>
+                  <a:srgbClr val="242852"/>
+                </a:solidFill>
+                <a:latin typeface="Calibri" pitchFamily="34" charset="0"/>
+                <a:ea typeface="Calibri" pitchFamily="34" charset="-122"/>
+                <a:cs typeface="Calibri" pitchFamily="34" charset="-120"/>
+              </a:rPr>
+              <a:t>The factory GUARANTEES all members of the family are compatible. Swap to</a:t>
+            </a:r>
+            <a:r>
+              <a:rPr lang="en-US" sz="1600" dirty="0"/>
+              <a:t> </a:t>
+            </a:r>
+            <a:r>
+              <a:rPr lang="en-US" sz="1600" b="1" dirty="0" err="1">
+                <a:solidFill>
+                  <a:srgbClr val="242852"/>
+                </a:solidFill>
+                <a:latin typeface="Calibri" pitchFamily="34" charset="0"/>
+                <a:ea typeface="Calibri" pitchFamily="34" charset="-122"/>
+                <a:cs typeface="Calibri" pitchFamily="34" charset="-120"/>
+              </a:rPr>
+              <a:t>HighestRatedMatchingFactory</a:t>
+            </a:r>
+            <a:r>
+              <a:rPr lang="en-US" sz="1600" b="1" dirty="0">
+                <a:solidFill>
+                  <a:srgbClr val="242852"/>
+                </a:solidFill>
+                <a:latin typeface="Calibri" pitchFamily="34" charset="0"/>
+                <a:ea typeface="Calibri" pitchFamily="34" charset="-122"/>
+                <a:cs typeface="Calibri" pitchFamily="34" charset="-120"/>
+              </a:rPr>
+              <a:t> — all three are replaced consistently. No mismatches.</a:t>
+            </a:r>
+            <a:endParaRPr lang="en-US" sz="1600" dirty="0"/>
+          </a:p>
+        </p:txBody>
+      </p:sp>
+    </p:spTree>
+  </p:cSld>
+  <p:clrMapOvr>
+    <a:masterClrMapping/>
+  </p:clrMapOvr>
+</p:sld>
+</file>
+
+<file path=ppt/slides/slide21.xml><?xml version="1.0" encoding="utf-8"?>
+<p:sld xmlns:a="http://schemas.openxmlformats.org/drawingml/2006/main" xmlns:r="http://schemas.openxmlformats.org/officeDocument/2006/relationships" xmlns:p="http://schemas.openxmlformats.org/presentationml/2006/main">
+  <p:cSld name="Slide 19">
+    <p:bg>
+      <p:bgPr>
+        <a:solidFill>
+          <a:srgbClr val="FFFFFF"/>
+        </a:solidFill>
+        <a:effectLst/>
+      </p:bgPr>
+    </p:bg>
+    <p:spTree>
+      <p:nvGrpSpPr>
+        <p:cNvPr id="1" name=""/>
+        <p:cNvGrpSpPr/>
+        <p:nvPr/>
+      </p:nvGrpSpPr>
+      <p:grpSpPr>
+        <a:xfrm>
+          <a:off x="0" y="0"/>
+          <a:ext cx="0" cy="0"/>
+          <a:chOff x="0" y="0"/>
+          <a:chExt cx="0" cy="0"/>
+        </a:xfrm>
+      </p:grpSpPr>
+      <p:sp>
+        <p:nvSpPr>
+          <p:cNvPr id="2" name="Shape 0"/>
+          <p:cNvSpPr/>
+          <p:nvPr/>
+        </p:nvSpPr>
+        <p:spPr>
+          <a:xfrm>
+            <a:off x="0" y="0"/>
+            <a:ext cx="9144000" cy="932688"/>
+          </a:xfrm>
+          <a:prstGeom prst="rect">
+            <a:avLst/>
+          </a:prstGeom>
+          <a:solidFill>
+            <a:srgbClr val="23242B"/>
+          </a:solidFill>
+          <a:ln/>
+        </p:spPr>
+        <p:txBody>
+          <a:bodyPr/>
+          <a:lstStyle/>
+          <a:p>
+            <a:endParaRPr lang="en-US"/>
+          </a:p>
+        </p:txBody>
+      </p:sp>
+      <p:sp>
+        <p:nvSpPr>
+          <p:cNvPr id="3" name="Shape 1"/>
+          <p:cNvSpPr/>
+          <p:nvPr/>
+        </p:nvSpPr>
+        <p:spPr>
+          <a:xfrm>
+            <a:off x="4114800" y="0"/>
+            <a:ext cx="5029200" cy="932688"/>
+          </a:xfrm>
+          <a:prstGeom prst="rect">
+            <a:avLst/>
+          </a:prstGeom>
+          <a:solidFill>
+            <a:srgbClr val="4A4C57">
+              <a:alpha val="45000"/>
+            </a:srgbClr>
+          </a:solidFill>
+          <a:ln/>
+        </p:spPr>
+        <p:txBody>
+          <a:bodyPr/>
+          <a:lstStyle/>
+          <a:p>
+            <a:endParaRPr lang="en-US"/>
+          </a:p>
+        </p:txBody>
+      </p:sp>
+      <p:pic>
+        <p:nvPicPr>
+          <p:cNvPr id="4" name="Image 0" descr="/home/claude/aiub_logo.png"/>
+          <p:cNvPicPr>
+            <a:picLocks noChangeAspect="1"/>
+          </p:cNvPicPr>
+          <p:nvPr/>
+        </p:nvPicPr>
+        <p:blipFill>
+          <a:blip r:embed="rId3"/>
+          <a:stretch>
+            <a:fillRect/>
+          </a:stretch>
+        </p:blipFill>
+        <p:spPr>
+          <a:xfrm>
+            <a:off x="8211312" y="118872"/>
+            <a:ext cx="694944" cy="694944"/>
+          </a:xfrm>
+          <a:prstGeom prst="rect">
+            <a:avLst/>
+          </a:prstGeom>
+        </p:spPr>
+      </p:pic>
+      <p:sp>
+        <p:nvSpPr>
+          <p:cNvPr id="5" name="Text 2"/>
+          <p:cNvSpPr/>
+          <p:nvPr/>
+        </p:nvSpPr>
+        <p:spPr>
+          <a:xfrm>
+            <a:off x="502920" y="0"/>
+            <a:ext cx="8001000" cy="932688"/>
+          </a:xfrm>
+          <a:prstGeom prst="rect">
+            <a:avLst/>
+          </a:prstGeom>
+          <a:noFill/>
+          <a:ln/>
+        </p:spPr>
+        <p:txBody>
+          <a:bodyPr wrap="square" rtlCol="0" anchor="ctr"/>
+          <a:lstStyle/>
+          <a:p>
+            <a:pPr marL="0" indent="0" algn="l">
+              <a:buNone/>
+            </a:pPr>
+            <a:r>
+              <a:rPr lang="en-US" sz="2500" dirty="0">
+                <a:solidFill>
+                  <a:srgbClr val="FFFFFF"/>
+                </a:solidFill>
+                <a:latin typeface="Cambria" pitchFamily="34" charset="0"/>
+                <a:ea typeface="Cambria" pitchFamily="34" charset="-122"/>
+                <a:cs typeface="Cambria" pitchFamily="34" charset="-120"/>
+              </a:rPr>
+              <a:t>Abstract Factory — Structure (UI Factory)</a:t>
+            </a:r>
+            <a:endParaRPr lang="en-US" sz="2500" dirty="0"/>
+          </a:p>
+        </p:txBody>
+      </p:sp>
+      <p:sp>
+        <p:nvSpPr>
+          <p:cNvPr id="6" name="Text 3"/>
+          <p:cNvSpPr/>
+          <p:nvPr/>
+        </p:nvSpPr>
+        <p:spPr>
+          <a:xfrm>
+            <a:off x="502920" y="6547104"/>
+            <a:ext cx="5943600" cy="237744"/>
+          </a:xfrm>
+          <a:prstGeom prst="rect">
+            <a:avLst/>
+          </a:prstGeom>
+          <a:noFill/>
+          <a:ln/>
+        </p:spPr>
+        <p:txBody>
+          <a:bodyPr wrap="square" rtlCol="0" anchor="ctr"/>
+          <a:lstStyle/>
+          <a:p>
+            <a:pPr marL="0" indent="0" algn="l">
+              <a:buNone/>
+            </a:pPr>
+            <a:r>
+              <a:rPr lang="en-US" sz="800" dirty="0">
+                <a:solidFill>
+                  <a:srgbClr val="9A9CA3"/>
+                </a:solidFill>
+                <a:latin typeface="Calibri" pitchFamily="34" charset="0"/>
+                <a:ea typeface="Calibri" pitchFamily="34" charset="-122"/>
+                <a:cs typeface="Calibri" pitchFamily="34" charset="-120"/>
+              </a:rPr>
+              <a:t>CSC 4273  ·  Software Architecture &amp; Design Patterns  ·  AIUB</a:t>
+            </a:r>
+            <a:endParaRPr lang="en-US" sz="800" dirty="0"/>
+          </a:p>
+        </p:txBody>
+      </p:sp>
+      <p:sp>
+        <p:nvSpPr>
+          <p:cNvPr id="7" name="Text 4"/>
+          <p:cNvSpPr/>
+          <p:nvPr/>
+        </p:nvSpPr>
+        <p:spPr>
+          <a:xfrm>
+            <a:off x="7132320" y="6547104"/>
+            <a:ext cx="1508760" cy="237744"/>
+          </a:xfrm>
+          <a:prstGeom prst="rect">
+            <a:avLst/>
+          </a:prstGeom>
+          <a:noFill/>
+          <a:ln/>
+        </p:spPr>
+        <p:txBody>
+          <a:bodyPr wrap="square" rtlCol="0" anchor="ctr"/>
+          <a:lstStyle/>
+          <a:p>
+            <a:pPr marL="0" indent="0" algn="r">
+              <a:buNone/>
+            </a:pPr>
+            <a:r>
+              <a:rPr lang="en-US" sz="800" dirty="0">
+                <a:solidFill>
+                  <a:srgbClr val="9A9CA3"/>
+                </a:solidFill>
+                <a:latin typeface="Calibri" pitchFamily="34" charset="0"/>
+                <a:ea typeface="Calibri" pitchFamily="34" charset="-122"/>
+                <a:cs typeface="Calibri" pitchFamily="34" charset="-120"/>
+              </a:rPr>
+              <a:t>Week 3</a:t>
+            </a:r>
+            <a:endParaRPr lang="en-US" sz="800" dirty="0"/>
+          </a:p>
+        </p:txBody>
+      </p:sp>
+      <p:sp>
+        <p:nvSpPr>
+          <p:cNvPr id="8" name="Shape 5"/>
+          <p:cNvSpPr/>
+          <p:nvPr/>
+        </p:nvSpPr>
+        <p:spPr>
+          <a:xfrm>
+            <a:off x="502920" y="1133856"/>
+            <a:ext cx="8138160" cy="4663440"/>
+          </a:xfrm>
+          <a:prstGeom prst="roundRect">
+            <a:avLst>
+              <a:gd name="adj" fmla="val 1176"/>
+            </a:avLst>
+          </a:prstGeom>
+          <a:solidFill>
+            <a:srgbClr val="F5F5F7"/>
+          </a:solidFill>
+          <a:ln w="12700">
+            <a:solidFill>
+              <a:srgbClr val="D9DBE2"/>
+            </a:solidFill>
+            <a:prstDash val="solid"/>
+          </a:ln>
+        </p:spPr>
+        <p:txBody>
+          <a:bodyPr/>
+          <a:lstStyle/>
+          <a:p>
+            <a:endParaRPr lang="en-US"/>
+          </a:p>
+        </p:txBody>
+      </p:sp>
+      <p:sp>
+        <p:nvSpPr>
+          <p:cNvPr id="9" name="Text 6"/>
+          <p:cNvSpPr/>
+          <p:nvPr/>
+        </p:nvSpPr>
+        <p:spPr>
+          <a:xfrm>
+            <a:off x="667512" y="1225296"/>
+            <a:ext cx="7808976" cy="4480560"/>
+          </a:xfrm>
+          <a:prstGeom prst="rect">
+            <a:avLst/>
+          </a:prstGeom>
+          <a:noFill/>
+          <a:ln/>
+        </p:spPr>
+        <p:txBody>
+          <a:bodyPr wrap="square" rtlCol="0" anchor="t"/>
+          <a:lstStyle/>
+          <a:p>
+            <a:pPr marL="0" indent="0">
+              <a:lnSpc>
+                <a:spcPct val="100000"/>
+              </a:lnSpc>
+              <a:buNone/>
+            </a:pPr>
+            <a:r>
+              <a:rPr lang="en-US" sz="1400" b="1" dirty="0">
+                <a:solidFill>
+                  <a:srgbClr val="1E7A34"/>
+                </a:solidFill>
+                <a:latin typeface="Consolas" pitchFamily="34" charset="0"/>
+                <a:ea typeface="Consolas" pitchFamily="34" charset="-122"/>
+                <a:cs typeface="Consolas" pitchFamily="34" charset="-120"/>
+              </a:rPr>
+              <a:t>interface Button   { render(): void; }      // ABSTRACT PRODUCTS</a:t>
+            </a:r>
+            <a:endParaRPr lang="en-US" sz="1400" dirty="0"/>
+          </a:p>
+          <a:p>
+            <a:pPr marL="0" indent="0">
+              <a:lnSpc>
+                <a:spcPct val="100000"/>
+              </a:lnSpc>
+              <a:buNone/>
+            </a:pPr>
+            <a:r>
+              <a:rPr lang="en-US" sz="1400" dirty="0">
+                <a:solidFill>
+                  <a:srgbClr val="1E1E22"/>
+                </a:solidFill>
+                <a:latin typeface="Consolas" pitchFamily="34" charset="0"/>
+                <a:ea typeface="Consolas" pitchFamily="34" charset="-122"/>
+                <a:cs typeface="Consolas" pitchFamily="34" charset="-120"/>
+              </a:rPr>
+              <a:t>interface Checkbox { check(): void; }</a:t>
+            </a:r>
+            <a:endParaRPr lang="en-US" sz="1400" dirty="0"/>
+          </a:p>
+          <a:p>
+            <a:pPr marL="0" indent="0">
+              <a:lnSpc>
+                <a:spcPct val="100000"/>
+              </a:lnSpc>
+              <a:buNone/>
+            </a:pPr>
+            <a:r>
+              <a:rPr lang="en-US" sz="1400" dirty="0">
+                <a:solidFill>
+                  <a:srgbClr val="1E1E22"/>
+                </a:solidFill>
+                <a:latin typeface="Consolas" pitchFamily="34" charset="0"/>
+                <a:ea typeface="Consolas" pitchFamily="34" charset="-122"/>
+                <a:cs typeface="Consolas" pitchFamily="34" charset="-120"/>
+              </a:rPr>
+              <a:t>class MacButton implements Button   { render() { /* Mac */ } }</a:t>
+            </a:r>
+            <a:endParaRPr lang="en-US" sz="1400" dirty="0"/>
+          </a:p>
+          <a:p>
+            <a:pPr marL="0" indent="0">
+              <a:lnSpc>
+                <a:spcPct val="100000"/>
+              </a:lnSpc>
+              <a:buNone/>
+            </a:pPr>
+            <a:r>
+              <a:rPr lang="en-US" sz="1400" dirty="0">
+                <a:solidFill>
+                  <a:srgbClr val="1E1E22"/>
+                </a:solidFill>
+                <a:latin typeface="Consolas" pitchFamily="34" charset="0"/>
+                <a:ea typeface="Consolas" pitchFamily="34" charset="-122"/>
+                <a:cs typeface="Consolas" pitchFamily="34" charset="-120"/>
+              </a:rPr>
+              <a:t>class MacCheckbox implements Checkbox { check() { /* Mac */ } }</a:t>
+            </a:r>
+            <a:endParaRPr lang="en-US" sz="1400" dirty="0"/>
+          </a:p>
+          <a:p>
+            <a:pPr marL="0" indent="0">
+              <a:lnSpc>
+                <a:spcPct val="100000"/>
+              </a:lnSpc>
+              <a:buNone/>
+            </a:pPr>
+            <a:r>
+              <a:rPr lang="en-US" sz="1400" dirty="0">
+                <a:solidFill>
+                  <a:srgbClr val="1E1E22"/>
+                </a:solidFill>
+                <a:latin typeface="Consolas" pitchFamily="34" charset="0"/>
+                <a:ea typeface="Consolas" pitchFamily="34" charset="-122"/>
+                <a:cs typeface="Consolas" pitchFamily="34" charset="-120"/>
+              </a:rPr>
+              <a:t>class WinButton implements Button   { render() { /* Win */ } }</a:t>
+            </a:r>
+            <a:endParaRPr lang="en-US" sz="1400" dirty="0"/>
+          </a:p>
+          <a:p>
+            <a:pPr marL="0" indent="0">
+              <a:lnSpc>
+                <a:spcPct val="100000"/>
+              </a:lnSpc>
+              <a:buNone/>
+            </a:pPr>
+            <a:r>
+              <a:rPr lang="en-US" sz="1400" dirty="0">
+                <a:solidFill>
+                  <a:srgbClr val="1E1E22"/>
+                </a:solidFill>
+                <a:latin typeface="Consolas" pitchFamily="34" charset="0"/>
+                <a:ea typeface="Consolas" pitchFamily="34" charset="-122"/>
+                <a:cs typeface="Consolas" pitchFamily="34" charset="-120"/>
+              </a:rPr>
+              <a:t>class WinCheckbox implements Checkbox { check() { /* Win */ } }</a:t>
+            </a:r>
+            <a:endParaRPr lang="en-US" sz="1400" dirty="0"/>
+          </a:p>
+          <a:p>
+            <a:pPr marL="0" indent="0">
+              <a:lnSpc>
+                <a:spcPct val="100000"/>
+              </a:lnSpc>
+              <a:buNone/>
+            </a:pPr>
+            <a:r>
+              <a:rPr lang="en-US" sz="1400" dirty="0">
+                <a:solidFill>
+                  <a:srgbClr val="1E1E22"/>
+                </a:solidFill>
+                <a:latin typeface="Consolas" pitchFamily="34" charset="0"/>
+                <a:ea typeface="Consolas" pitchFamily="34" charset="-122"/>
+                <a:cs typeface="Consolas" pitchFamily="34" charset="-120"/>
+              </a:rPr>
+              <a:t> </a:t>
+            </a:r>
+            <a:endParaRPr lang="en-US" sz="1400" dirty="0"/>
+          </a:p>
+          <a:p>
+            <a:pPr marL="0" indent="0">
+              <a:lnSpc>
+                <a:spcPct val="100000"/>
+              </a:lnSpc>
+              <a:buNone/>
+            </a:pPr>
+            <a:r>
+              <a:rPr lang="en-US" sz="1400" b="1" dirty="0">
+                <a:solidFill>
+                  <a:srgbClr val="1E7A34"/>
+                </a:solidFill>
+                <a:latin typeface="Consolas" pitchFamily="34" charset="0"/>
+                <a:ea typeface="Consolas" pitchFamily="34" charset="-122"/>
+                <a:cs typeface="Consolas" pitchFamily="34" charset="-120"/>
+              </a:rPr>
+              <a:t>interface UIFactory {                        // ABSTRACT FACTORY</a:t>
+            </a:r>
+            <a:endParaRPr lang="en-US" sz="1400" dirty="0"/>
+          </a:p>
+          <a:p>
+            <a:pPr marL="0" indent="0">
+              <a:lnSpc>
+                <a:spcPct val="100000"/>
+              </a:lnSpc>
+              <a:buNone/>
+            </a:pPr>
+            <a:r>
+              <a:rPr lang="en-US" sz="1400" dirty="0">
+                <a:solidFill>
+                  <a:srgbClr val="1E1E22"/>
+                </a:solidFill>
+                <a:latin typeface="Consolas" pitchFamily="34" charset="0"/>
+                <a:ea typeface="Consolas" pitchFamily="34" charset="-122"/>
+                <a:cs typeface="Consolas" pitchFamily="34" charset="-120"/>
+              </a:rPr>
+              <a:t>  createButton(): Button;</a:t>
+            </a:r>
+            <a:endParaRPr lang="en-US" sz="1400" dirty="0"/>
+          </a:p>
+          <a:p>
+            <a:pPr marL="0" indent="0">
+              <a:lnSpc>
+                <a:spcPct val="100000"/>
+              </a:lnSpc>
+              <a:buNone/>
+            </a:pPr>
+            <a:r>
+              <a:rPr lang="en-US" sz="1400" dirty="0">
+                <a:solidFill>
+                  <a:srgbClr val="1E1E22"/>
+                </a:solidFill>
+                <a:latin typeface="Consolas" pitchFamily="34" charset="0"/>
+                <a:ea typeface="Consolas" pitchFamily="34" charset="-122"/>
+                <a:cs typeface="Consolas" pitchFamily="34" charset="-120"/>
+              </a:rPr>
+              <a:t>  createCheckbox(): Checkbox;</a:t>
+            </a:r>
+            <a:endParaRPr lang="en-US" sz="1400" dirty="0"/>
+          </a:p>
+          <a:p>
+            <a:pPr marL="0" indent="0">
+              <a:lnSpc>
+                <a:spcPct val="100000"/>
+              </a:lnSpc>
+              <a:buNone/>
+            </a:pPr>
+            <a:r>
+              <a:rPr lang="en-US" sz="1400" dirty="0">
+                <a:solidFill>
+                  <a:srgbClr val="1E1E22"/>
+                </a:solidFill>
+                <a:latin typeface="Consolas" pitchFamily="34" charset="0"/>
+                <a:ea typeface="Consolas" pitchFamily="34" charset="-122"/>
+                <a:cs typeface="Consolas" pitchFamily="34" charset="-120"/>
+              </a:rPr>
+              <a:t>}</a:t>
+            </a:r>
+            <a:endParaRPr lang="en-US" sz="1400" dirty="0"/>
+          </a:p>
+          <a:p>
+            <a:pPr marL="0" indent="0">
+              <a:lnSpc>
+                <a:spcPct val="100000"/>
+              </a:lnSpc>
+              <a:buNone/>
+            </a:pPr>
+            <a:r>
+              <a:rPr lang="en-US" sz="1400" dirty="0">
+                <a:solidFill>
+                  <a:srgbClr val="1E1E22"/>
+                </a:solidFill>
+                <a:latin typeface="Consolas" pitchFamily="34" charset="0"/>
+                <a:ea typeface="Consolas" pitchFamily="34" charset="-122"/>
+                <a:cs typeface="Consolas" pitchFamily="34" charset="-120"/>
+              </a:rPr>
+              <a:t>class MacFactory implements UIFactory { /* Mac family */ }</a:t>
+            </a:r>
+            <a:endParaRPr lang="en-US" sz="1400" dirty="0"/>
+          </a:p>
+          <a:p>
+            <a:pPr marL="0" indent="0">
+              <a:lnSpc>
+                <a:spcPct val="100000"/>
+              </a:lnSpc>
+              <a:buNone/>
+            </a:pPr>
+            <a:r>
+              <a:rPr lang="en-US" sz="1400" dirty="0">
+                <a:solidFill>
+                  <a:srgbClr val="1E1E22"/>
+                </a:solidFill>
+                <a:latin typeface="Consolas" pitchFamily="34" charset="0"/>
+                <a:ea typeface="Consolas" pitchFamily="34" charset="-122"/>
+                <a:cs typeface="Consolas" pitchFamily="34" charset="-120"/>
+              </a:rPr>
+              <a:t>class WinFactory implements UIFactory { /* Win family */ }</a:t>
+            </a:r>
+            <a:endParaRPr lang="en-US" sz="1400" dirty="0"/>
+          </a:p>
+          <a:p>
+            <a:pPr marL="0" indent="0">
+              <a:lnSpc>
+                <a:spcPct val="100000"/>
+              </a:lnSpc>
+              <a:buNone/>
+            </a:pPr>
+            <a:r>
+              <a:rPr lang="en-US" sz="1400" dirty="0">
+                <a:solidFill>
+                  <a:srgbClr val="1E1E22"/>
+                </a:solidFill>
+                <a:latin typeface="Consolas" pitchFamily="34" charset="0"/>
+                <a:ea typeface="Consolas" pitchFamily="34" charset="-122"/>
+                <a:cs typeface="Consolas" pitchFamily="34" charset="-120"/>
+              </a:rPr>
+              <a:t> </a:t>
+            </a:r>
+            <a:endParaRPr lang="en-US" sz="1400" dirty="0"/>
+          </a:p>
+          <a:p>
+            <a:pPr marL="0" indent="0">
+              <a:lnSpc>
+                <a:spcPct val="100000"/>
+              </a:lnSpc>
+              <a:buNone/>
+            </a:pPr>
+            <a:r>
+              <a:rPr lang="en-US" sz="1400" b="1" dirty="0">
+                <a:solidFill>
+                  <a:srgbClr val="1E7A34"/>
+                </a:solidFill>
+                <a:latin typeface="Consolas" pitchFamily="34" charset="0"/>
+                <a:ea typeface="Consolas" pitchFamily="34" charset="-122"/>
+                <a:cs typeface="Consolas" pitchFamily="34" charset="-120"/>
+              </a:rPr>
+              <a:t>function renderUI(f: UIFactory) {            // CLIENT</a:t>
+            </a:r>
+            <a:endParaRPr lang="en-US" sz="1400" dirty="0"/>
+          </a:p>
+          <a:p>
+            <a:pPr marL="0" indent="0">
+              <a:lnSpc>
+                <a:spcPct val="100000"/>
+              </a:lnSpc>
+              <a:buNone/>
+            </a:pPr>
+            <a:r>
+              <a:rPr lang="en-US" sz="1400" dirty="0">
+                <a:solidFill>
+                  <a:srgbClr val="1E1E22"/>
+                </a:solidFill>
+                <a:latin typeface="Consolas" pitchFamily="34" charset="0"/>
+                <a:ea typeface="Consolas" pitchFamily="34" charset="-122"/>
+                <a:cs typeface="Consolas" pitchFamily="34" charset="-120"/>
+              </a:rPr>
+              <a:t>  f.createButton().render(); f.createCheckbox().check();</a:t>
+            </a:r>
+            <a:endParaRPr lang="en-US" sz="1400" dirty="0"/>
+          </a:p>
+          <a:p>
+            <a:pPr marL="0" indent="0">
+              <a:lnSpc>
+                <a:spcPct val="100000"/>
+              </a:lnSpc>
+              <a:buNone/>
+            </a:pPr>
+            <a:r>
+              <a:rPr lang="en-US" sz="1400" dirty="0">
+                <a:solidFill>
+                  <a:srgbClr val="1E1E22"/>
+                </a:solidFill>
+                <a:latin typeface="Consolas" pitchFamily="34" charset="0"/>
+                <a:ea typeface="Consolas" pitchFamily="34" charset="-122"/>
+                <a:cs typeface="Consolas" pitchFamily="34" charset="-120"/>
+              </a:rPr>
+              <a:t>}</a:t>
+            </a:r>
+            <a:endParaRPr lang="en-US" sz="1400" dirty="0"/>
+          </a:p>
+        </p:txBody>
+      </p:sp>
+      <p:sp>
+        <p:nvSpPr>
+          <p:cNvPr id="10" name="Text 7"/>
+          <p:cNvSpPr/>
+          <p:nvPr/>
+        </p:nvSpPr>
+        <p:spPr>
+          <a:xfrm>
+            <a:off x="502920" y="5907024"/>
+            <a:ext cx="8138160" cy="603504"/>
+          </a:xfrm>
+          <a:prstGeom prst="rect">
+            <a:avLst/>
+          </a:prstGeom>
+          <a:noFill/>
+          <a:ln/>
+        </p:spPr>
+        <p:txBody>
+          <a:bodyPr wrap="square" rtlCol="0" anchor="t"/>
+          <a:lstStyle/>
+          <a:p>
+            <a:pPr marL="0" indent="0">
+              <a:spcAft>
+                <a:spcPts val="300"/>
+              </a:spcAft>
+              <a:buNone/>
+            </a:pPr>
+            <a:r>
+              <a:rPr lang="en-US" sz="1150" dirty="0">
+                <a:solidFill>
+                  <a:srgbClr val="1A1A1A"/>
+                </a:solidFill>
+                <a:latin typeface="Calibri" pitchFamily="34" charset="0"/>
+                <a:ea typeface="Calibri" pitchFamily="34" charset="-122"/>
+                <a:cs typeface="Calibri" pitchFamily="34" charset="-120"/>
+              </a:rPr>
+              <a:t>Pass MacFactory → full Mac experience; WinFactory → full Win experience. You can</a:t>
+            </a:r>
+            <a:endParaRPr lang="en-US" sz="1150" dirty="0"/>
+          </a:p>
+          <a:p>
+            <a:pPr marL="0" indent="0">
+              <a:spcAft>
+                <a:spcPts val="300"/>
+              </a:spcAft>
+              <a:buNone/>
+            </a:pPr>
+            <a:r>
+              <a:rPr lang="en-US" sz="1150" b="1" dirty="0">
+                <a:solidFill>
+                  <a:srgbClr val="242852"/>
+                </a:solidFill>
+                <a:latin typeface="Calibri" pitchFamily="34" charset="0"/>
+                <a:ea typeface="Calibri" pitchFamily="34" charset="-122"/>
+                <a:cs typeface="Calibri" pitchFamily="34" charset="-120"/>
+              </a:rPr>
+              <a:t>NEVER get a MacButton with a WinCheckbox — the factory builds the whole family.</a:t>
+            </a:r>
+            <a:endParaRPr lang="en-US" sz="1150" dirty="0"/>
+          </a:p>
+        </p:txBody>
+      </p:sp>
+    </p:spTree>
+  </p:cSld>
+  <p:clrMapOvr>
+    <a:masterClrMapping/>
+  </p:clrMapOvr>
+</p:sld>
+</file>
+
+<file path=ppt/slides/slide22.xml><?xml version="1.0" encoding="utf-8"?>
+<p:sld xmlns:a="http://schemas.openxmlformats.org/drawingml/2006/main" xmlns:r="http://schemas.openxmlformats.org/officeDocument/2006/relationships" xmlns:p="http://schemas.openxmlformats.org/presentationml/2006/main">
+  <p:cSld>
+    <p:spTree>
+      <p:nvGrpSpPr>
+        <p:cNvPr id="1" name=""/>
+        <p:cNvGrpSpPr/>
+        <p:nvPr/>
+      </p:nvGrpSpPr>
+      <p:grpSpPr>
+        <a:xfrm>
+          <a:off x="0" y="0"/>
+          <a:ext cx="0" cy="0"/>
+          <a:chOff x="0" y="0"/>
+          <a:chExt cx="0" cy="0"/>
+        </a:xfrm>
+      </p:grpSpPr>
+      <p:sp>
+        <p:nvSpPr>
+          <p:cNvPr id="2" name="Rectangle 1"/>
+          <p:cNvSpPr/>
+          <p:nvPr/>
+        </p:nvSpPr>
+        <p:spPr>
+          <a:xfrm>
+            <a:off x="0" y="0"/>
+            <a:ext cx="9144000" cy="932688"/>
+          </a:xfrm>
+          <a:prstGeom prst="rect">
+            <a:avLst/>
+          </a:prstGeom>
+          <a:solidFill>
+            <a:srgbClr val="23242B"/>
+          </a:solidFill>
+          <a:ln>
+            <a:noFill/>
+          </a:ln>
+          <a:effectLst/>
+        </p:spPr>
+        <p:style>
+          <a:lnRef idx="1">
+            <a:schemeClr val="accent1"/>
+          </a:lnRef>
+          <a:fillRef idx="3">
+            <a:schemeClr val="accent1"/>
+          </a:fillRef>
+          <a:effectRef idx="2">
+            <a:schemeClr val="accent1"/>
+          </a:effectRef>
+          <a:fontRef idx="minor">
+            <a:schemeClr val="lt1"/>
+          </a:fontRef>
+        </p:style>
+        <p:txBody>
+          <a:bodyPr rtlCol="0" anchor="ctr"/>
+          <a:lstStyle/>
+          <a:p>
+            <a:pPr algn="ctr"/>
+            <a:endParaRPr/>
+          </a:p>
+        </p:txBody>
+      </p:sp>
+      <p:sp>
+        <p:nvSpPr>
+          <p:cNvPr id="3" name="Rectangle 2"/>
+          <p:cNvSpPr/>
+          <p:nvPr/>
+        </p:nvSpPr>
+        <p:spPr>
+          <a:xfrm>
+            <a:off x="4114800" y="0"/>
+            <a:ext cx="5029200" cy="932688"/>
+          </a:xfrm>
+          <a:prstGeom prst="rect">
+            <a:avLst/>
+          </a:prstGeom>
+          <a:solidFill>
+            <a:srgbClr val="4A4C57"/>
+          </a:solidFill>
+          <a:ln>
+            <a:noFill/>
+          </a:ln>
+          <a:effectLst/>
+        </p:spPr>
+        <p:style>
+          <a:lnRef idx="1">
+            <a:schemeClr val="accent1"/>
+          </a:lnRef>
+          <a:fillRef idx="3">
+            <a:schemeClr val="accent1"/>
+          </a:fillRef>
+          <a:effectRef idx="2">
+            <a:schemeClr val="accent1"/>
+          </a:effectRef>
+          <a:fontRef idx="minor">
+            <a:schemeClr val="lt1"/>
+          </a:fontRef>
+        </p:style>
+        <p:txBody>
+          <a:bodyPr rtlCol="0" anchor="ctr"/>
+          <a:lstStyle/>
+          <a:p>
+            <a:pPr algn="ctr"/>
+            <a:endParaRPr/>
+          </a:p>
+        </p:txBody>
+      </p:sp>
+      <p:pic>
+        <p:nvPicPr>
+          <p:cNvPr id="4" name="Picture 3" descr="image.png"/>
+          <p:cNvPicPr>
+            <a:picLocks noChangeAspect="1"/>
+          </p:cNvPicPr>
+          <p:nvPr/>
+        </p:nvPicPr>
+        <p:blipFill>
+          <a:blip r:embed="rId2"/>
+          <a:stretch>
+            <a:fillRect/>
+          </a:stretch>
+        </p:blipFill>
+        <p:spPr>
+          <a:xfrm>
+            <a:off x="8211312" y="118872"/>
+            <a:ext cx="694944" cy="694944"/>
+          </a:xfrm>
+          <a:prstGeom prst="rect">
+            <a:avLst/>
+          </a:prstGeom>
+        </p:spPr>
+      </p:pic>
+      <p:sp>
+        <p:nvSpPr>
+          <p:cNvPr id="5" name="TextBox 4"/>
+          <p:cNvSpPr txBox="1"/>
+          <p:nvPr/>
+        </p:nvSpPr>
+        <p:spPr>
+          <a:xfrm>
+            <a:off x="502920" y="0"/>
+            <a:ext cx="7406640" cy="932688"/>
+          </a:xfrm>
+          <a:prstGeom prst="rect">
+            <a:avLst/>
+          </a:prstGeom>
+          <a:noFill/>
+        </p:spPr>
+        <p:txBody>
+          <a:bodyPr wrap="square" lIns="45720" tIns="18288" rIns="45720" bIns="18288" anchor="ctr">
+            <a:spAutoFit/>
+          </a:bodyPr>
+          <a:lstStyle/>
+          <a:p>
+            <a:pPr algn="l"/>
+            <a:r>
+              <a:rPr sz="2300" b="0" i="0">
+                <a:solidFill>
+                  <a:srgbClr val="FFFFFF"/>
+                </a:solidFill>
+                <a:latin typeface="Calibri"/>
+              </a:rPr>
+              <a:t>Abstract Factory — a matching family</a:t>
+            </a:r>
+          </a:p>
+          <a:p>
+            <a:pPr algn="l"/>
+            <a:r>
+              <a:rPr sz="1100" b="0" i="1">
+                <a:solidFill>
+                  <a:srgbClr val="CADCFC"/>
+                </a:solidFill>
+                <a:latin typeface="Calibri"/>
+              </a:rPr>
+              <a:t>pick a style once, every piece comes out matching</a:t>
+            </a:r>
+          </a:p>
+        </p:txBody>
+      </p:sp>
+      <p:sp>
+        <p:nvSpPr>
+          <p:cNvPr id="6" name="TextBox 5"/>
+          <p:cNvSpPr txBox="1"/>
+          <p:nvPr/>
+        </p:nvSpPr>
+        <p:spPr>
+          <a:xfrm>
+            <a:off x="502920" y="6547104"/>
+            <a:ext cx="5943600" cy="237744"/>
+          </a:xfrm>
+          <a:prstGeom prst="rect">
+            <a:avLst/>
+          </a:prstGeom>
+          <a:noFill/>
+        </p:spPr>
+        <p:txBody>
+          <a:bodyPr wrap="square" lIns="45720" tIns="18288" rIns="45720" bIns="18288" anchor="ctr">
+            <a:spAutoFit/>
+          </a:bodyPr>
+          <a:lstStyle/>
+          <a:p>
+            <a:pPr algn="l"/>
+            <a:r>
+              <a:rPr sz="800" b="0" i="0">
+                <a:solidFill>
+                  <a:srgbClr val="9A9CA3"/>
+                </a:solidFill>
+                <a:latin typeface="Calibri"/>
+              </a:rPr>
+              <a:t>CSC 4273   ·   Software Architecture &amp; Design Patterns   ·   AIUB</a:t>
+            </a:r>
+          </a:p>
+        </p:txBody>
+      </p:sp>
+      <p:sp>
+        <p:nvSpPr>
+          <p:cNvPr id="7" name="TextBox 6"/>
+          <p:cNvSpPr txBox="1"/>
+          <p:nvPr/>
+        </p:nvSpPr>
+        <p:spPr>
+          <a:xfrm>
+            <a:off x="7132320" y="6547104"/>
+            <a:ext cx="1508760" cy="237744"/>
+          </a:xfrm>
+          <a:prstGeom prst="rect">
+            <a:avLst/>
+          </a:prstGeom>
+          <a:noFill/>
+        </p:spPr>
+        <p:txBody>
+          <a:bodyPr wrap="square" lIns="45720" tIns="18288" rIns="45720" bIns="18288" anchor="ctr">
+            <a:spAutoFit/>
+          </a:bodyPr>
+          <a:lstStyle/>
+          <a:p>
+            <a:pPr algn="r"/>
+            <a:r>
+              <a:rPr sz="800" b="0" i="0">
+                <a:solidFill>
+                  <a:srgbClr val="9A9CA3"/>
+                </a:solidFill>
+                <a:latin typeface="Calibri"/>
+              </a:rPr>
+              <a:t>Week 3</a:t>
+            </a:r>
+          </a:p>
+        </p:txBody>
+      </p:sp>
+      <p:sp>
+        <p:nvSpPr>
+          <p:cNvPr id="8" name="Rounded Rectangle 7"/>
+          <p:cNvSpPr/>
+          <p:nvPr/>
+        </p:nvSpPr>
+        <p:spPr>
+          <a:xfrm>
+            <a:off x="548640" y="1828800"/>
+            <a:ext cx="2560320" cy="777240"/>
+          </a:xfrm>
+          <a:prstGeom prst="roundRect">
+            <a:avLst>
+              <a:gd name="adj" fmla="val 8000"/>
+            </a:avLst>
+          </a:prstGeom>
+          <a:solidFill>
+            <a:srgbClr val="E1F5EE"/>
+          </a:solidFill>
+          <a:ln w="28575">
+            <a:solidFill>
+              <a:srgbClr val="0F6E56"/>
+            </a:solidFill>
+          </a:ln>
+          <a:effectLst/>
+        </p:spPr>
+        <p:style>
+          <a:lnRef idx="1">
+            <a:schemeClr val="accent1"/>
+          </a:lnRef>
+          <a:fillRef idx="3">
+            <a:schemeClr val="accent1"/>
+          </a:fillRef>
+          <a:effectRef idx="2">
+            <a:schemeClr val="accent1"/>
+          </a:effectRef>
+          <a:fontRef idx="minor">
+            <a:schemeClr val="lt1"/>
+          </a:fontRef>
+        </p:style>
+        <p:txBody>
+          <a:bodyPr wrap="square" lIns="45720" tIns="18288" rIns="45720" bIns="18288" rtlCol="0" anchor="ctr"/>
+          <a:lstStyle/>
+          <a:p>
+            <a:pPr algn="ctr"/>
+            <a:r>
+              <a:rPr sz="1300" b="1" i="0">
+                <a:solidFill>
+                  <a:srgbClr val="085041"/>
+                </a:solidFill>
+                <a:latin typeface="Calibri"/>
+              </a:rPr>
+              <a:t>Modern factory</a:t>
+            </a:r>
+          </a:p>
+          <a:p>
+            <a:pPr algn="ctr"/>
+            <a:r>
+              <a:rPr sz="1000" b="0" i="1">
+                <a:solidFill>
+                  <a:srgbClr val="0F6E56"/>
+                </a:solidFill>
+                <a:latin typeface="Calibri"/>
+              </a:rPr>
+              <a:t>makes a modern set</a:t>
+            </a:r>
+          </a:p>
+        </p:txBody>
+      </p:sp>
+      <p:sp>
+        <p:nvSpPr>
+          <p:cNvPr id="9" name="Rounded Rectangle 8"/>
+          <p:cNvSpPr/>
+          <p:nvPr/>
+        </p:nvSpPr>
+        <p:spPr>
+          <a:xfrm>
+            <a:off x="548640" y="3931920"/>
+            <a:ext cx="2560320" cy="777240"/>
+          </a:xfrm>
+          <a:prstGeom prst="roundRect">
+            <a:avLst>
+              <a:gd name="adj" fmla="val 8000"/>
+            </a:avLst>
+          </a:prstGeom>
+          <a:solidFill>
+            <a:srgbClr val="E1F5EE"/>
+          </a:solidFill>
+          <a:ln w="28575">
+            <a:solidFill>
+              <a:srgbClr val="0F6E56"/>
+            </a:solidFill>
+          </a:ln>
+          <a:effectLst/>
+        </p:spPr>
+        <p:style>
+          <a:lnRef idx="1">
+            <a:schemeClr val="accent1"/>
+          </a:lnRef>
+          <a:fillRef idx="3">
+            <a:schemeClr val="accent1"/>
+          </a:fillRef>
+          <a:effectRef idx="2">
+            <a:schemeClr val="accent1"/>
+          </a:effectRef>
+          <a:fontRef idx="minor">
+            <a:schemeClr val="lt1"/>
+          </a:fontRef>
+        </p:style>
+        <p:txBody>
+          <a:bodyPr wrap="square" lIns="45720" tIns="18288" rIns="45720" bIns="18288" rtlCol="0" anchor="ctr"/>
+          <a:lstStyle/>
+          <a:p>
+            <a:pPr algn="ctr"/>
+            <a:r>
+              <a:rPr sz="1300" b="1" i="0">
+                <a:solidFill>
+                  <a:srgbClr val="085041"/>
+                </a:solidFill>
+                <a:latin typeface="Calibri"/>
+              </a:rPr>
+              <a:t>Victorian factory</a:t>
+            </a:r>
+          </a:p>
+          <a:p>
+            <a:pPr algn="ctr"/>
+            <a:r>
+              <a:rPr sz="1000" b="0" i="1">
+                <a:solidFill>
+                  <a:srgbClr val="0F6E56"/>
+                </a:solidFill>
+                <a:latin typeface="Calibri"/>
+              </a:rPr>
+              <a:t>makes a victorian set</a:t>
+            </a:r>
+          </a:p>
+        </p:txBody>
+      </p:sp>
+      <p:sp>
+        <p:nvSpPr>
+          <p:cNvPr id="10" name="Rounded Rectangle 9"/>
+          <p:cNvSpPr/>
+          <p:nvPr/>
+        </p:nvSpPr>
+        <p:spPr>
+          <a:xfrm>
+            <a:off x="4114800" y="1417320"/>
+            <a:ext cx="4206240" cy="1600200"/>
+          </a:xfrm>
+          <a:prstGeom prst="roundRect">
+            <a:avLst>
+              <a:gd name="adj" fmla="val 5000"/>
+            </a:avLst>
+          </a:prstGeom>
+          <a:noFill/>
+          <a:ln w="12700">
+            <a:solidFill>
+              <a:srgbClr val="9AA0A6"/>
+            </a:solidFill>
+            <a:prstDash val="dash"/>
+          </a:ln>
+          <a:effectLst/>
+        </p:spPr>
+        <p:style>
+          <a:lnRef idx="1">
+            <a:schemeClr val="accent1"/>
+          </a:lnRef>
+          <a:fillRef idx="3">
+            <a:schemeClr val="accent1"/>
+          </a:fillRef>
+          <a:effectRef idx="2">
+            <a:schemeClr val="accent1"/>
+          </a:effectRef>
+          <a:fontRef idx="minor">
+            <a:schemeClr val="lt1"/>
+          </a:fontRef>
+        </p:style>
+        <p:txBody>
+          <a:bodyPr rtlCol="0" anchor="ctr"/>
+          <a:lstStyle/>
+          <a:p>
+            <a:pPr algn="ctr"/>
+            <a:endParaRPr/>
+          </a:p>
+        </p:txBody>
+      </p:sp>
+      <p:sp>
+        <p:nvSpPr>
+          <p:cNvPr id="11" name="TextBox 10"/>
+          <p:cNvSpPr txBox="1"/>
+          <p:nvPr/>
+        </p:nvSpPr>
+        <p:spPr>
+          <a:xfrm>
+            <a:off x="4224528" y="1463040"/>
+            <a:ext cx="3986783" cy="274320"/>
+          </a:xfrm>
+          <a:prstGeom prst="rect">
+            <a:avLst/>
+          </a:prstGeom>
+          <a:noFill/>
+        </p:spPr>
+        <p:txBody>
+          <a:bodyPr wrap="square" lIns="45720" tIns="18288" rIns="45720" bIns="18288" anchor="ctr">
+            <a:spAutoFit/>
+          </a:bodyPr>
+          <a:lstStyle/>
+          <a:p>
+            <a:pPr algn="l"/>
+            <a:r>
+              <a:rPr sz="1100" b="0" i="1">
+                <a:solidFill>
+                  <a:srgbClr val="6A6C72"/>
+                </a:solidFill>
+                <a:latin typeface="Calibri"/>
+              </a:rPr>
+              <a:t>Modern family</a:t>
+            </a:r>
+          </a:p>
+        </p:txBody>
+      </p:sp>
+      <p:sp>
+        <p:nvSpPr>
+          <p:cNvPr id="12" name="Rounded Rectangle 11"/>
+          <p:cNvSpPr/>
+          <p:nvPr/>
+        </p:nvSpPr>
+        <p:spPr>
+          <a:xfrm>
+            <a:off x="4343400" y="1920240"/>
+            <a:ext cx="1828800" cy="868680"/>
+          </a:xfrm>
+          <a:prstGeom prst="roundRect">
+            <a:avLst>
+              <a:gd name="adj" fmla="val 8000"/>
+            </a:avLst>
+          </a:prstGeom>
+          <a:solidFill>
+            <a:srgbClr val="EEEDFE"/>
+          </a:solidFill>
+          <a:ln w="12700">
+            <a:solidFill>
+              <a:srgbClr val="534AB7"/>
+            </a:solidFill>
+          </a:ln>
+          <a:effectLst/>
+        </p:spPr>
+        <p:style>
+          <a:lnRef idx="1">
+            <a:schemeClr val="accent1"/>
+          </a:lnRef>
+          <a:fillRef idx="3">
+            <a:schemeClr val="accent1"/>
+          </a:fillRef>
+          <a:effectRef idx="2">
+            <a:schemeClr val="accent1"/>
+          </a:effectRef>
+          <a:fontRef idx="minor">
+            <a:schemeClr val="lt1"/>
+          </a:fontRef>
+        </p:style>
+        <p:txBody>
+          <a:bodyPr wrap="square" lIns="45720" tIns="18288" rIns="45720" bIns="18288" rtlCol="0" anchor="ctr"/>
+          <a:lstStyle/>
+          <a:p>
+            <a:pPr algn="ctr"/>
+            <a:r>
+              <a:rPr sz="1300" b="1" i="0">
+                <a:solidFill>
+                  <a:srgbClr val="3C3489"/>
+                </a:solidFill>
+                <a:latin typeface="Calibri"/>
+              </a:rPr>
+              <a:t>Modern chair</a:t>
+            </a:r>
+          </a:p>
+        </p:txBody>
+      </p:sp>
+      <p:sp>
+        <p:nvSpPr>
+          <p:cNvPr id="13" name="Rounded Rectangle 12"/>
+          <p:cNvSpPr/>
+          <p:nvPr/>
+        </p:nvSpPr>
+        <p:spPr>
+          <a:xfrm>
+            <a:off x="6355080" y="1920240"/>
+            <a:ext cx="1828800" cy="868680"/>
+          </a:xfrm>
+          <a:prstGeom prst="roundRect">
+            <a:avLst>
+              <a:gd name="adj" fmla="val 8000"/>
+            </a:avLst>
+          </a:prstGeom>
+          <a:solidFill>
+            <a:srgbClr val="EEEDFE"/>
+          </a:solidFill>
+          <a:ln w="12700">
+            <a:solidFill>
+              <a:srgbClr val="534AB7"/>
+            </a:solidFill>
+          </a:ln>
+          <a:effectLst/>
+        </p:spPr>
+        <p:style>
+          <a:lnRef idx="1">
+            <a:schemeClr val="accent1"/>
+          </a:lnRef>
+          <a:fillRef idx="3">
+            <a:schemeClr val="accent1"/>
+          </a:fillRef>
+          <a:effectRef idx="2">
+            <a:schemeClr val="accent1"/>
+          </a:effectRef>
+          <a:fontRef idx="minor">
+            <a:schemeClr val="lt1"/>
+          </a:fontRef>
+        </p:style>
+        <p:txBody>
+          <a:bodyPr wrap="square" lIns="45720" tIns="18288" rIns="45720" bIns="18288" rtlCol="0" anchor="ctr"/>
+          <a:lstStyle/>
+          <a:p>
+            <a:pPr algn="ctr"/>
+            <a:r>
+              <a:rPr sz="1300" b="1" i="0">
+                <a:solidFill>
+                  <a:srgbClr val="3C3489"/>
+                </a:solidFill>
+                <a:latin typeface="Calibri"/>
+              </a:rPr>
+              <a:t>Modern sofa</a:t>
+            </a:r>
+          </a:p>
+        </p:txBody>
+      </p:sp>
+      <p:sp>
+        <p:nvSpPr>
+          <p:cNvPr id="14" name="Rounded Rectangle 13"/>
+          <p:cNvSpPr/>
+          <p:nvPr/>
+        </p:nvSpPr>
+        <p:spPr>
+          <a:xfrm>
+            <a:off x="4114800" y="3520440"/>
+            <a:ext cx="4206240" cy="1600200"/>
+          </a:xfrm>
+          <a:prstGeom prst="roundRect">
+            <a:avLst>
+              <a:gd name="adj" fmla="val 5000"/>
+            </a:avLst>
+          </a:prstGeom>
+          <a:noFill/>
+          <a:ln w="12700">
+            <a:solidFill>
+              <a:srgbClr val="9AA0A6"/>
+            </a:solidFill>
+            <a:prstDash val="dash"/>
+          </a:ln>
+          <a:effectLst/>
+        </p:spPr>
+        <p:style>
+          <a:lnRef idx="1">
+            <a:schemeClr val="accent1"/>
+          </a:lnRef>
+          <a:fillRef idx="3">
+            <a:schemeClr val="accent1"/>
+          </a:fillRef>
+          <a:effectRef idx="2">
+            <a:schemeClr val="accent1"/>
+          </a:effectRef>
+          <a:fontRef idx="minor">
+            <a:schemeClr val="lt1"/>
+          </a:fontRef>
+        </p:style>
+        <p:txBody>
+          <a:bodyPr rtlCol="0" anchor="ctr"/>
+          <a:lstStyle/>
+          <a:p>
+            <a:pPr algn="ctr"/>
+            <a:endParaRPr/>
+          </a:p>
+        </p:txBody>
+      </p:sp>
+      <p:sp>
+        <p:nvSpPr>
+          <p:cNvPr id="15" name="TextBox 14"/>
+          <p:cNvSpPr txBox="1"/>
+          <p:nvPr/>
+        </p:nvSpPr>
+        <p:spPr>
+          <a:xfrm>
+            <a:off x="4224528" y="3566160"/>
+            <a:ext cx="3986783" cy="274320"/>
+          </a:xfrm>
+          <a:prstGeom prst="rect">
+            <a:avLst/>
+          </a:prstGeom>
+          <a:noFill/>
+        </p:spPr>
+        <p:txBody>
+          <a:bodyPr wrap="square" lIns="45720" tIns="18288" rIns="45720" bIns="18288" anchor="ctr">
+            <a:spAutoFit/>
+          </a:bodyPr>
+          <a:lstStyle/>
+          <a:p>
+            <a:pPr algn="l"/>
+            <a:r>
+              <a:rPr sz="1100" b="0" i="1">
+                <a:solidFill>
+                  <a:srgbClr val="6A6C72"/>
+                </a:solidFill>
+                <a:latin typeface="Calibri"/>
+              </a:rPr>
+              <a:t>Victorian family</a:t>
+            </a:r>
+          </a:p>
+        </p:txBody>
+      </p:sp>
+      <p:sp>
+        <p:nvSpPr>
+          <p:cNvPr id="16" name="Rounded Rectangle 15"/>
+          <p:cNvSpPr/>
+          <p:nvPr/>
+        </p:nvSpPr>
+        <p:spPr>
+          <a:xfrm>
+            <a:off x="4343400" y="4023360"/>
+            <a:ext cx="1828800" cy="868680"/>
+          </a:xfrm>
+          <a:prstGeom prst="roundRect">
+            <a:avLst>
+              <a:gd name="adj" fmla="val 8000"/>
+            </a:avLst>
+          </a:prstGeom>
+          <a:solidFill>
+            <a:srgbClr val="FAECE7"/>
+          </a:solidFill>
+          <a:ln w="12700">
+            <a:solidFill>
+              <a:srgbClr val="993C1D"/>
+            </a:solidFill>
+          </a:ln>
+          <a:effectLst/>
+        </p:spPr>
+        <p:style>
+          <a:lnRef idx="1">
+            <a:schemeClr val="accent1"/>
+          </a:lnRef>
+          <a:fillRef idx="3">
+            <a:schemeClr val="accent1"/>
+          </a:fillRef>
+          <a:effectRef idx="2">
+            <a:schemeClr val="accent1"/>
+          </a:effectRef>
+          <a:fontRef idx="minor">
+            <a:schemeClr val="lt1"/>
+          </a:fontRef>
+        </p:style>
+        <p:txBody>
+          <a:bodyPr wrap="square" lIns="45720" tIns="18288" rIns="45720" bIns="18288" rtlCol="0" anchor="ctr"/>
+          <a:lstStyle/>
+          <a:p>
+            <a:pPr algn="ctr"/>
+            <a:r>
+              <a:rPr sz="1300" b="1" i="0">
+                <a:solidFill>
+                  <a:srgbClr val="712B13"/>
+                </a:solidFill>
+                <a:latin typeface="Calibri"/>
+              </a:rPr>
+              <a:t>Victorian chair</a:t>
+            </a:r>
+          </a:p>
+        </p:txBody>
+      </p:sp>
+      <p:sp>
+        <p:nvSpPr>
+          <p:cNvPr id="17" name="Rounded Rectangle 16"/>
+          <p:cNvSpPr/>
+          <p:nvPr/>
+        </p:nvSpPr>
+        <p:spPr>
+          <a:xfrm>
+            <a:off x="6355080" y="4023360"/>
+            <a:ext cx="1828800" cy="868680"/>
+          </a:xfrm>
+          <a:prstGeom prst="roundRect">
+            <a:avLst>
+              <a:gd name="adj" fmla="val 8000"/>
+            </a:avLst>
+          </a:prstGeom>
+          <a:solidFill>
+            <a:srgbClr val="FAECE7"/>
+          </a:solidFill>
+          <a:ln w="12700">
+            <a:solidFill>
+              <a:srgbClr val="993C1D"/>
+            </a:solidFill>
+          </a:ln>
+          <a:effectLst/>
+        </p:spPr>
+        <p:style>
+          <a:lnRef idx="1">
+            <a:schemeClr val="accent1"/>
+          </a:lnRef>
+          <a:fillRef idx="3">
+            <a:schemeClr val="accent1"/>
+          </a:fillRef>
+          <a:effectRef idx="2">
+            <a:schemeClr val="accent1"/>
+          </a:effectRef>
+          <a:fontRef idx="minor">
+            <a:schemeClr val="lt1"/>
+          </a:fontRef>
+        </p:style>
+        <p:txBody>
+          <a:bodyPr wrap="square" lIns="45720" tIns="18288" rIns="45720" bIns="18288" rtlCol="0" anchor="ctr"/>
+          <a:lstStyle/>
+          <a:p>
+            <a:pPr algn="ctr"/>
+            <a:r>
+              <a:rPr sz="1300" b="1" i="0">
+                <a:solidFill>
+                  <a:srgbClr val="712B13"/>
+                </a:solidFill>
+                <a:latin typeface="Calibri"/>
+              </a:rPr>
+              <a:t>Victorian sofa</a:t>
+            </a:r>
+          </a:p>
+        </p:txBody>
+      </p:sp>
+      <p:cxnSp>
+        <p:nvCxnSpPr>
+          <p:cNvPr id="18" name="Connector 17"/>
+          <p:cNvCxnSpPr/>
+          <p:nvPr/>
+        </p:nvCxnSpPr>
+        <p:spPr>
+          <a:xfrm>
+            <a:off x="3108960" y="2212848"/>
+            <a:ext cx="1005840" cy="0"/>
+          </a:xfrm>
+          <a:prstGeom prst="line">
+            <a:avLst/>
+          </a:prstGeom>
+          <a:ln w="15875">
+            <a:solidFill>
+              <a:srgbClr val="5A5C66"/>
+            </a:solidFill>
+            <a:tailEnd type="triangle" w="med" len="med"/>
+          </a:ln>
+          <a:effectLst/>
+        </p:spPr>
+        <p:style>
+          <a:lnRef idx="2">
+            <a:schemeClr val="accent1"/>
+          </a:lnRef>
+          <a:fillRef idx="0">
+            <a:schemeClr val="accent1"/>
+          </a:fillRef>
+          <a:effectRef idx="1">
+            <a:schemeClr val="accent1"/>
+          </a:effectRef>
+          <a:fontRef idx="minor">
+            <a:schemeClr val="tx1"/>
+          </a:fontRef>
+        </p:style>
+      </p:cxnSp>
+      <p:sp>
+        <p:nvSpPr>
+          <p:cNvPr id="19" name="TextBox 18"/>
+          <p:cNvSpPr txBox="1"/>
+          <p:nvPr/>
+        </p:nvSpPr>
+        <p:spPr>
+          <a:xfrm>
+            <a:off x="3063240" y="1956816"/>
+            <a:ext cx="1097280" cy="237744"/>
+          </a:xfrm>
+          <a:prstGeom prst="rect">
+            <a:avLst/>
+          </a:prstGeom>
+          <a:noFill/>
+        </p:spPr>
+        <p:txBody>
+          <a:bodyPr wrap="square" lIns="45720" tIns="18288" rIns="45720" bIns="18288" anchor="ctr">
+            <a:spAutoFit/>
+          </a:bodyPr>
+          <a:lstStyle/>
+          <a:p>
+            <a:pPr algn="ctr"/>
+            <a:r>
+              <a:rPr sz="950" b="0" i="1">
+                <a:solidFill>
+                  <a:srgbClr val="5A5C66"/>
+                </a:solidFill>
+                <a:latin typeface="Calibri"/>
+              </a:rPr>
+              <a:t>creates</a:t>
+            </a:r>
+          </a:p>
+        </p:txBody>
+      </p:sp>
+      <p:cxnSp>
+        <p:nvCxnSpPr>
+          <p:cNvPr id="20" name="Connector 19"/>
+          <p:cNvCxnSpPr/>
+          <p:nvPr/>
+        </p:nvCxnSpPr>
+        <p:spPr>
+          <a:xfrm>
+            <a:off x="3108960" y="4315968"/>
+            <a:ext cx="1005840" cy="0"/>
+          </a:xfrm>
+          <a:prstGeom prst="line">
+            <a:avLst/>
+          </a:prstGeom>
+          <a:ln w="15875">
+            <a:solidFill>
+              <a:srgbClr val="5A5C66"/>
+            </a:solidFill>
+            <a:tailEnd type="triangle" w="med" len="med"/>
+          </a:ln>
+          <a:effectLst/>
+        </p:spPr>
+        <p:style>
+          <a:lnRef idx="2">
+            <a:schemeClr val="accent1"/>
+          </a:lnRef>
+          <a:fillRef idx="0">
+            <a:schemeClr val="accent1"/>
+          </a:fillRef>
+          <a:effectRef idx="1">
+            <a:schemeClr val="accent1"/>
+          </a:effectRef>
+          <a:fontRef idx="minor">
+            <a:schemeClr val="tx1"/>
+          </a:fontRef>
+        </p:style>
+      </p:cxnSp>
+      <p:sp>
+        <p:nvSpPr>
+          <p:cNvPr id="21" name="TextBox 20"/>
+          <p:cNvSpPr txBox="1"/>
+          <p:nvPr/>
+        </p:nvSpPr>
+        <p:spPr>
+          <a:xfrm>
+            <a:off x="3063240" y="4059936"/>
+            <a:ext cx="1097280" cy="237744"/>
+          </a:xfrm>
+          <a:prstGeom prst="rect">
+            <a:avLst/>
+          </a:prstGeom>
+          <a:noFill/>
+        </p:spPr>
+        <p:txBody>
+          <a:bodyPr wrap="square" lIns="45720" tIns="18288" rIns="45720" bIns="18288" anchor="ctr">
+            <a:spAutoFit/>
+          </a:bodyPr>
+          <a:lstStyle/>
+          <a:p>
+            <a:pPr algn="ctr"/>
+            <a:r>
+              <a:rPr sz="950" b="0" i="1">
+                <a:solidFill>
+                  <a:srgbClr val="5A5C66"/>
+                </a:solidFill>
+                <a:latin typeface="Calibri"/>
+              </a:rPr>
+              <a:t>creates</a:t>
+            </a:r>
+          </a:p>
+        </p:txBody>
+      </p:sp>
+      <p:sp>
+        <p:nvSpPr>
+          <p:cNvPr id="22" name="TextBox 21"/>
+          <p:cNvSpPr txBox="1"/>
+          <p:nvPr/>
+        </p:nvSpPr>
+        <p:spPr>
+          <a:xfrm>
+            <a:off x="1828800" y="5897880"/>
+            <a:ext cx="5486400" cy="237744"/>
+          </a:xfrm>
+          <a:prstGeom prst="rect">
+            <a:avLst/>
+          </a:prstGeom>
+          <a:noFill/>
+        </p:spPr>
+        <p:txBody>
+          <a:bodyPr wrap="square" lIns="45720" tIns="18288" rIns="45720" bIns="18288" anchor="ctr">
+            <a:spAutoFit/>
+          </a:bodyPr>
+          <a:lstStyle/>
+          <a:p>
+            <a:pPr algn="ctr"/>
+            <a:r>
+              <a:rPr sz="950" b="0" i="1">
+                <a:solidFill>
+                  <a:srgbClr val="5A5C66"/>
+                </a:solidFill>
+                <a:latin typeface="Calibri"/>
+              </a:rPr>
+              <a:t>one factory makes a matching set — never mix a modern chair with a victorian sofa</a:t>
+            </a:r>
+          </a:p>
+        </p:txBody>
+      </p:sp>
+    </p:spTree>
+  </p:cSld>
+  <p:clrMapOvr>
+    <a:masterClrMapping/>
+  </p:clrMapOvr>
+</p:sld>
+</file>
+
+<file path=ppt/slides/slide23.xml><?xml version="1.0" encoding="utf-8"?>
+<p:sld xmlns:a="http://schemas.openxmlformats.org/drawingml/2006/main" xmlns:r="http://schemas.openxmlformats.org/officeDocument/2006/relationships" xmlns:p="http://schemas.openxmlformats.org/presentationml/2006/main">
   <p:cSld name="Slide 20">
     <p:bg>
       <p:bgPr>
@@ -11057,7 +13637,7 @@
 </p:sld>
 </file>
 
-<file path=ppt/slides/slide21.xml><?xml version="1.0" encoding="utf-8"?>
+<file path=ppt/slides/slide24.xml><?xml version="1.0" encoding="utf-8"?>
 <p:sld xmlns:a="http://schemas.openxmlformats.org/drawingml/2006/main" xmlns:r="http://schemas.openxmlformats.org/officeDocument/2006/relationships" xmlns:p="http://schemas.openxmlformats.org/presentationml/2006/main">
   <p:cSld name="Slide 21">
     <p:bg>
@@ -11609,7 +14189,26 @@
                 <a:ea typeface="Consolas" pitchFamily="34" charset="-122"/>
                 <a:cs typeface="Consolas" pitchFamily="34" charset="-120"/>
               </a:rPr>
-              <a:t>    const s = this.factory.createScorer(), f = this.factory.createFilter();</a:t>
+              <a:t>    const s = this.factory.createScorer(), </a:t>
+            </a:r>
+          </a:p>
+          <a:p>
+            <a:pPr marL="0" indent="0">
+              <a:lnSpc>
+                <a:spcPct val="100000"/>
+              </a:lnSpc>
+              <a:buNone/>
+            </a:pPr>
+            <a:r>
+              <a:rPr lang="en-US" sz="1400" dirty="0">
+                <a:solidFill>
+                  <a:srgbClr val="1E1E22"/>
+                </a:solidFill>
+                <a:latin typeface="Consolas" pitchFamily="34" charset="0"/>
+                <a:ea typeface="Consolas" pitchFamily="34" charset="-122"/>
+                <a:cs typeface="Consolas" pitchFamily="34" charset="-120"/>
+              </a:rPr>
+              <a:t>    Const f = this.factory.createFilter();</a:t>
             </a:r>
             <a:endParaRPr lang="en-US" sz="1400" dirty="0"/>
           </a:p>
@@ -11745,7 +14344,7 @@
 </p:sld>
 </file>
 
-<file path=ppt/slides/slide22.xml><?xml version="1.0" encoding="utf-8"?>
+<file path=ppt/slides/slide25.xml><?xml version="1.0" encoding="utf-8"?>
 <p:sld xmlns:a="http://schemas.openxmlformats.org/drawingml/2006/main" xmlns:r="http://schemas.openxmlformats.org/officeDocument/2006/relationships" xmlns:p="http://schemas.openxmlformats.org/presentationml/2006/main">
   <p:cSld name="Slide 22">
     <p:bg>
@@ -12261,17 +14860,12 @@
               </a:rPr>
               <a:t>Positional args are unreadable; adding an optional field changes the signature for all</a:t>
             </a:r>
-            <a:endParaRPr lang="en-US" sz="1200" dirty="0"/>
-          </a:p>
-          <a:p>
-            <a:pPr marL="0" indent="0">
-              <a:spcAft>
-                <a:spcPts val="300"/>
-              </a:spcAft>
-              <a:buNone/>
-            </a:pPr>
-            <a:r>
-              <a:rPr lang="en-US" sz="1200" b="1" dirty="0">
+            <a:r>
+              <a:rPr lang="en-US" sz="1200" dirty="0"/>
+              <a:t> </a:t>
+            </a:r>
+            <a:r>
+              <a:rPr lang="en-US" sz="1200" dirty="0">
                 <a:solidFill>
                   <a:srgbClr val="242852"/>
                 </a:solidFill>
@@ -12279,7 +14873,18 @@
                 <a:ea typeface="Calibri" pitchFamily="34" charset="-122"/>
                 <a:cs typeface="Calibri" pitchFamily="34" charset="-120"/>
               </a:rPr>
-              <a:t>callers; swap arguments 7 and 8 → a silent logic bug with no compile error.</a:t>
+              <a:t>callers</a:t>
+            </a:r>
+            <a:r>
+              <a:rPr lang="en-US" sz="1200" b="1" dirty="0">
+                <a:solidFill>
+                  <a:srgbClr val="242852"/>
+                </a:solidFill>
+                <a:latin typeface="Calibri" pitchFamily="34" charset="0"/>
+                <a:ea typeface="Calibri" pitchFamily="34" charset="-122"/>
+                <a:cs typeface="Calibri" pitchFamily="34" charset="-120"/>
+              </a:rPr>
+              <a:t>; swap arguments 7 and 8 → a silent logic bug with no compile error.</a:t>
             </a:r>
             <a:endParaRPr lang="en-US" sz="1200" dirty="0"/>
           </a:p>
@@ -12293,7 +14898,884 @@
 </p:sld>
 </file>
 
-<file path=ppt/slides/slide23.xml><?xml version="1.0" encoding="utf-8"?>
+<file path=ppt/slides/slide26.xml><?xml version="1.0" encoding="utf-8"?>
+<p:sld xmlns:a="http://schemas.openxmlformats.org/drawingml/2006/main" xmlns:r="http://schemas.openxmlformats.org/officeDocument/2006/relationships" xmlns:p="http://schemas.openxmlformats.org/presentationml/2006/main">
+  <p:cSld>
+    <p:spTree>
+      <p:nvGrpSpPr>
+        <p:cNvPr id="1" name=""/>
+        <p:cNvGrpSpPr/>
+        <p:nvPr/>
+      </p:nvGrpSpPr>
+      <p:grpSpPr>
+        <a:xfrm>
+          <a:off x="0" y="0"/>
+          <a:ext cx="0" cy="0"/>
+          <a:chOff x="0" y="0"/>
+          <a:chExt cx="0" cy="0"/>
+        </a:xfrm>
+      </p:grpSpPr>
+      <p:sp>
+        <p:nvSpPr>
+          <p:cNvPr id="2" name="Rectangle 1"/>
+          <p:cNvSpPr/>
+          <p:nvPr/>
+        </p:nvSpPr>
+        <p:spPr>
+          <a:xfrm>
+            <a:off x="0" y="0"/>
+            <a:ext cx="9144000" cy="932688"/>
+          </a:xfrm>
+          <a:prstGeom prst="rect">
+            <a:avLst/>
+          </a:prstGeom>
+          <a:solidFill>
+            <a:srgbClr val="23242B"/>
+          </a:solidFill>
+          <a:ln>
+            <a:noFill/>
+          </a:ln>
+          <a:effectLst/>
+        </p:spPr>
+        <p:style>
+          <a:lnRef idx="1">
+            <a:schemeClr val="accent1"/>
+          </a:lnRef>
+          <a:fillRef idx="3">
+            <a:schemeClr val="accent1"/>
+          </a:fillRef>
+          <a:effectRef idx="2">
+            <a:schemeClr val="accent1"/>
+          </a:effectRef>
+          <a:fontRef idx="minor">
+            <a:schemeClr val="lt1"/>
+          </a:fontRef>
+        </p:style>
+        <p:txBody>
+          <a:bodyPr rtlCol="0" anchor="ctr"/>
+          <a:lstStyle/>
+          <a:p>
+            <a:pPr algn="ctr"/>
+            <a:endParaRPr/>
+          </a:p>
+        </p:txBody>
+      </p:sp>
+      <p:sp>
+        <p:nvSpPr>
+          <p:cNvPr id="3" name="Rectangle 2"/>
+          <p:cNvSpPr/>
+          <p:nvPr/>
+        </p:nvSpPr>
+        <p:spPr>
+          <a:xfrm>
+            <a:off x="4114800" y="0"/>
+            <a:ext cx="5029200" cy="932688"/>
+          </a:xfrm>
+          <a:prstGeom prst="rect">
+            <a:avLst/>
+          </a:prstGeom>
+          <a:solidFill>
+            <a:srgbClr val="4A4C57"/>
+          </a:solidFill>
+          <a:ln>
+            <a:noFill/>
+          </a:ln>
+          <a:effectLst/>
+        </p:spPr>
+        <p:style>
+          <a:lnRef idx="1">
+            <a:schemeClr val="accent1"/>
+          </a:lnRef>
+          <a:fillRef idx="3">
+            <a:schemeClr val="accent1"/>
+          </a:fillRef>
+          <a:effectRef idx="2">
+            <a:schemeClr val="accent1"/>
+          </a:effectRef>
+          <a:fontRef idx="minor">
+            <a:schemeClr val="lt1"/>
+          </a:fontRef>
+        </p:style>
+        <p:txBody>
+          <a:bodyPr rtlCol="0" anchor="ctr"/>
+          <a:lstStyle/>
+          <a:p>
+            <a:pPr algn="ctr"/>
+            <a:endParaRPr/>
+          </a:p>
+        </p:txBody>
+      </p:sp>
+      <p:pic>
+        <p:nvPicPr>
+          <p:cNvPr id="4" name="Picture 3" descr="image.png"/>
+          <p:cNvPicPr>
+            <a:picLocks noChangeAspect="1"/>
+          </p:cNvPicPr>
+          <p:nvPr/>
+        </p:nvPicPr>
+        <p:blipFill>
+          <a:blip r:embed="rId2"/>
+          <a:stretch>
+            <a:fillRect/>
+          </a:stretch>
+        </p:blipFill>
+        <p:spPr>
+          <a:xfrm>
+            <a:off x="8211312" y="118872"/>
+            <a:ext cx="694944" cy="694944"/>
+          </a:xfrm>
+          <a:prstGeom prst="rect">
+            <a:avLst/>
+          </a:prstGeom>
+        </p:spPr>
+      </p:pic>
+      <p:sp>
+        <p:nvSpPr>
+          <p:cNvPr id="5" name="TextBox 4"/>
+          <p:cNvSpPr txBox="1"/>
+          <p:nvPr/>
+        </p:nvSpPr>
+        <p:spPr>
+          <a:xfrm>
+            <a:off x="502920" y="0"/>
+            <a:ext cx="7406640" cy="932688"/>
+          </a:xfrm>
+          <a:prstGeom prst="rect">
+            <a:avLst/>
+          </a:prstGeom>
+          <a:noFill/>
+        </p:spPr>
+        <p:txBody>
+          <a:bodyPr wrap="square" lIns="45720" tIns="18288" rIns="45720" bIns="18288" anchor="ctr">
+            <a:spAutoFit/>
+          </a:bodyPr>
+          <a:lstStyle/>
+          <a:p>
+            <a:pPr algn="l"/>
+            <a:r>
+              <a:rPr sz="2300" b="0" i="0">
+                <a:solidFill>
+                  <a:srgbClr val="FFFFFF"/>
+                </a:solidFill>
+                <a:latin typeface="Calibri"/>
+              </a:rPr>
+              <a:t>Builder — assemble step by step</a:t>
+            </a:r>
+          </a:p>
+          <a:p>
+            <a:pPr algn="l"/>
+            <a:r>
+              <a:rPr sz="1100" b="0" i="1">
+                <a:solidFill>
+                  <a:srgbClr val="CADCFC"/>
+                </a:solidFill>
+                <a:latin typeface="Calibri"/>
+              </a:rPr>
+              <a:t>like ordering a custom Subway sandwich</a:t>
+            </a:r>
+          </a:p>
+        </p:txBody>
+      </p:sp>
+      <p:sp>
+        <p:nvSpPr>
+          <p:cNvPr id="6" name="TextBox 5"/>
+          <p:cNvSpPr txBox="1"/>
+          <p:nvPr/>
+        </p:nvSpPr>
+        <p:spPr>
+          <a:xfrm>
+            <a:off x="502920" y="6547104"/>
+            <a:ext cx="5943600" cy="237744"/>
+          </a:xfrm>
+          <a:prstGeom prst="rect">
+            <a:avLst/>
+          </a:prstGeom>
+          <a:noFill/>
+        </p:spPr>
+        <p:txBody>
+          <a:bodyPr wrap="square" lIns="45720" tIns="18288" rIns="45720" bIns="18288" anchor="ctr">
+            <a:spAutoFit/>
+          </a:bodyPr>
+          <a:lstStyle/>
+          <a:p>
+            <a:pPr algn="l"/>
+            <a:r>
+              <a:rPr sz="800" b="0" i="0">
+                <a:solidFill>
+                  <a:srgbClr val="9A9CA3"/>
+                </a:solidFill>
+                <a:latin typeface="Calibri"/>
+              </a:rPr>
+              <a:t>CSC 4273   ·   Software Architecture &amp; Design Patterns   ·   AIUB</a:t>
+            </a:r>
+          </a:p>
+        </p:txBody>
+      </p:sp>
+      <p:sp>
+        <p:nvSpPr>
+          <p:cNvPr id="7" name="TextBox 6"/>
+          <p:cNvSpPr txBox="1"/>
+          <p:nvPr/>
+        </p:nvSpPr>
+        <p:spPr>
+          <a:xfrm>
+            <a:off x="7132320" y="6547104"/>
+            <a:ext cx="1508760" cy="237744"/>
+          </a:xfrm>
+          <a:prstGeom prst="rect">
+            <a:avLst/>
+          </a:prstGeom>
+          <a:noFill/>
+        </p:spPr>
+        <p:txBody>
+          <a:bodyPr wrap="square" lIns="45720" tIns="18288" rIns="45720" bIns="18288" anchor="ctr">
+            <a:spAutoFit/>
+          </a:bodyPr>
+          <a:lstStyle/>
+          <a:p>
+            <a:pPr algn="r"/>
+            <a:r>
+              <a:rPr sz="800" b="0" i="0">
+                <a:solidFill>
+                  <a:srgbClr val="9A9CA3"/>
+                </a:solidFill>
+                <a:latin typeface="Calibri"/>
+              </a:rPr>
+              <a:t>Week 3</a:t>
+            </a:r>
+          </a:p>
+        </p:txBody>
+      </p:sp>
+      <p:sp>
+        <p:nvSpPr>
+          <p:cNvPr id="8" name="Rounded Rectangle 7"/>
+          <p:cNvSpPr/>
+          <p:nvPr/>
+        </p:nvSpPr>
+        <p:spPr>
+          <a:xfrm>
+            <a:off x="548640" y="2743200"/>
+            <a:ext cx="2103120" cy="914400"/>
+          </a:xfrm>
+          <a:prstGeom prst="roundRect">
+            <a:avLst>
+              <a:gd name="adj" fmla="val 8000"/>
+            </a:avLst>
+          </a:prstGeom>
+          <a:solidFill>
+            <a:srgbClr val="E1F5EE"/>
+          </a:solidFill>
+          <a:ln w="28575">
+            <a:solidFill>
+              <a:srgbClr val="0F6E56"/>
+            </a:solidFill>
+          </a:ln>
+          <a:effectLst/>
+        </p:spPr>
+        <p:style>
+          <a:lnRef idx="1">
+            <a:schemeClr val="accent1"/>
+          </a:lnRef>
+          <a:fillRef idx="3">
+            <a:schemeClr val="accent1"/>
+          </a:fillRef>
+          <a:effectRef idx="2">
+            <a:schemeClr val="accent1"/>
+          </a:effectRef>
+          <a:fontRef idx="minor">
+            <a:schemeClr val="lt1"/>
+          </a:fontRef>
+        </p:style>
+        <p:txBody>
+          <a:bodyPr wrap="square" lIns="45720" tIns="18288" rIns="45720" bIns="18288" rtlCol="0" anchor="ctr"/>
+          <a:lstStyle/>
+          <a:p>
+            <a:pPr algn="ctr"/>
+            <a:r>
+              <a:rPr sz="1300" b="1" i="0">
+                <a:solidFill>
+                  <a:srgbClr val="085041"/>
+                </a:solidFill>
+                <a:latin typeface="Calibri"/>
+              </a:rPr>
+              <a:t>SandwichBuilder</a:t>
+            </a:r>
+          </a:p>
+          <a:p>
+            <a:pPr algn="ctr"/>
+            <a:r>
+              <a:rPr sz="1000" b="0" i="1">
+                <a:solidFill>
+                  <a:srgbClr val="0F6E56"/>
+                </a:solidFill>
+                <a:latin typeface="Calibri"/>
+              </a:rPr>
+              <a:t>builds step by step</a:t>
+            </a:r>
+          </a:p>
+        </p:txBody>
+      </p:sp>
+      <p:sp>
+        <p:nvSpPr>
+          <p:cNvPr id="9" name="Rounded Rectangle 8"/>
+          <p:cNvSpPr/>
+          <p:nvPr/>
+        </p:nvSpPr>
+        <p:spPr>
+          <a:xfrm>
+            <a:off x="3291840" y="1554480"/>
+            <a:ext cx="2103120" cy="566928"/>
+          </a:xfrm>
+          <a:prstGeom prst="roundRect">
+            <a:avLst>
+              <a:gd name="adj" fmla="val 8000"/>
+            </a:avLst>
+          </a:prstGeom>
+          <a:solidFill>
+            <a:srgbClr val="EEEDFE"/>
+          </a:solidFill>
+          <a:ln w="12700">
+            <a:solidFill>
+              <a:srgbClr val="534AB7"/>
+            </a:solidFill>
+          </a:ln>
+          <a:effectLst/>
+        </p:spPr>
+        <p:style>
+          <a:lnRef idx="1">
+            <a:schemeClr val="accent1"/>
+          </a:lnRef>
+          <a:fillRef idx="3">
+            <a:schemeClr val="accent1"/>
+          </a:fillRef>
+          <a:effectRef idx="2">
+            <a:schemeClr val="accent1"/>
+          </a:effectRef>
+          <a:fontRef idx="minor">
+            <a:schemeClr val="lt1"/>
+          </a:fontRef>
+        </p:style>
+        <p:txBody>
+          <a:bodyPr wrap="square" lIns="45720" tIns="18288" rIns="45720" bIns="18288" rtlCol="0" anchor="ctr"/>
+          <a:lstStyle/>
+          <a:p>
+            <a:pPr algn="ctr"/>
+            <a:r>
+              <a:rPr sz="1300" b="1" i="0">
+                <a:solidFill>
+                  <a:srgbClr val="3C3489"/>
+                </a:solidFill>
+                <a:latin typeface="Calibri"/>
+              </a:rPr>
+              <a:t>1 · add bread</a:t>
+            </a:r>
+          </a:p>
+        </p:txBody>
+      </p:sp>
+      <p:sp>
+        <p:nvSpPr>
+          <p:cNvPr id="10" name="Rounded Rectangle 9"/>
+          <p:cNvSpPr/>
+          <p:nvPr/>
+        </p:nvSpPr>
+        <p:spPr>
+          <a:xfrm>
+            <a:off x="3291840" y="2286000"/>
+            <a:ext cx="2103120" cy="566928"/>
+          </a:xfrm>
+          <a:prstGeom prst="roundRect">
+            <a:avLst>
+              <a:gd name="adj" fmla="val 8000"/>
+            </a:avLst>
+          </a:prstGeom>
+          <a:solidFill>
+            <a:srgbClr val="EEEDFE"/>
+          </a:solidFill>
+          <a:ln w="12700">
+            <a:solidFill>
+              <a:srgbClr val="534AB7"/>
+            </a:solidFill>
+          </a:ln>
+          <a:effectLst/>
+        </p:spPr>
+        <p:style>
+          <a:lnRef idx="1">
+            <a:schemeClr val="accent1"/>
+          </a:lnRef>
+          <a:fillRef idx="3">
+            <a:schemeClr val="accent1"/>
+          </a:fillRef>
+          <a:effectRef idx="2">
+            <a:schemeClr val="accent1"/>
+          </a:effectRef>
+          <a:fontRef idx="minor">
+            <a:schemeClr val="lt1"/>
+          </a:fontRef>
+        </p:style>
+        <p:txBody>
+          <a:bodyPr wrap="square" lIns="45720" tIns="18288" rIns="45720" bIns="18288" rtlCol="0" anchor="ctr"/>
+          <a:lstStyle/>
+          <a:p>
+            <a:pPr algn="ctr"/>
+            <a:r>
+              <a:rPr sz="1300" b="1" i="0">
+                <a:solidFill>
+                  <a:srgbClr val="3C3489"/>
+                </a:solidFill>
+                <a:latin typeface="Calibri"/>
+              </a:rPr>
+              <a:t>2 · add protein</a:t>
+            </a:r>
+          </a:p>
+        </p:txBody>
+      </p:sp>
+      <p:sp>
+        <p:nvSpPr>
+          <p:cNvPr id="11" name="Rounded Rectangle 10"/>
+          <p:cNvSpPr/>
+          <p:nvPr/>
+        </p:nvSpPr>
+        <p:spPr>
+          <a:xfrm>
+            <a:off x="3291840" y="3017520"/>
+            <a:ext cx="2103120" cy="566928"/>
+          </a:xfrm>
+          <a:prstGeom prst="roundRect">
+            <a:avLst>
+              <a:gd name="adj" fmla="val 8000"/>
+            </a:avLst>
+          </a:prstGeom>
+          <a:solidFill>
+            <a:srgbClr val="EEEDFE"/>
+          </a:solidFill>
+          <a:ln w="12700">
+            <a:solidFill>
+              <a:srgbClr val="534AB7"/>
+            </a:solidFill>
+          </a:ln>
+          <a:effectLst/>
+        </p:spPr>
+        <p:style>
+          <a:lnRef idx="1">
+            <a:schemeClr val="accent1"/>
+          </a:lnRef>
+          <a:fillRef idx="3">
+            <a:schemeClr val="accent1"/>
+          </a:fillRef>
+          <a:effectRef idx="2">
+            <a:schemeClr val="accent1"/>
+          </a:effectRef>
+          <a:fontRef idx="minor">
+            <a:schemeClr val="lt1"/>
+          </a:fontRef>
+        </p:style>
+        <p:txBody>
+          <a:bodyPr wrap="square" lIns="45720" tIns="18288" rIns="45720" bIns="18288" rtlCol="0" anchor="ctr"/>
+          <a:lstStyle/>
+          <a:p>
+            <a:pPr algn="ctr"/>
+            <a:r>
+              <a:rPr sz="1300" b="1" i="0">
+                <a:solidFill>
+                  <a:srgbClr val="3C3489"/>
+                </a:solidFill>
+                <a:latin typeface="Calibri"/>
+              </a:rPr>
+              <a:t>3 · add veggies</a:t>
+            </a:r>
+          </a:p>
+        </p:txBody>
+      </p:sp>
+      <p:sp>
+        <p:nvSpPr>
+          <p:cNvPr id="12" name="Rounded Rectangle 11"/>
+          <p:cNvSpPr/>
+          <p:nvPr/>
+        </p:nvSpPr>
+        <p:spPr>
+          <a:xfrm>
+            <a:off x="3291840" y="3749039"/>
+            <a:ext cx="2103120" cy="566928"/>
+          </a:xfrm>
+          <a:prstGeom prst="roundRect">
+            <a:avLst>
+              <a:gd name="adj" fmla="val 8000"/>
+            </a:avLst>
+          </a:prstGeom>
+          <a:solidFill>
+            <a:srgbClr val="EEEDFE"/>
+          </a:solidFill>
+          <a:ln w="12700">
+            <a:solidFill>
+              <a:srgbClr val="534AB7"/>
+            </a:solidFill>
+          </a:ln>
+          <a:effectLst/>
+        </p:spPr>
+        <p:style>
+          <a:lnRef idx="1">
+            <a:schemeClr val="accent1"/>
+          </a:lnRef>
+          <a:fillRef idx="3">
+            <a:schemeClr val="accent1"/>
+          </a:fillRef>
+          <a:effectRef idx="2">
+            <a:schemeClr val="accent1"/>
+          </a:effectRef>
+          <a:fontRef idx="minor">
+            <a:schemeClr val="lt1"/>
+          </a:fontRef>
+        </p:style>
+        <p:txBody>
+          <a:bodyPr wrap="square" lIns="45720" tIns="18288" rIns="45720" bIns="18288" rtlCol="0" anchor="ctr"/>
+          <a:lstStyle/>
+          <a:p>
+            <a:pPr algn="ctr"/>
+            <a:r>
+              <a:rPr sz="1300" b="1" i="0">
+                <a:solidFill>
+                  <a:srgbClr val="3C3489"/>
+                </a:solidFill>
+                <a:latin typeface="Calibri"/>
+              </a:rPr>
+              <a:t>4 · add sauce</a:t>
+            </a:r>
+          </a:p>
+        </p:txBody>
+      </p:sp>
+      <p:cxnSp>
+        <p:nvCxnSpPr>
+          <p:cNvPr id="13" name="Connector 12"/>
+          <p:cNvCxnSpPr/>
+          <p:nvPr/>
+        </p:nvCxnSpPr>
+        <p:spPr>
+          <a:xfrm>
+            <a:off x="4343400" y="2121408"/>
+            <a:ext cx="0" cy="164592"/>
+          </a:xfrm>
+          <a:prstGeom prst="line">
+            <a:avLst/>
+          </a:prstGeom>
+          <a:ln w="15875">
+            <a:solidFill>
+              <a:srgbClr val="5A5C66"/>
+            </a:solidFill>
+            <a:tailEnd type="triangle" w="med" len="med"/>
+          </a:ln>
+          <a:effectLst/>
+        </p:spPr>
+        <p:style>
+          <a:lnRef idx="2">
+            <a:schemeClr val="accent1"/>
+          </a:lnRef>
+          <a:fillRef idx="0">
+            <a:schemeClr val="accent1"/>
+          </a:fillRef>
+          <a:effectRef idx="1">
+            <a:schemeClr val="accent1"/>
+          </a:effectRef>
+          <a:fontRef idx="minor">
+            <a:schemeClr val="tx1"/>
+          </a:fontRef>
+        </p:style>
+      </p:cxnSp>
+      <p:cxnSp>
+        <p:nvCxnSpPr>
+          <p:cNvPr id="14" name="Connector 13"/>
+          <p:cNvCxnSpPr/>
+          <p:nvPr/>
+        </p:nvCxnSpPr>
+        <p:spPr>
+          <a:xfrm>
+            <a:off x="4343400" y="2852928"/>
+            <a:ext cx="0" cy="164592"/>
+          </a:xfrm>
+          <a:prstGeom prst="line">
+            <a:avLst/>
+          </a:prstGeom>
+          <a:ln w="15875">
+            <a:solidFill>
+              <a:srgbClr val="5A5C66"/>
+            </a:solidFill>
+            <a:tailEnd type="triangle" w="med" len="med"/>
+          </a:ln>
+          <a:effectLst/>
+        </p:spPr>
+        <p:style>
+          <a:lnRef idx="2">
+            <a:schemeClr val="accent1"/>
+          </a:lnRef>
+          <a:fillRef idx="0">
+            <a:schemeClr val="accent1"/>
+          </a:fillRef>
+          <a:effectRef idx="1">
+            <a:schemeClr val="accent1"/>
+          </a:effectRef>
+          <a:fontRef idx="minor">
+            <a:schemeClr val="tx1"/>
+          </a:fontRef>
+        </p:style>
+      </p:cxnSp>
+      <p:cxnSp>
+        <p:nvCxnSpPr>
+          <p:cNvPr id="15" name="Connector 14"/>
+          <p:cNvCxnSpPr/>
+          <p:nvPr/>
+        </p:nvCxnSpPr>
+        <p:spPr>
+          <a:xfrm>
+            <a:off x="4343400" y="3584448"/>
+            <a:ext cx="0" cy="164591"/>
+          </a:xfrm>
+          <a:prstGeom prst="line">
+            <a:avLst/>
+          </a:prstGeom>
+          <a:ln w="15875">
+            <a:solidFill>
+              <a:srgbClr val="5A5C66"/>
+            </a:solidFill>
+            <a:tailEnd type="triangle" w="med" len="med"/>
+          </a:ln>
+          <a:effectLst/>
+        </p:spPr>
+        <p:style>
+          <a:lnRef idx="2">
+            <a:schemeClr val="accent1"/>
+          </a:lnRef>
+          <a:fillRef idx="0">
+            <a:schemeClr val="accent1"/>
+          </a:fillRef>
+          <a:effectRef idx="1">
+            <a:schemeClr val="accent1"/>
+          </a:effectRef>
+          <a:fontRef idx="minor">
+            <a:schemeClr val="tx1"/>
+          </a:fontRef>
+        </p:style>
+      </p:cxnSp>
+      <p:sp>
+        <p:nvSpPr>
+          <p:cNvPr id="16" name="Rounded Rectangle 15"/>
+          <p:cNvSpPr/>
+          <p:nvPr/>
+        </p:nvSpPr>
+        <p:spPr>
+          <a:xfrm>
+            <a:off x="6309360" y="2743200"/>
+            <a:ext cx="2194560" cy="914400"/>
+          </a:xfrm>
+          <a:prstGeom prst="roundRect">
+            <a:avLst>
+              <a:gd name="adj" fmla="val 8000"/>
+            </a:avLst>
+          </a:prstGeom>
+          <a:solidFill>
+            <a:srgbClr val="EAF3DE"/>
+          </a:solidFill>
+          <a:ln w="28575">
+            <a:solidFill>
+              <a:srgbClr val="3B6D11"/>
+            </a:solidFill>
+          </a:ln>
+          <a:effectLst/>
+        </p:spPr>
+        <p:style>
+          <a:lnRef idx="1">
+            <a:schemeClr val="accent1"/>
+          </a:lnRef>
+          <a:fillRef idx="3">
+            <a:schemeClr val="accent1"/>
+          </a:fillRef>
+          <a:effectRef idx="2">
+            <a:schemeClr val="accent1"/>
+          </a:effectRef>
+          <a:fontRef idx="minor">
+            <a:schemeClr val="lt1"/>
+          </a:fontRef>
+        </p:style>
+        <p:txBody>
+          <a:bodyPr wrap="square" lIns="45720" tIns="18288" rIns="45720" bIns="18288" rtlCol="0" anchor="ctr"/>
+          <a:lstStyle/>
+          <a:p>
+            <a:pPr algn="ctr"/>
+            <a:r>
+              <a:rPr sz="1300" b="1" i="0">
+                <a:solidFill>
+                  <a:srgbClr val="27500A"/>
+                </a:solidFill>
+                <a:latin typeface="Calibri"/>
+              </a:rPr>
+              <a:t>Custom sub</a:t>
+            </a:r>
+          </a:p>
+          <a:p>
+            <a:pPr algn="ctr"/>
+            <a:r>
+              <a:rPr sz="1000" b="0" i="1">
+                <a:solidFill>
+                  <a:srgbClr val="3B6D11"/>
+                </a:solidFill>
+                <a:latin typeface="Calibri"/>
+              </a:rPr>
+              <a:t>finished product</a:t>
+            </a:r>
+          </a:p>
+        </p:txBody>
+      </p:sp>
+      <p:cxnSp>
+        <p:nvCxnSpPr>
+          <p:cNvPr id="17" name="Connector 16"/>
+          <p:cNvCxnSpPr/>
+          <p:nvPr/>
+        </p:nvCxnSpPr>
+        <p:spPr>
+          <a:xfrm flipV="1">
+            <a:off x="2651760" y="1828800"/>
+            <a:ext cx="640080" cy="1188720"/>
+          </a:xfrm>
+          <a:prstGeom prst="line">
+            <a:avLst/>
+          </a:prstGeom>
+          <a:ln w="15875">
+            <a:solidFill>
+              <a:srgbClr val="5A5C66"/>
+            </a:solidFill>
+            <a:tailEnd type="triangle" w="med" len="med"/>
+          </a:ln>
+          <a:effectLst/>
+        </p:spPr>
+        <p:style>
+          <a:lnRef idx="2">
+            <a:schemeClr val="accent1"/>
+          </a:lnRef>
+          <a:fillRef idx="0">
+            <a:schemeClr val="accent1"/>
+          </a:fillRef>
+          <a:effectRef idx="1">
+            <a:schemeClr val="accent1"/>
+          </a:effectRef>
+          <a:fontRef idx="minor">
+            <a:schemeClr val="tx1"/>
+          </a:fontRef>
+        </p:style>
+      </p:cxnSp>
+      <p:sp>
+        <p:nvSpPr>
+          <p:cNvPr id="18" name="TextBox 17"/>
+          <p:cNvSpPr txBox="1"/>
+          <p:nvPr/>
+        </p:nvSpPr>
+        <p:spPr>
+          <a:xfrm>
+            <a:off x="2331720" y="2286000"/>
+            <a:ext cx="1097280" cy="237744"/>
+          </a:xfrm>
+          <a:prstGeom prst="rect">
+            <a:avLst/>
+          </a:prstGeom>
+          <a:noFill/>
+        </p:spPr>
+        <p:txBody>
+          <a:bodyPr wrap="square" lIns="45720" tIns="18288" rIns="45720" bIns="18288" anchor="ctr">
+            <a:spAutoFit/>
+          </a:bodyPr>
+          <a:lstStyle/>
+          <a:p>
+            <a:pPr algn="ctr"/>
+            <a:r>
+              <a:rPr sz="950" b="0" i="1">
+                <a:solidFill>
+                  <a:srgbClr val="5A5C66"/>
+                </a:solidFill>
+                <a:latin typeface="Calibri"/>
+              </a:rPr>
+              <a:t>runs</a:t>
+            </a:r>
+          </a:p>
+        </p:txBody>
+      </p:sp>
+      <p:cxnSp>
+        <p:nvCxnSpPr>
+          <p:cNvPr id="19" name="Connector 18"/>
+          <p:cNvCxnSpPr/>
+          <p:nvPr/>
+        </p:nvCxnSpPr>
+        <p:spPr>
+          <a:xfrm flipV="1">
+            <a:off x="5394960" y="3291840"/>
+            <a:ext cx="914400" cy="731520"/>
+          </a:xfrm>
+          <a:prstGeom prst="line">
+            <a:avLst/>
+          </a:prstGeom>
+          <a:ln w="15875">
+            <a:solidFill>
+              <a:srgbClr val="5A5C66"/>
+            </a:solidFill>
+            <a:tailEnd type="triangle" w="med" len="med"/>
+          </a:ln>
+          <a:effectLst/>
+        </p:spPr>
+        <p:style>
+          <a:lnRef idx="2">
+            <a:schemeClr val="accent1"/>
+          </a:lnRef>
+          <a:fillRef idx="0">
+            <a:schemeClr val="accent1"/>
+          </a:fillRef>
+          <a:effectRef idx="1">
+            <a:schemeClr val="accent1"/>
+          </a:effectRef>
+          <a:fontRef idx="minor">
+            <a:schemeClr val="tx1"/>
+          </a:fontRef>
+        </p:style>
+      </p:cxnSp>
+      <p:sp>
+        <p:nvSpPr>
+          <p:cNvPr id="20" name="TextBox 19"/>
+          <p:cNvSpPr txBox="1"/>
+          <p:nvPr/>
+        </p:nvSpPr>
+        <p:spPr>
+          <a:xfrm>
+            <a:off x="5074920" y="4114800"/>
+            <a:ext cx="1097280" cy="237744"/>
+          </a:xfrm>
+          <a:prstGeom prst="rect">
+            <a:avLst/>
+          </a:prstGeom>
+          <a:noFill/>
+        </p:spPr>
+        <p:txBody>
+          <a:bodyPr wrap="square" lIns="45720" tIns="18288" rIns="45720" bIns="18288" anchor="ctr">
+            <a:spAutoFit/>
+          </a:bodyPr>
+          <a:lstStyle/>
+          <a:p>
+            <a:pPr algn="ctr"/>
+            <a:r>
+              <a:rPr sz="950" b="0" i="1">
+                <a:solidFill>
+                  <a:srgbClr val="5A5C66"/>
+                </a:solidFill>
+                <a:latin typeface="Calibri"/>
+              </a:rPr>
+              <a:t>build()</a:t>
+            </a:r>
+          </a:p>
+        </p:txBody>
+      </p:sp>
+    </p:spTree>
+  </p:cSld>
+  <p:clrMapOvr>
+    <a:masterClrMapping/>
+  </p:clrMapOvr>
+</p:sld>
+</file>
+
+<file path=ppt/slides/slide27.xml><?xml version="1.0" encoding="utf-8"?>
 <p:sld xmlns:a="http://schemas.openxmlformats.org/drawingml/2006/main" xmlns:r="http://schemas.openxmlformats.org/officeDocument/2006/relationships" xmlns:p="http://schemas.openxmlformats.org/presentationml/2006/main">
   <p:cSld name="Slide 23">
     <p:bg>
@@ -12692,7 +16174,7 @@
 </p:sld>
 </file>
 
-<file path=ppt/slides/slide24.xml><?xml version="1.0" encoding="utf-8"?>
+<file path=ppt/slides/slide28.xml><?xml version="1.0" encoding="utf-8"?>
 <p:sld xmlns:a="http://schemas.openxmlformats.org/drawingml/2006/main" xmlns:r="http://schemas.openxmlformats.org/officeDocument/2006/relationships" xmlns:p="http://schemas.openxmlformats.org/presentationml/2006/main">
   <p:cSld name="Slide 24">
     <p:bg>
@@ -13340,7 +16822,7 @@
 </p:sld>
 </file>
 
-<file path=ppt/slides/slide25.xml><?xml version="1.0" encoding="utf-8"?>
+<file path=ppt/slides/slide29.xml><?xml version="1.0" encoding="utf-8"?>
 <p:sld xmlns:a="http://schemas.openxmlformats.org/drawingml/2006/main" xmlns:r="http://schemas.openxmlformats.org/officeDocument/2006/relationships" xmlns:p="http://schemas.openxmlformats.org/presentationml/2006/main">
   <p:cSld name="Slide 25">
     <p:bg>
@@ -14217,7 +17699,414 @@
 </p:sld>
 </file>
 
-<file path=ppt/slides/slide26.xml><?xml version="1.0" encoding="utf-8"?>
+<file path=ppt/slides/slide3.xml><?xml version="1.0" encoding="utf-8"?>
+<p:sld xmlns:a="http://schemas.openxmlformats.org/drawingml/2006/main" xmlns:r="http://schemas.openxmlformats.org/officeDocument/2006/relationships" xmlns:p="http://schemas.openxmlformats.org/presentationml/2006/main">
+  <p:cSld name="Slide 3">
+    <p:bg>
+      <p:bgPr>
+        <a:solidFill>
+          <a:srgbClr val="FFFFFF"/>
+        </a:solidFill>
+        <a:effectLst/>
+      </p:bgPr>
+    </p:bg>
+    <p:spTree>
+      <p:nvGrpSpPr>
+        <p:cNvPr id="1" name=""/>
+        <p:cNvGrpSpPr/>
+        <p:nvPr/>
+      </p:nvGrpSpPr>
+      <p:grpSpPr>
+        <a:xfrm>
+          <a:off x="0" y="0"/>
+          <a:ext cx="0" cy="0"/>
+          <a:chOff x="0" y="0"/>
+          <a:chExt cx="0" cy="0"/>
+        </a:xfrm>
+      </p:grpSpPr>
+      <p:sp>
+        <p:nvSpPr>
+          <p:cNvPr id="2" name="Shape 0"/>
+          <p:cNvSpPr/>
+          <p:nvPr/>
+        </p:nvSpPr>
+        <p:spPr>
+          <a:xfrm>
+            <a:off x="0" y="0"/>
+            <a:ext cx="9144000" cy="932688"/>
+          </a:xfrm>
+          <a:prstGeom prst="rect">
+            <a:avLst/>
+          </a:prstGeom>
+          <a:solidFill>
+            <a:srgbClr val="23242B"/>
+          </a:solidFill>
+          <a:ln/>
+        </p:spPr>
+        <p:txBody>
+          <a:bodyPr/>
+          <a:lstStyle/>
+          <a:p>
+            <a:endParaRPr lang="en-US"/>
+          </a:p>
+        </p:txBody>
+      </p:sp>
+      <p:sp>
+        <p:nvSpPr>
+          <p:cNvPr id="3" name="Shape 1"/>
+          <p:cNvSpPr/>
+          <p:nvPr/>
+        </p:nvSpPr>
+        <p:spPr>
+          <a:xfrm>
+            <a:off x="4114800" y="0"/>
+            <a:ext cx="5029200" cy="932688"/>
+          </a:xfrm>
+          <a:prstGeom prst="rect">
+            <a:avLst/>
+          </a:prstGeom>
+          <a:solidFill>
+            <a:srgbClr val="4A4C57">
+              <a:alpha val="45000"/>
+            </a:srgbClr>
+          </a:solidFill>
+          <a:ln/>
+        </p:spPr>
+        <p:txBody>
+          <a:bodyPr/>
+          <a:lstStyle/>
+          <a:p>
+            <a:endParaRPr lang="en-US"/>
+          </a:p>
+        </p:txBody>
+      </p:sp>
+      <p:pic>
+        <p:nvPicPr>
+          <p:cNvPr id="4" name="Image 0" descr="/home/claude/aiub_logo.png"/>
+          <p:cNvPicPr>
+            <a:picLocks noChangeAspect="1"/>
+          </p:cNvPicPr>
+          <p:nvPr/>
+        </p:nvPicPr>
+        <p:blipFill>
+          <a:blip r:embed="rId3"/>
+          <a:stretch>
+            <a:fillRect/>
+          </a:stretch>
+        </p:blipFill>
+        <p:spPr>
+          <a:xfrm>
+            <a:off x="8211312" y="118872"/>
+            <a:ext cx="694944" cy="694944"/>
+          </a:xfrm>
+          <a:prstGeom prst="rect">
+            <a:avLst/>
+          </a:prstGeom>
+        </p:spPr>
+      </p:pic>
+      <p:sp>
+        <p:nvSpPr>
+          <p:cNvPr id="5" name="Text 2"/>
+          <p:cNvSpPr/>
+          <p:nvPr/>
+        </p:nvSpPr>
+        <p:spPr>
+          <a:xfrm>
+            <a:off x="502920" y="0"/>
+            <a:ext cx="8001000" cy="932688"/>
+          </a:xfrm>
+          <a:prstGeom prst="rect">
+            <a:avLst/>
+          </a:prstGeom>
+          <a:noFill/>
+          <a:ln/>
+        </p:spPr>
+        <p:txBody>
+          <a:bodyPr wrap="square" rtlCol="0" anchor="ctr"/>
+          <a:lstStyle/>
+          <a:p>
+            <a:pPr marL="0" indent="0" algn="l">
+              <a:buNone/>
+            </a:pPr>
+            <a:r>
+              <a:rPr lang="en-US" sz="2500" dirty="0">
+                <a:solidFill>
+                  <a:srgbClr val="FFFFFF"/>
+                </a:solidFill>
+                <a:latin typeface="Cambria" pitchFamily="34" charset="0"/>
+                <a:ea typeface="Cambria" pitchFamily="34" charset="-122"/>
+                <a:cs typeface="Cambria" pitchFamily="34" charset="-120"/>
+              </a:rPr>
+              <a:t>Week-3 &amp; Part-1</a:t>
+            </a:r>
+            <a:endParaRPr lang="en-US" sz="2500" dirty="0"/>
+          </a:p>
+        </p:txBody>
+      </p:sp>
+      <p:sp>
+        <p:nvSpPr>
+          <p:cNvPr id="6" name="Text 3"/>
+          <p:cNvSpPr/>
+          <p:nvPr/>
+        </p:nvSpPr>
+        <p:spPr>
+          <a:xfrm>
+            <a:off x="502920" y="6547104"/>
+            <a:ext cx="5943600" cy="237744"/>
+          </a:xfrm>
+          <a:prstGeom prst="rect">
+            <a:avLst/>
+          </a:prstGeom>
+          <a:noFill/>
+          <a:ln/>
+        </p:spPr>
+        <p:txBody>
+          <a:bodyPr wrap="square" rtlCol="0" anchor="ctr"/>
+          <a:lstStyle/>
+          <a:p>
+            <a:pPr marL="0" indent="0" algn="l">
+              <a:buNone/>
+            </a:pPr>
+            <a:r>
+              <a:rPr lang="en-US" sz="800" dirty="0">
+                <a:solidFill>
+                  <a:srgbClr val="9A9CA3"/>
+                </a:solidFill>
+                <a:latin typeface="Calibri" pitchFamily="34" charset="0"/>
+                <a:ea typeface="Calibri" pitchFamily="34" charset="-122"/>
+                <a:cs typeface="Calibri" pitchFamily="34" charset="-120"/>
+              </a:rPr>
+              <a:t>CSC 4273  ·  Software Architecture &amp; Design Patterns  ·  AIUB</a:t>
+            </a:r>
+            <a:endParaRPr lang="en-US" sz="800" dirty="0"/>
+          </a:p>
+        </p:txBody>
+      </p:sp>
+      <p:sp>
+        <p:nvSpPr>
+          <p:cNvPr id="7" name="Text 4"/>
+          <p:cNvSpPr/>
+          <p:nvPr/>
+        </p:nvSpPr>
+        <p:spPr>
+          <a:xfrm>
+            <a:off x="7132320" y="6547104"/>
+            <a:ext cx="1508760" cy="237744"/>
+          </a:xfrm>
+          <a:prstGeom prst="rect">
+            <a:avLst/>
+          </a:prstGeom>
+          <a:noFill/>
+          <a:ln/>
+        </p:spPr>
+        <p:txBody>
+          <a:bodyPr wrap="square" rtlCol="0" anchor="ctr"/>
+          <a:lstStyle/>
+          <a:p>
+            <a:pPr marL="0" indent="0" algn="r">
+              <a:buNone/>
+            </a:pPr>
+            <a:r>
+              <a:rPr lang="en-US" sz="800" dirty="0">
+                <a:solidFill>
+                  <a:srgbClr val="9A9CA3"/>
+                </a:solidFill>
+                <a:latin typeface="Calibri" pitchFamily="34" charset="0"/>
+                <a:ea typeface="Calibri" pitchFamily="34" charset="-122"/>
+                <a:cs typeface="Calibri" pitchFamily="34" charset="-120"/>
+              </a:rPr>
+              <a:t>Week 3</a:t>
+            </a:r>
+            <a:endParaRPr lang="en-US" sz="800" dirty="0"/>
+          </a:p>
+        </p:txBody>
+      </p:sp>
+      <p:sp>
+        <p:nvSpPr>
+          <p:cNvPr id="8" name="Text 5"/>
+          <p:cNvSpPr/>
+          <p:nvPr/>
+        </p:nvSpPr>
+        <p:spPr>
+          <a:xfrm>
+            <a:off x="502920" y="1188720"/>
+            <a:ext cx="8138160" cy="5239512"/>
+          </a:xfrm>
+          <a:prstGeom prst="rect">
+            <a:avLst/>
+          </a:prstGeom>
+          <a:noFill/>
+          <a:ln/>
+        </p:spPr>
+        <p:txBody>
+          <a:bodyPr wrap="square" rtlCol="0" anchor="t"/>
+          <a:lstStyle/>
+          <a:p>
+            <a:pPr marL="0" indent="0">
+              <a:lnSpc>
+                <a:spcPct val="102000"/>
+              </a:lnSpc>
+              <a:spcAft>
+                <a:spcPts val="1200"/>
+              </a:spcAft>
+              <a:buNone/>
+            </a:pPr>
+            <a:r>
+              <a:rPr lang="en-US" sz="1500" b="1" dirty="0">
+                <a:solidFill>
+                  <a:srgbClr val="242852"/>
+                </a:solidFill>
+                <a:latin typeface="Cambria" panose="02040503050406030204" pitchFamily="18" charset="0"/>
+                <a:ea typeface="Calibri" pitchFamily="34" charset="-122"/>
+                <a:cs typeface="Calibri" pitchFamily="34" charset="-120"/>
+              </a:rPr>
+              <a:t>PART 1 LEARNING GOALS — By the end of Part 1, you will be able to:</a:t>
+            </a:r>
+            <a:endParaRPr lang="en-US" sz="1500" dirty="0">
+              <a:latin typeface="Cambria" panose="02040503050406030204" pitchFamily="18" charset="0"/>
+            </a:endParaRPr>
+          </a:p>
+          <a:p>
+            <a:pPr marL="342900" indent="-342900">
+              <a:lnSpc>
+                <a:spcPct val="102000"/>
+              </a:lnSpc>
+              <a:spcAft>
+                <a:spcPts val="800"/>
+              </a:spcAft>
+              <a:buSzPct val="100000"/>
+              <a:buChar char="•"/>
+            </a:pPr>
+            <a:r>
+              <a:rPr lang="en-US" sz="1550" dirty="0">
+                <a:solidFill>
+                  <a:srgbClr val="1A1A1A"/>
+                </a:solidFill>
+                <a:latin typeface="Cambria" panose="02040503050406030204" pitchFamily="18" charset="0"/>
+                <a:ea typeface="Calibri" pitchFamily="34" charset="-122"/>
+                <a:cs typeface="Calibri" pitchFamily="34" charset="-120"/>
+              </a:rPr>
+              <a:t>Explain why creational patterns exist and the problem the new keyword creates.</a:t>
+            </a:r>
+            <a:endParaRPr lang="en-US" sz="1500" dirty="0">
+              <a:latin typeface="Cambria" panose="02040503050406030204" pitchFamily="18" charset="0"/>
+            </a:endParaRPr>
+          </a:p>
+          <a:p>
+            <a:pPr marL="342900" indent="-342900">
+              <a:lnSpc>
+                <a:spcPct val="102000"/>
+              </a:lnSpc>
+              <a:spcAft>
+                <a:spcPts val="800"/>
+              </a:spcAft>
+              <a:buSzPct val="100000"/>
+              <a:buChar char="•"/>
+            </a:pPr>
+            <a:r>
+              <a:rPr lang="en-US" sz="1550" dirty="0">
+                <a:solidFill>
+                  <a:srgbClr val="1A1A1A"/>
+                </a:solidFill>
+                <a:latin typeface="Cambria" panose="02040503050406030204" pitchFamily="18" charset="0"/>
+                <a:ea typeface="Calibri" pitchFamily="34" charset="-122"/>
+                <a:cs typeface="Calibri" pitchFamily="34" charset="-120"/>
+              </a:rPr>
+              <a:t>Implement a thread-safe Singleton in TypeScript and articulate its trade-offs.</a:t>
+            </a:r>
+            <a:endParaRPr lang="en-US" sz="1500" dirty="0">
+              <a:latin typeface="Cambria" panose="02040503050406030204" pitchFamily="18" charset="0"/>
+            </a:endParaRPr>
+          </a:p>
+          <a:p>
+            <a:pPr marL="342900" indent="-342900">
+              <a:lnSpc>
+                <a:spcPct val="102000"/>
+              </a:lnSpc>
+              <a:spcAft>
+                <a:spcPts val="800"/>
+              </a:spcAft>
+              <a:buSzPct val="100000"/>
+              <a:buChar char="•"/>
+            </a:pPr>
+            <a:r>
+              <a:rPr lang="en-US" sz="1550" dirty="0">
+                <a:solidFill>
+                  <a:srgbClr val="1A1A1A"/>
+                </a:solidFill>
+                <a:latin typeface="Cambria" panose="02040503050406030204" pitchFamily="18" charset="0"/>
+                <a:ea typeface="Calibri" pitchFamily="34" charset="-122"/>
+                <a:cs typeface="Calibri" pitchFamily="34" charset="-120"/>
+              </a:rPr>
+              <a:t>Implement the Factory Method pattern and explain how it satisfies OCP.</a:t>
+            </a:r>
+            <a:endParaRPr lang="en-US" sz="1500" dirty="0">
+              <a:latin typeface="Cambria" panose="02040503050406030204" pitchFamily="18" charset="0"/>
+            </a:endParaRPr>
+          </a:p>
+          <a:p>
+            <a:pPr marL="342900" indent="-342900">
+              <a:lnSpc>
+                <a:spcPct val="102000"/>
+              </a:lnSpc>
+              <a:spcAft>
+                <a:spcPts val="800"/>
+              </a:spcAft>
+              <a:buSzPct val="100000"/>
+              <a:buChar char="•"/>
+            </a:pPr>
+            <a:r>
+              <a:rPr lang="en-US" sz="1550" dirty="0">
+                <a:solidFill>
+                  <a:srgbClr val="1A1A1A"/>
+                </a:solidFill>
+                <a:latin typeface="Cambria" panose="02040503050406030204" pitchFamily="18" charset="0"/>
+                <a:ea typeface="Calibri" pitchFamily="34" charset="-122"/>
+                <a:cs typeface="Calibri" pitchFamily="34" charset="-120"/>
+              </a:rPr>
+              <a:t>Implement Abstract Factory and explain how it guarantees product-family consistency.</a:t>
+            </a:r>
+            <a:endParaRPr lang="en-US" sz="1500" dirty="0">
+              <a:latin typeface="Cambria" panose="02040503050406030204" pitchFamily="18" charset="0"/>
+            </a:endParaRPr>
+          </a:p>
+          <a:p>
+            <a:pPr marL="342900" indent="-342900">
+              <a:lnSpc>
+                <a:spcPct val="102000"/>
+              </a:lnSpc>
+              <a:spcAft>
+                <a:spcPts val="800"/>
+              </a:spcAft>
+              <a:buSzPct val="100000"/>
+              <a:buChar char="•"/>
+            </a:pPr>
+            <a:r>
+              <a:rPr lang="en-US" sz="1550" dirty="0">
+                <a:solidFill>
+                  <a:srgbClr val="1A1A1A"/>
+                </a:solidFill>
+                <a:latin typeface="Cambria" panose="02040503050406030204" pitchFamily="18" charset="0"/>
+                <a:ea typeface="Calibri" pitchFamily="34" charset="-122"/>
+                <a:cs typeface="Calibri" pitchFamily="34" charset="-120"/>
+              </a:rPr>
+              <a:t>Apply Singleton, Factory Method, and Abstract Factory to UniRide in code.</a:t>
+            </a:r>
+            <a:endParaRPr lang="en-US" sz="1500" dirty="0">
+              <a:latin typeface="Cambria" panose="02040503050406030204" pitchFamily="18" charset="0"/>
+            </a:endParaRPr>
+          </a:p>
+        </p:txBody>
+      </p:sp>
+    </p:spTree>
+  </p:cSld>
+  <p:clrMapOvr>
+    <a:masterClrMapping/>
+  </p:clrMapOvr>
+</p:sld>
+</file>
+
+<file path=ppt/slides/slide30.xml><?xml version="1.0" encoding="utf-8"?>
 <p:sld xmlns:a="http://schemas.openxmlformats.org/drawingml/2006/main" xmlns:r="http://schemas.openxmlformats.org/officeDocument/2006/relationships" xmlns:p="http://schemas.openxmlformats.org/presentationml/2006/main">
   <p:cSld name="Slide 26">
     <p:bg>
@@ -16592,7 +20481,7 @@
 </p:sld>
 </file>
 
-<file path=ppt/slides/slide27.xml><?xml version="1.0" encoding="utf-8"?>
+<file path=ppt/slides/slide31.xml><?xml version="1.0" encoding="utf-8"?>
 <p:sld xmlns:a="http://schemas.openxmlformats.org/drawingml/2006/main" xmlns:r="http://schemas.openxmlformats.org/officeDocument/2006/relationships" xmlns:p="http://schemas.openxmlformats.org/presentationml/2006/main">
   <p:cSld name="Slide 27">
     <p:bg>
@@ -17128,7 +21017,7 @@
 </p:sld>
 </file>
 
-<file path=ppt/slides/slide28.xml><?xml version="1.0" encoding="utf-8"?>
+<file path=ppt/slides/slide32.xml><?xml version="1.0" encoding="utf-8"?>
 <p:sld xmlns:a="http://schemas.openxmlformats.org/drawingml/2006/main" xmlns:r="http://schemas.openxmlformats.org/officeDocument/2006/relationships" xmlns:p="http://schemas.openxmlformats.org/presentationml/2006/main">
   <p:cSld name="Slide 28">
     <p:bg>
@@ -17423,7 +21312,29 @@
                 <a:ea typeface="Calibri" pitchFamily="34" charset="-122"/>
                 <a:cs typeface="Calibri" pitchFamily="34" charset="-120"/>
               </a:rPr>
-              <a:t>Due end of Week 3  ·  Individual  ·  1,200–1,800 words  ·  15% of mid-term</a:t>
+              <a:t>Due end of Week 3  ·  Individual  ·  1,200–1,800 words  </a:t>
+            </a:r>
+            <a:r>
+              <a:rPr lang="en-US" sz="1400" b="1">
+                <a:solidFill>
+                  <a:srgbClr val="242852"/>
+                </a:solidFill>
+                <a:latin typeface="Cambria" panose="02040503050406030204" pitchFamily="18" charset="0"/>
+                <a:ea typeface="Calibri" pitchFamily="34" charset="-122"/>
+                <a:cs typeface="Calibri" pitchFamily="34" charset="-120"/>
+              </a:rPr>
+              <a:t>·  5</a:t>
+            </a:r>
+            <a:r>
+              <a:rPr lang="en-US" sz="1400" b="1" dirty="0">
+                <a:solidFill>
+                  <a:srgbClr val="242852"/>
+                </a:solidFill>
+                <a:latin typeface="Cambria" panose="02040503050406030204" pitchFamily="18" charset="0"/>
+                <a:ea typeface="Calibri" pitchFamily="34" charset="-122"/>
+                <a:cs typeface="Calibri" pitchFamily="34" charset="-120"/>
+              </a:rPr>
+              <a:t>% of mid-term</a:t>
             </a:r>
             <a:endParaRPr lang="en-US" sz="1400" dirty="0">
               <a:latin typeface="Cambria" panose="02040503050406030204" pitchFamily="18" charset="0"/>
@@ -17659,7 +21570,7 @@
               <a:t>GoF</a:t>
             </a:r>
             <a:r>
-              <a:rPr lang="en-US" sz="1400" b="1">
+              <a:rPr lang="en-US" sz="1400" b="1" dirty="0">
                 <a:solidFill>
                   <a:srgbClr val="C00000"/>
                 </a:solidFill>
@@ -17676,7 +21587,7 @@
               <a:t> </a:t>
             </a:r>
             <a:r>
-              <a:rPr lang="en-US" sz="1400" b="1">
+              <a:rPr lang="en-US" sz="1400" b="1" dirty="0">
                 <a:solidFill>
                   <a:srgbClr val="C00000"/>
                 </a:solidFill>
@@ -17684,18 +21595,7 @@
                 <a:ea typeface="Calibri" pitchFamily="34" charset="-122"/>
                 <a:cs typeface="Calibri" pitchFamily="34" charset="-120"/>
               </a:rPr>
-              <a:t>verbatim</a:t>
-            </a:r>
-            <a:r>
-              <a:rPr lang="en-US" sz="1400" b="1" dirty="0">
-                <a:solidFill>
-                  <a:srgbClr val="C00000"/>
-                </a:solidFill>
-                <a:latin typeface="Cambria" panose="02040503050406030204" pitchFamily="18" charset="0"/>
-                <a:ea typeface="Calibri" pitchFamily="34" charset="-122"/>
-                <a:cs typeface="Calibri" pitchFamily="34" charset="-120"/>
-              </a:rPr>
-              <a:t>; omitting the UML sketch or the trade-off (more subclasses per new type).</a:t>
+              <a:t>verbatim; omitting the UML sketch or the trade-off (more subclasses per new type).</a:t>
             </a:r>
             <a:endParaRPr lang="en-US" sz="1400" dirty="0">
               <a:latin typeface="Cambria" panose="02040503050406030204" pitchFamily="18" charset="0"/>
@@ -17711,7 +21611,7 @@
 </p:sld>
 </file>
 
-<file path=ppt/slides/slide29.xml><?xml version="1.0" encoding="utf-8"?>
+<file path=ppt/slides/slide33.xml><?xml version="1.0" encoding="utf-8"?>
 <p:sld xmlns:a="http://schemas.openxmlformats.org/drawingml/2006/main" xmlns:r="http://schemas.openxmlformats.org/officeDocument/2006/relationships" xmlns:p="http://schemas.openxmlformats.org/presentationml/2006/main">
   <p:cSld name="Slide 29">
     <p:bg>
@@ -18491,414 +22391,7 @@
 </p:sld>
 </file>
 
-<file path=ppt/slides/slide3.xml><?xml version="1.0" encoding="utf-8"?>
-<p:sld xmlns:a="http://schemas.openxmlformats.org/drawingml/2006/main" xmlns:r="http://schemas.openxmlformats.org/officeDocument/2006/relationships" xmlns:p="http://schemas.openxmlformats.org/presentationml/2006/main">
-  <p:cSld name="Slide 3">
-    <p:bg>
-      <p:bgPr>
-        <a:solidFill>
-          <a:srgbClr val="FFFFFF"/>
-        </a:solidFill>
-        <a:effectLst/>
-      </p:bgPr>
-    </p:bg>
-    <p:spTree>
-      <p:nvGrpSpPr>
-        <p:cNvPr id="1" name=""/>
-        <p:cNvGrpSpPr/>
-        <p:nvPr/>
-      </p:nvGrpSpPr>
-      <p:grpSpPr>
-        <a:xfrm>
-          <a:off x="0" y="0"/>
-          <a:ext cx="0" cy="0"/>
-          <a:chOff x="0" y="0"/>
-          <a:chExt cx="0" cy="0"/>
-        </a:xfrm>
-      </p:grpSpPr>
-      <p:sp>
-        <p:nvSpPr>
-          <p:cNvPr id="2" name="Shape 0"/>
-          <p:cNvSpPr/>
-          <p:nvPr/>
-        </p:nvSpPr>
-        <p:spPr>
-          <a:xfrm>
-            <a:off x="0" y="0"/>
-            <a:ext cx="9144000" cy="932688"/>
-          </a:xfrm>
-          <a:prstGeom prst="rect">
-            <a:avLst/>
-          </a:prstGeom>
-          <a:solidFill>
-            <a:srgbClr val="23242B"/>
-          </a:solidFill>
-          <a:ln/>
-        </p:spPr>
-        <p:txBody>
-          <a:bodyPr/>
-          <a:lstStyle/>
-          <a:p>
-            <a:endParaRPr lang="en-US"/>
-          </a:p>
-        </p:txBody>
-      </p:sp>
-      <p:sp>
-        <p:nvSpPr>
-          <p:cNvPr id="3" name="Shape 1"/>
-          <p:cNvSpPr/>
-          <p:nvPr/>
-        </p:nvSpPr>
-        <p:spPr>
-          <a:xfrm>
-            <a:off x="4114800" y="0"/>
-            <a:ext cx="5029200" cy="932688"/>
-          </a:xfrm>
-          <a:prstGeom prst="rect">
-            <a:avLst/>
-          </a:prstGeom>
-          <a:solidFill>
-            <a:srgbClr val="4A4C57">
-              <a:alpha val="45000"/>
-            </a:srgbClr>
-          </a:solidFill>
-          <a:ln/>
-        </p:spPr>
-        <p:txBody>
-          <a:bodyPr/>
-          <a:lstStyle/>
-          <a:p>
-            <a:endParaRPr lang="en-US"/>
-          </a:p>
-        </p:txBody>
-      </p:sp>
-      <p:pic>
-        <p:nvPicPr>
-          <p:cNvPr id="4" name="Image 0" descr="/home/claude/aiub_logo.png"/>
-          <p:cNvPicPr>
-            <a:picLocks noChangeAspect="1"/>
-          </p:cNvPicPr>
-          <p:nvPr/>
-        </p:nvPicPr>
-        <p:blipFill>
-          <a:blip r:embed="rId3"/>
-          <a:stretch>
-            <a:fillRect/>
-          </a:stretch>
-        </p:blipFill>
-        <p:spPr>
-          <a:xfrm>
-            <a:off x="8211312" y="118872"/>
-            <a:ext cx="694944" cy="694944"/>
-          </a:xfrm>
-          <a:prstGeom prst="rect">
-            <a:avLst/>
-          </a:prstGeom>
-        </p:spPr>
-      </p:pic>
-      <p:sp>
-        <p:nvSpPr>
-          <p:cNvPr id="5" name="Text 2"/>
-          <p:cNvSpPr/>
-          <p:nvPr/>
-        </p:nvSpPr>
-        <p:spPr>
-          <a:xfrm>
-            <a:off x="502920" y="0"/>
-            <a:ext cx="8001000" cy="932688"/>
-          </a:xfrm>
-          <a:prstGeom prst="rect">
-            <a:avLst/>
-          </a:prstGeom>
-          <a:noFill/>
-          <a:ln/>
-        </p:spPr>
-        <p:txBody>
-          <a:bodyPr wrap="square" rtlCol="0" anchor="ctr"/>
-          <a:lstStyle/>
-          <a:p>
-            <a:pPr marL="0" indent="0" algn="l">
-              <a:buNone/>
-            </a:pPr>
-            <a:r>
-              <a:rPr lang="en-US" sz="2500" dirty="0">
-                <a:solidFill>
-                  <a:srgbClr val="FFFFFF"/>
-                </a:solidFill>
-                <a:latin typeface="Cambria" pitchFamily="34" charset="0"/>
-                <a:ea typeface="Cambria" pitchFamily="34" charset="-122"/>
-                <a:cs typeface="Cambria" pitchFamily="34" charset="-120"/>
-              </a:rPr>
-              <a:t>Week-3 &amp; Part-1</a:t>
-            </a:r>
-            <a:endParaRPr lang="en-US" sz="2500" dirty="0"/>
-          </a:p>
-        </p:txBody>
-      </p:sp>
-      <p:sp>
-        <p:nvSpPr>
-          <p:cNvPr id="6" name="Text 3"/>
-          <p:cNvSpPr/>
-          <p:nvPr/>
-        </p:nvSpPr>
-        <p:spPr>
-          <a:xfrm>
-            <a:off x="502920" y="6547104"/>
-            <a:ext cx="5943600" cy="237744"/>
-          </a:xfrm>
-          <a:prstGeom prst="rect">
-            <a:avLst/>
-          </a:prstGeom>
-          <a:noFill/>
-          <a:ln/>
-        </p:spPr>
-        <p:txBody>
-          <a:bodyPr wrap="square" rtlCol="0" anchor="ctr"/>
-          <a:lstStyle/>
-          <a:p>
-            <a:pPr marL="0" indent="0" algn="l">
-              <a:buNone/>
-            </a:pPr>
-            <a:r>
-              <a:rPr lang="en-US" sz="800" dirty="0">
-                <a:solidFill>
-                  <a:srgbClr val="9A9CA3"/>
-                </a:solidFill>
-                <a:latin typeface="Calibri" pitchFamily="34" charset="0"/>
-                <a:ea typeface="Calibri" pitchFamily="34" charset="-122"/>
-                <a:cs typeface="Calibri" pitchFamily="34" charset="-120"/>
-              </a:rPr>
-              <a:t>CSC 4273  ·  Software Architecture &amp; Design Patterns  ·  AIUB</a:t>
-            </a:r>
-            <a:endParaRPr lang="en-US" sz="800" dirty="0"/>
-          </a:p>
-        </p:txBody>
-      </p:sp>
-      <p:sp>
-        <p:nvSpPr>
-          <p:cNvPr id="7" name="Text 4"/>
-          <p:cNvSpPr/>
-          <p:nvPr/>
-        </p:nvSpPr>
-        <p:spPr>
-          <a:xfrm>
-            <a:off x="7132320" y="6547104"/>
-            <a:ext cx="1508760" cy="237744"/>
-          </a:xfrm>
-          <a:prstGeom prst="rect">
-            <a:avLst/>
-          </a:prstGeom>
-          <a:noFill/>
-          <a:ln/>
-        </p:spPr>
-        <p:txBody>
-          <a:bodyPr wrap="square" rtlCol="0" anchor="ctr"/>
-          <a:lstStyle/>
-          <a:p>
-            <a:pPr marL="0" indent="0" algn="r">
-              <a:buNone/>
-            </a:pPr>
-            <a:r>
-              <a:rPr lang="en-US" sz="800" dirty="0">
-                <a:solidFill>
-                  <a:srgbClr val="9A9CA3"/>
-                </a:solidFill>
-                <a:latin typeface="Calibri" pitchFamily="34" charset="0"/>
-                <a:ea typeface="Calibri" pitchFamily="34" charset="-122"/>
-                <a:cs typeface="Calibri" pitchFamily="34" charset="-120"/>
-              </a:rPr>
-              <a:t>Week 3</a:t>
-            </a:r>
-            <a:endParaRPr lang="en-US" sz="800" dirty="0"/>
-          </a:p>
-        </p:txBody>
-      </p:sp>
-      <p:sp>
-        <p:nvSpPr>
-          <p:cNvPr id="8" name="Text 5"/>
-          <p:cNvSpPr/>
-          <p:nvPr/>
-        </p:nvSpPr>
-        <p:spPr>
-          <a:xfrm>
-            <a:off x="502920" y="1188720"/>
-            <a:ext cx="8138160" cy="5239512"/>
-          </a:xfrm>
-          <a:prstGeom prst="rect">
-            <a:avLst/>
-          </a:prstGeom>
-          <a:noFill/>
-          <a:ln/>
-        </p:spPr>
-        <p:txBody>
-          <a:bodyPr wrap="square" rtlCol="0" anchor="t"/>
-          <a:lstStyle/>
-          <a:p>
-            <a:pPr marL="0" indent="0">
-              <a:lnSpc>
-                <a:spcPct val="102000"/>
-              </a:lnSpc>
-              <a:spcAft>
-                <a:spcPts val="1200"/>
-              </a:spcAft>
-              <a:buNone/>
-            </a:pPr>
-            <a:r>
-              <a:rPr lang="en-US" sz="1500" b="1" dirty="0">
-                <a:solidFill>
-                  <a:srgbClr val="242852"/>
-                </a:solidFill>
-                <a:latin typeface="Cambria" panose="02040503050406030204" pitchFamily="18" charset="0"/>
-                <a:ea typeface="Calibri" pitchFamily="34" charset="-122"/>
-                <a:cs typeface="Calibri" pitchFamily="34" charset="-120"/>
-              </a:rPr>
-              <a:t>PART 1 LEARNING GOALS — By the end of Part 1, you will be able to:</a:t>
-            </a:r>
-            <a:endParaRPr lang="en-US" sz="1500" dirty="0">
-              <a:latin typeface="Cambria" panose="02040503050406030204" pitchFamily="18" charset="0"/>
-            </a:endParaRPr>
-          </a:p>
-          <a:p>
-            <a:pPr marL="342900" indent="-342900">
-              <a:lnSpc>
-                <a:spcPct val="102000"/>
-              </a:lnSpc>
-              <a:spcAft>
-                <a:spcPts val="800"/>
-              </a:spcAft>
-              <a:buSzPct val="100000"/>
-              <a:buChar char="•"/>
-            </a:pPr>
-            <a:r>
-              <a:rPr lang="en-US" sz="1550" dirty="0">
-                <a:solidFill>
-                  <a:srgbClr val="1A1A1A"/>
-                </a:solidFill>
-                <a:latin typeface="Cambria" panose="02040503050406030204" pitchFamily="18" charset="0"/>
-                <a:ea typeface="Calibri" pitchFamily="34" charset="-122"/>
-                <a:cs typeface="Calibri" pitchFamily="34" charset="-120"/>
-              </a:rPr>
-              <a:t>Explain why creational patterns exist and the problem the new keyword creates.</a:t>
-            </a:r>
-            <a:endParaRPr lang="en-US" sz="1500" dirty="0">
-              <a:latin typeface="Cambria" panose="02040503050406030204" pitchFamily="18" charset="0"/>
-            </a:endParaRPr>
-          </a:p>
-          <a:p>
-            <a:pPr marL="342900" indent="-342900">
-              <a:lnSpc>
-                <a:spcPct val="102000"/>
-              </a:lnSpc>
-              <a:spcAft>
-                <a:spcPts val="800"/>
-              </a:spcAft>
-              <a:buSzPct val="100000"/>
-              <a:buChar char="•"/>
-            </a:pPr>
-            <a:r>
-              <a:rPr lang="en-US" sz="1550" dirty="0">
-                <a:solidFill>
-                  <a:srgbClr val="1A1A1A"/>
-                </a:solidFill>
-                <a:latin typeface="Cambria" panose="02040503050406030204" pitchFamily="18" charset="0"/>
-                <a:ea typeface="Calibri" pitchFamily="34" charset="-122"/>
-                <a:cs typeface="Calibri" pitchFamily="34" charset="-120"/>
-              </a:rPr>
-              <a:t>Implement a thread-safe Singleton in TypeScript and articulate its trade-offs.</a:t>
-            </a:r>
-            <a:endParaRPr lang="en-US" sz="1500" dirty="0">
-              <a:latin typeface="Cambria" panose="02040503050406030204" pitchFamily="18" charset="0"/>
-            </a:endParaRPr>
-          </a:p>
-          <a:p>
-            <a:pPr marL="342900" indent="-342900">
-              <a:lnSpc>
-                <a:spcPct val="102000"/>
-              </a:lnSpc>
-              <a:spcAft>
-                <a:spcPts val="800"/>
-              </a:spcAft>
-              <a:buSzPct val="100000"/>
-              <a:buChar char="•"/>
-            </a:pPr>
-            <a:r>
-              <a:rPr lang="en-US" sz="1550" dirty="0">
-                <a:solidFill>
-                  <a:srgbClr val="1A1A1A"/>
-                </a:solidFill>
-                <a:latin typeface="Cambria" panose="02040503050406030204" pitchFamily="18" charset="0"/>
-                <a:ea typeface="Calibri" pitchFamily="34" charset="-122"/>
-                <a:cs typeface="Calibri" pitchFamily="34" charset="-120"/>
-              </a:rPr>
-              <a:t>Implement the Factory Method pattern and explain how it satisfies OCP.</a:t>
-            </a:r>
-            <a:endParaRPr lang="en-US" sz="1500" dirty="0">
-              <a:latin typeface="Cambria" panose="02040503050406030204" pitchFamily="18" charset="0"/>
-            </a:endParaRPr>
-          </a:p>
-          <a:p>
-            <a:pPr marL="342900" indent="-342900">
-              <a:lnSpc>
-                <a:spcPct val="102000"/>
-              </a:lnSpc>
-              <a:spcAft>
-                <a:spcPts val="800"/>
-              </a:spcAft>
-              <a:buSzPct val="100000"/>
-              <a:buChar char="•"/>
-            </a:pPr>
-            <a:r>
-              <a:rPr lang="en-US" sz="1550" dirty="0">
-                <a:solidFill>
-                  <a:srgbClr val="1A1A1A"/>
-                </a:solidFill>
-                <a:latin typeface="Cambria" panose="02040503050406030204" pitchFamily="18" charset="0"/>
-                <a:ea typeface="Calibri" pitchFamily="34" charset="-122"/>
-                <a:cs typeface="Calibri" pitchFamily="34" charset="-120"/>
-              </a:rPr>
-              <a:t>Implement Abstract Factory and explain how it guarantees product-family consistency.</a:t>
-            </a:r>
-            <a:endParaRPr lang="en-US" sz="1500" dirty="0">
-              <a:latin typeface="Cambria" panose="02040503050406030204" pitchFamily="18" charset="0"/>
-            </a:endParaRPr>
-          </a:p>
-          <a:p>
-            <a:pPr marL="342900" indent="-342900">
-              <a:lnSpc>
-                <a:spcPct val="102000"/>
-              </a:lnSpc>
-              <a:spcAft>
-                <a:spcPts val="800"/>
-              </a:spcAft>
-              <a:buSzPct val="100000"/>
-              <a:buChar char="•"/>
-            </a:pPr>
-            <a:r>
-              <a:rPr lang="en-US" sz="1550" dirty="0">
-                <a:solidFill>
-                  <a:srgbClr val="1A1A1A"/>
-                </a:solidFill>
-                <a:latin typeface="Cambria" panose="02040503050406030204" pitchFamily="18" charset="0"/>
-                <a:ea typeface="Calibri" pitchFamily="34" charset="-122"/>
-                <a:cs typeface="Calibri" pitchFamily="34" charset="-120"/>
-              </a:rPr>
-              <a:t>Apply Singleton, Factory Method, and Abstract Factory to UniRide in code.</a:t>
-            </a:r>
-            <a:endParaRPr lang="en-US" sz="1500" dirty="0">
-              <a:latin typeface="Cambria" panose="02040503050406030204" pitchFamily="18" charset="0"/>
-            </a:endParaRPr>
-          </a:p>
-        </p:txBody>
-      </p:sp>
-    </p:spTree>
-  </p:cSld>
-  <p:clrMapOvr>
-    <a:masterClrMapping/>
-  </p:clrMapOvr>
-</p:sld>
-</file>
-
-<file path=ppt/slides/slide30.xml><?xml version="1.0" encoding="utf-8"?>
+<file path=ppt/slides/slide34.xml><?xml version="1.0" encoding="utf-8"?>
 <p:sld xmlns:a="http://schemas.openxmlformats.org/drawingml/2006/main" xmlns:r="http://schemas.openxmlformats.org/officeDocument/2006/relationships" xmlns:p="http://schemas.openxmlformats.org/presentationml/2006/main">
   <p:cSld name="Slide 30">
     <p:bg>
@@ -22980,15 +26473,7 @@
 
 <file path=ppt/slides/slide9.xml><?xml version="1.0" encoding="utf-8"?>
 <p:sld xmlns:a="http://schemas.openxmlformats.org/drawingml/2006/main" xmlns:r="http://schemas.openxmlformats.org/officeDocument/2006/relationships" xmlns:p="http://schemas.openxmlformats.org/presentationml/2006/main">
-  <p:cSld name="Slide 9">
-    <p:bg>
-      <p:bgPr>
-        <a:solidFill>
-          <a:srgbClr val="FFFFFF"/>
-        </a:solidFill>
-        <a:effectLst/>
-      </p:bgPr>
-    </p:bg>
+  <p:cSld>
     <p:spTree>
       <p:nvGrpSpPr>
         <p:cNvPr id="1" name=""/>
@@ -23005,7 +26490,7 @@
       </p:grpSpPr>
       <p:sp>
         <p:nvSpPr>
-          <p:cNvPr id="2" name="Shape 0"/>
+          <p:cNvPr id="2" name="Rectangle 1"/>
           <p:cNvSpPr/>
           <p:nvPr/>
         </p:nvSpPr>
@@ -23020,19 +26505,37 @@
           <a:solidFill>
             <a:srgbClr val="23242B"/>
           </a:solidFill>
-          <a:ln/>
-        </p:spPr>
-        <p:txBody>
-          <a:bodyPr/>
-          <a:lstStyle/>
-          <a:p>
-            <a:endParaRPr lang="en-US"/>
-          </a:p>
-        </p:txBody>
-      </p:sp>
-      <p:sp>
-        <p:nvSpPr>
-          <p:cNvPr id="3" name="Shape 1"/>
+          <a:ln>
+            <a:noFill/>
+          </a:ln>
+          <a:effectLst/>
+        </p:spPr>
+        <p:style>
+          <a:lnRef idx="1">
+            <a:schemeClr val="accent1"/>
+          </a:lnRef>
+          <a:fillRef idx="3">
+            <a:schemeClr val="accent1"/>
+          </a:fillRef>
+          <a:effectRef idx="2">
+            <a:schemeClr val="accent1"/>
+          </a:effectRef>
+          <a:fontRef idx="minor">
+            <a:schemeClr val="lt1"/>
+          </a:fontRef>
+        </p:style>
+        <p:txBody>
+          <a:bodyPr rtlCol="0" anchor="ctr"/>
+          <a:lstStyle/>
+          <a:p>
+            <a:pPr algn="ctr"/>
+            <a:endParaRPr/>
+          </a:p>
+        </p:txBody>
+      </p:sp>
+      <p:sp>
+        <p:nvSpPr>
+          <p:cNvPr id="3" name="Rectangle 2"/>
           <p:cNvSpPr/>
           <p:nvPr/>
         </p:nvSpPr>
@@ -23045,30 +26548,46 @@
             <a:avLst/>
           </a:prstGeom>
           <a:solidFill>
-            <a:srgbClr val="4A4C57">
-              <a:alpha val="45000"/>
-            </a:srgbClr>
+            <a:srgbClr val="4A4C57"/>
           </a:solidFill>
-          <a:ln/>
-        </p:spPr>
-        <p:txBody>
-          <a:bodyPr/>
-          <a:lstStyle/>
-          <a:p>
-            <a:endParaRPr lang="en-US"/>
+          <a:ln>
+            <a:noFill/>
+          </a:ln>
+          <a:effectLst/>
+        </p:spPr>
+        <p:style>
+          <a:lnRef idx="1">
+            <a:schemeClr val="accent1"/>
+          </a:lnRef>
+          <a:fillRef idx="3">
+            <a:schemeClr val="accent1"/>
+          </a:fillRef>
+          <a:effectRef idx="2">
+            <a:schemeClr val="accent1"/>
+          </a:effectRef>
+          <a:fontRef idx="minor">
+            <a:schemeClr val="lt1"/>
+          </a:fontRef>
+        </p:style>
+        <p:txBody>
+          <a:bodyPr rtlCol="0" anchor="ctr"/>
+          <a:lstStyle/>
+          <a:p>
+            <a:pPr algn="ctr"/>
+            <a:endParaRPr/>
           </a:p>
         </p:txBody>
       </p:sp>
       <p:pic>
         <p:nvPicPr>
-          <p:cNvPr id="4" name="Image 0" descr="/home/claude/aiub_logo.png"/>
+          <p:cNvPr id="4" name="Picture 3" descr="image.png"/>
           <p:cNvPicPr>
             <a:picLocks noChangeAspect="1"/>
           </p:cNvPicPr>
           <p:nvPr/>
         </p:nvPicPr>
         <p:blipFill>
-          <a:blip r:embed="rId3"/>
+          <a:blip r:embed="rId2"/>
           <a:stretch>
             <a:fillRect/>
           </a:stretch>
@@ -23085,47 +26604,55 @@
       </p:pic>
       <p:sp>
         <p:nvSpPr>
-          <p:cNvPr id="5" name="Text 2"/>
-          <p:cNvSpPr/>
+          <p:cNvPr id="5" name="TextBox 4"/>
+          <p:cNvSpPr txBox="1"/>
           <p:nvPr/>
         </p:nvSpPr>
         <p:spPr>
           <a:xfrm>
             <a:off x="502920" y="0"/>
-            <a:ext cx="8001000" cy="932688"/>
+            <a:ext cx="7406640" cy="932688"/>
           </a:xfrm>
           <a:prstGeom prst="rect">
             <a:avLst/>
           </a:prstGeom>
           <a:noFill/>
-          <a:ln/>
-        </p:spPr>
-        <p:txBody>
-          <a:bodyPr wrap="square" rtlCol="0" anchor="ctr"/>
-          <a:lstStyle/>
-          <a:p>
-            <a:pPr marL="0" indent="0" algn="l">
-              <a:buNone/>
-            </a:pPr>
-            <a:r>
-              <a:rPr lang="en-US" sz="2500" dirty="0">
+        </p:spPr>
+        <p:txBody>
+          <a:bodyPr wrap="square" lIns="45720" tIns="18288" rIns="45720" bIns="18288" anchor="ctr">
+            <a:spAutoFit/>
+          </a:bodyPr>
+          <a:lstStyle/>
+          <a:p>
+            <a:pPr algn="l"/>
+            <a:r>
+              <a:rPr sz="2300" b="0" i="0">
                 <a:solidFill>
                   <a:srgbClr val="FFFFFF"/>
                 </a:solidFill>
-                <a:latin typeface="Cambria" pitchFamily="34" charset="0"/>
-                <a:ea typeface="Cambria" pitchFamily="34" charset="-122"/>
-                <a:cs typeface="Cambria" pitchFamily="34" charset="-120"/>
-              </a:rPr>
-              <a:t>Singleton — Thread-safe TypeScript</a:t>
-            </a:r>
-            <a:endParaRPr lang="en-US" sz="2500" dirty="0"/>
-          </a:p>
-        </p:txBody>
-      </p:sp>
-      <p:sp>
-        <p:nvSpPr>
-          <p:cNvPr id="6" name="Text 3"/>
-          <p:cNvSpPr/>
+                <a:latin typeface="Calibri"/>
+              </a:rPr>
+              <a:t>Singleton — one shared instance</a:t>
+            </a:r>
+          </a:p>
+          <a:p>
+            <a:pPr algn="l"/>
+            <a:r>
+              <a:rPr sz="1100" b="0" i="1">
+                <a:solidFill>
+                  <a:srgbClr val="CADCFC"/>
+                </a:solidFill>
+                <a:latin typeface="Calibri"/>
+              </a:rPr>
+              <a:t>every module gets the same object, never a new copy</a:t>
+            </a:r>
+          </a:p>
+        </p:txBody>
+      </p:sp>
+      <p:sp>
+        <p:nvSpPr>
+          <p:cNvPr id="6" name="TextBox 5"/>
+          <p:cNvSpPr txBox="1"/>
           <p:nvPr/>
         </p:nvSpPr>
         <p:spPr>
@@ -23137,34 +26664,30 @@
             <a:avLst/>
           </a:prstGeom>
           <a:noFill/>
-          <a:ln/>
-        </p:spPr>
-        <p:txBody>
-          <a:bodyPr wrap="square" rtlCol="0" anchor="ctr"/>
-          <a:lstStyle/>
-          <a:p>
-            <a:pPr marL="0" indent="0" algn="l">
-              <a:buNone/>
-            </a:pPr>
-            <a:r>
-              <a:rPr lang="en-US" sz="800" dirty="0">
+        </p:spPr>
+        <p:txBody>
+          <a:bodyPr wrap="square" lIns="45720" tIns="18288" rIns="45720" bIns="18288" anchor="ctr">
+            <a:spAutoFit/>
+          </a:bodyPr>
+          <a:lstStyle/>
+          <a:p>
+            <a:pPr algn="l"/>
+            <a:r>
+              <a:rPr sz="800" b="0" i="0">
                 <a:solidFill>
                   <a:srgbClr val="9A9CA3"/>
                 </a:solidFill>
-                <a:latin typeface="Calibri" pitchFamily="34" charset="0"/>
-                <a:ea typeface="Calibri" pitchFamily="34" charset="-122"/>
-                <a:cs typeface="Calibri" pitchFamily="34" charset="-120"/>
-              </a:rPr>
-              <a:t>CSC 4273  ·  Software Architecture &amp; Design Patterns  ·  AIUB</a:t>
-            </a:r>
-            <a:endParaRPr lang="en-US" sz="800" dirty="0"/>
-          </a:p>
-        </p:txBody>
-      </p:sp>
-      <p:sp>
-        <p:nvSpPr>
-          <p:cNvPr id="7" name="Text 4"/>
-          <p:cNvSpPr/>
+                <a:latin typeface="Calibri"/>
+              </a:rPr>
+              <a:t>CSC 4273   ·   Software Architecture &amp; Design Patterns   ·   AIUB</a:t>
+            </a:r>
+          </a:p>
+        </p:txBody>
+      </p:sp>
+      <p:sp>
+        <p:nvSpPr>
+          <p:cNvPr id="7" name="TextBox 6"/>
+          <p:cNvSpPr txBox="1"/>
           <p:nvPr/>
         </p:nvSpPr>
         <p:spPr>
@@ -23176,445 +26699,409 @@
             <a:avLst/>
           </a:prstGeom>
           <a:noFill/>
-          <a:ln/>
-        </p:spPr>
-        <p:txBody>
-          <a:bodyPr wrap="square" rtlCol="0" anchor="ctr"/>
-          <a:lstStyle/>
-          <a:p>
-            <a:pPr marL="0" indent="0" algn="r">
-              <a:buNone/>
-            </a:pPr>
-            <a:r>
-              <a:rPr lang="en-US" sz="800" dirty="0">
+        </p:spPr>
+        <p:txBody>
+          <a:bodyPr wrap="square" lIns="45720" tIns="18288" rIns="45720" bIns="18288" anchor="ctr">
+            <a:spAutoFit/>
+          </a:bodyPr>
+          <a:lstStyle/>
+          <a:p>
+            <a:pPr algn="r"/>
+            <a:r>
+              <a:rPr sz="800" b="0" i="0">
                 <a:solidFill>
                   <a:srgbClr val="9A9CA3"/>
                 </a:solidFill>
-                <a:latin typeface="Calibri" pitchFamily="34" charset="0"/>
-                <a:ea typeface="Calibri" pitchFamily="34" charset="-122"/>
-                <a:cs typeface="Calibri" pitchFamily="34" charset="-120"/>
+                <a:latin typeface="Calibri"/>
               </a:rPr>
               <a:t>Week 3</a:t>
             </a:r>
-            <a:endParaRPr lang="en-US" sz="800" dirty="0"/>
-          </a:p>
-        </p:txBody>
-      </p:sp>
-      <p:sp>
-        <p:nvSpPr>
-          <p:cNvPr id="8" name="Shape 5"/>
-          <p:cNvSpPr/>
-          <p:nvPr/>
-        </p:nvSpPr>
-        <p:spPr>
-          <a:xfrm>
-            <a:off x="502920" y="1133856"/>
-            <a:ext cx="8138160" cy="4206240"/>
+          </a:p>
+        </p:txBody>
+      </p:sp>
+      <p:sp>
+        <p:nvSpPr>
+          <p:cNvPr id="8" name="Rounded Rectangle 7"/>
+          <p:cNvSpPr/>
+          <p:nvPr/>
+        </p:nvSpPr>
+        <p:spPr>
+          <a:xfrm>
+            <a:off x="640080" y="1645920"/>
+            <a:ext cx="2194560" cy="566928"/>
           </a:xfrm>
           <a:prstGeom prst="roundRect">
             <a:avLst>
-              <a:gd name="adj" fmla="val 1304"/>
+              <a:gd name="adj" fmla="val 8000"/>
             </a:avLst>
           </a:prstGeom>
           <a:solidFill>
-            <a:srgbClr val="F5F5F7"/>
+            <a:srgbClr val="F1EFE8"/>
           </a:solidFill>
           <a:ln w="12700">
             <a:solidFill>
-              <a:srgbClr val="D9DBE2"/>
+              <a:srgbClr val="5F5E5A"/>
             </a:solidFill>
-            <a:prstDash val="solid"/>
           </a:ln>
-        </p:spPr>
-        <p:txBody>
-          <a:bodyPr/>
-          <a:lstStyle/>
-          <a:p>
-            <a:endParaRPr lang="en-US"/>
-          </a:p>
-        </p:txBody>
-      </p:sp>
-      <p:sp>
-        <p:nvSpPr>
-          <p:cNvPr id="9" name="Text 6"/>
-          <p:cNvSpPr/>
-          <p:nvPr/>
-        </p:nvSpPr>
-        <p:spPr>
-          <a:xfrm>
-            <a:off x="667512" y="1225296"/>
-            <a:ext cx="7808976" cy="4023360"/>
+          <a:effectLst/>
+        </p:spPr>
+        <p:style>
+          <a:lnRef idx="1">
+            <a:schemeClr val="accent1"/>
+          </a:lnRef>
+          <a:fillRef idx="3">
+            <a:schemeClr val="accent1"/>
+          </a:fillRef>
+          <a:effectRef idx="2">
+            <a:schemeClr val="accent1"/>
+          </a:effectRef>
+          <a:fontRef idx="minor">
+            <a:schemeClr val="lt1"/>
+          </a:fontRef>
+        </p:style>
+        <p:txBody>
+          <a:bodyPr wrap="square" lIns="45720" tIns="18288" rIns="45720" bIns="18288" rtlCol="0" anchor="ctr"/>
+          <a:lstStyle/>
+          <a:p>
+            <a:pPr algn="ctr"/>
+            <a:r>
+              <a:rPr sz="1300" b="1" i="0">
+                <a:solidFill>
+                  <a:srgbClr val="444441"/>
+                </a:solidFill>
+                <a:latin typeface="Calibri"/>
+              </a:rPr>
+              <a:t>Booking</a:t>
+            </a:r>
+          </a:p>
+        </p:txBody>
+      </p:sp>
+      <p:sp>
+        <p:nvSpPr>
+          <p:cNvPr id="9" name="Rounded Rectangle 8"/>
+          <p:cNvSpPr/>
+          <p:nvPr/>
+        </p:nvSpPr>
+        <p:spPr>
+          <a:xfrm>
+            <a:off x="3474720" y="1645920"/>
+            <a:ext cx="2194560" cy="566928"/>
+          </a:xfrm>
+          <a:prstGeom prst="roundRect">
+            <a:avLst>
+              <a:gd name="adj" fmla="val 8000"/>
+            </a:avLst>
+          </a:prstGeom>
+          <a:solidFill>
+            <a:srgbClr val="F1EFE8"/>
+          </a:solidFill>
+          <a:ln w="12700">
+            <a:solidFill>
+              <a:srgbClr val="5F5E5A"/>
+            </a:solidFill>
+          </a:ln>
+          <a:effectLst/>
+        </p:spPr>
+        <p:style>
+          <a:lnRef idx="1">
+            <a:schemeClr val="accent1"/>
+          </a:lnRef>
+          <a:fillRef idx="3">
+            <a:schemeClr val="accent1"/>
+          </a:fillRef>
+          <a:effectRef idx="2">
+            <a:schemeClr val="accent1"/>
+          </a:effectRef>
+          <a:fontRef idx="minor">
+            <a:schemeClr val="lt1"/>
+          </a:fontRef>
+        </p:style>
+        <p:txBody>
+          <a:bodyPr wrap="square" lIns="45720" tIns="18288" rIns="45720" bIns="18288" rtlCol="0" anchor="ctr"/>
+          <a:lstStyle/>
+          <a:p>
+            <a:pPr algn="ctr"/>
+            <a:r>
+              <a:rPr sz="1300" b="1" i="0">
+                <a:solidFill>
+                  <a:srgbClr val="444441"/>
+                </a:solidFill>
+                <a:latin typeface="Calibri"/>
+              </a:rPr>
+              <a:t>Payments</a:t>
+            </a:r>
+          </a:p>
+        </p:txBody>
+      </p:sp>
+      <p:sp>
+        <p:nvSpPr>
+          <p:cNvPr id="10" name="Rounded Rectangle 9"/>
+          <p:cNvSpPr/>
+          <p:nvPr/>
+        </p:nvSpPr>
+        <p:spPr>
+          <a:xfrm>
+            <a:off x="6309360" y="1645920"/>
+            <a:ext cx="2194560" cy="566928"/>
+          </a:xfrm>
+          <a:prstGeom prst="roundRect">
+            <a:avLst>
+              <a:gd name="adj" fmla="val 8000"/>
+            </a:avLst>
+          </a:prstGeom>
+          <a:solidFill>
+            <a:srgbClr val="F1EFE8"/>
+          </a:solidFill>
+          <a:ln w="12700">
+            <a:solidFill>
+              <a:srgbClr val="5F5E5A"/>
+            </a:solidFill>
+          </a:ln>
+          <a:effectLst/>
+        </p:spPr>
+        <p:style>
+          <a:lnRef idx="1">
+            <a:schemeClr val="accent1"/>
+          </a:lnRef>
+          <a:fillRef idx="3">
+            <a:schemeClr val="accent1"/>
+          </a:fillRef>
+          <a:effectRef idx="2">
+            <a:schemeClr val="accent1"/>
+          </a:effectRef>
+          <a:fontRef idx="minor">
+            <a:schemeClr val="lt1"/>
+          </a:fontRef>
+        </p:style>
+        <p:txBody>
+          <a:bodyPr wrap="square" lIns="45720" tIns="18288" rIns="45720" bIns="18288" rtlCol="0" anchor="ctr"/>
+          <a:lstStyle/>
+          <a:p>
+            <a:pPr algn="ctr"/>
+            <a:r>
+              <a:rPr sz="1300" b="1" i="0">
+                <a:solidFill>
+                  <a:srgbClr val="444441"/>
+                </a:solidFill>
+                <a:latin typeface="Calibri"/>
+              </a:rPr>
+              <a:t>Matching</a:t>
+            </a:r>
+          </a:p>
+        </p:txBody>
+      </p:sp>
+      <p:sp>
+        <p:nvSpPr>
+          <p:cNvPr id="11" name="Rounded Rectangle 10"/>
+          <p:cNvSpPr/>
+          <p:nvPr/>
+        </p:nvSpPr>
+        <p:spPr>
+          <a:xfrm>
+            <a:off x="3383280" y="3383280"/>
+            <a:ext cx="2377440" cy="914400"/>
+          </a:xfrm>
+          <a:prstGeom prst="roundRect">
+            <a:avLst>
+              <a:gd name="adj" fmla="val 8000"/>
+            </a:avLst>
+          </a:prstGeom>
+          <a:solidFill>
+            <a:srgbClr val="E1F5EE"/>
+          </a:solidFill>
+          <a:ln w="28575">
+            <a:solidFill>
+              <a:srgbClr val="0F6E56"/>
+            </a:solidFill>
+          </a:ln>
+          <a:effectLst/>
+        </p:spPr>
+        <p:style>
+          <a:lnRef idx="1">
+            <a:schemeClr val="accent1"/>
+          </a:lnRef>
+          <a:fillRef idx="3">
+            <a:schemeClr val="accent1"/>
+          </a:fillRef>
+          <a:effectRef idx="2">
+            <a:schemeClr val="accent1"/>
+          </a:effectRef>
+          <a:fontRef idx="minor">
+            <a:schemeClr val="lt1"/>
+          </a:fontRef>
+        </p:style>
+        <p:txBody>
+          <a:bodyPr wrap="square" lIns="45720" tIns="18288" rIns="45720" bIns="18288" rtlCol="0" anchor="ctr"/>
+          <a:lstStyle/>
+          <a:p>
+            <a:pPr algn="ctr"/>
+            <a:r>
+              <a:rPr sz="1300" b="1" i="0">
+                <a:solidFill>
+                  <a:srgbClr val="085041"/>
+                </a:solidFill>
+                <a:latin typeface="Calibri"/>
+              </a:rPr>
+              <a:t>AppConfig</a:t>
+            </a:r>
+          </a:p>
+          <a:p>
+            <a:pPr algn="ctr"/>
+            <a:r>
+              <a:rPr sz="1000" b="0" i="1">
+                <a:solidFill>
+                  <a:srgbClr val="0F6E56"/>
+                </a:solidFill>
+                <a:latin typeface="Calibri"/>
+              </a:rPr>
+              <a:t>one shared instance</a:t>
+            </a:r>
+          </a:p>
+        </p:txBody>
+      </p:sp>
+      <p:cxnSp>
+        <p:nvCxnSpPr>
+          <p:cNvPr id="12" name="Connector 11"/>
+          <p:cNvCxnSpPr/>
+          <p:nvPr/>
+        </p:nvCxnSpPr>
+        <p:spPr>
+          <a:xfrm>
+            <a:off x="1737360" y="2212848"/>
+            <a:ext cx="2194560" cy="1170432"/>
+          </a:xfrm>
+          <a:prstGeom prst="line">
+            <a:avLst/>
+          </a:prstGeom>
+          <a:ln w="15875">
+            <a:solidFill>
+              <a:srgbClr val="5A5C66"/>
+            </a:solidFill>
+            <a:tailEnd type="triangle" w="med" len="med"/>
+          </a:ln>
+          <a:effectLst/>
+        </p:spPr>
+        <p:style>
+          <a:lnRef idx="2">
+            <a:schemeClr val="accent1"/>
+          </a:lnRef>
+          <a:fillRef idx="0">
+            <a:schemeClr val="accent1"/>
+          </a:fillRef>
+          <a:effectRef idx="1">
+            <a:schemeClr val="accent1"/>
+          </a:effectRef>
+          <a:fontRef idx="minor">
+            <a:schemeClr val="tx1"/>
+          </a:fontRef>
+        </p:style>
+      </p:cxnSp>
+      <p:cxnSp>
+        <p:nvCxnSpPr>
+          <p:cNvPr id="13" name="Connector 12"/>
+          <p:cNvCxnSpPr/>
+          <p:nvPr/>
+        </p:nvCxnSpPr>
+        <p:spPr>
+          <a:xfrm>
+            <a:off x="4572000" y="2212848"/>
+            <a:ext cx="0" cy="1170432"/>
+          </a:xfrm>
+          <a:prstGeom prst="line">
+            <a:avLst/>
+          </a:prstGeom>
+          <a:ln w="15875">
+            <a:solidFill>
+              <a:srgbClr val="5A5C66"/>
+            </a:solidFill>
+            <a:tailEnd type="triangle" w="med" len="med"/>
+          </a:ln>
+          <a:effectLst/>
+        </p:spPr>
+        <p:style>
+          <a:lnRef idx="2">
+            <a:schemeClr val="accent1"/>
+          </a:lnRef>
+          <a:fillRef idx="0">
+            <a:schemeClr val="accent1"/>
+          </a:fillRef>
+          <a:effectRef idx="1">
+            <a:schemeClr val="accent1"/>
+          </a:effectRef>
+          <a:fontRef idx="minor">
+            <a:schemeClr val="tx1"/>
+          </a:fontRef>
+        </p:style>
+      </p:cxnSp>
+      <p:cxnSp>
+        <p:nvCxnSpPr>
+          <p:cNvPr id="14" name="Connector 13"/>
+          <p:cNvCxnSpPr/>
+          <p:nvPr/>
+        </p:nvCxnSpPr>
+        <p:spPr>
+          <a:xfrm flipH="1">
+            <a:off x="5212080" y="2212848"/>
+            <a:ext cx="2194560" cy="1170432"/>
+          </a:xfrm>
+          <a:prstGeom prst="line">
+            <a:avLst/>
+          </a:prstGeom>
+          <a:ln w="15875">
+            <a:solidFill>
+              <a:srgbClr val="5A5C66"/>
+            </a:solidFill>
+            <a:tailEnd type="triangle" w="med" len="med"/>
+          </a:ln>
+          <a:effectLst/>
+        </p:spPr>
+        <p:style>
+          <a:lnRef idx="2">
+            <a:schemeClr val="accent1"/>
+          </a:lnRef>
+          <a:fillRef idx="0">
+            <a:schemeClr val="accent1"/>
+          </a:fillRef>
+          <a:effectRef idx="1">
+            <a:schemeClr val="accent1"/>
+          </a:effectRef>
+          <a:fontRef idx="minor">
+            <a:schemeClr val="tx1"/>
+          </a:fontRef>
+        </p:style>
+      </p:cxnSp>
+      <p:sp>
+        <p:nvSpPr>
+          <p:cNvPr id="15" name="TextBox 14"/>
+          <p:cNvSpPr txBox="1"/>
+          <p:nvPr/>
+        </p:nvSpPr>
+        <p:spPr>
+          <a:xfrm>
+            <a:off x="2468880" y="4572000"/>
+            <a:ext cx="4206240" cy="237744"/>
           </a:xfrm>
           <a:prstGeom prst="rect">
             <a:avLst/>
           </a:prstGeom>
           <a:noFill/>
-          <a:ln/>
-        </p:spPr>
-        <p:txBody>
-          <a:bodyPr wrap="square" rtlCol="0" anchor="t"/>
-          <a:lstStyle/>
-          <a:p>
-            <a:pPr marL="0" indent="0">
-              <a:lnSpc>
-                <a:spcPct val="100000"/>
-              </a:lnSpc>
-              <a:buNone/>
-            </a:pPr>
-            <a:r>
-              <a:rPr lang="en-US" sz="1400" dirty="0">
-                <a:solidFill>
-                  <a:srgbClr val="1E1E22"/>
-                </a:solidFill>
-                <a:latin typeface="Consolas" pitchFamily="34" charset="0"/>
-                <a:ea typeface="Consolas" pitchFamily="34" charset="-122"/>
-                <a:cs typeface="Consolas" pitchFamily="34" charset="-120"/>
-              </a:rPr>
-              <a:t>class DatabaseConnection {</a:t>
-            </a:r>
-            <a:endParaRPr lang="en-US" sz="1400" dirty="0"/>
-          </a:p>
-          <a:p>
-            <a:pPr marL="0" indent="0">
-              <a:lnSpc>
-                <a:spcPct val="100000"/>
-              </a:lnSpc>
-              <a:buNone/>
-            </a:pPr>
-            <a:r>
-              <a:rPr lang="en-US" sz="1400" dirty="0">
-                <a:solidFill>
-                  <a:srgbClr val="1E1E22"/>
-                </a:solidFill>
-                <a:latin typeface="Consolas" pitchFamily="34" charset="0"/>
-                <a:ea typeface="Consolas" pitchFamily="34" charset="-122"/>
-                <a:cs typeface="Consolas" pitchFamily="34" charset="-120"/>
-              </a:rPr>
-              <a:t>  private static instance: DatabaseConnection | null = null;</a:t>
-            </a:r>
-            <a:endParaRPr lang="en-US" sz="1400" dirty="0"/>
-          </a:p>
-          <a:p>
-            <a:pPr marL="0" indent="0">
-              <a:lnSpc>
-                <a:spcPct val="100000"/>
-              </a:lnSpc>
-              <a:buNone/>
-            </a:pPr>
-            <a:r>
-              <a:rPr lang="en-US" sz="1400" dirty="0">
-                <a:solidFill>
-                  <a:srgbClr val="1E1E22"/>
-                </a:solidFill>
-                <a:latin typeface="Consolas" pitchFamily="34" charset="0"/>
-                <a:ea typeface="Consolas" pitchFamily="34" charset="-122"/>
-                <a:cs typeface="Consolas" pitchFamily="34" charset="-120"/>
-              </a:rPr>
-              <a:t>  private constructor(private readonly url: string) {}</a:t>
-            </a:r>
-            <a:endParaRPr lang="en-US" sz="1400" dirty="0"/>
-          </a:p>
-          <a:p>
-            <a:pPr marL="0" indent="0">
-              <a:lnSpc>
-                <a:spcPct val="100000"/>
-              </a:lnSpc>
-              <a:buNone/>
-            </a:pPr>
-            <a:r>
-              <a:rPr lang="en-US" sz="1400" dirty="0">
-                <a:solidFill>
-                  <a:srgbClr val="1E1E22"/>
-                </a:solidFill>
-                <a:latin typeface="Consolas" pitchFamily="34" charset="0"/>
-                <a:ea typeface="Consolas" pitchFamily="34" charset="-122"/>
-                <a:cs typeface="Consolas" pitchFamily="34" charset="-120"/>
-              </a:rPr>
-              <a:t> </a:t>
-            </a:r>
-            <a:endParaRPr lang="en-US" sz="1400" dirty="0"/>
-          </a:p>
-          <a:p>
-            <a:pPr marL="0" indent="0">
-              <a:lnSpc>
-                <a:spcPct val="100000"/>
-              </a:lnSpc>
-              <a:buNone/>
-            </a:pPr>
-            <a:r>
-              <a:rPr lang="en-US" sz="1400" dirty="0">
-                <a:solidFill>
-                  <a:srgbClr val="1E1E22"/>
-                </a:solidFill>
-                <a:latin typeface="Consolas" pitchFamily="34" charset="0"/>
-                <a:ea typeface="Consolas" pitchFamily="34" charset="-122"/>
-                <a:cs typeface="Consolas" pitchFamily="34" charset="-120"/>
-              </a:rPr>
-              <a:t>  static getInstance(url: string): DatabaseConnection {</a:t>
-            </a:r>
-            <a:endParaRPr lang="en-US" sz="1400" dirty="0"/>
-          </a:p>
-          <a:p>
-            <a:pPr marL="0" indent="0">
-              <a:lnSpc>
-                <a:spcPct val="100000"/>
-              </a:lnSpc>
-              <a:buNone/>
-            </a:pPr>
-            <a:r>
-              <a:rPr lang="en-US" sz="1400" dirty="0">
-                <a:solidFill>
-                  <a:srgbClr val="1E1E22"/>
-                </a:solidFill>
-                <a:latin typeface="Consolas" pitchFamily="34" charset="0"/>
-                <a:ea typeface="Consolas" pitchFamily="34" charset="-122"/>
-                <a:cs typeface="Consolas" pitchFamily="34" charset="-120"/>
-              </a:rPr>
-              <a:t>    if (!DatabaseConnection.instance) {</a:t>
-            </a:r>
-            <a:endParaRPr lang="en-US" sz="1400" dirty="0"/>
-          </a:p>
-          <a:p>
-            <a:pPr marL="0" indent="0">
-              <a:lnSpc>
-                <a:spcPct val="100000"/>
-              </a:lnSpc>
-              <a:buNone/>
-            </a:pPr>
-            <a:r>
-              <a:rPr lang="en-US" sz="1400" dirty="0">
-                <a:solidFill>
-                  <a:srgbClr val="1E1E22"/>
-                </a:solidFill>
-                <a:latin typeface="Consolas" pitchFamily="34" charset="0"/>
-                <a:ea typeface="Consolas" pitchFamily="34" charset="-122"/>
-                <a:cs typeface="Consolas" pitchFamily="34" charset="-120"/>
-              </a:rPr>
-              <a:t>      DatabaseConnection.instance = new DatabaseConnection(url);</a:t>
-            </a:r>
-            <a:endParaRPr lang="en-US" sz="1400" dirty="0"/>
-          </a:p>
-          <a:p>
-            <a:pPr marL="0" indent="0">
-              <a:lnSpc>
-                <a:spcPct val="100000"/>
-              </a:lnSpc>
-              <a:buNone/>
-            </a:pPr>
-            <a:r>
-              <a:rPr lang="en-US" sz="1400" dirty="0">
-                <a:solidFill>
-                  <a:srgbClr val="1E1E22"/>
-                </a:solidFill>
-                <a:latin typeface="Consolas" pitchFamily="34" charset="0"/>
-                <a:ea typeface="Consolas" pitchFamily="34" charset="-122"/>
-                <a:cs typeface="Consolas" pitchFamily="34" charset="-120"/>
-              </a:rPr>
-              <a:t>    }</a:t>
-            </a:r>
-            <a:endParaRPr lang="en-US" sz="1400" dirty="0"/>
-          </a:p>
-          <a:p>
-            <a:pPr marL="0" indent="0">
-              <a:lnSpc>
-                <a:spcPct val="100000"/>
-              </a:lnSpc>
-              <a:buNone/>
-            </a:pPr>
-            <a:r>
-              <a:rPr lang="en-US" sz="1400" dirty="0">
-                <a:solidFill>
-                  <a:srgbClr val="1E1E22"/>
-                </a:solidFill>
-                <a:latin typeface="Consolas" pitchFamily="34" charset="0"/>
-                <a:ea typeface="Consolas" pitchFamily="34" charset="-122"/>
-                <a:cs typeface="Consolas" pitchFamily="34" charset="-120"/>
-              </a:rPr>
-              <a:t>    return DatabaseConnection.instance;       // same object every time</a:t>
-            </a:r>
-            <a:endParaRPr lang="en-US" sz="1400" dirty="0"/>
-          </a:p>
-          <a:p>
-            <a:pPr marL="0" indent="0">
-              <a:lnSpc>
-                <a:spcPct val="100000"/>
-              </a:lnSpc>
-              <a:buNone/>
-            </a:pPr>
-            <a:r>
-              <a:rPr lang="en-US" sz="1400" dirty="0">
-                <a:solidFill>
-                  <a:srgbClr val="1E1E22"/>
-                </a:solidFill>
-                <a:latin typeface="Consolas" pitchFamily="34" charset="0"/>
-                <a:ea typeface="Consolas" pitchFamily="34" charset="-122"/>
-                <a:cs typeface="Consolas" pitchFamily="34" charset="-120"/>
-              </a:rPr>
-              <a:t>  }</a:t>
-            </a:r>
-            <a:endParaRPr lang="en-US" sz="1400" dirty="0"/>
-          </a:p>
-          <a:p>
-            <a:pPr marL="0" indent="0">
-              <a:lnSpc>
-                <a:spcPct val="100000"/>
-              </a:lnSpc>
-              <a:buNone/>
-            </a:pPr>
-            <a:r>
-              <a:rPr lang="en-US" sz="1400" dirty="0">
-                <a:solidFill>
-                  <a:srgbClr val="1E1E22"/>
-                </a:solidFill>
-                <a:latin typeface="Consolas" pitchFamily="34" charset="0"/>
-                <a:ea typeface="Consolas" pitchFamily="34" charset="-122"/>
-                <a:cs typeface="Consolas" pitchFamily="34" charset="-120"/>
-              </a:rPr>
-              <a:t>}</a:t>
-            </a:r>
-            <a:endParaRPr lang="en-US" sz="1400" dirty="0"/>
-          </a:p>
-          <a:p>
-            <a:pPr marL="0" indent="0">
-              <a:lnSpc>
-                <a:spcPct val="100000"/>
-              </a:lnSpc>
-              <a:buNone/>
-            </a:pPr>
-            <a:r>
-              <a:rPr lang="en-US" sz="1400" dirty="0">
-                <a:solidFill>
-                  <a:srgbClr val="1E1E22"/>
-                </a:solidFill>
-                <a:latin typeface="Consolas" pitchFamily="34" charset="0"/>
-                <a:ea typeface="Consolas" pitchFamily="34" charset="-122"/>
-                <a:cs typeface="Consolas" pitchFamily="34" charset="-120"/>
-              </a:rPr>
-              <a:t> </a:t>
-            </a:r>
-            <a:endParaRPr lang="en-US" sz="1400" dirty="0"/>
-          </a:p>
-          <a:p>
-            <a:pPr marL="0" indent="0">
-              <a:lnSpc>
-                <a:spcPct val="100000"/>
-              </a:lnSpc>
-              <a:buNone/>
-            </a:pPr>
-            <a:r>
-              <a:rPr lang="en-US" sz="1400" dirty="0">
-                <a:solidFill>
-                  <a:srgbClr val="1E1E22"/>
-                </a:solidFill>
-                <a:latin typeface="Consolas" pitchFamily="34" charset="0"/>
-                <a:ea typeface="Consolas" pitchFamily="34" charset="-122"/>
-                <a:cs typeface="Consolas" pitchFamily="34" charset="-120"/>
-              </a:rPr>
-              <a:t>const db1 = DatabaseConnection.getInstance('postgres://localhost/db');</a:t>
-            </a:r>
-            <a:endParaRPr lang="en-US" sz="1400" dirty="0"/>
-          </a:p>
-          <a:p>
-            <a:pPr marL="0" indent="0">
-              <a:lnSpc>
-                <a:spcPct val="100000"/>
-              </a:lnSpc>
-              <a:buNone/>
-            </a:pPr>
-            <a:r>
-              <a:rPr lang="en-US" sz="1400" dirty="0">
-                <a:solidFill>
-                  <a:srgbClr val="1E1E22"/>
-                </a:solidFill>
-                <a:latin typeface="Consolas" pitchFamily="34" charset="0"/>
-                <a:ea typeface="Consolas" pitchFamily="34" charset="-122"/>
-                <a:cs typeface="Consolas" pitchFamily="34" charset="-120"/>
-              </a:rPr>
-              <a:t>const db2 = DatabaseConnection.getInstance('postgres://localhost/db');</a:t>
-            </a:r>
-            <a:endParaRPr lang="en-US" sz="1400" dirty="0"/>
-          </a:p>
-          <a:p>
-            <a:pPr marL="0" indent="0">
-              <a:lnSpc>
-                <a:spcPct val="100000"/>
-              </a:lnSpc>
-              <a:buNone/>
-            </a:pPr>
-            <a:r>
-              <a:rPr lang="en-US" sz="1400" dirty="0">
-                <a:solidFill>
-                  <a:srgbClr val="1E7A34"/>
-                </a:solidFill>
-                <a:latin typeface="Consolas" pitchFamily="34" charset="0"/>
-                <a:ea typeface="Consolas" pitchFamily="34" charset="-122"/>
-                <a:cs typeface="Consolas" pitchFamily="34" charset="-120"/>
-              </a:rPr>
-              <a:t>console.log(db1 === db2);   // true — reference equality, ONE object</a:t>
-            </a:r>
-            <a:endParaRPr lang="en-US" sz="1400" dirty="0"/>
-          </a:p>
-        </p:txBody>
-      </p:sp>
-      <p:sp>
-        <p:nvSpPr>
-          <p:cNvPr id="10" name="Text 7"/>
-          <p:cNvSpPr/>
-          <p:nvPr/>
-        </p:nvSpPr>
-        <p:spPr>
-          <a:xfrm>
-            <a:off x="502920" y="5449824"/>
-            <a:ext cx="8138160" cy="1060704"/>
-          </a:xfrm>
-          <a:prstGeom prst="rect">
-            <a:avLst/>
-          </a:prstGeom>
-          <a:noFill/>
-          <a:ln/>
-        </p:spPr>
-        <p:txBody>
-          <a:bodyPr wrap="square" rtlCol="0" anchor="t"/>
-          <a:lstStyle/>
-          <a:p>
-            <a:pPr marL="0" indent="0">
-              <a:spcAft>
-                <a:spcPts val="300"/>
-              </a:spcAft>
-              <a:buNone/>
-            </a:pPr>
-            <a:r>
-              <a:rPr lang="en-US" sz="1200" dirty="0">
-                <a:solidFill>
-                  <a:srgbClr val="1A1A1A"/>
-                </a:solidFill>
-                <a:latin typeface="Calibri" pitchFamily="34" charset="0"/>
-                <a:ea typeface="Calibri" pitchFamily="34" charset="-122"/>
-                <a:cs typeface="Calibri" pitchFamily="34" charset="-120"/>
-              </a:rPr>
-              <a:t>Node.js is single-threaded, so the simple null check is enough (no double-checked</a:t>
-            </a:r>
-            <a:endParaRPr lang="en-US" sz="1200" dirty="0"/>
-          </a:p>
-          <a:p>
-            <a:pPr marL="0" indent="0">
-              <a:spcAft>
-                <a:spcPts val="300"/>
-              </a:spcAft>
-              <a:buNone/>
-            </a:pPr>
-            <a:r>
-              <a:rPr lang="en-US" sz="1200" b="1" dirty="0">
-                <a:solidFill>
-                  <a:srgbClr val="242852"/>
-                </a:solidFill>
-                <a:latin typeface="Calibri" pitchFamily="34" charset="0"/>
-                <a:ea typeface="Calibri" pitchFamily="34" charset="-122"/>
-                <a:cs typeface="Calibri" pitchFamily="34" charset="-120"/>
-              </a:rPr>
-              <a:t>locking). Add a static resetForTesting() — in tests only — to clear the instance.</a:t>
-            </a:r>
-            <a:endParaRPr lang="en-US" sz="1200" dirty="0"/>
+        </p:spPr>
+        <p:txBody>
+          <a:bodyPr wrap="square" lIns="45720" tIns="18288" rIns="45720" bIns="18288" anchor="ctr">
+            <a:spAutoFit/>
+          </a:bodyPr>
+          <a:lstStyle/>
+          <a:p>
+            <a:pPr algn="ctr"/>
+            <a:r>
+              <a:rPr sz="950" b="0" i="1">
+                <a:solidFill>
+                  <a:srgbClr val="5A5C66"/>
+                </a:solidFill>
+                <a:latin typeface="Calibri"/>
+              </a:rPr>
+              <a:t>getInstance() always returns the same object</a:t>
+            </a:r>
           </a:p>
         </p:txBody>
       </p:sp>

--- a/week-3/Week_03_SADP_Creational_Patterns_details.pptx
+++ b/week-3/Week_03_SADP_Creational_Patterns_details.pptx
@@ -28,13 +28,13 @@
     <p:sldId id="271" r:id="rId19"/>
     <p:sldId id="272" r:id="rId20"/>
     <p:sldId id="273" r:id="rId21"/>
-    <p:sldId id="274" r:id="rId22"/>
-    <p:sldId id="288" r:id="rId23"/>
+    <p:sldId id="288" r:id="rId22"/>
+    <p:sldId id="274" r:id="rId23"/>
     <p:sldId id="275" r:id="rId24"/>
     <p:sldId id="276" r:id="rId25"/>
     <p:sldId id="277" r:id="rId26"/>
-    <p:sldId id="289" r:id="rId27"/>
-    <p:sldId id="278" r:id="rId28"/>
+    <p:sldId id="278" r:id="rId27"/>
+    <p:sldId id="289" r:id="rId28"/>
     <p:sldId id="279" r:id="rId29"/>
     <p:sldId id="280" r:id="rId30"/>
     <p:sldId id="281" r:id="rId31"/>
@@ -1175,7 +1175,7 @@
           <a:p>
             <a:fld id="{F7021451-1387-4CA6-816F-3879F97B5CBC}" type="slidenum">
               <a:rPr lang="en-US"/>
-              <a:t>21</a:t>
+              <a:t>22</a:t>
             </a:fld>
             <a:endParaRPr lang="en-US"/>
           </a:p>
@@ -1595,7 +1595,7 @@
           <a:p>
             <a:fld id="{F7021451-1387-4CA6-816F-3879F97B5CBC}" type="slidenum">
               <a:rPr lang="en-US"/>
-              <a:t>27</a:t>
+              <a:t>26</a:t>
             </a:fld>
             <a:endParaRPr lang="en-US"/>
           </a:p>
@@ -11276,6 +11276,973 @@
 
 <file path=ppt/slides/slide21.xml><?xml version="1.0" encoding="utf-8"?>
 <p:sld xmlns:a="http://schemas.openxmlformats.org/drawingml/2006/main" xmlns:r="http://schemas.openxmlformats.org/officeDocument/2006/relationships" xmlns:p="http://schemas.openxmlformats.org/presentationml/2006/main">
+  <p:cSld>
+    <p:spTree>
+      <p:nvGrpSpPr>
+        <p:cNvPr id="1" name=""/>
+        <p:cNvGrpSpPr/>
+        <p:nvPr/>
+      </p:nvGrpSpPr>
+      <p:grpSpPr>
+        <a:xfrm>
+          <a:off x="0" y="0"/>
+          <a:ext cx="0" cy="0"/>
+          <a:chOff x="0" y="0"/>
+          <a:chExt cx="0" cy="0"/>
+        </a:xfrm>
+      </p:grpSpPr>
+      <p:sp>
+        <p:nvSpPr>
+          <p:cNvPr id="2" name="Rectangle 1"/>
+          <p:cNvSpPr/>
+          <p:nvPr/>
+        </p:nvSpPr>
+        <p:spPr>
+          <a:xfrm>
+            <a:off x="0" y="0"/>
+            <a:ext cx="9144000" cy="932688"/>
+          </a:xfrm>
+          <a:prstGeom prst="rect">
+            <a:avLst/>
+          </a:prstGeom>
+          <a:solidFill>
+            <a:srgbClr val="23242B"/>
+          </a:solidFill>
+          <a:ln>
+            <a:noFill/>
+          </a:ln>
+          <a:effectLst/>
+        </p:spPr>
+        <p:style>
+          <a:lnRef idx="1">
+            <a:schemeClr val="accent1"/>
+          </a:lnRef>
+          <a:fillRef idx="3">
+            <a:schemeClr val="accent1"/>
+          </a:fillRef>
+          <a:effectRef idx="2">
+            <a:schemeClr val="accent1"/>
+          </a:effectRef>
+          <a:fontRef idx="minor">
+            <a:schemeClr val="lt1"/>
+          </a:fontRef>
+        </p:style>
+        <p:txBody>
+          <a:bodyPr rtlCol="0" anchor="ctr"/>
+          <a:lstStyle/>
+          <a:p>
+            <a:pPr algn="ctr"/>
+            <a:endParaRPr/>
+          </a:p>
+        </p:txBody>
+      </p:sp>
+      <p:sp>
+        <p:nvSpPr>
+          <p:cNvPr id="3" name="Rectangle 2"/>
+          <p:cNvSpPr/>
+          <p:nvPr/>
+        </p:nvSpPr>
+        <p:spPr>
+          <a:xfrm>
+            <a:off x="4114800" y="0"/>
+            <a:ext cx="5029200" cy="932688"/>
+          </a:xfrm>
+          <a:prstGeom prst="rect">
+            <a:avLst/>
+          </a:prstGeom>
+          <a:solidFill>
+            <a:srgbClr val="4A4C57"/>
+          </a:solidFill>
+          <a:ln>
+            <a:noFill/>
+          </a:ln>
+          <a:effectLst/>
+        </p:spPr>
+        <p:style>
+          <a:lnRef idx="1">
+            <a:schemeClr val="accent1"/>
+          </a:lnRef>
+          <a:fillRef idx="3">
+            <a:schemeClr val="accent1"/>
+          </a:fillRef>
+          <a:effectRef idx="2">
+            <a:schemeClr val="accent1"/>
+          </a:effectRef>
+          <a:fontRef idx="minor">
+            <a:schemeClr val="lt1"/>
+          </a:fontRef>
+        </p:style>
+        <p:txBody>
+          <a:bodyPr rtlCol="0" anchor="ctr"/>
+          <a:lstStyle/>
+          <a:p>
+            <a:pPr algn="ctr"/>
+            <a:endParaRPr/>
+          </a:p>
+        </p:txBody>
+      </p:sp>
+      <p:pic>
+        <p:nvPicPr>
+          <p:cNvPr id="4" name="Picture 3" descr="image.png"/>
+          <p:cNvPicPr>
+            <a:picLocks noChangeAspect="1"/>
+          </p:cNvPicPr>
+          <p:nvPr/>
+        </p:nvPicPr>
+        <p:blipFill>
+          <a:blip r:embed="rId2"/>
+          <a:stretch>
+            <a:fillRect/>
+          </a:stretch>
+        </p:blipFill>
+        <p:spPr>
+          <a:xfrm>
+            <a:off x="8211312" y="118872"/>
+            <a:ext cx="694944" cy="694944"/>
+          </a:xfrm>
+          <a:prstGeom prst="rect">
+            <a:avLst/>
+          </a:prstGeom>
+        </p:spPr>
+      </p:pic>
+      <p:sp>
+        <p:nvSpPr>
+          <p:cNvPr id="5" name="TextBox 4"/>
+          <p:cNvSpPr txBox="1"/>
+          <p:nvPr/>
+        </p:nvSpPr>
+        <p:spPr>
+          <a:xfrm>
+            <a:off x="502920" y="0"/>
+            <a:ext cx="7406640" cy="932688"/>
+          </a:xfrm>
+          <a:prstGeom prst="rect">
+            <a:avLst/>
+          </a:prstGeom>
+          <a:noFill/>
+        </p:spPr>
+        <p:txBody>
+          <a:bodyPr wrap="square" lIns="45720" tIns="18288" rIns="45720" bIns="18288" anchor="ctr">
+            <a:spAutoFit/>
+          </a:bodyPr>
+          <a:lstStyle/>
+          <a:p>
+            <a:pPr algn="l"/>
+            <a:r>
+              <a:rPr sz="2300" b="0" i="0">
+                <a:solidFill>
+                  <a:srgbClr val="FFFFFF"/>
+                </a:solidFill>
+                <a:latin typeface="Calibri"/>
+              </a:rPr>
+              <a:t>Abstract Factory — a matching family</a:t>
+            </a:r>
+          </a:p>
+          <a:p>
+            <a:pPr algn="l"/>
+            <a:r>
+              <a:rPr sz="1100" b="0" i="1">
+                <a:solidFill>
+                  <a:srgbClr val="CADCFC"/>
+                </a:solidFill>
+                <a:latin typeface="Calibri"/>
+              </a:rPr>
+              <a:t>pick a style once, every piece comes out matching</a:t>
+            </a:r>
+          </a:p>
+        </p:txBody>
+      </p:sp>
+      <p:sp>
+        <p:nvSpPr>
+          <p:cNvPr id="6" name="TextBox 5"/>
+          <p:cNvSpPr txBox="1"/>
+          <p:nvPr/>
+        </p:nvSpPr>
+        <p:spPr>
+          <a:xfrm>
+            <a:off x="502920" y="6547104"/>
+            <a:ext cx="5943600" cy="237744"/>
+          </a:xfrm>
+          <a:prstGeom prst="rect">
+            <a:avLst/>
+          </a:prstGeom>
+          <a:noFill/>
+        </p:spPr>
+        <p:txBody>
+          <a:bodyPr wrap="square" lIns="45720" tIns="18288" rIns="45720" bIns="18288" anchor="ctr">
+            <a:spAutoFit/>
+          </a:bodyPr>
+          <a:lstStyle/>
+          <a:p>
+            <a:pPr algn="l"/>
+            <a:r>
+              <a:rPr sz="800" b="0" i="0">
+                <a:solidFill>
+                  <a:srgbClr val="9A9CA3"/>
+                </a:solidFill>
+                <a:latin typeface="Calibri"/>
+              </a:rPr>
+              <a:t>CSC 4273   ·   Software Architecture &amp; Design Patterns   ·   AIUB</a:t>
+            </a:r>
+          </a:p>
+        </p:txBody>
+      </p:sp>
+      <p:sp>
+        <p:nvSpPr>
+          <p:cNvPr id="7" name="TextBox 6"/>
+          <p:cNvSpPr txBox="1"/>
+          <p:nvPr/>
+        </p:nvSpPr>
+        <p:spPr>
+          <a:xfrm>
+            <a:off x="7132320" y="6547104"/>
+            <a:ext cx="1508760" cy="237744"/>
+          </a:xfrm>
+          <a:prstGeom prst="rect">
+            <a:avLst/>
+          </a:prstGeom>
+          <a:noFill/>
+        </p:spPr>
+        <p:txBody>
+          <a:bodyPr wrap="square" lIns="45720" tIns="18288" rIns="45720" bIns="18288" anchor="ctr">
+            <a:spAutoFit/>
+          </a:bodyPr>
+          <a:lstStyle/>
+          <a:p>
+            <a:pPr algn="r"/>
+            <a:r>
+              <a:rPr sz="800" b="0" i="0">
+                <a:solidFill>
+                  <a:srgbClr val="9A9CA3"/>
+                </a:solidFill>
+                <a:latin typeface="Calibri"/>
+              </a:rPr>
+              <a:t>Week 3</a:t>
+            </a:r>
+          </a:p>
+        </p:txBody>
+      </p:sp>
+      <p:sp>
+        <p:nvSpPr>
+          <p:cNvPr id="8" name="Rounded Rectangle 7"/>
+          <p:cNvSpPr/>
+          <p:nvPr/>
+        </p:nvSpPr>
+        <p:spPr>
+          <a:xfrm>
+            <a:off x="548640" y="1828800"/>
+            <a:ext cx="2560320" cy="777240"/>
+          </a:xfrm>
+          <a:prstGeom prst="roundRect">
+            <a:avLst>
+              <a:gd name="adj" fmla="val 8000"/>
+            </a:avLst>
+          </a:prstGeom>
+          <a:solidFill>
+            <a:srgbClr val="E1F5EE"/>
+          </a:solidFill>
+          <a:ln w="28575">
+            <a:solidFill>
+              <a:srgbClr val="0F6E56"/>
+            </a:solidFill>
+          </a:ln>
+          <a:effectLst/>
+        </p:spPr>
+        <p:style>
+          <a:lnRef idx="1">
+            <a:schemeClr val="accent1"/>
+          </a:lnRef>
+          <a:fillRef idx="3">
+            <a:schemeClr val="accent1"/>
+          </a:fillRef>
+          <a:effectRef idx="2">
+            <a:schemeClr val="accent1"/>
+          </a:effectRef>
+          <a:fontRef idx="minor">
+            <a:schemeClr val="lt1"/>
+          </a:fontRef>
+        </p:style>
+        <p:txBody>
+          <a:bodyPr wrap="square" lIns="45720" tIns="18288" rIns="45720" bIns="18288" rtlCol="0" anchor="ctr"/>
+          <a:lstStyle/>
+          <a:p>
+            <a:pPr algn="ctr"/>
+            <a:r>
+              <a:rPr sz="1300" b="1" i="0">
+                <a:solidFill>
+                  <a:srgbClr val="085041"/>
+                </a:solidFill>
+                <a:latin typeface="Calibri"/>
+              </a:rPr>
+              <a:t>Modern factory</a:t>
+            </a:r>
+          </a:p>
+          <a:p>
+            <a:pPr algn="ctr"/>
+            <a:r>
+              <a:rPr sz="1000" b="0" i="1">
+                <a:solidFill>
+                  <a:srgbClr val="0F6E56"/>
+                </a:solidFill>
+                <a:latin typeface="Calibri"/>
+              </a:rPr>
+              <a:t>makes a modern set</a:t>
+            </a:r>
+          </a:p>
+        </p:txBody>
+      </p:sp>
+      <p:sp>
+        <p:nvSpPr>
+          <p:cNvPr id="9" name="Rounded Rectangle 8"/>
+          <p:cNvSpPr/>
+          <p:nvPr/>
+        </p:nvSpPr>
+        <p:spPr>
+          <a:xfrm>
+            <a:off x="548640" y="3931920"/>
+            <a:ext cx="2560320" cy="777240"/>
+          </a:xfrm>
+          <a:prstGeom prst="roundRect">
+            <a:avLst>
+              <a:gd name="adj" fmla="val 8000"/>
+            </a:avLst>
+          </a:prstGeom>
+          <a:solidFill>
+            <a:srgbClr val="E1F5EE"/>
+          </a:solidFill>
+          <a:ln w="28575">
+            <a:solidFill>
+              <a:srgbClr val="0F6E56"/>
+            </a:solidFill>
+          </a:ln>
+          <a:effectLst/>
+        </p:spPr>
+        <p:style>
+          <a:lnRef idx="1">
+            <a:schemeClr val="accent1"/>
+          </a:lnRef>
+          <a:fillRef idx="3">
+            <a:schemeClr val="accent1"/>
+          </a:fillRef>
+          <a:effectRef idx="2">
+            <a:schemeClr val="accent1"/>
+          </a:effectRef>
+          <a:fontRef idx="minor">
+            <a:schemeClr val="lt1"/>
+          </a:fontRef>
+        </p:style>
+        <p:txBody>
+          <a:bodyPr wrap="square" lIns="45720" tIns="18288" rIns="45720" bIns="18288" rtlCol="0" anchor="ctr"/>
+          <a:lstStyle/>
+          <a:p>
+            <a:pPr algn="ctr"/>
+            <a:r>
+              <a:rPr sz="1300" b="1" i="0">
+                <a:solidFill>
+                  <a:srgbClr val="085041"/>
+                </a:solidFill>
+                <a:latin typeface="Calibri"/>
+              </a:rPr>
+              <a:t>Victorian factory</a:t>
+            </a:r>
+          </a:p>
+          <a:p>
+            <a:pPr algn="ctr"/>
+            <a:r>
+              <a:rPr sz="1000" b="0" i="1">
+                <a:solidFill>
+                  <a:srgbClr val="0F6E56"/>
+                </a:solidFill>
+                <a:latin typeface="Calibri"/>
+              </a:rPr>
+              <a:t>makes a victorian set</a:t>
+            </a:r>
+          </a:p>
+        </p:txBody>
+      </p:sp>
+      <p:sp>
+        <p:nvSpPr>
+          <p:cNvPr id="10" name="Rounded Rectangle 9"/>
+          <p:cNvSpPr/>
+          <p:nvPr/>
+        </p:nvSpPr>
+        <p:spPr>
+          <a:xfrm>
+            <a:off x="4114800" y="1417320"/>
+            <a:ext cx="4206240" cy="1600200"/>
+          </a:xfrm>
+          <a:prstGeom prst="roundRect">
+            <a:avLst>
+              <a:gd name="adj" fmla="val 5000"/>
+            </a:avLst>
+          </a:prstGeom>
+          <a:noFill/>
+          <a:ln w="12700">
+            <a:solidFill>
+              <a:srgbClr val="9AA0A6"/>
+            </a:solidFill>
+            <a:prstDash val="dash"/>
+          </a:ln>
+          <a:effectLst/>
+        </p:spPr>
+        <p:style>
+          <a:lnRef idx="1">
+            <a:schemeClr val="accent1"/>
+          </a:lnRef>
+          <a:fillRef idx="3">
+            <a:schemeClr val="accent1"/>
+          </a:fillRef>
+          <a:effectRef idx="2">
+            <a:schemeClr val="accent1"/>
+          </a:effectRef>
+          <a:fontRef idx="minor">
+            <a:schemeClr val="lt1"/>
+          </a:fontRef>
+        </p:style>
+        <p:txBody>
+          <a:bodyPr rtlCol="0" anchor="ctr"/>
+          <a:lstStyle/>
+          <a:p>
+            <a:pPr algn="ctr"/>
+            <a:endParaRPr/>
+          </a:p>
+        </p:txBody>
+      </p:sp>
+      <p:sp>
+        <p:nvSpPr>
+          <p:cNvPr id="11" name="TextBox 10"/>
+          <p:cNvSpPr txBox="1"/>
+          <p:nvPr/>
+        </p:nvSpPr>
+        <p:spPr>
+          <a:xfrm>
+            <a:off x="4224528" y="1463040"/>
+            <a:ext cx="3986783" cy="274320"/>
+          </a:xfrm>
+          <a:prstGeom prst="rect">
+            <a:avLst/>
+          </a:prstGeom>
+          <a:noFill/>
+        </p:spPr>
+        <p:txBody>
+          <a:bodyPr wrap="square" lIns="45720" tIns="18288" rIns="45720" bIns="18288" anchor="ctr">
+            <a:spAutoFit/>
+          </a:bodyPr>
+          <a:lstStyle/>
+          <a:p>
+            <a:pPr algn="l"/>
+            <a:r>
+              <a:rPr sz="1100" b="0" i="1">
+                <a:solidFill>
+                  <a:srgbClr val="6A6C72"/>
+                </a:solidFill>
+                <a:latin typeface="Calibri"/>
+              </a:rPr>
+              <a:t>Modern family</a:t>
+            </a:r>
+          </a:p>
+        </p:txBody>
+      </p:sp>
+      <p:sp>
+        <p:nvSpPr>
+          <p:cNvPr id="12" name="Rounded Rectangle 11"/>
+          <p:cNvSpPr/>
+          <p:nvPr/>
+        </p:nvSpPr>
+        <p:spPr>
+          <a:xfrm>
+            <a:off x="4343400" y="1920240"/>
+            <a:ext cx="1828800" cy="868680"/>
+          </a:xfrm>
+          <a:prstGeom prst="roundRect">
+            <a:avLst>
+              <a:gd name="adj" fmla="val 8000"/>
+            </a:avLst>
+          </a:prstGeom>
+          <a:solidFill>
+            <a:srgbClr val="EEEDFE"/>
+          </a:solidFill>
+          <a:ln w="12700">
+            <a:solidFill>
+              <a:srgbClr val="534AB7"/>
+            </a:solidFill>
+          </a:ln>
+          <a:effectLst/>
+        </p:spPr>
+        <p:style>
+          <a:lnRef idx="1">
+            <a:schemeClr val="accent1"/>
+          </a:lnRef>
+          <a:fillRef idx="3">
+            <a:schemeClr val="accent1"/>
+          </a:fillRef>
+          <a:effectRef idx="2">
+            <a:schemeClr val="accent1"/>
+          </a:effectRef>
+          <a:fontRef idx="minor">
+            <a:schemeClr val="lt1"/>
+          </a:fontRef>
+        </p:style>
+        <p:txBody>
+          <a:bodyPr wrap="square" lIns="45720" tIns="18288" rIns="45720" bIns="18288" rtlCol="0" anchor="ctr"/>
+          <a:lstStyle/>
+          <a:p>
+            <a:pPr algn="ctr"/>
+            <a:r>
+              <a:rPr sz="1300" b="1" i="0">
+                <a:solidFill>
+                  <a:srgbClr val="3C3489"/>
+                </a:solidFill>
+                <a:latin typeface="Calibri"/>
+              </a:rPr>
+              <a:t>Modern chair</a:t>
+            </a:r>
+          </a:p>
+        </p:txBody>
+      </p:sp>
+      <p:sp>
+        <p:nvSpPr>
+          <p:cNvPr id="13" name="Rounded Rectangle 12"/>
+          <p:cNvSpPr/>
+          <p:nvPr/>
+        </p:nvSpPr>
+        <p:spPr>
+          <a:xfrm>
+            <a:off x="6355080" y="1920240"/>
+            <a:ext cx="1828800" cy="868680"/>
+          </a:xfrm>
+          <a:prstGeom prst="roundRect">
+            <a:avLst>
+              <a:gd name="adj" fmla="val 8000"/>
+            </a:avLst>
+          </a:prstGeom>
+          <a:solidFill>
+            <a:srgbClr val="EEEDFE"/>
+          </a:solidFill>
+          <a:ln w="12700">
+            <a:solidFill>
+              <a:srgbClr val="534AB7"/>
+            </a:solidFill>
+          </a:ln>
+          <a:effectLst/>
+        </p:spPr>
+        <p:style>
+          <a:lnRef idx="1">
+            <a:schemeClr val="accent1"/>
+          </a:lnRef>
+          <a:fillRef idx="3">
+            <a:schemeClr val="accent1"/>
+          </a:fillRef>
+          <a:effectRef idx="2">
+            <a:schemeClr val="accent1"/>
+          </a:effectRef>
+          <a:fontRef idx="minor">
+            <a:schemeClr val="lt1"/>
+          </a:fontRef>
+        </p:style>
+        <p:txBody>
+          <a:bodyPr wrap="square" lIns="45720" tIns="18288" rIns="45720" bIns="18288" rtlCol="0" anchor="ctr"/>
+          <a:lstStyle/>
+          <a:p>
+            <a:pPr algn="ctr"/>
+            <a:r>
+              <a:rPr sz="1300" b="1" i="0">
+                <a:solidFill>
+                  <a:srgbClr val="3C3489"/>
+                </a:solidFill>
+                <a:latin typeface="Calibri"/>
+              </a:rPr>
+              <a:t>Modern sofa</a:t>
+            </a:r>
+          </a:p>
+        </p:txBody>
+      </p:sp>
+      <p:sp>
+        <p:nvSpPr>
+          <p:cNvPr id="14" name="Rounded Rectangle 13"/>
+          <p:cNvSpPr/>
+          <p:nvPr/>
+        </p:nvSpPr>
+        <p:spPr>
+          <a:xfrm>
+            <a:off x="4114800" y="3520440"/>
+            <a:ext cx="4206240" cy="1600200"/>
+          </a:xfrm>
+          <a:prstGeom prst="roundRect">
+            <a:avLst>
+              <a:gd name="adj" fmla="val 5000"/>
+            </a:avLst>
+          </a:prstGeom>
+          <a:noFill/>
+          <a:ln w="12700">
+            <a:solidFill>
+              <a:srgbClr val="9AA0A6"/>
+            </a:solidFill>
+            <a:prstDash val="dash"/>
+          </a:ln>
+          <a:effectLst/>
+        </p:spPr>
+        <p:style>
+          <a:lnRef idx="1">
+            <a:schemeClr val="accent1"/>
+          </a:lnRef>
+          <a:fillRef idx="3">
+            <a:schemeClr val="accent1"/>
+          </a:fillRef>
+          <a:effectRef idx="2">
+            <a:schemeClr val="accent1"/>
+          </a:effectRef>
+          <a:fontRef idx="minor">
+            <a:schemeClr val="lt1"/>
+          </a:fontRef>
+        </p:style>
+        <p:txBody>
+          <a:bodyPr rtlCol="0" anchor="ctr"/>
+          <a:lstStyle/>
+          <a:p>
+            <a:pPr algn="ctr"/>
+            <a:endParaRPr/>
+          </a:p>
+        </p:txBody>
+      </p:sp>
+      <p:sp>
+        <p:nvSpPr>
+          <p:cNvPr id="15" name="TextBox 14"/>
+          <p:cNvSpPr txBox="1"/>
+          <p:nvPr/>
+        </p:nvSpPr>
+        <p:spPr>
+          <a:xfrm>
+            <a:off x="4224528" y="3566160"/>
+            <a:ext cx="3986783" cy="274320"/>
+          </a:xfrm>
+          <a:prstGeom prst="rect">
+            <a:avLst/>
+          </a:prstGeom>
+          <a:noFill/>
+        </p:spPr>
+        <p:txBody>
+          <a:bodyPr wrap="square" lIns="45720" tIns="18288" rIns="45720" bIns="18288" anchor="ctr">
+            <a:spAutoFit/>
+          </a:bodyPr>
+          <a:lstStyle/>
+          <a:p>
+            <a:pPr algn="l"/>
+            <a:r>
+              <a:rPr sz="1100" b="0" i="1">
+                <a:solidFill>
+                  <a:srgbClr val="6A6C72"/>
+                </a:solidFill>
+                <a:latin typeface="Calibri"/>
+              </a:rPr>
+              <a:t>Victorian family</a:t>
+            </a:r>
+          </a:p>
+        </p:txBody>
+      </p:sp>
+      <p:sp>
+        <p:nvSpPr>
+          <p:cNvPr id="16" name="Rounded Rectangle 15"/>
+          <p:cNvSpPr/>
+          <p:nvPr/>
+        </p:nvSpPr>
+        <p:spPr>
+          <a:xfrm>
+            <a:off x="4343400" y="4023360"/>
+            <a:ext cx="1828800" cy="868680"/>
+          </a:xfrm>
+          <a:prstGeom prst="roundRect">
+            <a:avLst>
+              <a:gd name="adj" fmla="val 8000"/>
+            </a:avLst>
+          </a:prstGeom>
+          <a:solidFill>
+            <a:srgbClr val="FAECE7"/>
+          </a:solidFill>
+          <a:ln w="12700">
+            <a:solidFill>
+              <a:srgbClr val="993C1D"/>
+            </a:solidFill>
+          </a:ln>
+          <a:effectLst/>
+        </p:spPr>
+        <p:style>
+          <a:lnRef idx="1">
+            <a:schemeClr val="accent1"/>
+          </a:lnRef>
+          <a:fillRef idx="3">
+            <a:schemeClr val="accent1"/>
+          </a:fillRef>
+          <a:effectRef idx="2">
+            <a:schemeClr val="accent1"/>
+          </a:effectRef>
+          <a:fontRef idx="minor">
+            <a:schemeClr val="lt1"/>
+          </a:fontRef>
+        </p:style>
+        <p:txBody>
+          <a:bodyPr wrap="square" lIns="45720" tIns="18288" rIns="45720" bIns="18288" rtlCol="0" anchor="ctr"/>
+          <a:lstStyle/>
+          <a:p>
+            <a:pPr algn="ctr"/>
+            <a:r>
+              <a:rPr sz="1300" b="1" i="0">
+                <a:solidFill>
+                  <a:srgbClr val="712B13"/>
+                </a:solidFill>
+                <a:latin typeface="Calibri"/>
+              </a:rPr>
+              <a:t>Victorian chair</a:t>
+            </a:r>
+          </a:p>
+        </p:txBody>
+      </p:sp>
+      <p:sp>
+        <p:nvSpPr>
+          <p:cNvPr id="17" name="Rounded Rectangle 16"/>
+          <p:cNvSpPr/>
+          <p:nvPr/>
+        </p:nvSpPr>
+        <p:spPr>
+          <a:xfrm>
+            <a:off x="6355080" y="4023360"/>
+            <a:ext cx="1828800" cy="868680"/>
+          </a:xfrm>
+          <a:prstGeom prst="roundRect">
+            <a:avLst>
+              <a:gd name="adj" fmla="val 8000"/>
+            </a:avLst>
+          </a:prstGeom>
+          <a:solidFill>
+            <a:srgbClr val="FAECE7"/>
+          </a:solidFill>
+          <a:ln w="12700">
+            <a:solidFill>
+              <a:srgbClr val="993C1D"/>
+            </a:solidFill>
+          </a:ln>
+          <a:effectLst/>
+        </p:spPr>
+        <p:style>
+          <a:lnRef idx="1">
+            <a:schemeClr val="accent1"/>
+          </a:lnRef>
+          <a:fillRef idx="3">
+            <a:schemeClr val="accent1"/>
+          </a:fillRef>
+          <a:effectRef idx="2">
+            <a:schemeClr val="accent1"/>
+          </a:effectRef>
+          <a:fontRef idx="minor">
+            <a:schemeClr val="lt1"/>
+          </a:fontRef>
+        </p:style>
+        <p:txBody>
+          <a:bodyPr wrap="square" lIns="45720" tIns="18288" rIns="45720" bIns="18288" rtlCol="0" anchor="ctr"/>
+          <a:lstStyle/>
+          <a:p>
+            <a:pPr algn="ctr"/>
+            <a:r>
+              <a:rPr sz="1300" b="1" i="0">
+                <a:solidFill>
+                  <a:srgbClr val="712B13"/>
+                </a:solidFill>
+                <a:latin typeface="Calibri"/>
+              </a:rPr>
+              <a:t>Victorian sofa</a:t>
+            </a:r>
+          </a:p>
+        </p:txBody>
+      </p:sp>
+      <p:cxnSp>
+        <p:nvCxnSpPr>
+          <p:cNvPr id="18" name="Connector 17"/>
+          <p:cNvCxnSpPr/>
+          <p:nvPr/>
+        </p:nvCxnSpPr>
+        <p:spPr>
+          <a:xfrm>
+            <a:off x="3108960" y="2212848"/>
+            <a:ext cx="1005840" cy="0"/>
+          </a:xfrm>
+          <a:prstGeom prst="line">
+            <a:avLst/>
+          </a:prstGeom>
+          <a:ln w="15875">
+            <a:solidFill>
+              <a:srgbClr val="5A5C66"/>
+            </a:solidFill>
+            <a:tailEnd type="triangle" w="med" len="med"/>
+          </a:ln>
+          <a:effectLst/>
+        </p:spPr>
+        <p:style>
+          <a:lnRef idx="2">
+            <a:schemeClr val="accent1"/>
+          </a:lnRef>
+          <a:fillRef idx="0">
+            <a:schemeClr val="accent1"/>
+          </a:fillRef>
+          <a:effectRef idx="1">
+            <a:schemeClr val="accent1"/>
+          </a:effectRef>
+          <a:fontRef idx="minor">
+            <a:schemeClr val="tx1"/>
+          </a:fontRef>
+        </p:style>
+      </p:cxnSp>
+      <p:sp>
+        <p:nvSpPr>
+          <p:cNvPr id="19" name="TextBox 18"/>
+          <p:cNvSpPr txBox="1"/>
+          <p:nvPr/>
+        </p:nvSpPr>
+        <p:spPr>
+          <a:xfrm>
+            <a:off x="3063240" y="1956816"/>
+            <a:ext cx="1097280" cy="237744"/>
+          </a:xfrm>
+          <a:prstGeom prst="rect">
+            <a:avLst/>
+          </a:prstGeom>
+          <a:noFill/>
+        </p:spPr>
+        <p:txBody>
+          <a:bodyPr wrap="square" lIns="45720" tIns="18288" rIns="45720" bIns="18288" anchor="ctr">
+            <a:spAutoFit/>
+          </a:bodyPr>
+          <a:lstStyle/>
+          <a:p>
+            <a:pPr algn="ctr"/>
+            <a:r>
+              <a:rPr sz="950" b="0" i="1">
+                <a:solidFill>
+                  <a:srgbClr val="5A5C66"/>
+                </a:solidFill>
+                <a:latin typeface="Calibri"/>
+              </a:rPr>
+              <a:t>creates</a:t>
+            </a:r>
+          </a:p>
+        </p:txBody>
+      </p:sp>
+      <p:cxnSp>
+        <p:nvCxnSpPr>
+          <p:cNvPr id="20" name="Connector 19"/>
+          <p:cNvCxnSpPr/>
+          <p:nvPr/>
+        </p:nvCxnSpPr>
+        <p:spPr>
+          <a:xfrm>
+            <a:off x="3108960" y="4315968"/>
+            <a:ext cx="1005840" cy="0"/>
+          </a:xfrm>
+          <a:prstGeom prst="line">
+            <a:avLst/>
+          </a:prstGeom>
+          <a:ln w="15875">
+            <a:solidFill>
+              <a:srgbClr val="5A5C66"/>
+            </a:solidFill>
+            <a:tailEnd type="triangle" w="med" len="med"/>
+          </a:ln>
+          <a:effectLst/>
+        </p:spPr>
+        <p:style>
+          <a:lnRef idx="2">
+            <a:schemeClr val="accent1"/>
+          </a:lnRef>
+          <a:fillRef idx="0">
+            <a:schemeClr val="accent1"/>
+          </a:fillRef>
+          <a:effectRef idx="1">
+            <a:schemeClr val="accent1"/>
+          </a:effectRef>
+          <a:fontRef idx="minor">
+            <a:schemeClr val="tx1"/>
+          </a:fontRef>
+        </p:style>
+      </p:cxnSp>
+      <p:sp>
+        <p:nvSpPr>
+          <p:cNvPr id="21" name="TextBox 20"/>
+          <p:cNvSpPr txBox="1"/>
+          <p:nvPr/>
+        </p:nvSpPr>
+        <p:spPr>
+          <a:xfrm>
+            <a:off x="3063240" y="4059936"/>
+            <a:ext cx="1097280" cy="237744"/>
+          </a:xfrm>
+          <a:prstGeom prst="rect">
+            <a:avLst/>
+          </a:prstGeom>
+          <a:noFill/>
+        </p:spPr>
+        <p:txBody>
+          <a:bodyPr wrap="square" lIns="45720" tIns="18288" rIns="45720" bIns="18288" anchor="ctr">
+            <a:spAutoFit/>
+          </a:bodyPr>
+          <a:lstStyle/>
+          <a:p>
+            <a:pPr algn="ctr"/>
+            <a:r>
+              <a:rPr sz="950" b="0" i="1">
+                <a:solidFill>
+                  <a:srgbClr val="5A5C66"/>
+                </a:solidFill>
+                <a:latin typeface="Calibri"/>
+              </a:rPr>
+              <a:t>creates</a:t>
+            </a:r>
+          </a:p>
+        </p:txBody>
+      </p:sp>
+      <p:sp>
+        <p:nvSpPr>
+          <p:cNvPr id="22" name="TextBox 21"/>
+          <p:cNvSpPr txBox="1"/>
+          <p:nvPr/>
+        </p:nvSpPr>
+        <p:spPr>
+          <a:xfrm>
+            <a:off x="1828800" y="5897880"/>
+            <a:ext cx="5486400" cy="237744"/>
+          </a:xfrm>
+          <a:prstGeom prst="rect">
+            <a:avLst/>
+          </a:prstGeom>
+          <a:noFill/>
+        </p:spPr>
+        <p:txBody>
+          <a:bodyPr wrap="square" lIns="45720" tIns="18288" rIns="45720" bIns="18288" anchor="ctr">
+            <a:spAutoFit/>
+          </a:bodyPr>
+          <a:lstStyle/>
+          <a:p>
+            <a:pPr algn="ctr"/>
+            <a:r>
+              <a:rPr sz="950" b="0" i="1">
+                <a:solidFill>
+                  <a:srgbClr val="5A5C66"/>
+                </a:solidFill>
+                <a:latin typeface="Calibri"/>
+              </a:rPr>
+              <a:t>one factory makes a matching set — never mix a modern chair with a victorian sofa</a:t>
+            </a:r>
+          </a:p>
+        </p:txBody>
+      </p:sp>
+    </p:spTree>
+  </p:cSld>
+  <p:clrMapOvr>
+    <a:masterClrMapping/>
+  </p:clrMapOvr>
+</p:sld>
+</file>
+
+<file path=ppt/slides/slide22.xml><?xml version="1.0" encoding="utf-8"?>
+<p:sld xmlns:a="http://schemas.openxmlformats.org/drawingml/2006/main" xmlns:r="http://schemas.openxmlformats.org/officeDocument/2006/relationships" xmlns:p="http://schemas.openxmlformats.org/presentationml/2006/main">
   <p:cSld name="Slide 19">
     <p:bg>
       <p:bgPr>
@@ -11588,7 +12555,6 @@
               </a:rPr>
               <a:t>interface Checkbox { check(): void; }</a:t>
             </a:r>
-            <a:endParaRPr lang="en-US" sz="1400" dirty="0"/>
           </a:p>
           <a:p>
             <a:pPr marL="0" indent="0">
@@ -11597,17 +12563,6 @@
               </a:lnSpc>
               <a:buNone/>
             </a:pPr>
-            <a:r>
-              <a:rPr lang="en-US" sz="1400" dirty="0">
-                <a:solidFill>
-                  <a:srgbClr val="1E1E22"/>
-                </a:solidFill>
-                <a:latin typeface="Consolas" pitchFamily="34" charset="0"/>
-                <a:ea typeface="Consolas" pitchFamily="34" charset="-122"/>
-                <a:cs typeface="Consolas" pitchFamily="34" charset="-120"/>
-              </a:rPr>
-              <a:t>class MacButton implements Button   { render() { /* Mac */ } }</a:t>
-            </a:r>
             <a:endParaRPr lang="en-US" sz="1400" dirty="0"/>
           </a:p>
           <a:p>
@@ -11626,7 +12581,7 @@
                 <a:ea typeface="Consolas" pitchFamily="34" charset="-122"/>
                 <a:cs typeface="Consolas" pitchFamily="34" charset="-120"/>
               </a:rPr>
-              <a:t>class MacCheckbox implements Checkbox { check() { /* Mac */ } }</a:t>
+              <a:t>class MacButton implements Button   { render() { /* Mac */ } }</a:t>
             </a:r>
             <a:endParaRPr lang="en-US" sz="1400" dirty="0"/>
           </a:p>
@@ -11646,7 +12601,7 @@
                 <a:ea typeface="Consolas" pitchFamily="34" charset="-122"/>
                 <a:cs typeface="Consolas" pitchFamily="34" charset="-120"/>
               </a:rPr>
-              <a:t>class WinButton implements Button   { render() { /* Win */ } }</a:t>
+              <a:t>class MacCheckbox implements Checkbox { check() { /* Mac */ } }</a:t>
             </a:r>
             <a:endParaRPr lang="en-US" sz="1400" dirty="0"/>
           </a:p>
@@ -11666,7 +12621,7 @@
                 <a:ea typeface="Consolas" pitchFamily="34" charset="-122"/>
                 <a:cs typeface="Consolas" pitchFamily="34" charset="-120"/>
               </a:rPr>
-              <a:t>class WinCheckbox implements Checkbox { check() { /* Win */ } }</a:t>
+              <a:t>class WinButton implements Button   { render() { /* Win */ } }</a:t>
             </a:r>
             <a:endParaRPr lang="en-US" sz="1400" dirty="0"/>
           </a:p>
@@ -11686,7 +12641,7 @@
                 <a:ea typeface="Consolas" pitchFamily="34" charset="-122"/>
                 <a:cs typeface="Consolas" pitchFamily="34" charset="-120"/>
               </a:rPr>
-              <a:t> </a:t>
+              <a:t>class WinCheckbox implements Checkbox { check() { /* Win */ } }</a:t>
             </a:r>
             <a:endParaRPr lang="en-US" sz="1400" dirty="0"/>
           </a:p>
@@ -11698,15 +12653,15 @@
               <a:buNone/>
             </a:pPr>
             <a:r>
-              <a:rPr lang="en-US" sz="1400" b="1" dirty="0">
-                <a:solidFill>
-                  <a:srgbClr val="1E7A34"/>
+              <a:rPr lang="en-US" sz="1400" dirty="0">
+                <a:solidFill>
+                  <a:srgbClr val="1E1E22"/>
                 </a:solidFill>
                 <a:latin typeface="Consolas" pitchFamily="34" charset="0"/>
                 <a:ea typeface="Consolas" pitchFamily="34" charset="-122"/>
                 <a:cs typeface="Consolas" pitchFamily="34" charset="-120"/>
               </a:rPr>
-              <a:t>interface UIFactory {                        // ABSTRACT FACTORY</a:t>
+              <a:t> </a:t>
             </a:r>
             <a:endParaRPr lang="en-US" sz="1400" dirty="0"/>
           </a:p>
@@ -11718,15 +12673,15 @@
               <a:buNone/>
             </a:pPr>
             <a:r>
-              <a:rPr lang="en-US" sz="1400" dirty="0">
-                <a:solidFill>
-                  <a:srgbClr val="1E1E22"/>
+              <a:rPr lang="en-US" sz="1400" b="1" dirty="0">
+                <a:solidFill>
+                  <a:srgbClr val="1E7A34"/>
                 </a:solidFill>
                 <a:latin typeface="Consolas" pitchFamily="34" charset="0"/>
                 <a:ea typeface="Consolas" pitchFamily="34" charset="-122"/>
                 <a:cs typeface="Consolas" pitchFamily="34" charset="-120"/>
               </a:rPr>
-              <a:t>  createButton(): Button;</a:t>
+              <a:t>interface UIFactory {                        // ABSTRACT FACTORY</a:t>
             </a:r>
             <a:endParaRPr lang="en-US" sz="1400" dirty="0"/>
           </a:p>
@@ -11746,7 +12701,7 @@
                 <a:ea typeface="Consolas" pitchFamily="34" charset="-122"/>
                 <a:cs typeface="Consolas" pitchFamily="34" charset="-120"/>
               </a:rPr>
-              <a:t>  createCheckbox(): Checkbox;</a:t>
+              <a:t>  createButton(): Button;</a:t>
             </a:r>
             <a:endParaRPr lang="en-US" sz="1400" dirty="0"/>
           </a:p>
@@ -11766,7 +12721,7 @@
                 <a:ea typeface="Consolas" pitchFamily="34" charset="-122"/>
                 <a:cs typeface="Consolas" pitchFamily="34" charset="-120"/>
               </a:rPr>
-              <a:t>}</a:t>
+              <a:t>  createCheckbox(): Checkbox;</a:t>
             </a:r>
             <a:endParaRPr lang="en-US" sz="1400" dirty="0"/>
           </a:p>
@@ -11786,7 +12741,7 @@
                 <a:ea typeface="Consolas" pitchFamily="34" charset="-122"/>
                 <a:cs typeface="Consolas" pitchFamily="34" charset="-120"/>
               </a:rPr>
-              <a:t>class MacFactory implements UIFactory { /* Mac family */ }</a:t>
+              <a:t>}</a:t>
             </a:r>
             <a:endParaRPr lang="en-US" sz="1400" dirty="0"/>
           </a:p>
@@ -11806,7 +12761,7 @@
                 <a:ea typeface="Consolas" pitchFamily="34" charset="-122"/>
                 <a:cs typeface="Consolas" pitchFamily="34" charset="-120"/>
               </a:rPr>
-              <a:t>class WinFactory implements UIFactory { /* Win family */ }</a:t>
+              <a:t>class MacFactory implements UIFactory { /* Mac family */ }</a:t>
             </a:r>
             <a:endParaRPr lang="en-US" sz="1400" dirty="0"/>
           </a:p>
@@ -11826,7 +12781,7 @@
                 <a:ea typeface="Consolas" pitchFamily="34" charset="-122"/>
                 <a:cs typeface="Consolas" pitchFamily="34" charset="-120"/>
               </a:rPr>
-              <a:t> </a:t>
+              <a:t>class WinFactory implements UIFactory { /* Win family */ }</a:t>
             </a:r>
             <a:endParaRPr lang="en-US" sz="1400" dirty="0"/>
           </a:p>
@@ -11838,15 +12793,15 @@
               <a:buNone/>
             </a:pPr>
             <a:r>
-              <a:rPr lang="en-US" sz="1400" b="1" dirty="0">
-                <a:solidFill>
-                  <a:srgbClr val="1E7A34"/>
+              <a:rPr lang="en-US" sz="1400" dirty="0">
+                <a:solidFill>
+                  <a:srgbClr val="1E1E22"/>
                 </a:solidFill>
                 <a:latin typeface="Consolas" pitchFamily="34" charset="0"/>
                 <a:ea typeface="Consolas" pitchFamily="34" charset="-122"/>
                 <a:cs typeface="Consolas" pitchFamily="34" charset="-120"/>
               </a:rPr>
-              <a:t>function renderUI(f: UIFactory) {            // CLIENT</a:t>
+              <a:t> </a:t>
             </a:r>
             <a:endParaRPr lang="en-US" sz="1400" dirty="0"/>
           </a:p>
@@ -11858,15 +12813,15 @@
               <a:buNone/>
             </a:pPr>
             <a:r>
-              <a:rPr lang="en-US" sz="1400" dirty="0">
-                <a:solidFill>
-                  <a:srgbClr val="1E1E22"/>
+              <a:rPr lang="en-US" sz="1400" b="1" dirty="0">
+                <a:solidFill>
+                  <a:srgbClr val="1E7A34"/>
                 </a:solidFill>
                 <a:latin typeface="Consolas" pitchFamily="34" charset="0"/>
                 <a:ea typeface="Consolas" pitchFamily="34" charset="-122"/>
                 <a:cs typeface="Consolas" pitchFamily="34" charset="-120"/>
               </a:rPr>
-              <a:t>  f.createButton().render(); f.createCheckbox().check();</a:t>
+              <a:t>function renderUI(f: UIFactory) {            // CLIENT</a:t>
             </a:r>
             <a:endParaRPr lang="en-US" sz="1400" dirty="0"/>
           </a:p>
@@ -11886,6 +12841,26 @@
                 <a:ea typeface="Consolas" pitchFamily="34" charset="-122"/>
                 <a:cs typeface="Consolas" pitchFamily="34" charset="-120"/>
               </a:rPr>
+              <a:t>  f.createButton().render(); f.createCheckbox().check();</a:t>
+            </a:r>
+            <a:endParaRPr lang="en-US" sz="1400" dirty="0"/>
+          </a:p>
+          <a:p>
+            <a:pPr marL="0" indent="0">
+              <a:lnSpc>
+                <a:spcPct val="100000"/>
+              </a:lnSpc>
+              <a:buNone/>
+            </a:pPr>
+            <a:r>
+              <a:rPr lang="en-US" sz="1400" dirty="0">
+                <a:solidFill>
+                  <a:srgbClr val="1E1E22"/>
+                </a:solidFill>
+                <a:latin typeface="Consolas" pitchFamily="34" charset="0"/>
+                <a:ea typeface="Consolas" pitchFamily="34" charset="-122"/>
+                <a:cs typeface="Consolas" pitchFamily="34" charset="-120"/>
+              </a:rPr>
               <a:t>}</a:t>
             </a:r>
             <a:endParaRPr lang="en-US" sz="1400" dirty="0"/>
@@ -11951,973 +12926,6 @@
               <a:t>NEVER get a MacButton with a WinCheckbox — the factory builds the whole family.</a:t>
             </a:r>
             <a:endParaRPr lang="en-US" sz="1150" dirty="0"/>
-          </a:p>
-        </p:txBody>
-      </p:sp>
-    </p:spTree>
-  </p:cSld>
-  <p:clrMapOvr>
-    <a:masterClrMapping/>
-  </p:clrMapOvr>
-</p:sld>
-</file>
-
-<file path=ppt/slides/slide22.xml><?xml version="1.0" encoding="utf-8"?>
-<p:sld xmlns:a="http://schemas.openxmlformats.org/drawingml/2006/main" xmlns:r="http://schemas.openxmlformats.org/officeDocument/2006/relationships" xmlns:p="http://schemas.openxmlformats.org/presentationml/2006/main">
-  <p:cSld>
-    <p:spTree>
-      <p:nvGrpSpPr>
-        <p:cNvPr id="1" name=""/>
-        <p:cNvGrpSpPr/>
-        <p:nvPr/>
-      </p:nvGrpSpPr>
-      <p:grpSpPr>
-        <a:xfrm>
-          <a:off x="0" y="0"/>
-          <a:ext cx="0" cy="0"/>
-          <a:chOff x="0" y="0"/>
-          <a:chExt cx="0" cy="0"/>
-        </a:xfrm>
-      </p:grpSpPr>
-      <p:sp>
-        <p:nvSpPr>
-          <p:cNvPr id="2" name="Rectangle 1"/>
-          <p:cNvSpPr/>
-          <p:nvPr/>
-        </p:nvSpPr>
-        <p:spPr>
-          <a:xfrm>
-            <a:off x="0" y="0"/>
-            <a:ext cx="9144000" cy="932688"/>
-          </a:xfrm>
-          <a:prstGeom prst="rect">
-            <a:avLst/>
-          </a:prstGeom>
-          <a:solidFill>
-            <a:srgbClr val="23242B"/>
-          </a:solidFill>
-          <a:ln>
-            <a:noFill/>
-          </a:ln>
-          <a:effectLst/>
-        </p:spPr>
-        <p:style>
-          <a:lnRef idx="1">
-            <a:schemeClr val="accent1"/>
-          </a:lnRef>
-          <a:fillRef idx="3">
-            <a:schemeClr val="accent1"/>
-          </a:fillRef>
-          <a:effectRef idx="2">
-            <a:schemeClr val="accent1"/>
-          </a:effectRef>
-          <a:fontRef idx="minor">
-            <a:schemeClr val="lt1"/>
-          </a:fontRef>
-        </p:style>
-        <p:txBody>
-          <a:bodyPr rtlCol="0" anchor="ctr"/>
-          <a:lstStyle/>
-          <a:p>
-            <a:pPr algn="ctr"/>
-            <a:endParaRPr/>
-          </a:p>
-        </p:txBody>
-      </p:sp>
-      <p:sp>
-        <p:nvSpPr>
-          <p:cNvPr id="3" name="Rectangle 2"/>
-          <p:cNvSpPr/>
-          <p:nvPr/>
-        </p:nvSpPr>
-        <p:spPr>
-          <a:xfrm>
-            <a:off x="4114800" y="0"/>
-            <a:ext cx="5029200" cy="932688"/>
-          </a:xfrm>
-          <a:prstGeom prst="rect">
-            <a:avLst/>
-          </a:prstGeom>
-          <a:solidFill>
-            <a:srgbClr val="4A4C57"/>
-          </a:solidFill>
-          <a:ln>
-            <a:noFill/>
-          </a:ln>
-          <a:effectLst/>
-        </p:spPr>
-        <p:style>
-          <a:lnRef idx="1">
-            <a:schemeClr val="accent1"/>
-          </a:lnRef>
-          <a:fillRef idx="3">
-            <a:schemeClr val="accent1"/>
-          </a:fillRef>
-          <a:effectRef idx="2">
-            <a:schemeClr val="accent1"/>
-          </a:effectRef>
-          <a:fontRef idx="minor">
-            <a:schemeClr val="lt1"/>
-          </a:fontRef>
-        </p:style>
-        <p:txBody>
-          <a:bodyPr rtlCol="0" anchor="ctr"/>
-          <a:lstStyle/>
-          <a:p>
-            <a:pPr algn="ctr"/>
-            <a:endParaRPr/>
-          </a:p>
-        </p:txBody>
-      </p:sp>
-      <p:pic>
-        <p:nvPicPr>
-          <p:cNvPr id="4" name="Picture 3" descr="image.png"/>
-          <p:cNvPicPr>
-            <a:picLocks noChangeAspect="1"/>
-          </p:cNvPicPr>
-          <p:nvPr/>
-        </p:nvPicPr>
-        <p:blipFill>
-          <a:blip r:embed="rId2"/>
-          <a:stretch>
-            <a:fillRect/>
-          </a:stretch>
-        </p:blipFill>
-        <p:spPr>
-          <a:xfrm>
-            <a:off x="8211312" y="118872"/>
-            <a:ext cx="694944" cy="694944"/>
-          </a:xfrm>
-          <a:prstGeom prst="rect">
-            <a:avLst/>
-          </a:prstGeom>
-        </p:spPr>
-      </p:pic>
-      <p:sp>
-        <p:nvSpPr>
-          <p:cNvPr id="5" name="TextBox 4"/>
-          <p:cNvSpPr txBox="1"/>
-          <p:nvPr/>
-        </p:nvSpPr>
-        <p:spPr>
-          <a:xfrm>
-            <a:off x="502920" y="0"/>
-            <a:ext cx="7406640" cy="932688"/>
-          </a:xfrm>
-          <a:prstGeom prst="rect">
-            <a:avLst/>
-          </a:prstGeom>
-          <a:noFill/>
-        </p:spPr>
-        <p:txBody>
-          <a:bodyPr wrap="square" lIns="45720" tIns="18288" rIns="45720" bIns="18288" anchor="ctr">
-            <a:spAutoFit/>
-          </a:bodyPr>
-          <a:lstStyle/>
-          <a:p>
-            <a:pPr algn="l"/>
-            <a:r>
-              <a:rPr sz="2300" b="0" i="0">
-                <a:solidFill>
-                  <a:srgbClr val="FFFFFF"/>
-                </a:solidFill>
-                <a:latin typeface="Calibri"/>
-              </a:rPr>
-              <a:t>Abstract Factory — a matching family</a:t>
-            </a:r>
-          </a:p>
-          <a:p>
-            <a:pPr algn="l"/>
-            <a:r>
-              <a:rPr sz="1100" b="0" i="1">
-                <a:solidFill>
-                  <a:srgbClr val="CADCFC"/>
-                </a:solidFill>
-                <a:latin typeface="Calibri"/>
-              </a:rPr>
-              <a:t>pick a style once, every piece comes out matching</a:t>
-            </a:r>
-          </a:p>
-        </p:txBody>
-      </p:sp>
-      <p:sp>
-        <p:nvSpPr>
-          <p:cNvPr id="6" name="TextBox 5"/>
-          <p:cNvSpPr txBox="1"/>
-          <p:nvPr/>
-        </p:nvSpPr>
-        <p:spPr>
-          <a:xfrm>
-            <a:off x="502920" y="6547104"/>
-            <a:ext cx="5943600" cy="237744"/>
-          </a:xfrm>
-          <a:prstGeom prst="rect">
-            <a:avLst/>
-          </a:prstGeom>
-          <a:noFill/>
-        </p:spPr>
-        <p:txBody>
-          <a:bodyPr wrap="square" lIns="45720" tIns="18288" rIns="45720" bIns="18288" anchor="ctr">
-            <a:spAutoFit/>
-          </a:bodyPr>
-          <a:lstStyle/>
-          <a:p>
-            <a:pPr algn="l"/>
-            <a:r>
-              <a:rPr sz="800" b="0" i="0">
-                <a:solidFill>
-                  <a:srgbClr val="9A9CA3"/>
-                </a:solidFill>
-                <a:latin typeface="Calibri"/>
-              </a:rPr>
-              <a:t>CSC 4273   ·   Software Architecture &amp; Design Patterns   ·   AIUB</a:t>
-            </a:r>
-          </a:p>
-        </p:txBody>
-      </p:sp>
-      <p:sp>
-        <p:nvSpPr>
-          <p:cNvPr id="7" name="TextBox 6"/>
-          <p:cNvSpPr txBox="1"/>
-          <p:nvPr/>
-        </p:nvSpPr>
-        <p:spPr>
-          <a:xfrm>
-            <a:off x="7132320" y="6547104"/>
-            <a:ext cx="1508760" cy="237744"/>
-          </a:xfrm>
-          <a:prstGeom prst="rect">
-            <a:avLst/>
-          </a:prstGeom>
-          <a:noFill/>
-        </p:spPr>
-        <p:txBody>
-          <a:bodyPr wrap="square" lIns="45720" tIns="18288" rIns="45720" bIns="18288" anchor="ctr">
-            <a:spAutoFit/>
-          </a:bodyPr>
-          <a:lstStyle/>
-          <a:p>
-            <a:pPr algn="r"/>
-            <a:r>
-              <a:rPr sz="800" b="0" i="0">
-                <a:solidFill>
-                  <a:srgbClr val="9A9CA3"/>
-                </a:solidFill>
-                <a:latin typeface="Calibri"/>
-              </a:rPr>
-              <a:t>Week 3</a:t>
-            </a:r>
-          </a:p>
-        </p:txBody>
-      </p:sp>
-      <p:sp>
-        <p:nvSpPr>
-          <p:cNvPr id="8" name="Rounded Rectangle 7"/>
-          <p:cNvSpPr/>
-          <p:nvPr/>
-        </p:nvSpPr>
-        <p:spPr>
-          <a:xfrm>
-            <a:off x="548640" y="1828800"/>
-            <a:ext cx="2560320" cy="777240"/>
-          </a:xfrm>
-          <a:prstGeom prst="roundRect">
-            <a:avLst>
-              <a:gd name="adj" fmla="val 8000"/>
-            </a:avLst>
-          </a:prstGeom>
-          <a:solidFill>
-            <a:srgbClr val="E1F5EE"/>
-          </a:solidFill>
-          <a:ln w="28575">
-            <a:solidFill>
-              <a:srgbClr val="0F6E56"/>
-            </a:solidFill>
-          </a:ln>
-          <a:effectLst/>
-        </p:spPr>
-        <p:style>
-          <a:lnRef idx="1">
-            <a:schemeClr val="accent1"/>
-          </a:lnRef>
-          <a:fillRef idx="3">
-            <a:schemeClr val="accent1"/>
-          </a:fillRef>
-          <a:effectRef idx="2">
-            <a:schemeClr val="accent1"/>
-          </a:effectRef>
-          <a:fontRef idx="minor">
-            <a:schemeClr val="lt1"/>
-          </a:fontRef>
-        </p:style>
-        <p:txBody>
-          <a:bodyPr wrap="square" lIns="45720" tIns="18288" rIns="45720" bIns="18288" rtlCol="0" anchor="ctr"/>
-          <a:lstStyle/>
-          <a:p>
-            <a:pPr algn="ctr"/>
-            <a:r>
-              <a:rPr sz="1300" b="1" i="0">
-                <a:solidFill>
-                  <a:srgbClr val="085041"/>
-                </a:solidFill>
-                <a:latin typeface="Calibri"/>
-              </a:rPr>
-              <a:t>Modern factory</a:t>
-            </a:r>
-          </a:p>
-          <a:p>
-            <a:pPr algn="ctr"/>
-            <a:r>
-              <a:rPr sz="1000" b="0" i="1">
-                <a:solidFill>
-                  <a:srgbClr val="0F6E56"/>
-                </a:solidFill>
-                <a:latin typeface="Calibri"/>
-              </a:rPr>
-              <a:t>makes a modern set</a:t>
-            </a:r>
-          </a:p>
-        </p:txBody>
-      </p:sp>
-      <p:sp>
-        <p:nvSpPr>
-          <p:cNvPr id="9" name="Rounded Rectangle 8"/>
-          <p:cNvSpPr/>
-          <p:nvPr/>
-        </p:nvSpPr>
-        <p:spPr>
-          <a:xfrm>
-            <a:off x="548640" y="3931920"/>
-            <a:ext cx="2560320" cy="777240"/>
-          </a:xfrm>
-          <a:prstGeom prst="roundRect">
-            <a:avLst>
-              <a:gd name="adj" fmla="val 8000"/>
-            </a:avLst>
-          </a:prstGeom>
-          <a:solidFill>
-            <a:srgbClr val="E1F5EE"/>
-          </a:solidFill>
-          <a:ln w="28575">
-            <a:solidFill>
-              <a:srgbClr val="0F6E56"/>
-            </a:solidFill>
-          </a:ln>
-          <a:effectLst/>
-        </p:spPr>
-        <p:style>
-          <a:lnRef idx="1">
-            <a:schemeClr val="accent1"/>
-          </a:lnRef>
-          <a:fillRef idx="3">
-            <a:schemeClr val="accent1"/>
-          </a:fillRef>
-          <a:effectRef idx="2">
-            <a:schemeClr val="accent1"/>
-          </a:effectRef>
-          <a:fontRef idx="minor">
-            <a:schemeClr val="lt1"/>
-          </a:fontRef>
-        </p:style>
-        <p:txBody>
-          <a:bodyPr wrap="square" lIns="45720" tIns="18288" rIns="45720" bIns="18288" rtlCol="0" anchor="ctr"/>
-          <a:lstStyle/>
-          <a:p>
-            <a:pPr algn="ctr"/>
-            <a:r>
-              <a:rPr sz="1300" b="1" i="0">
-                <a:solidFill>
-                  <a:srgbClr val="085041"/>
-                </a:solidFill>
-                <a:latin typeface="Calibri"/>
-              </a:rPr>
-              <a:t>Victorian factory</a:t>
-            </a:r>
-          </a:p>
-          <a:p>
-            <a:pPr algn="ctr"/>
-            <a:r>
-              <a:rPr sz="1000" b="0" i="1">
-                <a:solidFill>
-                  <a:srgbClr val="0F6E56"/>
-                </a:solidFill>
-                <a:latin typeface="Calibri"/>
-              </a:rPr>
-              <a:t>makes a victorian set</a:t>
-            </a:r>
-          </a:p>
-        </p:txBody>
-      </p:sp>
-      <p:sp>
-        <p:nvSpPr>
-          <p:cNvPr id="10" name="Rounded Rectangle 9"/>
-          <p:cNvSpPr/>
-          <p:nvPr/>
-        </p:nvSpPr>
-        <p:spPr>
-          <a:xfrm>
-            <a:off x="4114800" y="1417320"/>
-            <a:ext cx="4206240" cy="1600200"/>
-          </a:xfrm>
-          <a:prstGeom prst="roundRect">
-            <a:avLst>
-              <a:gd name="adj" fmla="val 5000"/>
-            </a:avLst>
-          </a:prstGeom>
-          <a:noFill/>
-          <a:ln w="12700">
-            <a:solidFill>
-              <a:srgbClr val="9AA0A6"/>
-            </a:solidFill>
-            <a:prstDash val="dash"/>
-          </a:ln>
-          <a:effectLst/>
-        </p:spPr>
-        <p:style>
-          <a:lnRef idx="1">
-            <a:schemeClr val="accent1"/>
-          </a:lnRef>
-          <a:fillRef idx="3">
-            <a:schemeClr val="accent1"/>
-          </a:fillRef>
-          <a:effectRef idx="2">
-            <a:schemeClr val="accent1"/>
-          </a:effectRef>
-          <a:fontRef idx="minor">
-            <a:schemeClr val="lt1"/>
-          </a:fontRef>
-        </p:style>
-        <p:txBody>
-          <a:bodyPr rtlCol="0" anchor="ctr"/>
-          <a:lstStyle/>
-          <a:p>
-            <a:pPr algn="ctr"/>
-            <a:endParaRPr/>
-          </a:p>
-        </p:txBody>
-      </p:sp>
-      <p:sp>
-        <p:nvSpPr>
-          <p:cNvPr id="11" name="TextBox 10"/>
-          <p:cNvSpPr txBox="1"/>
-          <p:nvPr/>
-        </p:nvSpPr>
-        <p:spPr>
-          <a:xfrm>
-            <a:off x="4224528" y="1463040"/>
-            <a:ext cx="3986783" cy="274320"/>
-          </a:xfrm>
-          <a:prstGeom prst="rect">
-            <a:avLst/>
-          </a:prstGeom>
-          <a:noFill/>
-        </p:spPr>
-        <p:txBody>
-          <a:bodyPr wrap="square" lIns="45720" tIns="18288" rIns="45720" bIns="18288" anchor="ctr">
-            <a:spAutoFit/>
-          </a:bodyPr>
-          <a:lstStyle/>
-          <a:p>
-            <a:pPr algn="l"/>
-            <a:r>
-              <a:rPr sz="1100" b="0" i="1">
-                <a:solidFill>
-                  <a:srgbClr val="6A6C72"/>
-                </a:solidFill>
-                <a:latin typeface="Calibri"/>
-              </a:rPr>
-              <a:t>Modern family</a:t>
-            </a:r>
-          </a:p>
-        </p:txBody>
-      </p:sp>
-      <p:sp>
-        <p:nvSpPr>
-          <p:cNvPr id="12" name="Rounded Rectangle 11"/>
-          <p:cNvSpPr/>
-          <p:nvPr/>
-        </p:nvSpPr>
-        <p:spPr>
-          <a:xfrm>
-            <a:off x="4343400" y="1920240"/>
-            <a:ext cx="1828800" cy="868680"/>
-          </a:xfrm>
-          <a:prstGeom prst="roundRect">
-            <a:avLst>
-              <a:gd name="adj" fmla="val 8000"/>
-            </a:avLst>
-          </a:prstGeom>
-          <a:solidFill>
-            <a:srgbClr val="EEEDFE"/>
-          </a:solidFill>
-          <a:ln w="12700">
-            <a:solidFill>
-              <a:srgbClr val="534AB7"/>
-            </a:solidFill>
-          </a:ln>
-          <a:effectLst/>
-        </p:spPr>
-        <p:style>
-          <a:lnRef idx="1">
-            <a:schemeClr val="accent1"/>
-          </a:lnRef>
-          <a:fillRef idx="3">
-            <a:schemeClr val="accent1"/>
-          </a:fillRef>
-          <a:effectRef idx="2">
-            <a:schemeClr val="accent1"/>
-          </a:effectRef>
-          <a:fontRef idx="minor">
-            <a:schemeClr val="lt1"/>
-          </a:fontRef>
-        </p:style>
-        <p:txBody>
-          <a:bodyPr wrap="square" lIns="45720" tIns="18288" rIns="45720" bIns="18288" rtlCol="0" anchor="ctr"/>
-          <a:lstStyle/>
-          <a:p>
-            <a:pPr algn="ctr"/>
-            <a:r>
-              <a:rPr sz="1300" b="1" i="0">
-                <a:solidFill>
-                  <a:srgbClr val="3C3489"/>
-                </a:solidFill>
-                <a:latin typeface="Calibri"/>
-              </a:rPr>
-              <a:t>Modern chair</a:t>
-            </a:r>
-          </a:p>
-        </p:txBody>
-      </p:sp>
-      <p:sp>
-        <p:nvSpPr>
-          <p:cNvPr id="13" name="Rounded Rectangle 12"/>
-          <p:cNvSpPr/>
-          <p:nvPr/>
-        </p:nvSpPr>
-        <p:spPr>
-          <a:xfrm>
-            <a:off x="6355080" y="1920240"/>
-            <a:ext cx="1828800" cy="868680"/>
-          </a:xfrm>
-          <a:prstGeom prst="roundRect">
-            <a:avLst>
-              <a:gd name="adj" fmla="val 8000"/>
-            </a:avLst>
-          </a:prstGeom>
-          <a:solidFill>
-            <a:srgbClr val="EEEDFE"/>
-          </a:solidFill>
-          <a:ln w="12700">
-            <a:solidFill>
-              <a:srgbClr val="534AB7"/>
-            </a:solidFill>
-          </a:ln>
-          <a:effectLst/>
-        </p:spPr>
-        <p:style>
-          <a:lnRef idx="1">
-            <a:schemeClr val="accent1"/>
-          </a:lnRef>
-          <a:fillRef idx="3">
-            <a:schemeClr val="accent1"/>
-          </a:fillRef>
-          <a:effectRef idx="2">
-            <a:schemeClr val="accent1"/>
-          </a:effectRef>
-          <a:fontRef idx="minor">
-            <a:schemeClr val="lt1"/>
-          </a:fontRef>
-        </p:style>
-        <p:txBody>
-          <a:bodyPr wrap="square" lIns="45720" tIns="18288" rIns="45720" bIns="18288" rtlCol="0" anchor="ctr"/>
-          <a:lstStyle/>
-          <a:p>
-            <a:pPr algn="ctr"/>
-            <a:r>
-              <a:rPr sz="1300" b="1" i="0">
-                <a:solidFill>
-                  <a:srgbClr val="3C3489"/>
-                </a:solidFill>
-                <a:latin typeface="Calibri"/>
-              </a:rPr>
-              <a:t>Modern sofa</a:t>
-            </a:r>
-          </a:p>
-        </p:txBody>
-      </p:sp>
-      <p:sp>
-        <p:nvSpPr>
-          <p:cNvPr id="14" name="Rounded Rectangle 13"/>
-          <p:cNvSpPr/>
-          <p:nvPr/>
-        </p:nvSpPr>
-        <p:spPr>
-          <a:xfrm>
-            <a:off x="4114800" y="3520440"/>
-            <a:ext cx="4206240" cy="1600200"/>
-          </a:xfrm>
-          <a:prstGeom prst="roundRect">
-            <a:avLst>
-              <a:gd name="adj" fmla="val 5000"/>
-            </a:avLst>
-          </a:prstGeom>
-          <a:noFill/>
-          <a:ln w="12700">
-            <a:solidFill>
-              <a:srgbClr val="9AA0A6"/>
-            </a:solidFill>
-            <a:prstDash val="dash"/>
-          </a:ln>
-          <a:effectLst/>
-        </p:spPr>
-        <p:style>
-          <a:lnRef idx="1">
-            <a:schemeClr val="accent1"/>
-          </a:lnRef>
-          <a:fillRef idx="3">
-            <a:schemeClr val="accent1"/>
-          </a:fillRef>
-          <a:effectRef idx="2">
-            <a:schemeClr val="accent1"/>
-          </a:effectRef>
-          <a:fontRef idx="minor">
-            <a:schemeClr val="lt1"/>
-          </a:fontRef>
-        </p:style>
-        <p:txBody>
-          <a:bodyPr rtlCol="0" anchor="ctr"/>
-          <a:lstStyle/>
-          <a:p>
-            <a:pPr algn="ctr"/>
-            <a:endParaRPr/>
-          </a:p>
-        </p:txBody>
-      </p:sp>
-      <p:sp>
-        <p:nvSpPr>
-          <p:cNvPr id="15" name="TextBox 14"/>
-          <p:cNvSpPr txBox="1"/>
-          <p:nvPr/>
-        </p:nvSpPr>
-        <p:spPr>
-          <a:xfrm>
-            <a:off x="4224528" y="3566160"/>
-            <a:ext cx="3986783" cy="274320"/>
-          </a:xfrm>
-          <a:prstGeom prst="rect">
-            <a:avLst/>
-          </a:prstGeom>
-          <a:noFill/>
-        </p:spPr>
-        <p:txBody>
-          <a:bodyPr wrap="square" lIns="45720" tIns="18288" rIns="45720" bIns="18288" anchor="ctr">
-            <a:spAutoFit/>
-          </a:bodyPr>
-          <a:lstStyle/>
-          <a:p>
-            <a:pPr algn="l"/>
-            <a:r>
-              <a:rPr sz="1100" b="0" i="1">
-                <a:solidFill>
-                  <a:srgbClr val="6A6C72"/>
-                </a:solidFill>
-                <a:latin typeface="Calibri"/>
-              </a:rPr>
-              <a:t>Victorian family</a:t>
-            </a:r>
-          </a:p>
-        </p:txBody>
-      </p:sp>
-      <p:sp>
-        <p:nvSpPr>
-          <p:cNvPr id="16" name="Rounded Rectangle 15"/>
-          <p:cNvSpPr/>
-          <p:nvPr/>
-        </p:nvSpPr>
-        <p:spPr>
-          <a:xfrm>
-            <a:off x="4343400" y="4023360"/>
-            <a:ext cx="1828800" cy="868680"/>
-          </a:xfrm>
-          <a:prstGeom prst="roundRect">
-            <a:avLst>
-              <a:gd name="adj" fmla="val 8000"/>
-            </a:avLst>
-          </a:prstGeom>
-          <a:solidFill>
-            <a:srgbClr val="FAECE7"/>
-          </a:solidFill>
-          <a:ln w="12700">
-            <a:solidFill>
-              <a:srgbClr val="993C1D"/>
-            </a:solidFill>
-          </a:ln>
-          <a:effectLst/>
-        </p:spPr>
-        <p:style>
-          <a:lnRef idx="1">
-            <a:schemeClr val="accent1"/>
-          </a:lnRef>
-          <a:fillRef idx="3">
-            <a:schemeClr val="accent1"/>
-          </a:fillRef>
-          <a:effectRef idx="2">
-            <a:schemeClr val="accent1"/>
-          </a:effectRef>
-          <a:fontRef idx="minor">
-            <a:schemeClr val="lt1"/>
-          </a:fontRef>
-        </p:style>
-        <p:txBody>
-          <a:bodyPr wrap="square" lIns="45720" tIns="18288" rIns="45720" bIns="18288" rtlCol="0" anchor="ctr"/>
-          <a:lstStyle/>
-          <a:p>
-            <a:pPr algn="ctr"/>
-            <a:r>
-              <a:rPr sz="1300" b="1" i="0">
-                <a:solidFill>
-                  <a:srgbClr val="712B13"/>
-                </a:solidFill>
-                <a:latin typeface="Calibri"/>
-              </a:rPr>
-              <a:t>Victorian chair</a:t>
-            </a:r>
-          </a:p>
-        </p:txBody>
-      </p:sp>
-      <p:sp>
-        <p:nvSpPr>
-          <p:cNvPr id="17" name="Rounded Rectangle 16"/>
-          <p:cNvSpPr/>
-          <p:nvPr/>
-        </p:nvSpPr>
-        <p:spPr>
-          <a:xfrm>
-            <a:off x="6355080" y="4023360"/>
-            <a:ext cx="1828800" cy="868680"/>
-          </a:xfrm>
-          <a:prstGeom prst="roundRect">
-            <a:avLst>
-              <a:gd name="adj" fmla="val 8000"/>
-            </a:avLst>
-          </a:prstGeom>
-          <a:solidFill>
-            <a:srgbClr val="FAECE7"/>
-          </a:solidFill>
-          <a:ln w="12700">
-            <a:solidFill>
-              <a:srgbClr val="993C1D"/>
-            </a:solidFill>
-          </a:ln>
-          <a:effectLst/>
-        </p:spPr>
-        <p:style>
-          <a:lnRef idx="1">
-            <a:schemeClr val="accent1"/>
-          </a:lnRef>
-          <a:fillRef idx="3">
-            <a:schemeClr val="accent1"/>
-          </a:fillRef>
-          <a:effectRef idx="2">
-            <a:schemeClr val="accent1"/>
-          </a:effectRef>
-          <a:fontRef idx="minor">
-            <a:schemeClr val="lt1"/>
-          </a:fontRef>
-        </p:style>
-        <p:txBody>
-          <a:bodyPr wrap="square" lIns="45720" tIns="18288" rIns="45720" bIns="18288" rtlCol="0" anchor="ctr"/>
-          <a:lstStyle/>
-          <a:p>
-            <a:pPr algn="ctr"/>
-            <a:r>
-              <a:rPr sz="1300" b="1" i="0">
-                <a:solidFill>
-                  <a:srgbClr val="712B13"/>
-                </a:solidFill>
-                <a:latin typeface="Calibri"/>
-              </a:rPr>
-              <a:t>Victorian sofa</a:t>
-            </a:r>
-          </a:p>
-        </p:txBody>
-      </p:sp>
-      <p:cxnSp>
-        <p:nvCxnSpPr>
-          <p:cNvPr id="18" name="Connector 17"/>
-          <p:cNvCxnSpPr/>
-          <p:nvPr/>
-        </p:nvCxnSpPr>
-        <p:spPr>
-          <a:xfrm>
-            <a:off x="3108960" y="2212848"/>
-            <a:ext cx="1005840" cy="0"/>
-          </a:xfrm>
-          <a:prstGeom prst="line">
-            <a:avLst/>
-          </a:prstGeom>
-          <a:ln w="15875">
-            <a:solidFill>
-              <a:srgbClr val="5A5C66"/>
-            </a:solidFill>
-            <a:tailEnd type="triangle" w="med" len="med"/>
-          </a:ln>
-          <a:effectLst/>
-        </p:spPr>
-        <p:style>
-          <a:lnRef idx="2">
-            <a:schemeClr val="accent1"/>
-          </a:lnRef>
-          <a:fillRef idx="0">
-            <a:schemeClr val="accent1"/>
-          </a:fillRef>
-          <a:effectRef idx="1">
-            <a:schemeClr val="accent1"/>
-          </a:effectRef>
-          <a:fontRef idx="minor">
-            <a:schemeClr val="tx1"/>
-          </a:fontRef>
-        </p:style>
-      </p:cxnSp>
-      <p:sp>
-        <p:nvSpPr>
-          <p:cNvPr id="19" name="TextBox 18"/>
-          <p:cNvSpPr txBox="1"/>
-          <p:nvPr/>
-        </p:nvSpPr>
-        <p:spPr>
-          <a:xfrm>
-            <a:off x="3063240" y="1956816"/>
-            <a:ext cx="1097280" cy="237744"/>
-          </a:xfrm>
-          <a:prstGeom prst="rect">
-            <a:avLst/>
-          </a:prstGeom>
-          <a:noFill/>
-        </p:spPr>
-        <p:txBody>
-          <a:bodyPr wrap="square" lIns="45720" tIns="18288" rIns="45720" bIns="18288" anchor="ctr">
-            <a:spAutoFit/>
-          </a:bodyPr>
-          <a:lstStyle/>
-          <a:p>
-            <a:pPr algn="ctr"/>
-            <a:r>
-              <a:rPr sz="950" b="0" i="1">
-                <a:solidFill>
-                  <a:srgbClr val="5A5C66"/>
-                </a:solidFill>
-                <a:latin typeface="Calibri"/>
-              </a:rPr>
-              <a:t>creates</a:t>
-            </a:r>
-          </a:p>
-        </p:txBody>
-      </p:sp>
-      <p:cxnSp>
-        <p:nvCxnSpPr>
-          <p:cNvPr id="20" name="Connector 19"/>
-          <p:cNvCxnSpPr/>
-          <p:nvPr/>
-        </p:nvCxnSpPr>
-        <p:spPr>
-          <a:xfrm>
-            <a:off x="3108960" y="4315968"/>
-            <a:ext cx="1005840" cy="0"/>
-          </a:xfrm>
-          <a:prstGeom prst="line">
-            <a:avLst/>
-          </a:prstGeom>
-          <a:ln w="15875">
-            <a:solidFill>
-              <a:srgbClr val="5A5C66"/>
-            </a:solidFill>
-            <a:tailEnd type="triangle" w="med" len="med"/>
-          </a:ln>
-          <a:effectLst/>
-        </p:spPr>
-        <p:style>
-          <a:lnRef idx="2">
-            <a:schemeClr val="accent1"/>
-          </a:lnRef>
-          <a:fillRef idx="0">
-            <a:schemeClr val="accent1"/>
-          </a:fillRef>
-          <a:effectRef idx="1">
-            <a:schemeClr val="accent1"/>
-          </a:effectRef>
-          <a:fontRef idx="minor">
-            <a:schemeClr val="tx1"/>
-          </a:fontRef>
-        </p:style>
-      </p:cxnSp>
-      <p:sp>
-        <p:nvSpPr>
-          <p:cNvPr id="21" name="TextBox 20"/>
-          <p:cNvSpPr txBox="1"/>
-          <p:nvPr/>
-        </p:nvSpPr>
-        <p:spPr>
-          <a:xfrm>
-            <a:off x="3063240" y="4059936"/>
-            <a:ext cx="1097280" cy="237744"/>
-          </a:xfrm>
-          <a:prstGeom prst="rect">
-            <a:avLst/>
-          </a:prstGeom>
-          <a:noFill/>
-        </p:spPr>
-        <p:txBody>
-          <a:bodyPr wrap="square" lIns="45720" tIns="18288" rIns="45720" bIns="18288" anchor="ctr">
-            <a:spAutoFit/>
-          </a:bodyPr>
-          <a:lstStyle/>
-          <a:p>
-            <a:pPr algn="ctr"/>
-            <a:r>
-              <a:rPr sz="950" b="0" i="1">
-                <a:solidFill>
-                  <a:srgbClr val="5A5C66"/>
-                </a:solidFill>
-                <a:latin typeface="Calibri"/>
-              </a:rPr>
-              <a:t>creates</a:t>
-            </a:r>
-          </a:p>
-        </p:txBody>
-      </p:sp>
-      <p:sp>
-        <p:nvSpPr>
-          <p:cNvPr id="22" name="TextBox 21"/>
-          <p:cNvSpPr txBox="1"/>
-          <p:nvPr/>
-        </p:nvSpPr>
-        <p:spPr>
-          <a:xfrm>
-            <a:off x="1828800" y="5897880"/>
-            <a:ext cx="5486400" cy="237744"/>
-          </a:xfrm>
-          <a:prstGeom prst="rect">
-            <a:avLst/>
-          </a:prstGeom>
-          <a:noFill/>
-        </p:spPr>
-        <p:txBody>
-          <a:bodyPr wrap="square" lIns="45720" tIns="18288" rIns="45720" bIns="18288" anchor="ctr">
-            <a:spAutoFit/>
-          </a:bodyPr>
-          <a:lstStyle/>
-          <a:p>
-            <a:pPr algn="ctr"/>
-            <a:r>
-              <a:rPr sz="950" b="0" i="1">
-                <a:solidFill>
-                  <a:srgbClr val="5A5C66"/>
-                </a:solidFill>
-                <a:latin typeface="Calibri"/>
-              </a:rPr>
-              <a:t>one factory makes a matching set — never mix a modern chair with a victorian sofa</a:t>
-            </a:r>
           </a:p>
         </p:txBody>
       </p:sp>
@@ -13971,6 +13979,14 @@
               </a:rPr>
               <a:t>interface ResultSorter { sort(ds: Driver[]): Driver[]; }</a:t>
             </a:r>
+          </a:p>
+          <a:p>
+            <a:pPr marL="0" indent="0">
+              <a:lnSpc>
+                <a:spcPct val="100000"/>
+              </a:lnSpc>
+              <a:buNone/>
+            </a:pPr>
             <a:endParaRPr lang="en-US" sz="1400" dirty="0"/>
           </a:p>
           <a:p>
@@ -14900,883 +14916,6 @@
 
 <file path=ppt/slides/slide26.xml><?xml version="1.0" encoding="utf-8"?>
 <p:sld xmlns:a="http://schemas.openxmlformats.org/drawingml/2006/main" xmlns:r="http://schemas.openxmlformats.org/officeDocument/2006/relationships" xmlns:p="http://schemas.openxmlformats.org/presentationml/2006/main">
-  <p:cSld>
-    <p:spTree>
-      <p:nvGrpSpPr>
-        <p:cNvPr id="1" name=""/>
-        <p:cNvGrpSpPr/>
-        <p:nvPr/>
-      </p:nvGrpSpPr>
-      <p:grpSpPr>
-        <a:xfrm>
-          <a:off x="0" y="0"/>
-          <a:ext cx="0" cy="0"/>
-          <a:chOff x="0" y="0"/>
-          <a:chExt cx="0" cy="0"/>
-        </a:xfrm>
-      </p:grpSpPr>
-      <p:sp>
-        <p:nvSpPr>
-          <p:cNvPr id="2" name="Rectangle 1"/>
-          <p:cNvSpPr/>
-          <p:nvPr/>
-        </p:nvSpPr>
-        <p:spPr>
-          <a:xfrm>
-            <a:off x="0" y="0"/>
-            <a:ext cx="9144000" cy="932688"/>
-          </a:xfrm>
-          <a:prstGeom prst="rect">
-            <a:avLst/>
-          </a:prstGeom>
-          <a:solidFill>
-            <a:srgbClr val="23242B"/>
-          </a:solidFill>
-          <a:ln>
-            <a:noFill/>
-          </a:ln>
-          <a:effectLst/>
-        </p:spPr>
-        <p:style>
-          <a:lnRef idx="1">
-            <a:schemeClr val="accent1"/>
-          </a:lnRef>
-          <a:fillRef idx="3">
-            <a:schemeClr val="accent1"/>
-          </a:fillRef>
-          <a:effectRef idx="2">
-            <a:schemeClr val="accent1"/>
-          </a:effectRef>
-          <a:fontRef idx="minor">
-            <a:schemeClr val="lt1"/>
-          </a:fontRef>
-        </p:style>
-        <p:txBody>
-          <a:bodyPr rtlCol="0" anchor="ctr"/>
-          <a:lstStyle/>
-          <a:p>
-            <a:pPr algn="ctr"/>
-            <a:endParaRPr/>
-          </a:p>
-        </p:txBody>
-      </p:sp>
-      <p:sp>
-        <p:nvSpPr>
-          <p:cNvPr id="3" name="Rectangle 2"/>
-          <p:cNvSpPr/>
-          <p:nvPr/>
-        </p:nvSpPr>
-        <p:spPr>
-          <a:xfrm>
-            <a:off x="4114800" y="0"/>
-            <a:ext cx="5029200" cy="932688"/>
-          </a:xfrm>
-          <a:prstGeom prst="rect">
-            <a:avLst/>
-          </a:prstGeom>
-          <a:solidFill>
-            <a:srgbClr val="4A4C57"/>
-          </a:solidFill>
-          <a:ln>
-            <a:noFill/>
-          </a:ln>
-          <a:effectLst/>
-        </p:spPr>
-        <p:style>
-          <a:lnRef idx="1">
-            <a:schemeClr val="accent1"/>
-          </a:lnRef>
-          <a:fillRef idx="3">
-            <a:schemeClr val="accent1"/>
-          </a:fillRef>
-          <a:effectRef idx="2">
-            <a:schemeClr val="accent1"/>
-          </a:effectRef>
-          <a:fontRef idx="minor">
-            <a:schemeClr val="lt1"/>
-          </a:fontRef>
-        </p:style>
-        <p:txBody>
-          <a:bodyPr rtlCol="0" anchor="ctr"/>
-          <a:lstStyle/>
-          <a:p>
-            <a:pPr algn="ctr"/>
-            <a:endParaRPr/>
-          </a:p>
-        </p:txBody>
-      </p:sp>
-      <p:pic>
-        <p:nvPicPr>
-          <p:cNvPr id="4" name="Picture 3" descr="image.png"/>
-          <p:cNvPicPr>
-            <a:picLocks noChangeAspect="1"/>
-          </p:cNvPicPr>
-          <p:nvPr/>
-        </p:nvPicPr>
-        <p:blipFill>
-          <a:blip r:embed="rId2"/>
-          <a:stretch>
-            <a:fillRect/>
-          </a:stretch>
-        </p:blipFill>
-        <p:spPr>
-          <a:xfrm>
-            <a:off x="8211312" y="118872"/>
-            <a:ext cx="694944" cy="694944"/>
-          </a:xfrm>
-          <a:prstGeom prst="rect">
-            <a:avLst/>
-          </a:prstGeom>
-        </p:spPr>
-      </p:pic>
-      <p:sp>
-        <p:nvSpPr>
-          <p:cNvPr id="5" name="TextBox 4"/>
-          <p:cNvSpPr txBox="1"/>
-          <p:nvPr/>
-        </p:nvSpPr>
-        <p:spPr>
-          <a:xfrm>
-            <a:off x="502920" y="0"/>
-            <a:ext cx="7406640" cy="932688"/>
-          </a:xfrm>
-          <a:prstGeom prst="rect">
-            <a:avLst/>
-          </a:prstGeom>
-          <a:noFill/>
-        </p:spPr>
-        <p:txBody>
-          <a:bodyPr wrap="square" lIns="45720" tIns="18288" rIns="45720" bIns="18288" anchor="ctr">
-            <a:spAutoFit/>
-          </a:bodyPr>
-          <a:lstStyle/>
-          <a:p>
-            <a:pPr algn="l"/>
-            <a:r>
-              <a:rPr sz="2300" b="0" i="0">
-                <a:solidFill>
-                  <a:srgbClr val="FFFFFF"/>
-                </a:solidFill>
-                <a:latin typeface="Calibri"/>
-              </a:rPr>
-              <a:t>Builder — assemble step by step</a:t>
-            </a:r>
-          </a:p>
-          <a:p>
-            <a:pPr algn="l"/>
-            <a:r>
-              <a:rPr sz="1100" b="0" i="1">
-                <a:solidFill>
-                  <a:srgbClr val="CADCFC"/>
-                </a:solidFill>
-                <a:latin typeface="Calibri"/>
-              </a:rPr>
-              <a:t>like ordering a custom Subway sandwich</a:t>
-            </a:r>
-          </a:p>
-        </p:txBody>
-      </p:sp>
-      <p:sp>
-        <p:nvSpPr>
-          <p:cNvPr id="6" name="TextBox 5"/>
-          <p:cNvSpPr txBox="1"/>
-          <p:nvPr/>
-        </p:nvSpPr>
-        <p:spPr>
-          <a:xfrm>
-            <a:off x="502920" y="6547104"/>
-            <a:ext cx="5943600" cy="237744"/>
-          </a:xfrm>
-          <a:prstGeom prst="rect">
-            <a:avLst/>
-          </a:prstGeom>
-          <a:noFill/>
-        </p:spPr>
-        <p:txBody>
-          <a:bodyPr wrap="square" lIns="45720" tIns="18288" rIns="45720" bIns="18288" anchor="ctr">
-            <a:spAutoFit/>
-          </a:bodyPr>
-          <a:lstStyle/>
-          <a:p>
-            <a:pPr algn="l"/>
-            <a:r>
-              <a:rPr sz="800" b="0" i="0">
-                <a:solidFill>
-                  <a:srgbClr val="9A9CA3"/>
-                </a:solidFill>
-                <a:latin typeface="Calibri"/>
-              </a:rPr>
-              <a:t>CSC 4273   ·   Software Architecture &amp; Design Patterns   ·   AIUB</a:t>
-            </a:r>
-          </a:p>
-        </p:txBody>
-      </p:sp>
-      <p:sp>
-        <p:nvSpPr>
-          <p:cNvPr id="7" name="TextBox 6"/>
-          <p:cNvSpPr txBox="1"/>
-          <p:nvPr/>
-        </p:nvSpPr>
-        <p:spPr>
-          <a:xfrm>
-            <a:off x="7132320" y="6547104"/>
-            <a:ext cx="1508760" cy="237744"/>
-          </a:xfrm>
-          <a:prstGeom prst="rect">
-            <a:avLst/>
-          </a:prstGeom>
-          <a:noFill/>
-        </p:spPr>
-        <p:txBody>
-          <a:bodyPr wrap="square" lIns="45720" tIns="18288" rIns="45720" bIns="18288" anchor="ctr">
-            <a:spAutoFit/>
-          </a:bodyPr>
-          <a:lstStyle/>
-          <a:p>
-            <a:pPr algn="r"/>
-            <a:r>
-              <a:rPr sz="800" b="0" i="0">
-                <a:solidFill>
-                  <a:srgbClr val="9A9CA3"/>
-                </a:solidFill>
-                <a:latin typeface="Calibri"/>
-              </a:rPr>
-              <a:t>Week 3</a:t>
-            </a:r>
-          </a:p>
-        </p:txBody>
-      </p:sp>
-      <p:sp>
-        <p:nvSpPr>
-          <p:cNvPr id="8" name="Rounded Rectangle 7"/>
-          <p:cNvSpPr/>
-          <p:nvPr/>
-        </p:nvSpPr>
-        <p:spPr>
-          <a:xfrm>
-            <a:off x="548640" y="2743200"/>
-            <a:ext cx="2103120" cy="914400"/>
-          </a:xfrm>
-          <a:prstGeom prst="roundRect">
-            <a:avLst>
-              <a:gd name="adj" fmla="val 8000"/>
-            </a:avLst>
-          </a:prstGeom>
-          <a:solidFill>
-            <a:srgbClr val="E1F5EE"/>
-          </a:solidFill>
-          <a:ln w="28575">
-            <a:solidFill>
-              <a:srgbClr val="0F6E56"/>
-            </a:solidFill>
-          </a:ln>
-          <a:effectLst/>
-        </p:spPr>
-        <p:style>
-          <a:lnRef idx="1">
-            <a:schemeClr val="accent1"/>
-          </a:lnRef>
-          <a:fillRef idx="3">
-            <a:schemeClr val="accent1"/>
-          </a:fillRef>
-          <a:effectRef idx="2">
-            <a:schemeClr val="accent1"/>
-          </a:effectRef>
-          <a:fontRef idx="minor">
-            <a:schemeClr val="lt1"/>
-          </a:fontRef>
-        </p:style>
-        <p:txBody>
-          <a:bodyPr wrap="square" lIns="45720" tIns="18288" rIns="45720" bIns="18288" rtlCol="0" anchor="ctr"/>
-          <a:lstStyle/>
-          <a:p>
-            <a:pPr algn="ctr"/>
-            <a:r>
-              <a:rPr sz="1300" b="1" i="0">
-                <a:solidFill>
-                  <a:srgbClr val="085041"/>
-                </a:solidFill>
-                <a:latin typeface="Calibri"/>
-              </a:rPr>
-              <a:t>SandwichBuilder</a:t>
-            </a:r>
-          </a:p>
-          <a:p>
-            <a:pPr algn="ctr"/>
-            <a:r>
-              <a:rPr sz="1000" b="0" i="1">
-                <a:solidFill>
-                  <a:srgbClr val="0F6E56"/>
-                </a:solidFill>
-                <a:latin typeface="Calibri"/>
-              </a:rPr>
-              <a:t>builds step by step</a:t>
-            </a:r>
-          </a:p>
-        </p:txBody>
-      </p:sp>
-      <p:sp>
-        <p:nvSpPr>
-          <p:cNvPr id="9" name="Rounded Rectangle 8"/>
-          <p:cNvSpPr/>
-          <p:nvPr/>
-        </p:nvSpPr>
-        <p:spPr>
-          <a:xfrm>
-            <a:off x="3291840" y="1554480"/>
-            <a:ext cx="2103120" cy="566928"/>
-          </a:xfrm>
-          <a:prstGeom prst="roundRect">
-            <a:avLst>
-              <a:gd name="adj" fmla="val 8000"/>
-            </a:avLst>
-          </a:prstGeom>
-          <a:solidFill>
-            <a:srgbClr val="EEEDFE"/>
-          </a:solidFill>
-          <a:ln w="12700">
-            <a:solidFill>
-              <a:srgbClr val="534AB7"/>
-            </a:solidFill>
-          </a:ln>
-          <a:effectLst/>
-        </p:spPr>
-        <p:style>
-          <a:lnRef idx="1">
-            <a:schemeClr val="accent1"/>
-          </a:lnRef>
-          <a:fillRef idx="3">
-            <a:schemeClr val="accent1"/>
-          </a:fillRef>
-          <a:effectRef idx="2">
-            <a:schemeClr val="accent1"/>
-          </a:effectRef>
-          <a:fontRef idx="minor">
-            <a:schemeClr val="lt1"/>
-          </a:fontRef>
-        </p:style>
-        <p:txBody>
-          <a:bodyPr wrap="square" lIns="45720" tIns="18288" rIns="45720" bIns="18288" rtlCol="0" anchor="ctr"/>
-          <a:lstStyle/>
-          <a:p>
-            <a:pPr algn="ctr"/>
-            <a:r>
-              <a:rPr sz="1300" b="1" i="0">
-                <a:solidFill>
-                  <a:srgbClr val="3C3489"/>
-                </a:solidFill>
-                <a:latin typeface="Calibri"/>
-              </a:rPr>
-              <a:t>1 · add bread</a:t>
-            </a:r>
-          </a:p>
-        </p:txBody>
-      </p:sp>
-      <p:sp>
-        <p:nvSpPr>
-          <p:cNvPr id="10" name="Rounded Rectangle 9"/>
-          <p:cNvSpPr/>
-          <p:nvPr/>
-        </p:nvSpPr>
-        <p:spPr>
-          <a:xfrm>
-            <a:off x="3291840" y="2286000"/>
-            <a:ext cx="2103120" cy="566928"/>
-          </a:xfrm>
-          <a:prstGeom prst="roundRect">
-            <a:avLst>
-              <a:gd name="adj" fmla="val 8000"/>
-            </a:avLst>
-          </a:prstGeom>
-          <a:solidFill>
-            <a:srgbClr val="EEEDFE"/>
-          </a:solidFill>
-          <a:ln w="12700">
-            <a:solidFill>
-              <a:srgbClr val="534AB7"/>
-            </a:solidFill>
-          </a:ln>
-          <a:effectLst/>
-        </p:spPr>
-        <p:style>
-          <a:lnRef idx="1">
-            <a:schemeClr val="accent1"/>
-          </a:lnRef>
-          <a:fillRef idx="3">
-            <a:schemeClr val="accent1"/>
-          </a:fillRef>
-          <a:effectRef idx="2">
-            <a:schemeClr val="accent1"/>
-          </a:effectRef>
-          <a:fontRef idx="minor">
-            <a:schemeClr val="lt1"/>
-          </a:fontRef>
-        </p:style>
-        <p:txBody>
-          <a:bodyPr wrap="square" lIns="45720" tIns="18288" rIns="45720" bIns="18288" rtlCol="0" anchor="ctr"/>
-          <a:lstStyle/>
-          <a:p>
-            <a:pPr algn="ctr"/>
-            <a:r>
-              <a:rPr sz="1300" b="1" i="0">
-                <a:solidFill>
-                  <a:srgbClr val="3C3489"/>
-                </a:solidFill>
-                <a:latin typeface="Calibri"/>
-              </a:rPr>
-              <a:t>2 · add protein</a:t>
-            </a:r>
-          </a:p>
-        </p:txBody>
-      </p:sp>
-      <p:sp>
-        <p:nvSpPr>
-          <p:cNvPr id="11" name="Rounded Rectangle 10"/>
-          <p:cNvSpPr/>
-          <p:nvPr/>
-        </p:nvSpPr>
-        <p:spPr>
-          <a:xfrm>
-            <a:off x="3291840" y="3017520"/>
-            <a:ext cx="2103120" cy="566928"/>
-          </a:xfrm>
-          <a:prstGeom prst="roundRect">
-            <a:avLst>
-              <a:gd name="adj" fmla="val 8000"/>
-            </a:avLst>
-          </a:prstGeom>
-          <a:solidFill>
-            <a:srgbClr val="EEEDFE"/>
-          </a:solidFill>
-          <a:ln w="12700">
-            <a:solidFill>
-              <a:srgbClr val="534AB7"/>
-            </a:solidFill>
-          </a:ln>
-          <a:effectLst/>
-        </p:spPr>
-        <p:style>
-          <a:lnRef idx="1">
-            <a:schemeClr val="accent1"/>
-          </a:lnRef>
-          <a:fillRef idx="3">
-            <a:schemeClr val="accent1"/>
-          </a:fillRef>
-          <a:effectRef idx="2">
-            <a:schemeClr val="accent1"/>
-          </a:effectRef>
-          <a:fontRef idx="minor">
-            <a:schemeClr val="lt1"/>
-          </a:fontRef>
-        </p:style>
-        <p:txBody>
-          <a:bodyPr wrap="square" lIns="45720" tIns="18288" rIns="45720" bIns="18288" rtlCol="0" anchor="ctr"/>
-          <a:lstStyle/>
-          <a:p>
-            <a:pPr algn="ctr"/>
-            <a:r>
-              <a:rPr sz="1300" b="1" i="0">
-                <a:solidFill>
-                  <a:srgbClr val="3C3489"/>
-                </a:solidFill>
-                <a:latin typeface="Calibri"/>
-              </a:rPr>
-              <a:t>3 · add veggies</a:t>
-            </a:r>
-          </a:p>
-        </p:txBody>
-      </p:sp>
-      <p:sp>
-        <p:nvSpPr>
-          <p:cNvPr id="12" name="Rounded Rectangle 11"/>
-          <p:cNvSpPr/>
-          <p:nvPr/>
-        </p:nvSpPr>
-        <p:spPr>
-          <a:xfrm>
-            <a:off x="3291840" y="3749039"/>
-            <a:ext cx="2103120" cy="566928"/>
-          </a:xfrm>
-          <a:prstGeom prst="roundRect">
-            <a:avLst>
-              <a:gd name="adj" fmla="val 8000"/>
-            </a:avLst>
-          </a:prstGeom>
-          <a:solidFill>
-            <a:srgbClr val="EEEDFE"/>
-          </a:solidFill>
-          <a:ln w="12700">
-            <a:solidFill>
-              <a:srgbClr val="534AB7"/>
-            </a:solidFill>
-          </a:ln>
-          <a:effectLst/>
-        </p:spPr>
-        <p:style>
-          <a:lnRef idx="1">
-            <a:schemeClr val="accent1"/>
-          </a:lnRef>
-          <a:fillRef idx="3">
-            <a:schemeClr val="accent1"/>
-          </a:fillRef>
-          <a:effectRef idx="2">
-            <a:schemeClr val="accent1"/>
-          </a:effectRef>
-          <a:fontRef idx="minor">
-            <a:schemeClr val="lt1"/>
-          </a:fontRef>
-        </p:style>
-        <p:txBody>
-          <a:bodyPr wrap="square" lIns="45720" tIns="18288" rIns="45720" bIns="18288" rtlCol="0" anchor="ctr"/>
-          <a:lstStyle/>
-          <a:p>
-            <a:pPr algn="ctr"/>
-            <a:r>
-              <a:rPr sz="1300" b="1" i="0">
-                <a:solidFill>
-                  <a:srgbClr val="3C3489"/>
-                </a:solidFill>
-                <a:latin typeface="Calibri"/>
-              </a:rPr>
-              <a:t>4 · add sauce</a:t>
-            </a:r>
-          </a:p>
-        </p:txBody>
-      </p:sp>
-      <p:cxnSp>
-        <p:nvCxnSpPr>
-          <p:cNvPr id="13" name="Connector 12"/>
-          <p:cNvCxnSpPr/>
-          <p:nvPr/>
-        </p:nvCxnSpPr>
-        <p:spPr>
-          <a:xfrm>
-            <a:off x="4343400" y="2121408"/>
-            <a:ext cx="0" cy="164592"/>
-          </a:xfrm>
-          <a:prstGeom prst="line">
-            <a:avLst/>
-          </a:prstGeom>
-          <a:ln w="15875">
-            <a:solidFill>
-              <a:srgbClr val="5A5C66"/>
-            </a:solidFill>
-            <a:tailEnd type="triangle" w="med" len="med"/>
-          </a:ln>
-          <a:effectLst/>
-        </p:spPr>
-        <p:style>
-          <a:lnRef idx="2">
-            <a:schemeClr val="accent1"/>
-          </a:lnRef>
-          <a:fillRef idx="0">
-            <a:schemeClr val="accent1"/>
-          </a:fillRef>
-          <a:effectRef idx="1">
-            <a:schemeClr val="accent1"/>
-          </a:effectRef>
-          <a:fontRef idx="minor">
-            <a:schemeClr val="tx1"/>
-          </a:fontRef>
-        </p:style>
-      </p:cxnSp>
-      <p:cxnSp>
-        <p:nvCxnSpPr>
-          <p:cNvPr id="14" name="Connector 13"/>
-          <p:cNvCxnSpPr/>
-          <p:nvPr/>
-        </p:nvCxnSpPr>
-        <p:spPr>
-          <a:xfrm>
-            <a:off x="4343400" y="2852928"/>
-            <a:ext cx="0" cy="164592"/>
-          </a:xfrm>
-          <a:prstGeom prst="line">
-            <a:avLst/>
-          </a:prstGeom>
-          <a:ln w="15875">
-            <a:solidFill>
-              <a:srgbClr val="5A5C66"/>
-            </a:solidFill>
-            <a:tailEnd type="triangle" w="med" len="med"/>
-          </a:ln>
-          <a:effectLst/>
-        </p:spPr>
-        <p:style>
-          <a:lnRef idx="2">
-            <a:schemeClr val="accent1"/>
-          </a:lnRef>
-          <a:fillRef idx="0">
-            <a:schemeClr val="accent1"/>
-          </a:fillRef>
-          <a:effectRef idx="1">
-            <a:schemeClr val="accent1"/>
-          </a:effectRef>
-          <a:fontRef idx="minor">
-            <a:schemeClr val="tx1"/>
-          </a:fontRef>
-        </p:style>
-      </p:cxnSp>
-      <p:cxnSp>
-        <p:nvCxnSpPr>
-          <p:cNvPr id="15" name="Connector 14"/>
-          <p:cNvCxnSpPr/>
-          <p:nvPr/>
-        </p:nvCxnSpPr>
-        <p:spPr>
-          <a:xfrm>
-            <a:off x="4343400" y="3584448"/>
-            <a:ext cx="0" cy="164591"/>
-          </a:xfrm>
-          <a:prstGeom prst="line">
-            <a:avLst/>
-          </a:prstGeom>
-          <a:ln w="15875">
-            <a:solidFill>
-              <a:srgbClr val="5A5C66"/>
-            </a:solidFill>
-            <a:tailEnd type="triangle" w="med" len="med"/>
-          </a:ln>
-          <a:effectLst/>
-        </p:spPr>
-        <p:style>
-          <a:lnRef idx="2">
-            <a:schemeClr val="accent1"/>
-          </a:lnRef>
-          <a:fillRef idx="0">
-            <a:schemeClr val="accent1"/>
-          </a:fillRef>
-          <a:effectRef idx="1">
-            <a:schemeClr val="accent1"/>
-          </a:effectRef>
-          <a:fontRef idx="minor">
-            <a:schemeClr val="tx1"/>
-          </a:fontRef>
-        </p:style>
-      </p:cxnSp>
-      <p:sp>
-        <p:nvSpPr>
-          <p:cNvPr id="16" name="Rounded Rectangle 15"/>
-          <p:cNvSpPr/>
-          <p:nvPr/>
-        </p:nvSpPr>
-        <p:spPr>
-          <a:xfrm>
-            <a:off x="6309360" y="2743200"/>
-            <a:ext cx="2194560" cy="914400"/>
-          </a:xfrm>
-          <a:prstGeom prst="roundRect">
-            <a:avLst>
-              <a:gd name="adj" fmla="val 8000"/>
-            </a:avLst>
-          </a:prstGeom>
-          <a:solidFill>
-            <a:srgbClr val="EAF3DE"/>
-          </a:solidFill>
-          <a:ln w="28575">
-            <a:solidFill>
-              <a:srgbClr val="3B6D11"/>
-            </a:solidFill>
-          </a:ln>
-          <a:effectLst/>
-        </p:spPr>
-        <p:style>
-          <a:lnRef idx="1">
-            <a:schemeClr val="accent1"/>
-          </a:lnRef>
-          <a:fillRef idx="3">
-            <a:schemeClr val="accent1"/>
-          </a:fillRef>
-          <a:effectRef idx="2">
-            <a:schemeClr val="accent1"/>
-          </a:effectRef>
-          <a:fontRef idx="minor">
-            <a:schemeClr val="lt1"/>
-          </a:fontRef>
-        </p:style>
-        <p:txBody>
-          <a:bodyPr wrap="square" lIns="45720" tIns="18288" rIns="45720" bIns="18288" rtlCol="0" anchor="ctr"/>
-          <a:lstStyle/>
-          <a:p>
-            <a:pPr algn="ctr"/>
-            <a:r>
-              <a:rPr sz="1300" b="1" i="0">
-                <a:solidFill>
-                  <a:srgbClr val="27500A"/>
-                </a:solidFill>
-                <a:latin typeface="Calibri"/>
-              </a:rPr>
-              <a:t>Custom sub</a:t>
-            </a:r>
-          </a:p>
-          <a:p>
-            <a:pPr algn="ctr"/>
-            <a:r>
-              <a:rPr sz="1000" b="0" i="1">
-                <a:solidFill>
-                  <a:srgbClr val="3B6D11"/>
-                </a:solidFill>
-                <a:latin typeface="Calibri"/>
-              </a:rPr>
-              <a:t>finished product</a:t>
-            </a:r>
-          </a:p>
-        </p:txBody>
-      </p:sp>
-      <p:cxnSp>
-        <p:nvCxnSpPr>
-          <p:cNvPr id="17" name="Connector 16"/>
-          <p:cNvCxnSpPr/>
-          <p:nvPr/>
-        </p:nvCxnSpPr>
-        <p:spPr>
-          <a:xfrm flipV="1">
-            <a:off x="2651760" y="1828800"/>
-            <a:ext cx="640080" cy="1188720"/>
-          </a:xfrm>
-          <a:prstGeom prst="line">
-            <a:avLst/>
-          </a:prstGeom>
-          <a:ln w="15875">
-            <a:solidFill>
-              <a:srgbClr val="5A5C66"/>
-            </a:solidFill>
-            <a:tailEnd type="triangle" w="med" len="med"/>
-          </a:ln>
-          <a:effectLst/>
-        </p:spPr>
-        <p:style>
-          <a:lnRef idx="2">
-            <a:schemeClr val="accent1"/>
-          </a:lnRef>
-          <a:fillRef idx="0">
-            <a:schemeClr val="accent1"/>
-          </a:fillRef>
-          <a:effectRef idx="1">
-            <a:schemeClr val="accent1"/>
-          </a:effectRef>
-          <a:fontRef idx="minor">
-            <a:schemeClr val="tx1"/>
-          </a:fontRef>
-        </p:style>
-      </p:cxnSp>
-      <p:sp>
-        <p:nvSpPr>
-          <p:cNvPr id="18" name="TextBox 17"/>
-          <p:cNvSpPr txBox="1"/>
-          <p:nvPr/>
-        </p:nvSpPr>
-        <p:spPr>
-          <a:xfrm>
-            <a:off x="2331720" y="2286000"/>
-            <a:ext cx="1097280" cy="237744"/>
-          </a:xfrm>
-          <a:prstGeom prst="rect">
-            <a:avLst/>
-          </a:prstGeom>
-          <a:noFill/>
-        </p:spPr>
-        <p:txBody>
-          <a:bodyPr wrap="square" lIns="45720" tIns="18288" rIns="45720" bIns="18288" anchor="ctr">
-            <a:spAutoFit/>
-          </a:bodyPr>
-          <a:lstStyle/>
-          <a:p>
-            <a:pPr algn="ctr"/>
-            <a:r>
-              <a:rPr sz="950" b="0" i="1">
-                <a:solidFill>
-                  <a:srgbClr val="5A5C66"/>
-                </a:solidFill>
-                <a:latin typeface="Calibri"/>
-              </a:rPr>
-              <a:t>runs</a:t>
-            </a:r>
-          </a:p>
-        </p:txBody>
-      </p:sp>
-      <p:cxnSp>
-        <p:nvCxnSpPr>
-          <p:cNvPr id="19" name="Connector 18"/>
-          <p:cNvCxnSpPr/>
-          <p:nvPr/>
-        </p:nvCxnSpPr>
-        <p:spPr>
-          <a:xfrm flipV="1">
-            <a:off x="5394960" y="3291840"/>
-            <a:ext cx="914400" cy="731520"/>
-          </a:xfrm>
-          <a:prstGeom prst="line">
-            <a:avLst/>
-          </a:prstGeom>
-          <a:ln w="15875">
-            <a:solidFill>
-              <a:srgbClr val="5A5C66"/>
-            </a:solidFill>
-            <a:tailEnd type="triangle" w="med" len="med"/>
-          </a:ln>
-          <a:effectLst/>
-        </p:spPr>
-        <p:style>
-          <a:lnRef idx="2">
-            <a:schemeClr val="accent1"/>
-          </a:lnRef>
-          <a:fillRef idx="0">
-            <a:schemeClr val="accent1"/>
-          </a:fillRef>
-          <a:effectRef idx="1">
-            <a:schemeClr val="accent1"/>
-          </a:effectRef>
-          <a:fontRef idx="minor">
-            <a:schemeClr val="tx1"/>
-          </a:fontRef>
-        </p:style>
-      </p:cxnSp>
-      <p:sp>
-        <p:nvSpPr>
-          <p:cNvPr id="20" name="TextBox 19"/>
-          <p:cNvSpPr txBox="1"/>
-          <p:nvPr/>
-        </p:nvSpPr>
-        <p:spPr>
-          <a:xfrm>
-            <a:off x="5074920" y="4114800"/>
-            <a:ext cx="1097280" cy="237744"/>
-          </a:xfrm>
-          <a:prstGeom prst="rect">
-            <a:avLst/>
-          </a:prstGeom>
-          <a:noFill/>
-        </p:spPr>
-        <p:txBody>
-          <a:bodyPr wrap="square" lIns="45720" tIns="18288" rIns="45720" bIns="18288" anchor="ctr">
-            <a:spAutoFit/>
-          </a:bodyPr>
-          <a:lstStyle/>
-          <a:p>
-            <a:pPr algn="ctr"/>
-            <a:r>
-              <a:rPr sz="950" b="0" i="1">
-                <a:solidFill>
-                  <a:srgbClr val="5A5C66"/>
-                </a:solidFill>
-                <a:latin typeface="Calibri"/>
-              </a:rPr>
-              <a:t>build()</a:t>
-            </a:r>
-          </a:p>
-        </p:txBody>
-      </p:sp>
-    </p:spTree>
-  </p:cSld>
-  <p:clrMapOvr>
-    <a:masterClrMapping/>
-  </p:clrMapOvr>
-</p:sld>
-</file>
-
-<file path=ppt/slides/slide27.xml><?xml version="1.0" encoding="utf-8"?>
-<p:sld xmlns:a="http://schemas.openxmlformats.org/drawingml/2006/main" xmlns:r="http://schemas.openxmlformats.org/officeDocument/2006/relationships" xmlns:p="http://schemas.openxmlformats.org/presentationml/2006/main">
   <p:cSld name="Slide 23">
     <p:bg>
       <p:bgPr>
@@ -16163,6 +15302,883 @@
             <a:endParaRPr lang="en-US" sz="1550" dirty="0">
               <a:latin typeface="Cambria" panose="02040503050406030204" pitchFamily="18" charset="0"/>
             </a:endParaRPr>
+          </a:p>
+        </p:txBody>
+      </p:sp>
+    </p:spTree>
+  </p:cSld>
+  <p:clrMapOvr>
+    <a:masterClrMapping/>
+  </p:clrMapOvr>
+</p:sld>
+</file>
+
+<file path=ppt/slides/slide27.xml><?xml version="1.0" encoding="utf-8"?>
+<p:sld xmlns:a="http://schemas.openxmlformats.org/drawingml/2006/main" xmlns:r="http://schemas.openxmlformats.org/officeDocument/2006/relationships" xmlns:p="http://schemas.openxmlformats.org/presentationml/2006/main">
+  <p:cSld>
+    <p:spTree>
+      <p:nvGrpSpPr>
+        <p:cNvPr id="1" name=""/>
+        <p:cNvGrpSpPr/>
+        <p:nvPr/>
+      </p:nvGrpSpPr>
+      <p:grpSpPr>
+        <a:xfrm>
+          <a:off x="0" y="0"/>
+          <a:ext cx="0" cy="0"/>
+          <a:chOff x="0" y="0"/>
+          <a:chExt cx="0" cy="0"/>
+        </a:xfrm>
+      </p:grpSpPr>
+      <p:sp>
+        <p:nvSpPr>
+          <p:cNvPr id="2" name="Rectangle 1"/>
+          <p:cNvSpPr/>
+          <p:nvPr/>
+        </p:nvSpPr>
+        <p:spPr>
+          <a:xfrm>
+            <a:off x="0" y="0"/>
+            <a:ext cx="9144000" cy="932688"/>
+          </a:xfrm>
+          <a:prstGeom prst="rect">
+            <a:avLst/>
+          </a:prstGeom>
+          <a:solidFill>
+            <a:srgbClr val="23242B"/>
+          </a:solidFill>
+          <a:ln>
+            <a:noFill/>
+          </a:ln>
+          <a:effectLst/>
+        </p:spPr>
+        <p:style>
+          <a:lnRef idx="1">
+            <a:schemeClr val="accent1"/>
+          </a:lnRef>
+          <a:fillRef idx="3">
+            <a:schemeClr val="accent1"/>
+          </a:fillRef>
+          <a:effectRef idx="2">
+            <a:schemeClr val="accent1"/>
+          </a:effectRef>
+          <a:fontRef idx="minor">
+            <a:schemeClr val="lt1"/>
+          </a:fontRef>
+        </p:style>
+        <p:txBody>
+          <a:bodyPr rtlCol="0" anchor="ctr"/>
+          <a:lstStyle/>
+          <a:p>
+            <a:pPr algn="ctr"/>
+            <a:endParaRPr/>
+          </a:p>
+        </p:txBody>
+      </p:sp>
+      <p:sp>
+        <p:nvSpPr>
+          <p:cNvPr id="3" name="Rectangle 2"/>
+          <p:cNvSpPr/>
+          <p:nvPr/>
+        </p:nvSpPr>
+        <p:spPr>
+          <a:xfrm>
+            <a:off x="4114800" y="0"/>
+            <a:ext cx="5029200" cy="932688"/>
+          </a:xfrm>
+          <a:prstGeom prst="rect">
+            <a:avLst/>
+          </a:prstGeom>
+          <a:solidFill>
+            <a:srgbClr val="4A4C57"/>
+          </a:solidFill>
+          <a:ln>
+            <a:noFill/>
+          </a:ln>
+          <a:effectLst/>
+        </p:spPr>
+        <p:style>
+          <a:lnRef idx="1">
+            <a:schemeClr val="accent1"/>
+          </a:lnRef>
+          <a:fillRef idx="3">
+            <a:schemeClr val="accent1"/>
+          </a:fillRef>
+          <a:effectRef idx="2">
+            <a:schemeClr val="accent1"/>
+          </a:effectRef>
+          <a:fontRef idx="minor">
+            <a:schemeClr val="lt1"/>
+          </a:fontRef>
+        </p:style>
+        <p:txBody>
+          <a:bodyPr rtlCol="0" anchor="ctr"/>
+          <a:lstStyle/>
+          <a:p>
+            <a:pPr algn="ctr"/>
+            <a:endParaRPr/>
+          </a:p>
+        </p:txBody>
+      </p:sp>
+      <p:pic>
+        <p:nvPicPr>
+          <p:cNvPr id="4" name="Picture 3" descr="image.png"/>
+          <p:cNvPicPr>
+            <a:picLocks noChangeAspect="1"/>
+          </p:cNvPicPr>
+          <p:nvPr/>
+        </p:nvPicPr>
+        <p:blipFill>
+          <a:blip r:embed="rId2"/>
+          <a:stretch>
+            <a:fillRect/>
+          </a:stretch>
+        </p:blipFill>
+        <p:spPr>
+          <a:xfrm>
+            <a:off x="8211312" y="118872"/>
+            <a:ext cx="694944" cy="694944"/>
+          </a:xfrm>
+          <a:prstGeom prst="rect">
+            <a:avLst/>
+          </a:prstGeom>
+        </p:spPr>
+      </p:pic>
+      <p:sp>
+        <p:nvSpPr>
+          <p:cNvPr id="5" name="TextBox 4"/>
+          <p:cNvSpPr txBox="1"/>
+          <p:nvPr/>
+        </p:nvSpPr>
+        <p:spPr>
+          <a:xfrm>
+            <a:off x="502920" y="0"/>
+            <a:ext cx="7406640" cy="932688"/>
+          </a:xfrm>
+          <a:prstGeom prst="rect">
+            <a:avLst/>
+          </a:prstGeom>
+          <a:noFill/>
+        </p:spPr>
+        <p:txBody>
+          <a:bodyPr wrap="square" lIns="45720" tIns="18288" rIns="45720" bIns="18288" anchor="ctr">
+            <a:spAutoFit/>
+          </a:bodyPr>
+          <a:lstStyle/>
+          <a:p>
+            <a:pPr algn="l"/>
+            <a:r>
+              <a:rPr sz="2300" b="0" i="0">
+                <a:solidFill>
+                  <a:srgbClr val="FFFFFF"/>
+                </a:solidFill>
+                <a:latin typeface="Calibri"/>
+              </a:rPr>
+              <a:t>Builder — assemble step by step</a:t>
+            </a:r>
+          </a:p>
+          <a:p>
+            <a:pPr algn="l"/>
+            <a:r>
+              <a:rPr sz="1100" b="0" i="1">
+                <a:solidFill>
+                  <a:srgbClr val="CADCFC"/>
+                </a:solidFill>
+                <a:latin typeface="Calibri"/>
+              </a:rPr>
+              <a:t>like ordering a custom Subway sandwich</a:t>
+            </a:r>
+          </a:p>
+        </p:txBody>
+      </p:sp>
+      <p:sp>
+        <p:nvSpPr>
+          <p:cNvPr id="6" name="TextBox 5"/>
+          <p:cNvSpPr txBox="1"/>
+          <p:nvPr/>
+        </p:nvSpPr>
+        <p:spPr>
+          <a:xfrm>
+            <a:off x="502920" y="6547104"/>
+            <a:ext cx="5943600" cy="237744"/>
+          </a:xfrm>
+          <a:prstGeom prst="rect">
+            <a:avLst/>
+          </a:prstGeom>
+          <a:noFill/>
+        </p:spPr>
+        <p:txBody>
+          <a:bodyPr wrap="square" lIns="45720" tIns="18288" rIns="45720" bIns="18288" anchor="ctr">
+            <a:spAutoFit/>
+          </a:bodyPr>
+          <a:lstStyle/>
+          <a:p>
+            <a:pPr algn="l"/>
+            <a:r>
+              <a:rPr sz="800" b="0" i="0">
+                <a:solidFill>
+                  <a:srgbClr val="9A9CA3"/>
+                </a:solidFill>
+                <a:latin typeface="Calibri"/>
+              </a:rPr>
+              <a:t>CSC 4273   ·   Software Architecture &amp; Design Patterns   ·   AIUB</a:t>
+            </a:r>
+          </a:p>
+        </p:txBody>
+      </p:sp>
+      <p:sp>
+        <p:nvSpPr>
+          <p:cNvPr id="7" name="TextBox 6"/>
+          <p:cNvSpPr txBox="1"/>
+          <p:nvPr/>
+        </p:nvSpPr>
+        <p:spPr>
+          <a:xfrm>
+            <a:off x="7132320" y="6547104"/>
+            <a:ext cx="1508760" cy="237744"/>
+          </a:xfrm>
+          <a:prstGeom prst="rect">
+            <a:avLst/>
+          </a:prstGeom>
+          <a:noFill/>
+        </p:spPr>
+        <p:txBody>
+          <a:bodyPr wrap="square" lIns="45720" tIns="18288" rIns="45720" bIns="18288" anchor="ctr">
+            <a:spAutoFit/>
+          </a:bodyPr>
+          <a:lstStyle/>
+          <a:p>
+            <a:pPr algn="r"/>
+            <a:r>
+              <a:rPr sz="800" b="0" i="0">
+                <a:solidFill>
+                  <a:srgbClr val="9A9CA3"/>
+                </a:solidFill>
+                <a:latin typeface="Calibri"/>
+              </a:rPr>
+              <a:t>Week 3</a:t>
+            </a:r>
+          </a:p>
+        </p:txBody>
+      </p:sp>
+      <p:sp>
+        <p:nvSpPr>
+          <p:cNvPr id="8" name="Rounded Rectangle 7"/>
+          <p:cNvSpPr/>
+          <p:nvPr/>
+        </p:nvSpPr>
+        <p:spPr>
+          <a:xfrm>
+            <a:off x="548640" y="2743200"/>
+            <a:ext cx="2103120" cy="914400"/>
+          </a:xfrm>
+          <a:prstGeom prst="roundRect">
+            <a:avLst>
+              <a:gd name="adj" fmla="val 8000"/>
+            </a:avLst>
+          </a:prstGeom>
+          <a:solidFill>
+            <a:srgbClr val="E1F5EE"/>
+          </a:solidFill>
+          <a:ln w="28575">
+            <a:solidFill>
+              <a:srgbClr val="0F6E56"/>
+            </a:solidFill>
+          </a:ln>
+          <a:effectLst/>
+        </p:spPr>
+        <p:style>
+          <a:lnRef idx="1">
+            <a:schemeClr val="accent1"/>
+          </a:lnRef>
+          <a:fillRef idx="3">
+            <a:schemeClr val="accent1"/>
+          </a:fillRef>
+          <a:effectRef idx="2">
+            <a:schemeClr val="accent1"/>
+          </a:effectRef>
+          <a:fontRef idx="minor">
+            <a:schemeClr val="lt1"/>
+          </a:fontRef>
+        </p:style>
+        <p:txBody>
+          <a:bodyPr wrap="square" lIns="45720" tIns="18288" rIns="45720" bIns="18288" rtlCol="0" anchor="ctr"/>
+          <a:lstStyle/>
+          <a:p>
+            <a:pPr algn="ctr"/>
+            <a:r>
+              <a:rPr sz="1300" b="1" i="0">
+                <a:solidFill>
+                  <a:srgbClr val="085041"/>
+                </a:solidFill>
+                <a:latin typeface="Calibri"/>
+              </a:rPr>
+              <a:t>SandwichBuilder</a:t>
+            </a:r>
+          </a:p>
+          <a:p>
+            <a:pPr algn="ctr"/>
+            <a:r>
+              <a:rPr sz="1000" b="0" i="1">
+                <a:solidFill>
+                  <a:srgbClr val="0F6E56"/>
+                </a:solidFill>
+                <a:latin typeface="Calibri"/>
+              </a:rPr>
+              <a:t>builds step by step</a:t>
+            </a:r>
+          </a:p>
+        </p:txBody>
+      </p:sp>
+      <p:sp>
+        <p:nvSpPr>
+          <p:cNvPr id="9" name="Rounded Rectangle 8"/>
+          <p:cNvSpPr/>
+          <p:nvPr/>
+        </p:nvSpPr>
+        <p:spPr>
+          <a:xfrm>
+            <a:off x="3291840" y="1554480"/>
+            <a:ext cx="2103120" cy="566928"/>
+          </a:xfrm>
+          <a:prstGeom prst="roundRect">
+            <a:avLst>
+              <a:gd name="adj" fmla="val 8000"/>
+            </a:avLst>
+          </a:prstGeom>
+          <a:solidFill>
+            <a:srgbClr val="EEEDFE"/>
+          </a:solidFill>
+          <a:ln w="12700">
+            <a:solidFill>
+              <a:srgbClr val="534AB7"/>
+            </a:solidFill>
+          </a:ln>
+          <a:effectLst/>
+        </p:spPr>
+        <p:style>
+          <a:lnRef idx="1">
+            <a:schemeClr val="accent1"/>
+          </a:lnRef>
+          <a:fillRef idx="3">
+            <a:schemeClr val="accent1"/>
+          </a:fillRef>
+          <a:effectRef idx="2">
+            <a:schemeClr val="accent1"/>
+          </a:effectRef>
+          <a:fontRef idx="minor">
+            <a:schemeClr val="lt1"/>
+          </a:fontRef>
+        </p:style>
+        <p:txBody>
+          <a:bodyPr wrap="square" lIns="45720" tIns="18288" rIns="45720" bIns="18288" rtlCol="0" anchor="ctr"/>
+          <a:lstStyle/>
+          <a:p>
+            <a:pPr algn="ctr"/>
+            <a:r>
+              <a:rPr sz="1300" b="1" i="0">
+                <a:solidFill>
+                  <a:srgbClr val="3C3489"/>
+                </a:solidFill>
+                <a:latin typeface="Calibri"/>
+              </a:rPr>
+              <a:t>1 · add bread</a:t>
+            </a:r>
+          </a:p>
+        </p:txBody>
+      </p:sp>
+      <p:sp>
+        <p:nvSpPr>
+          <p:cNvPr id="10" name="Rounded Rectangle 9"/>
+          <p:cNvSpPr/>
+          <p:nvPr/>
+        </p:nvSpPr>
+        <p:spPr>
+          <a:xfrm>
+            <a:off x="3291840" y="2286000"/>
+            <a:ext cx="2103120" cy="566928"/>
+          </a:xfrm>
+          <a:prstGeom prst="roundRect">
+            <a:avLst>
+              <a:gd name="adj" fmla="val 8000"/>
+            </a:avLst>
+          </a:prstGeom>
+          <a:solidFill>
+            <a:srgbClr val="EEEDFE"/>
+          </a:solidFill>
+          <a:ln w="12700">
+            <a:solidFill>
+              <a:srgbClr val="534AB7"/>
+            </a:solidFill>
+          </a:ln>
+          <a:effectLst/>
+        </p:spPr>
+        <p:style>
+          <a:lnRef idx="1">
+            <a:schemeClr val="accent1"/>
+          </a:lnRef>
+          <a:fillRef idx="3">
+            <a:schemeClr val="accent1"/>
+          </a:fillRef>
+          <a:effectRef idx="2">
+            <a:schemeClr val="accent1"/>
+          </a:effectRef>
+          <a:fontRef idx="minor">
+            <a:schemeClr val="lt1"/>
+          </a:fontRef>
+        </p:style>
+        <p:txBody>
+          <a:bodyPr wrap="square" lIns="45720" tIns="18288" rIns="45720" bIns="18288" rtlCol="0" anchor="ctr"/>
+          <a:lstStyle/>
+          <a:p>
+            <a:pPr algn="ctr"/>
+            <a:r>
+              <a:rPr sz="1300" b="1" i="0">
+                <a:solidFill>
+                  <a:srgbClr val="3C3489"/>
+                </a:solidFill>
+                <a:latin typeface="Calibri"/>
+              </a:rPr>
+              <a:t>2 · add protein</a:t>
+            </a:r>
+          </a:p>
+        </p:txBody>
+      </p:sp>
+      <p:sp>
+        <p:nvSpPr>
+          <p:cNvPr id="11" name="Rounded Rectangle 10"/>
+          <p:cNvSpPr/>
+          <p:nvPr/>
+        </p:nvSpPr>
+        <p:spPr>
+          <a:xfrm>
+            <a:off x="3291840" y="3017520"/>
+            <a:ext cx="2103120" cy="566928"/>
+          </a:xfrm>
+          <a:prstGeom prst="roundRect">
+            <a:avLst>
+              <a:gd name="adj" fmla="val 8000"/>
+            </a:avLst>
+          </a:prstGeom>
+          <a:solidFill>
+            <a:srgbClr val="EEEDFE"/>
+          </a:solidFill>
+          <a:ln w="12700">
+            <a:solidFill>
+              <a:srgbClr val="534AB7"/>
+            </a:solidFill>
+          </a:ln>
+          <a:effectLst/>
+        </p:spPr>
+        <p:style>
+          <a:lnRef idx="1">
+            <a:schemeClr val="accent1"/>
+          </a:lnRef>
+          <a:fillRef idx="3">
+            <a:schemeClr val="accent1"/>
+          </a:fillRef>
+          <a:effectRef idx="2">
+            <a:schemeClr val="accent1"/>
+          </a:effectRef>
+          <a:fontRef idx="minor">
+            <a:schemeClr val="lt1"/>
+          </a:fontRef>
+        </p:style>
+        <p:txBody>
+          <a:bodyPr wrap="square" lIns="45720" tIns="18288" rIns="45720" bIns="18288" rtlCol="0" anchor="ctr"/>
+          <a:lstStyle/>
+          <a:p>
+            <a:pPr algn="ctr"/>
+            <a:r>
+              <a:rPr sz="1300" b="1" i="0">
+                <a:solidFill>
+                  <a:srgbClr val="3C3489"/>
+                </a:solidFill>
+                <a:latin typeface="Calibri"/>
+              </a:rPr>
+              <a:t>3 · add veggies</a:t>
+            </a:r>
+          </a:p>
+        </p:txBody>
+      </p:sp>
+      <p:sp>
+        <p:nvSpPr>
+          <p:cNvPr id="12" name="Rounded Rectangle 11"/>
+          <p:cNvSpPr/>
+          <p:nvPr/>
+        </p:nvSpPr>
+        <p:spPr>
+          <a:xfrm>
+            <a:off x="3291840" y="3749039"/>
+            <a:ext cx="2103120" cy="566928"/>
+          </a:xfrm>
+          <a:prstGeom prst="roundRect">
+            <a:avLst>
+              <a:gd name="adj" fmla="val 8000"/>
+            </a:avLst>
+          </a:prstGeom>
+          <a:solidFill>
+            <a:srgbClr val="EEEDFE"/>
+          </a:solidFill>
+          <a:ln w="12700">
+            <a:solidFill>
+              <a:srgbClr val="534AB7"/>
+            </a:solidFill>
+          </a:ln>
+          <a:effectLst/>
+        </p:spPr>
+        <p:style>
+          <a:lnRef idx="1">
+            <a:schemeClr val="accent1"/>
+          </a:lnRef>
+          <a:fillRef idx="3">
+            <a:schemeClr val="accent1"/>
+          </a:fillRef>
+          <a:effectRef idx="2">
+            <a:schemeClr val="accent1"/>
+          </a:effectRef>
+          <a:fontRef idx="minor">
+            <a:schemeClr val="lt1"/>
+          </a:fontRef>
+        </p:style>
+        <p:txBody>
+          <a:bodyPr wrap="square" lIns="45720" tIns="18288" rIns="45720" bIns="18288" rtlCol="0" anchor="ctr"/>
+          <a:lstStyle/>
+          <a:p>
+            <a:pPr algn="ctr"/>
+            <a:r>
+              <a:rPr sz="1300" b="1" i="0">
+                <a:solidFill>
+                  <a:srgbClr val="3C3489"/>
+                </a:solidFill>
+                <a:latin typeface="Calibri"/>
+              </a:rPr>
+              <a:t>4 · add sauce</a:t>
+            </a:r>
+          </a:p>
+        </p:txBody>
+      </p:sp>
+      <p:cxnSp>
+        <p:nvCxnSpPr>
+          <p:cNvPr id="13" name="Connector 12"/>
+          <p:cNvCxnSpPr/>
+          <p:nvPr/>
+        </p:nvCxnSpPr>
+        <p:spPr>
+          <a:xfrm>
+            <a:off x="4343400" y="2121408"/>
+            <a:ext cx="0" cy="164592"/>
+          </a:xfrm>
+          <a:prstGeom prst="line">
+            <a:avLst/>
+          </a:prstGeom>
+          <a:ln w="15875">
+            <a:solidFill>
+              <a:srgbClr val="5A5C66"/>
+            </a:solidFill>
+            <a:tailEnd type="triangle" w="med" len="med"/>
+          </a:ln>
+          <a:effectLst/>
+        </p:spPr>
+        <p:style>
+          <a:lnRef idx="2">
+            <a:schemeClr val="accent1"/>
+          </a:lnRef>
+          <a:fillRef idx="0">
+            <a:schemeClr val="accent1"/>
+          </a:fillRef>
+          <a:effectRef idx="1">
+            <a:schemeClr val="accent1"/>
+          </a:effectRef>
+          <a:fontRef idx="minor">
+            <a:schemeClr val="tx1"/>
+          </a:fontRef>
+        </p:style>
+      </p:cxnSp>
+      <p:cxnSp>
+        <p:nvCxnSpPr>
+          <p:cNvPr id="14" name="Connector 13"/>
+          <p:cNvCxnSpPr/>
+          <p:nvPr/>
+        </p:nvCxnSpPr>
+        <p:spPr>
+          <a:xfrm>
+            <a:off x="4343400" y="2852928"/>
+            <a:ext cx="0" cy="164592"/>
+          </a:xfrm>
+          <a:prstGeom prst="line">
+            <a:avLst/>
+          </a:prstGeom>
+          <a:ln w="15875">
+            <a:solidFill>
+              <a:srgbClr val="5A5C66"/>
+            </a:solidFill>
+            <a:tailEnd type="triangle" w="med" len="med"/>
+          </a:ln>
+          <a:effectLst/>
+        </p:spPr>
+        <p:style>
+          <a:lnRef idx="2">
+            <a:schemeClr val="accent1"/>
+          </a:lnRef>
+          <a:fillRef idx="0">
+            <a:schemeClr val="accent1"/>
+          </a:fillRef>
+          <a:effectRef idx="1">
+            <a:schemeClr val="accent1"/>
+          </a:effectRef>
+          <a:fontRef idx="minor">
+            <a:schemeClr val="tx1"/>
+          </a:fontRef>
+        </p:style>
+      </p:cxnSp>
+      <p:cxnSp>
+        <p:nvCxnSpPr>
+          <p:cNvPr id="15" name="Connector 14"/>
+          <p:cNvCxnSpPr/>
+          <p:nvPr/>
+        </p:nvCxnSpPr>
+        <p:spPr>
+          <a:xfrm>
+            <a:off x="4343400" y="3584448"/>
+            <a:ext cx="0" cy="164591"/>
+          </a:xfrm>
+          <a:prstGeom prst="line">
+            <a:avLst/>
+          </a:prstGeom>
+          <a:ln w="15875">
+            <a:solidFill>
+              <a:srgbClr val="5A5C66"/>
+            </a:solidFill>
+            <a:tailEnd type="triangle" w="med" len="med"/>
+          </a:ln>
+          <a:effectLst/>
+        </p:spPr>
+        <p:style>
+          <a:lnRef idx="2">
+            <a:schemeClr val="accent1"/>
+          </a:lnRef>
+          <a:fillRef idx="0">
+            <a:schemeClr val="accent1"/>
+          </a:fillRef>
+          <a:effectRef idx="1">
+            <a:schemeClr val="accent1"/>
+          </a:effectRef>
+          <a:fontRef idx="minor">
+            <a:schemeClr val="tx1"/>
+          </a:fontRef>
+        </p:style>
+      </p:cxnSp>
+      <p:sp>
+        <p:nvSpPr>
+          <p:cNvPr id="16" name="Rounded Rectangle 15"/>
+          <p:cNvSpPr/>
+          <p:nvPr/>
+        </p:nvSpPr>
+        <p:spPr>
+          <a:xfrm>
+            <a:off x="6309360" y="2743200"/>
+            <a:ext cx="2194560" cy="914400"/>
+          </a:xfrm>
+          <a:prstGeom prst="roundRect">
+            <a:avLst>
+              <a:gd name="adj" fmla="val 8000"/>
+            </a:avLst>
+          </a:prstGeom>
+          <a:solidFill>
+            <a:srgbClr val="EAF3DE"/>
+          </a:solidFill>
+          <a:ln w="28575">
+            <a:solidFill>
+              <a:srgbClr val="3B6D11"/>
+            </a:solidFill>
+          </a:ln>
+          <a:effectLst/>
+        </p:spPr>
+        <p:style>
+          <a:lnRef idx="1">
+            <a:schemeClr val="accent1"/>
+          </a:lnRef>
+          <a:fillRef idx="3">
+            <a:schemeClr val="accent1"/>
+          </a:fillRef>
+          <a:effectRef idx="2">
+            <a:schemeClr val="accent1"/>
+          </a:effectRef>
+          <a:fontRef idx="minor">
+            <a:schemeClr val="lt1"/>
+          </a:fontRef>
+        </p:style>
+        <p:txBody>
+          <a:bodyPr wrap="square" lIns="45720" tIns="18288" rIns="45720" bIns="18288" rtlCol="0" anchor="ctr"/>
+          <a:lstStyle/>
+          <a:p>
+            <a:pPr algn="ctr"/>
+            <a:r>
+              <a:rPr sz="1300" b="1" i="0">
+                <a:solidFill>
+                  <a:srgbClr val="27500A"/>
+                </a:solidFill>
+                <a:latin typeface="Calibri"/>
+              </a:rPr>
+              <a:t>Custom sub</a:t>
+            </a:r>
+          </a:p>
+          <a:p>
+            <a:pPr algn="ctr"/>
+            <a:r>
+              <a:rPr sz="1000" b="0" i="1">
+                <a:solidFill>
+                  <a:srgbClr val="3B6D11"/>
+                </a:solidFill>
+                <a:latin typeface="Calibri"/>
+              </a:rPr>
+              <a:t>finished product</a:t>
+            </a:r>
+          </a:p>
+        </p:txBody>
+      </p:sp>
+      <p:cxnSp>
+        <p:nvCxnSpPr>
+          <p:cNvPr id="17" name="Connector 16"/>
+          <p:cNvCxnSpPr/>
+          <p:nvPr/>
+        </p:nvCxnSpPr>
+        <p:spPr>
+          <a:xfrm flipV="1">
+            <a:off x="2651760" y="1828800"/>
+            <a:ext cx="640080" cy="1188720"/>
+          </a:xfrm>
+          <a:prstGeom prst="line">
+            <a:avLst/>
+          </a:prstGeom>
+          <a:ln w="15875">
+            <a:solidFill>
+              <a:srgbClr val="5A5C66"/>
+            </a:solidFill>
+            <a:tailEnd type="triangle" w="med" len="med"/>
+          </a:ln>
+          <a:effectLst/>
+        </p:spPr>
+        <p:style>
+          <a:lnRef idx="2">
+            <a:schemeClr val="accent1"/>
+          </a:lnRef>
+          <a:fillRef idx="0">
+            <a:schemeClr val="accent1"/>
+          </a:fillRef>
+          <a:effectRef idx="1">
+            <a:schemeClr val="accent1"/>
+          </a:effectRef>
+          <a:fontRef idx="minor">
+            <a:schemeClr val="tx1"/>
+          </a:fontRef>
+        </p:style>
+      </p:cxnSp>
+      <p:sp>
+        <p:nvSpPr>
+          <p:cNvPr id="18" name="TextBox 17"/>
+          <p:cNvSpPr txBox="1"/>
+          <p:nvPr/>
+        </p:nvSpPr>
+        <p:spPr>
+          <a:xfrm>
+            <a:off x="2331720" y="2286000"/>
+            <a:ext cx="1097280" cy="237744"/>
+          </a:xfrm>
+          <a:prstGeom prst="rect">
+            <a:avLst/>
+          </a:prstGeom>
+          <a:noFill/>
+        </p:spPr>
+        <p:txBody>
+          <a:bodyPr wrap="square" lIns="45720" tIns="18288" rIns="45720" bIns="18288" anchor="ctr">
+            <a:spAutoFit/>
+          </a:bodyPr>
+          <a:lstStyle/>
+          <a:p>
+            <a:pPr algn="ctr"/>
+            <a:r>
+              <a:rPr sz="950" b="0" i="1">
+                <a:solidFill>
+                  <a:srgbClr val="5A5C66"/>
+                </a:solidFill>
+                <a:latin typeface="Calibri"/>
+              </a:rPr>
+              <a:t>runs</a:t>
+            </a:r>
+          </a:p>
+        </p:txBody>
+      </p:sp>
+      <p:cxnSp>
+        <p:nvCxnSpPr>
+          <p:cNvPr id="19" name="Connector 18"/>
+          <p:cNvCxnSpPr/>
+          <p:nvPr/>
+        </p:nvCxnSpPr>
+        <p:spPr>
+          <a:xfrm flipV="1">
+            <a:off x="5394960" y="3291840"/>
+            <a:ext cx="914400" cy="731520"/>
+          </a:xfrm>
+          <a:prstGeom prst="line">
+            <a:avLst/>
+          </a:prstGeom>
+          <a:ln w="15875">
+            <a:solidFill>
+              <a:srgbClr val="5A5C66"/>
+            </a:solidFill>
+            <a:tailEnd type="triangle" w="med" len="med"/>
+          </a:ln>
+          <a:effectLst/>
+        </p:spPr>
+        <p:style>
+          <a:lnRef idx="2">
+            <a:schemeClr val="accent1"/>
+          </a:lnRef>
+          <a:fillRef idx="0">
+            <a:schemeClr val="accent1"/>
+          </a:fillRef>
+          <a:effectRef idx="1">
+            <a:schemeClr val="accent1"/>
+          </a:effectRef>
+          <a:fontRef idx="minor">
+            <a:schemeClr val="tx1"/>
+          </a:fontRef>
+        </p:style>
+      </p:cxnSp>
+      <p:sp>
+        <p:nvSpPr>
+          <p:cNvPr id="20" name="TextBox 19"/>
+          <p:cNvSpPr txBox="1"/>
+          <p:nvPr/>
+        </p:nvSpPr>
+        <p:spPr>
+          <a:xfrm>
+            <a:off x="5074920" y="4114800"/>
+            <a:ext cx="1097280" cy="237744"/>
+          </a:xfrm>
+          <a:prstGeom prst="rect">
+            <a:avLst/>
+          </a:prstGeom>
+          <a:noFill/>
+        </p:spPr>
+        <p:txBody>
+          <a:bodyPr wrap="square" lIns="45720" tIns="18288" rIns="45720" bIns="18288" anchor="ctr">
+            <a:spAutoFit/>
+          </a:bodyPr>
+          <a:lstStyle/>
+          <a:p>
+            <a:pPr algn="ctr"/>
+            <a:r>
+              <a:rPr sz="950" b="0" i="1">
+                <a:solidFill>
+                  <a:srgbClr val="5A5C66"/>
+                </a:solidFill>
+                <a:latin typeface="Calibri"/>
+              </a:rPr>
+              <a:t>build()</a:t>
+            </a:r>
           </a:p>
         </p:txBody>
       </p:sp>
@@ -16788,29 +16804,31 @@
                 <a:ea typeface="Calibri" pitchFamily="34" charset="-122"/>
                 <a:cs typeface="Calibri" pitchFamily="34" charset="-120"/>
               </a:rPr>
-              <a:t>Usage reads like English: new RideRequestBuilder().forStudent('u-456').from(GATE)</a:t>
-            </a:r>
-            <a:endParaRPr lang="en-US" sz="1100" dirty="0"/>
-          </a:p>
-          <a:p>
-            <a:pPr marL="0" indent="0">
-              <a:spcAft>
-                <a:spcPts val="300"/>
-              </a:spcAft>
-              <a:buNone/>
-            </a:pPr>
+              <a:t>Usage reads like English: new RideRequestBuilder().</a:t>
+            </a:r>
             <a:r>
               <a:rPr lang="en-US" sz="1100" b="1" dirty="0">
                 <a:solidFill>
-                  <a:srgbClr val="242852"/>
+                  <a:srgbClr val="1E1E22"/>
                 </a:solidFill>
                 <a:latin typeface="Calibri" pitchFamily="34" charset="0"/>
                 <a:ea typeface="Calibri" pitchFamily="34" charset="-122"/>
                 <a:cs typeface="Calibri" pitchFamily="34" charset="-120"/>
               </a:rPr>
+              <a:t>forStudent('u-456').from(GATE) </a:t>
+            </a:r>
+            <a:r>
+              <a:rPr lang="en-US" sz="1100" b="1" dirty="0">
+                <a:solidFill>
+                  <a:srgbClr val="242852"/>
+                </a:solidFill>
+                <a:latin typeface="Calibri" pitchFamily="34" charset="0"/>
+                <a:ea typeface="Calibri" pitchFamily="34" charset="-122"/>
+                <a:cs typeface="Calibri" pitchFamily="34" charset="-120"/>
+              </a:rPr>
               <a:t>.to(AIRPORT).vehicleType('xl').requiresAccessibility().maxFare(800).build();</a:t>
             </a:r>
-            <a:endParaRPr lang="en-US" sz="1100" dirty="0"/>
+            <a:endParaRPr lang="en-US" sz="1100" b="1" dirty="0"/>
           </a:p>
         </p:txBody>
       </p:sp>
@@ -18330,121 +18348,132 @@
       </p:sp>
       <p:graphicFrame>
         <p:nvGraphicFramePr>
-          <p:cNvPr id="27" name="Table 0"/>
+          <p:cNvPr id="9" name="Table 8">
+            <a:extLst>
+              <a:ext uri="{FF2B5EF4-FFF2-40B4-BE49-F238E27FC236}">
+                <a16:creationId xmlns:a16="http://schemas.microsoft.com/office/drawing/2014/main" id="{6C07FA65-7342-9034-8546-6122427CA209}"/>
+              </a:ext>
+            </a:extLst>
+          </p:cNvPr>
           <p:cNvGraphicFramePr>
             <a:graphicFrameLocks noGrp="1"/>
           </p:cNvGraphicFramePr>
           <p:nvPr>
             <p:extLst>
               <p:ext uri="{D42A27DB-BD31-4B8C-83A1-F6EECF244321}">
-                <p14:modId xmlns:p14="http://schemas.microsoft.com/office/powerpoint/2010/main" val="831490387"/>
+                <p14:modId xmlns:p14="http://schemas.microsoft.com/office/powerpoint/2010/main" val="3311593376"/>
               </p:ext>
             </p:extLst>
           </p:nvPr>
         </p:nvGraphicFramePr>
         <p:xfrm>
-          <a:off x="502920" y="1133856"/>
-          <a:ext cx="8138160" cy="1981200"/>
+          <a:off x="902617" y="1352504"/>
+          <a:ext cx="7308696" cy="4530079"/>
         </p:xfrm>
         <a:graphic>
           <a:graphicData uri="http://schemas.openxmlformats.org/drawingml/2006/table">
             <a:tbl>
               <a:tblPr/>
               <a:tblGrid>
-                <a:gridCol w="1188720">
+                <a:gridCol w="1405518">
                   <a:extLst>
                     <a:ext uri="{9D8B030D-6E8A-4147-A177-3AD203B41FA5}">
-                      <a16:colId xmlns:a16="http://schemas.microsoft.com/office/drawing/2014/main" val="20000"/>
+                      <a16:colId xmlns:a16="http://schemas.microsoft.com/office/drawing/2014/main" val="2354441155"/>
                     </a:ext>
                   </a:extLst>
                 </a:gridCol>
-                <a:gridCol w="1783080">
+                <a:gridCol w="1483603">
                   <a:extLst>
                     <a:ext uri="{9D8B030D-6E8A-4147-A177-3AD203B41FA5}">
-                      <a16:colId xmlns:a16="http://schemas.microsoft.com/office/drawing/2014/main" val="20001"/>
+                      <a16:colId xmlns:a16="http://schemas.microsoft.com/office/drawing/2014/main" val="2963917411"/>
                     </a:ext>
                   </a:extLst>
                 </a:gridCol>
-                <a:gridCol w="1783080">
+                <a:gridCol w="1483603">
                   <a:extLst>
                     <a:ext uri="{9D8B030D-6E8A-4147-A177-3AD203B41FA5}">
-                      <a16:colId xmlns:a16="http://schemas.microsoft.com/office/drawing/2014/main" val="20002"/>
+                      <a16:colId xmlns:a16="http://schemas.microsoft.com/office/drawing/2014/main" val="2576219167"/>
                     </a:ext>
                   </a:extLst>
                 </a:gridCol>
-                <a:gridCol w="1783080">
+                <a:gridCol w="1467986">
                   <a:extLst>
                     <a:ext uri="{9D8B030D-6E8A-4147-A177-3AD203B41FA5}">
-                      <a16:colId xmlns:a16="http://schemas.microsoft.com/office/drawing/2014/main" val="20003"/>
+                      <a16:colId xmlns:a16="http://schemas.microsoft.com/office/drawing/2014/main" val="4265367021"/>
                     </a:ext>
                   </a:extLst>
                 </a:gridCol>
-                <a:gridCol w="1600200">
+                <a:gridCol w="1467986">
                   <a:extLst>
                     <a:ext uri="{9D8B030D-6E8A-4147-A177-3AD203B41FA5}">
-                      <a16:colId xmlns:a16="http://schemas.microsoft.com/office/drawing/2014/main" val="20004"/>
+                      <a16:colId xmlns:a16="http://schemas.microsoft.com/office/drawing/2014/main" val="705310825"/>
                     </a:ext>
                   </a:extLst>
                 </a:gridCol>
               </a:tblGrid>
-              <a:tr h="0">
+              <a:tr h="276284">
                 <a:tc>
                   <a:txBody>
                     <a:bodyPr/>
                     <a:lstStyle/>
                     <a:p>
-                      <a:pPr marL="0" indent="0" algn="l">
+                      <a:pPr marL="0" marR="0">
+                        <a:spcAft>
+                          <a:spcPts val="500"/>
+                        </a:spcAft>
                         <a:buNone/>
                       </a:pPr>
                       <a:r>
-                        <a:rPr lang="en-US" sz="1600" b="1" dirty="0">
+                        <a:rPr lang="en-US" sz="1200" b="1">
                           <a:solidFill>
                             <a:srgbClr val="FFFFFF"/>
                           </a:solidFill>
+                          <a:effectLst/>
                           <a:latin typeface="Cambria" panose="02040503050406030204" pitchFamily="18" charset="0"/>
-                          <a:ea typeface="Calibri" pitchFamily="34" charset="-122"/>
-                          <a:cs typeface="Calibri" pitchFamily="34" charset="-120"/>
+                          <a:ea typeface="Arial" panose="020B0604020202020204" pitchFamily="34" charset="0"/>
+                          <a:cs typeface="Arial" panose="020B0604020202020204" pitchFamily="34" charset="0"/>
                         </a:rPr>
                         <a:t>Criterion</a:t>
                       </a:r>
-                      <a:endParaRPr lang="en-US" sz="1600" dirty="0">
+                      <a:endParaRPr lang="en-US" sz="1200">
+                        <a:effectLst/>
                         <a:latin typeface="Cambria" panose="02040503050406030204" pitchFamily="18" charset="0"/>
-                        <a:ea typeface="Calibri" charset="0"/>
-                        <a:cs typeface="Calibri" charset="0"/>
+                        <a:ea typeface="Arial" panose="020B0604020202020204" pitchFamily="34" charset="0"/>
+                        <a:cs typeface="Vrinda" panose="020B0502040204020203" pitchFamily="34" charset="0"/>
                       </a:endParaRPr>
                     </a:p>
                   </a:txBody>
-                  <a:tcPr marL="76200" marR="63500" marT="38100" marB="38100" anchor="ctr">
-                    <a:lnL w="9525" cap="flat" cmpd="sng" algn="ctr">
+                  <a:tcPr marL="57150" marR="50800" marT="44450" marB="44450">
+                    <a:lnL w="12700" cap="flat" cmpd="sng" algn="ctr">
                       <a:solidFill>
-                        <a:srgbClr val="D4D7DF"/>
+                        <a:srgbClr val="CCCCCC"/>
                       </a:solidFill>
                       <a:prstDash val="solid"/>
                       <a:round/>
                       <a:headEnd type="none" w="med" len="med"/>
                       <a:tailEnd type="none" w="med" len="med"/>
                     </a:lnL>
-                    <a:lnR w="9525" cap="flat" cmpd="sng" algn="ctr">
+                    <a:lnR w="12700" cap="flat" cmpd="sng" algn="ctr">
                       <a:solidFill>
-                        <a:srgbClr val="D4D7DF"/>
+                        <a:srgbClr val="CCCCCC"/>
                       </a:solidFill>
                       <a:prstDash val="solid"/>
                       <a:round/>
                       <a:headEnd type="none" w="med" len="med"/>
                       <a:tailEnd type="none" w="med" len="med"/>
                     </a:lnR>
-                    <a:lnT w="9525" cap="flat" cmpd="sng" algn="ctr">
+                    <a:lnT w="12700" cap="flat" cmpd="sng" algn="ctr">
                       <a:solidFill>
-                        <a:srgbClr val="D4D7DF"/>
+                        <a:srgbClr val="CCCCCC"/>
                       </a:solidFill>
                       <a:prstDash val="solid"/>
                       <a:round/>
                       <a:headEnd type="none" w="med" len="med"/>
                       <a:tailEnd type="none" w="med" len="med"/>
                     </a:lnT>
-                    <a:lnB w="9525" cap="flat" cmpd="sng" algn="ctr">
+                    <a:lnB w="12700" cap="flat" cmpd="sng" algn="ctr">
                       <a:solidFill>
-                        <a:srgbClr val="D4D7DF"/>
+                        <a:srgbClr val="CCCCCC"/>
                       </a:solidFill>
                       <a:prstDash val="solid"/>
                       <a:round/>
@@ -18452,7 +18481,7 @@
                       <a:tailEnd type="none" w="med" len="med"/>
                     </a:lnB>
                     <a:solidFill>
-                      <a:srgbClr val="242852"/>
+                      <a:srgbClr val="1F3864"/>
                     </a:solidFill>
                   </a:tcPr>
                 </a:tc>
@@ -18461,58 +18490,63 @@
                     <a:bodyPr/>
                     <a:lstStyle/>
                     <a:p>
-                      <a:pPr marL="0" indent="0" algn="l">
+                      <a:pPr marL="0" marR="0">
+                        <a:spcAft>
+                          <a:spcPts val="500"/>
+                        </a:spcAft>
                         <a:buNone/>
                       </a:pPr>
                       <a:r>
-                        <a:rPr lang="en-US" sz="1600" b="1" dirty="0">
+                        <a:rPr lang="en-US" sz="1200" b="1" dirty="0">
                           <a:solidFill>
                             <a:srgbClr val="FFFFFF"/>
                           </a:solidFill>
+                          <a:effectLst/>
                           <a:latin typeface="Cambria" panose="02040503050406030204" pitchFamily="18" charset="0"/>
-                          <a:ea typeface="Calibri" pitchFamily="34" charset="-122"/>
-                          <a:cs typeface="Calibri" pitchFamily="34" charset="-120"/>
+                          <a:ea typeface="Arial" panose="020B0604020202020204" pitchFamily="34" charset="0"/>
+                          <a:cs typeface="Arial" panose="020B0604020202020204" pitchFamily="34" charset="0"/>
                         </a:rPr>
                         <a:t>Singleton</a:t>
                       </a:r>
-                      <a:endParaRPr lang="en-US" sz="1600" dirty="0">
+                      <a:endParaRPr lang="en-US" sz="1200" dirty="0">
+                        <a:effectLst/>
                         <a:latin typeface="Cambria" panose="02040503050406030204" pitchFamily="18" charset="0"/>
-                        <a:ea typeface="Calibri" charset="0"/>
-                        <a:cs typeface="Calibri" charset="0"/>
+                        <a:ea typeface="Arial" panose="020B0604020202020204" pitchFamily="34" charset="0"/>
+                        <a:cs typeface="Vrinda" panose="020B0502040204020203" pitchFamily="34" charset="0"/>
                       </a:endParaRPr>
                     </a:p>
                   </a:txBody>
-                  <a:tcPr marL="76200" marR="63500" marT="38100" marB="38100" anchor="ctr">
-                    <a:lnL w="9525" cap="flat" cmpd="sng" algn="ctr">
+                  <a:tcPr marL="57150" marR="50800" marT="44450" marB="44450">
+                    <a:lnL w="12700" cap="flat" cmpd="sng" algn="ctr">
                       <a:solidFill>
-                        <a:srgbClr val="D4D7DF"/>
+                        <a:srgbClr val="CCCCCC"/>
                       </a:solidFill>
                       <a:prstDash val="solid"/>
                       <a:round/>
                       <a:headEnd type="none" w="med" len="med"/>
                       <a:tailEnd type="none" w="med" len="med"/>
                     </a:lnL>
-                    <a:lnR w="9525" cap="flat" cmpd="sng" algn="ctr">
+                    <a:lnR w="12700" cap="flat" cmpd="sng" algn="ctr">
                       <a:solidFill>
-                        <a:srgbClr val="D4D7DF"/>
+                        <a:srgbClr val="CCCCCC"/>
                       </a:solidFill>
                       <a:prstDash val="solid"/>
                       <a:round/>
                       <a:headEnd type="none" w="med" len="med"/>
                       <a:tailEnd type="none" w="med" len="med"/>
                     </a:lnR>
-                    <a:lnT w="9525" cap="flat" cmpd="sng" algn="ctr">
+                    <a:lnT w="12700" cap="flat" cmpd="sng" algn="ctr">
                       <a:solidFill>
-                        <a:srgbClr val="D4D7DF"/>
+                        <a:srgbClr val="CCCCCC"/>
                       </a:solidFill>
                       <a:prstDash val="solid"/>
                       <a:round/>
                       <a:headEnd type="none" w="med" len="med"/>
                       <a:tailEnd type="none" w="med" len="med"/>
                     </a:lnT>
-                    <a:lnB w="9525" cap="flat" cmpd="sng" algn="ctr">
+                    <a:lnB w="12700" cap="flat" cmpd="sng" algn="ctr">
                       <a:solidFill>
-                        <a:srgbClr val="D4D7DF"/>
+                        <a:srgbClr val="CCCCCC"/>
                       </a:solidFill>
                       <a:prstDash val="solid"/>
                       <a:round/>
@@ -18520,7 +18554,7 @@
                       <a:tailEnd type="none" w="med" len="med"/>
                     </a:lnB>
                     <a:solidFill>
-                      <a:srgbClr val="242852"/>
+                      <a:srgbClr val="1F3864"/>
                     </a:solidFill>
                   </a:tcPr>
                 </a:tc>
@@ -18529,58 +18563,63 @@
                     <a:bodyPr/>
                     <a:lstStyle/>
                     <a:p>
-                      <a:pPr marL="0" indent="0" algn="l">
+                      <a:pPr marL="0" marR="0">
+                        <a:spcAft>
+                          <a:spcPts val="500"/>
+                        </a:spcAft>
                         <a:buNone/>
                       </a:pPr>
                       <a:r>
-                        <a:rPr lang="en-US" sz="1600" b="1" dirty="0">
+                        <a:rPr lang="en-US" sz="1200" b="1">
                           <a:solidFill>
                             <a:srgbClr val="FFFFFF"/>
                           </a:solidFill>
+                          <a:effectLst/>
                           <a:latin typeface="Cambria" panose="02040503050406030204" pitchFamily="18" charset="0"/>
-                          <a:ea typeface="Calibri" pitchFamily="34" charset="-122"/>
-                          <a:cs typeface="Calibri" pitchFamily="34" charset="-120"/>
+                          <a:ea typeface="Arial" panose="020B0604020202020204" pitchFamily="34" charset="0"/>
+                          <a:cs typeface="Arial" panose="020B0604020202020204" pitchFamily="34" charset="0"/>
                         </a:rPr>
                         <a:t>Factory Method</a:t>
                       </a:r>
-                      <a:endParaRPr lang="en-US" sz="1600" dirty="0">
+                      <a:endParaRPr lang="en-US" sz="1200">
+                        <a:effectLst/>
                         <a:latin typeface="Cambria" panose="02040503050406030204" pitchFamily="18" charset="0"/>
-                        <a:ea typeface="Calibri" charset="0"/>
-                        <a:cs typeface="Calibri" charset="0"/>
+                        <a:ea typeface="Arial" panose="020B0604020202020204" pitchFamily="34" charset="0"/>
+                        <a:cs typeface="Vrinda" panose="020B0502040204020203" pitchFamily="34" charset="0"/>
                       </a:endParaRPr>
                     </a:p>
                   </a:txBody>
-                  <a:tcPr marL="76200" marR="63500" marT="38100" marB="38100" anchor="ctr">
-                    <a:lnL w="9525" cap="flat" cmpd="sng" algn="ctr">
+                  <a:tcPr marL="57150" marR="50800" marT="44450" marB="44450">
+                    <a:lnL w="12700" cap="flat" cmpd="sng" algn="ctr">
                       <a:solidFill>
-                        <a:srgbClr val="D4D7DF"/>
+                        <a:srgbClr val="CCCCCC"/>
                       </a:solidFill>
                       <a:prstDash val="solid"/>
                       <a:round/>
                       <a:headEnd type="none" w="med" len="med"/>
                       <a:tailEnd type="none" w="med" len="med"/>
                     </a:lnL>
-                    <a:lnR w="9525" cap="flat" cmpd="sng" algn="ctr">
+                    <a:lnR w="12700" cap="flat" cmpd="sng" algn="ctr">
                       <a:solidFill>
-                        <a:srgbClr val="D4D7DF"/>
+                        <a:srgbClr val="CCCCCC"/>
                       </a:solidFill>
                       <a:prstDash val="solid"/>
                       <a:round/>
                       <a:headEnd type="none" w="med" len="med"/>
                       <a:tailEnd type="none" w="med" len="med"/>
                     </a:lnR>
-                    <a:lnT w="9525" cap="flat" cmpd="sng" algn="ctr">
+                    <a:lnT w="12700" cap="flat" cmpd="sng" algn="ctr">
                       <a:solidFill>
-                        <a:srgbClr val="D4D7DF"/>
+                        <a:srgbClr val="CCCCCC"/>
                       </a:solidFill>
                       <a:prstDash val="solid"/>
                       <a:round/>
                       <a:headEnd type="none" w="med" len="med"/>
                       <a:tailEnd type="none" w="med" len="med"/>
                     </a:lnT>
-                    <a:lnB w="9525" cap="flat" cmpd="sng" algn="ctr">
+                    <a:lnB w="12700" cap="flat" cmpd="sng" algn="ctr">
                       <a:solidFill>
-                        <a:srgbClr val="D4D7DF"/>
+                        <a:srgbClr val="CCCCCC"/>
                       </a:solidFill>
                       <a:prstDash val="solid"/>
                       <a:round/>
@@ -18588,7 +18627,7 @@
                       <a:tailEnd type="none" w="med" len="med"/>
                     </a:lnB>
                     <a:solidFill>
-                      <a:srgbClr val="242852"/>
+                      <a:srgbClr val="1F3864"/>
                     </a:solidFill>
                   </a:tcPr>
                 </a:tc>
@@ -18597,58 +18636,63 @@
                     <a:bodyPr/>
                     <a:lstStyle/>
                     <a:p>
-                      <a:pPr marL="0" indent="0" algn="l">
+                      <a:pPr marL="0" marR="0">
+                        <a:spcAft>
+                          <a:spcPts val="500"/>
+                        </a:spcAft>
                         <a:buNone/>
                       </a:pPr>
                       <a:r>
-                        <a:rPr lang="en-US" sz="1600" b="1" dirty="0">
+                        <a:rPr lang="en-US" sz="1200" b="1">
                           <a:solidFill>
                             <a:srgbClr val="FFFFFF"/>
                           </a:solidFill>
+                          <a:effectLst/>
                           <a:latin typeface="Cambria" panose="02040503050406030204" pitchFamily="18" charset="0"/>
-                          <a:ea typeface="Calibri" pitchFamily="34" charset="-122"/>
-                          <a:cs typeface="Calibri" pitchFamily="34" charset="-120"/>
+                          <a:ea typeface="Arial" panose="020B0604020202020204" pitchFamily="34" charset="0"/>
+                          <a:cs typeface="Arial" panose="020B0604020202020204" pitchFamily="34" charset="0"/>
                         </a:rPr>
                         <a:t>Abstract Factory</a:t>
                       </a:r>
-                      <a:endParaRPr lang="en-US" sz="1600" dirty="0">
+                      <a:endParaRPr lang="en-US" sz="1200">
+                        <a:effectLst/>
                         <a:latin typeface="Cambria" panose="02040503050406030204" pitchFamily="18" charset="0"/>
-                        <a:ea typeface="Calibri" charset="0"/>
-                        <a:cs typeface="Calibri" charset="0"/>
+                        <a:ea typeface="Arial" panose="020B0604020202020204" pitchFamily="34" charset="0"/>
+                        <a:cs typeface="Vrinda" panose="020B0502040204020203" pitchFamily="34" charset="0"/>
                       </a:endParaRPr>
                     </a:p>
                   </a:txBody>
-                  <a:tcPr marL="76200" marR="63500" marT="38100" marB="38100" anchor="ctr">
-                    <a:lnL w="9525" cap="flat" cmpd="sng" algn="ctr">
+                  <a:tcPr marL="57150" marR="50800" marT="44450" marB="44450">
+                    <a:lnL w="12700" cap="flat" cmpd="sng" algn="ctr">
                       <a:solidFill>
-                        <a:srgbClr val="D4D7DF"/>
+                        <a:srgbClr val="CCCCCC"/>
                       </a:solidFill>
                       <a:prstDash val="solid"/>
                       <a:round/>
                       <a:headEnd type="none" w="med" len="med"/>
                       <a:tailEnd type="none" w="med" len="med"/>
                     </a:lnL>
-                    <a:lnR w="9525" cap="flat" cmpd="sng" algn="ctr">
+                    <a:lnR w="12700" cap="flat" cmpd="sng" algn="ctr">
                       <a:solidFill>
-                        <a:srgbClr val="D4D7DF"/>
+                        <a:srgbClr val="CCCCCC"/>
                       </a:solidFill>
                       <a:prstDash val="solid"/>
                       <a:round/>
                       <a:headEnd type="none" w="med" len="med"/>
                       <a:tailEnd type="none" w="med" len="med"/>
                     </a:lnR>
-                    <a:lnT w="9525" cap="flat" cmpd="sng" algn="ctr">
+                    <a:lnT w="12700" cap="flat" cmpd="sng" algn="ctr">
                       <a:solidFill>
-                        <a:srgbClr val="D4D7DF"/>
+                        <a:srgbClr val="CCCCCC"/>
                       </a:solidFill>
                       <a:prstDash val="solid"/>
                       <a:round/>
                       <a:headEnd type="none" w="med" len="med"/>
                       <a:tailEnd type="none" w="med" len="med"/>
                     </a:lnT>
-                    <a:lnB w="9525" cap="flat" cmpd="sng" algn="ctr">
+                    <a:lnB w="12700" cap="flat" cmpd="sng" algn="ctr">
                       <a:solidFill>
-                        <a:srgbClr val="D4D7DF"/>
+                        <a:srgbClr val="CCCCCC"/>
                       </a:solidFill>
                       <a:prstDash val="solid"/>
                       <a:round/>
@@ -18656,7 +18700,7 @@
                       <a:tailEnd type="none" w="med" len="med"/>
                     </a:lnB>
                     <a:solidFill>
-                      <a:srgbClr val="242852"/>
+                      <a:srgbClr val="1F3864"/>
                     </a:solidFill>
                   </a:tcPr>
                 </a:tc>
@@ -18665,58 +18709,63 @@
                     <a:bodyPr/>
                     <a:lstStyle/>
                     <a:p>
-                      <a:pPr marL="0" indent="0" algn="l">
+                      <a:pPr marL="0" marR="0">
+                        <a:spcAft>
+                          <a:spcPts val="500"/>
+                        </a:spcAft>
                         <a:buNone/>
                       </a:pPr>
                       <a:r>
-                        <a:rPr lang="en-US" sz="1600" b="1" dirty="0">
+                        <a:rPr lang="en-US" sz="1200" b="1">
                           <a:solidFill>
                             <a:srgbClr val="FFFFFF"/>
                           </a:solidFill>
+                          <a:effectLst/>
                           <a:latin typeface="Cambria" panose="02040503050406030204" pitchFamily="18" charset="0"/>
-                          <a:ea typeface="Calibri" pitchFamily="34" charset="-122"/>
-                          <a:cs typeface="Calibri" pitchFamily="34" charset="-120"/>
+                          <a:ea typeface="Arial" panose="020B0604020202020204" pitchFamily="34" charset="0"/>
+                          <a:cs typeface="Arial" panose="020B0604020202020204" pitchFamily="34" charset="0"/>
                         </a:rPr>
                         <a:t>Builder</a:t>
                       </a:r>
-                      <a:endParaRPr lang="en-US" sz="1600" dirty="0">
+                      <a:endParaRPr lang="en-US" sz="1200">
+                        <a:effectLst/>
                         <a:latin typeface="Cambria" panose="02040503050406030204" pitchFamily="18" charset="0"/>
-                        <a:ea typeface="Calibri" charset="0"/>
-                        <a:cs typeface="Calibri" charset="0"/>
+                        <a:ea typeface="Arial" panose="020B0604020202020204" pitchFamily="34" charset="0"/>
+                        <a:cs typeface="Vrinda" panose="020B0502040204020203" pitchFamily="34" charset="0"/>
                       </a:endParaRPr>
                     </a:p>
                   </a:txBody>
-                  <a:tcPr marL="76200" marR="63500" marT="38100" marB="38100" anchor="ctr">
-                    <a:lnL w="9525" cap="flat" cmpd="sng" algn="ctr">
+                  <a:tcPr marL="57150" marR="50800" marT="44450" marB="44450">
+                    <a:lnL w="12700" cap="flat" cmpd="sng" algn="ctr">
                       <a:solidFill>
-                        <a:srgbClr val="D4D7DF"/>
+                        <a:srgbClr val="CCCCCC"/>
                       </a:solidFill>
                       <a:prstDash val="solid"/>
                       <a:round/>
                       <a:headEnd type="none" w="med" len="med"/>
                       <a:tailEnd type="none" w="med" len="med"/>
                     </a:lnL>
-                    <a:lnR w="9525" cap="flat" cmpd="sng" algn="ctr">
+                    <a:lnR w="12700" cap="flat" cmpd="sng" algn="ctr">
                       <a:solidFill>
-                        <a:srgbClr val="D4D7DF"/>
+                        <a:srgbClr val="CCCCCC"/>
                       </a:solidFill>
                       <a:prstDash val="solid"/>
                       <a:round/>
                       <a:headEnd type="none" w="med" len="med"/>
                       <a:tailEnd type="none" w="med" len="med"/>
                     </a:lnR>
-                    <a:lnT w="9525" cap="flat" cmpd="sng" algn="ctr">
+                    <a:lnT w="12700" cap="flat" cmpd="sng" algn="ctr">
                       <a:solidFill>
-                        <a:srgbClr val="D4D7DF"/>
+                        <a:srgbClr val="CCCCCC"/>
                       </a:solidFill>
                       <a:prstDash val="solid"/>
                       <a:round/>
                       <a:headEnd type="none" w="med" len="med"/>
                       <a:tailEnd type="none" w="med" len="med"/>
                     </a:lnT>
-                    <a:lnB w="9525" cap="flat" cmpd="sng" algn="ctr">
+                    <a:lnB w="12700" cap="flat" cmpd="sng" algn="ctr">
                       <a:solidFill>
-                        <a:srgbClr val="D4D7DF"/>
+                        <a:srgbClr val="CCCCCC"/>
                       </a:solidFill>
                       <a:prstDash val="solid"/>
                       <a:round/>
@@ -18724,74 +18773,451 @@
                       <a:tailEnd type="none" w="med" len="med"/>
                     </a:lnB>
                     <a:solidFill>
-                      <a:srgbClr val="242852"/>
+                      <a:srgbClr val="1F3864"/>
                     </a:solidFill>
                   </a:tcPr>
                 </a:tc>
                 <a:extLst>
                   <a:ext uri="{0D108BD9-81ED-4DB2-BD59-A6C34878D82A}">
-                    <a16:rowId xmlns:a16="http://schemas.microsoft.com/office/drawing/2014/main" val="10000"/>
+                    <a16:rowId xmlns:a16="http://schemas.microsoft.com/office/drawing/2014/main" val="4251445182"/>
                   </a:ext>
                 </a:extLst>
               </a:tr>
-              <a:tr h="0">
+              <a:tr h="276284">
                 <a:tc>
                   <a:txBody>
                     <a:bodyPr/>
                     <a:lstStyle/>
                     <a:p>
-                      <a:pPr marL="0" indent="0" algn="l">
+                      <a:pPr marL="0" marR="0">
+                        <a:spcAft>
+                          <a:spcPts val="500"/>
+                        </a:spcAft>
                         <a:buNone/>
                       </a:pPr>
                       <a:r>
-                        <a:rPr lang="en-US" sz="1200" b="1" dirty="0">
+                        <a:rPr lang="en-US" sz="1200" b="1">
                           <a:solidFill>
-                            <a:srgbClr val="1A1A1A"/>
+                            <a:srgbClr val="111111"/>
                           </a:solidFill>
+                          <a:effectLst/>
                           <a:latin typeface="Cambria" panose="02040503050406030204" pitchFamily="18" charset="0"/>
-                          <a:ea typeface="Calibri" pitchFamily="34" charset="-122"/>
-                          <a:cs typeface="Calibri" pitchFamily="34" charset="-120"/>
+                          <a:ea typeface="Arial" panose="020B0604020202020204" pitchFamily="34" charset="0"/>
+                          <a:cs typeface="Arial" panose="020B0604020202020204" pitchFamily="34" charset="0"/>
                         </a:rPr>
-                        <a:t>Intent</a:t>
+                        <a:t>Criterion</a:t>
                       </a:r>
-                      <a:endParaRPr lang="en-US" sz="1200" dirty="0">
+                      <a:endParaRPr lang="en-US" sz="1200">
+                        <a:effectLst/>
                         <a:latin typeface="Cambria" panose="02040503050406030204" pitchFamily="18" charset="0"/>
-                        <a:ea typeface="Calibri" charset="0"/>
-                        <a:cs typeface="Calibri" charset="0"/>
+                        <a:ea typeface="Arial" panose="020B0604020202020204" pitchFamily="34" charset="0"/>
+                        <a:cs typeface="Vrinda" panose="020B0502040204020203" pitchFamily="34" charset="0"/>
                       </a:endParaRPr>
                     </a:p>
                   </a:txBody>
-                  <a:tcPr marL="76200" marR="63500" marT="38100" marB="38100">
-                    <a:lnL w="9525" cap="flat" cmpd="sng" algn="ctr">
+                  <a:tcPr marL="57150" marR="50800" marT="44450" marB="44450">
+                    <a:lnL w="12700" cap="flat" cmpd="sng" algn="ctr">
                       <a:solidFill>
-                        <a:srgbClr val="D4D7DF"/>
+                        <a:srgbClr val="CCCCCC"/>
                       </a:solidFill>
                       <a:prstDash val="solid"/>
                       <a:round/>
                       <a:headEnd type="none" w="med" len="med"/>
                       <a:tailEnd type="none" w="med" len="med"/>
                     </a:lnL>
-                    <a:lnR w="9525" cap="flat" cmpd="sng" algn="ctr">
+                    <a:lnR w="12700" cap="flat" cmpd="sng" algn="ctr">
                       <a:solidFill>
-                        <a:srgbClr val="D4D7DF"/>
+                        <a:srgbClr val="CCCCCC"/>
                       </a:solidFill>
                       <a:prstDash val="solid"/>
                       <a:round/>
                       <a:headEnd type="none" w="med" len="med"/>
                       <a:tailEnd type="none" w="med" len="med"/>
                     </a:lnR>
-                    <a:lnT w="9525" cap="flat" cmpd="sng" algn="ctr">
+                    <a:lnT w="12700" cap="flat" cmpd="sng" algn="ctr">
                       <a:solidFill>
-                        <a:srgbClr val="D4D7DF"/>
+                        <a:srgbClr val="CCCCCC"/>
                       </a:solidFill>
                       <a:prstDash val="solid"/>
                       <a:round/>
                       <a:headEnd type="none" w="med" len="med"/>
                       <a:tailEnd type="none" w="med" len="med"/>
                     </a:lnT>
-                    <a:lnB w="9525" cap="flat" cmpd="sng" algn="ctr">
+                    <a:lnB w="12700" cap="flat" cmpd="sng" algn="ctr">
                       <a:solidFill>
-                        <a:srgbClr val="D4D7DF"/>
+                        <a:srgbClr val="CCCCCC"/>
+                      </a:solidFill>
+                      <a:prstDash val="solid"/>
+                      <a:round/>
+                      <a:headEnd type="none" w="med" len="med"/>
+                      <a:tailEnd type="none" w="med" len="med"/>
+                    </a:lnB>
+                    <a:solidFill>
+                      <a:srgbClr val="EBF4FF"/>
+                    </a:solidFill>
+                  </a:tcPr>
+                </a:tc>
+                <a:tc>
+                  <a:txBody>
+                    <a:bodyPr/>
+                    <a:lstStyle/>
+                    <a:p>
+                      <a:pPr marL="0" marR="0">
+                        <a:spcAft>
+                          <a:spcPts val="500"/>
+                        </a:spcAft>
+                        <a:buNone/>
+                      </a:pPr>
+                      <a:r>
+                        <a:rPr lang="en-US" sz="1200">
+                          <a:solidFill>
+                            <a:srgbClr val="111111"/>
+                          </a:solidFill>
+                          <a:effectLst/>
+                          <a:latin typeface="Cambria" panose="02040503050406030204" pitchFamily="18" charset="0"/>
+                          <a:ea typeface="Arial" panose="020B0604020202020204" pitchFamily="34" charset="0"/>
+                          <a:cs typeface="Arial" panose="020B0604020202020204" pitchFamily="34" charset="0"/>
+                        </a:rPr>
+                        <a:t>Singleton</a:t>
+                      </a:r>
+                      <a:endParaRPr lang="en-US" sz="1200">
+                        <a:effectLst/>
+                        <a:latin typeface="Cambria" panose="02040503050406030204" pitchFamily="18" charset="0"/>
+                        <a:ea typeface="Arial" panose="020B0604020202020204" pitchFamily="34" charset="0"/>
+                        <a:cs typeface="Vrinda" panose="020B0502040204020203" pitchFamily="34" charset="0"/>
+                      </a:endParaRPr>
+                    </a:p>
+                  </a:txBody>
+                  <a:tcPr marL="57150" marR="50800" marT="44450" marB="44450">
+                    <a:lnL w="12700" cap="flat" cmpd="sng" algn="ctr">
+                      <a:solidFill>
+                        <a:srgbClr val="CCCCCC"/>
+                      </a:solidFill>
+                      <a:prstDash val="solid"/>
+                      <a:round/>
+                      <a:headEnd type="none" w="med" len="med"/>
+                      <a:tailEnd type="none" w="med" len="med"/>
+                    </a:lnL>
+                    <a:lnR w="12700" cap="flat" cmpd="sng" algn="ctr">
+                      <a:solidFill>
+                        <a:srgbClr val="CCCCCC"/>
+                      </a:solidFill>
+                      <a:prstDash val="solid"/>
+                      <a:round/>
+                      <a:headEnd type="none" w="med" len="med"/>
+                      <a:tailEnd type="none" w="med" len="med"/>
+                    </a:lnR>
+                    <a:lnT w="12700" cap="flat" cmpd="sng" algn="ctr">
+                      <a:solidFill>
+                        <a:srgbClr val="CCCCCC"/>
+                      </a:solidFill>
+                      <a:prstDash val="solid"/>
+                      <a:round/>
+                      <a:headEnd type="none" w="med" len="med"/>
+                      <a:tailEnd type="none" w="med" len="med"/>
+                    </a:lnT>
+                    <a:lnB w="12700" cap="flat" cmpd="sng" algn="ctr">
+                      <a:solidFill>
+                        <a:srgbClr val="CCCCCC"/>
+                      </a:solidFill>
+                      <a:prstDash val="solid"/>
+                      <a:round/>
+                      <a:headEnd type="none" w="med" len="med"/>
+                      <a:tailEnd type="none" w="med" len="med"/>
+                    </a:lnB>
+                    <a:solidFill>
+                      <a:srgbClr val="F0F7FF"/>
+                    </a:solidFill>
+                  </a:tcPr>
+                </a:tc>
+                <a:tc>
+                  <a:txBody>
+                    <a:bodyPr/>
+                    <a:lstStyle/>
+                    <a:p>
+                      <a:pPr marL="0" marR="0">
+                        <a:spcAft>
+                          <a:spcPts val="500"/>
+                        </a:spcAft>
+                        <a:buNone/>
+                      </a:pPr>
+                      <a:r>
+                        <a:rPr lang="en-US" sz="1200">
+                          <a:solidFill>
+                            <a:srgbClr val="111111"/>
+                          </a:solidFill>
+                          <a:effectLst/>
+                          <a:latin typeface="Cambria" panose="02040503050406030204" pitchFamily="18" charset="0"/>
+                          <a:ea typeface="Arial" panose="020B0604020202020204" pitchFamily="34" charset="0"/>
+                          <a:cs typeface="Arial" panose="020B0604020202020204" pitchFamily="34" charset="0"/>
+                        </a:rPr>
+                        <a:t>Factory Method</a:t>
+                      </a:r>
+                      <a:endParaRPr lang="en-US" sz="1200">
+                        <a:effectLst/>
+                        <a:latin typeface="Cambria" panose="02040503050406030204" pitchFamily="18" charset="0"/>
+                        <a:ea typeface="Arial" panose="020B0604020202020204" pitchFamily="34" charset="0"/>
+                        <a:cs typeface="Vrinda" panose="020B0502040204020203" pitchFamily="34" charset="0"/>
+                      </a:endParaRPr>
+                    </a:p>
+                  </a:txBody>
+                  <a:tcPr marL="57150" marR="50800" marT="44450" marB="44450">
+                    <a:lnL w="12700" cap="flat" cmpd="sng" algn="ctr">
+                      <a:solidFill>
+                        <a:srgbClr val="CCCCCC"/>
+                      </a:solidFill>
+                      <a:prstDash val="solid"/>
+                      <a:round/>
+                      <a:headEnd type="none" w="med" len="med"/>
+                      <a:tailEnd type="none" w="med" len="med"/>
+                    </a:lnL>
+                    <a:lnR w="12700" cap="flat" cmpd="sng" algn="ctr">
+                      <a:solidFill>
+                        <a:srgbClr val="CCCCCC"/>
+                      </a:solidFill>
+                      <a:prstDash val="solid"/>
+                      <a:round/>
+                      <a:headEnd type="none" w="med" len="med"/>
+                      <a:tailEnd type="none" w="med" len="med"/>
+                    </a:lnR>
+                    <a:lnT w="12700" cap="flat" cmpd="sng" algn="ctr">
+                      <a:solidFill>
+                        <a:srgbClr val="CCCCCC"/>
+                      </a:solidFill>
+                      <a:prstDash val="solid"/>
+                      <a:round/>
+                      <a:headEnd type="none" w="med" len="med"/>
+                      <a:tailEnd type="none" w="med" len="med"/>
+                    </a:lnT>
+                    <a:lnB w="12700" cap="flat" cmpd="sng" algn="ctr">
+                      <a:solidFill>
+                        <a:srgbClr val="CCCCCC"/>
+                      </a:solidFill>
+                      <a:prstDash val="solid"/>
+                      <a:round/>
+                      <a:headEnd type="none" w="med" len="med"/>
+                      <a:tailEnd type="none" w="med" len="med"/>
+                    </a:lnB>
+                    <a:solidFill>
+                      <a:srgbClr val="F0FFF0"/>
+                    </a:solidFill>
+                  </a:tcPr>
+                </a:tc>
+                <a:tc>
+                  <a:txBody>
+                    <a:bodyPr/>
+                    <a:lstStyle/>
+                    <a:p>
+                      <a:pPr marL="0" marR="0">
+                        <a:spcAft>
+                          <a:spcPts val="500"/>
+                        </a:spcAft>
+                        <a:buNone/>
+                      </a:pPr>
+                      <a:r>
+                        <a:rPr lang="en-US" sz="1200">
+                          <a:solidFill>
+                            <a:srgbClr val="111111"/>
+                          </a:solidFill>
+                          <a:effectLst/>
+                          <a:latin typeface="Cambria" panose="02040503050406030204" pitchFamily="18" charset="0"/>
+                          <a:ea typeface="Arial" panose="020B0604020202020204" pitchFamily="34" charset="0"/>
+                          <a:cs typeface="Arial" panose="020B0604020202020204" pitchFamily="34" charset="0"/>
+                        </a:rPr>
+                        <a:t>Abstract Factory</a:t>
+                      </a:r>
+                      <a:endParaRPr lang="en-US" sz="1200">
+                        <a:effectLst/>
+                        <a:latin typeface="Cambria" panose="02040503050406030204" pitchFamily="18" charset="0"/>
+                        <a:ea typeface="Arial" panose="020B0604020202020204" pitchFamily="34" charset="0"/>
+                        <a:cs typeface="Vrinda" panose="020B0502040204020203" pitchFamily="34" charset="0"/>
+                      </a:endParaRPr>
+                    </a:p>
+                  </a:txBody>
+                  <a:tcPr marL="57150" marR="50800" marT="44450" marB="44450">
+                    <a:lnL w="12700" cap="flat" cmpd="sng" algn="ctr">
+                      <a:solidFill>
+                        <a:srgbClr val="CCCCCC"/>
+                      </a:solidFill>
+                      <a:prstDash val="solid"/>
+                      <a:round/>
+                      <a:headEnd type="none" w="med" len="med"/>
+                      <a:tailEnd type="none" w="med" len="med"/>
+                    </a:lnL>
+                    <a:lnR w="12700" cap="flat" cmpd="sng" algn="ctr">
+                      <a:solidFill>
+                        <a:srgbClr val="CCCCCC"/>
+                      </a:solidFill>
+                      <a:prstDash val="solid"/>
+                      <a:round/>
+                      <a:headEnd type="none" w="med" len="med"/>
+                      <a:tailEnd type="none" w="med" len="med"/>
+                    </a:lnR>
+                    <a:lnT w="12700" cap="flat" cmpd="sng" algn="ctr">
+                      <a:solidFill>
+                        <a:srgbClr val="CCCCCC"/>
+                      </a:solidFill>
+                      <a:prstDash val="solid"/>
+                      <a:round/>
+                      <a:headEnd type="none" w="med" len="med"/>
+                      <a:tailEnd type="none" w="med" len="med"/>
+                    </a:lnT>
+                    <a:lnB w="12700" cap="flat" cmpd="sng" algn="ctr">
+                      <a:solidFill>
+                        <a:srgbClr val="CCCCCC"/>
+                      </a:solidFill>
+                      <a:prstDash val="solid"/>
+                      <a:round/>
+                      <a:headEnd type="none" w="med" len="med"/>
+                      <a:tailEnd type="none" w="med" len="med"/>
+                    </a:lnB>
+                    <a:solidFill>
+                      <a:srgbClr val="FFF8E1"/>
+                    </a:solidFill>
+                  </a:tcPr>
+                </a:tc>
+                <a:tc>
+                  <a:txBody>
+                    <a:bodyPr/>
+                    <a:lstStyle/>
+                    <a:p>
+                      <a:pPr marL="0" marR="0">
+                        <a:spcAft>
+                          <a:spcPts val="500"/>
+                        </a:spcAft>
+                        <a:buNone/>
+                      </a:pPr>
+                      <a:r>
+                        <a:rPr lang="en-US" sz="1200">
+                          <a:solidFill>
+                            <a:srgbClr val="111111"/>
+                          </a:solidFill>
+                          <a:effectLst/>
+                          <a:latin typeface="Cambria" panose="02040503050406030204" pitchFamily="18" charset="0"/>
+                          <a:ea typeface="Arial" panose="020B0604020202020204" pitchFamily="34" charset="0"/>
+                          <a:cs typeface="Arial" panose="020B0604020202020204" pitchFamily="34" charset="0"/>
+                        </a:rPr>
+                        <a:t>Builder</a:t>
+                      </a:r>
+                      <a:endParaRPr lang="en-US" sz="1200">
+                        <a:effectLst/>
+                        <a:latin typeface="Cambria" panose="02040503050406030204" pitchFamily="18" charset="0"/>
+                        <a:ea typeface="Arial" panose="020B0604020202020204" pitchFamily="34" charset="0"/>
+                        <a:cs typeface="Vrinda" panose="020B0502040204020203" pitchFamily="34" charset="0"/>
+                      </a:endParaRPr>
+                    </a:p>
+                  </a:txBody>
+                  <a:tcPr marL="57150" marR="50800" marT="44450" marB="44450">
+                    <a:lnL w="12700" cap="flat" cmpd="sng" algn="ctr">
+                      <a:solidFill>
+                        <a:srgbClr val="CCCCCC"/>
+                      </a:solidFill>
+                      <a:prstDash val="solid"/>
+                      <a:round/>
+                      <a:headEnd type="none" w="med" len="med"/>
+                      <a:tailEnd type="none" w="med" len="med"/>
+                    </a:lnL>
+                    <a:lnR w="12700" cap="flat" cmpd="sng" algn="ctr">
+                      <a:solidFill>
+                        <a:srgbClr val="CCCCCC"/>
+                      </a:solidFill>
+                      <a:prstDash val="solid"/>
+                      <a:round/>
+                      <a:headEnd type="none" w="med" len="med"/>
+                      <a:tailEnd type="none" w="med" len="med"/>
+                    </a:lnR>
+                    <a:lnT w="12700" cap="flat" cmpd="sng" algn="ctr">
+                      <a:solidFill>
+                        <a:srgbClr val="CCCCCC"/>
+                      </a:solidFill>
+                      <a:prstDash val="solid"/>
+                      <a:round/>
+                      <a:headEnd type="none" w="med" len="med"/>
+                      <a:tailEnd type="none" w="med" len="med"/>
+                    </a:lnT>
+                    <a:lnB w="12700" cap="flat" cmpd="sng" algn="ctr">
+                      <a:solidFill>
+                        <a:srgbClr val="CCCCCC"/>
+                      </a:solidFill>
+                      <a:prstDash val="solid"/>
+                      <a:round/>
+                      <a:headEnd type="none" w="med" len="med"/>
+                      <a:tailEnd type="none" w="med" len="med"/>
+                    </a:lnB>
+                    <a:solidFill>
+                      <a:srgbClr val="FFF0FF"/>
+                    </a:solidFill>
+                  </a:tcPr>
+                </a:tc>
+                <a:extLst>
+                  <a:ext uri="{0D108BD9-81ED-4DB2-BD59-A6C34878D82A}">
+                    <a16:rowId xmlns:a16="http://schemas.microsoft.com/office/drawing/2014/main" val="474552794"/>
+                  </a:ext>
+                </a:extLst>
+              </a:tr>
+              <a:tr h="618635">
+                <a:tc>
+                  <a:txBody>
+                    <a:bodyPr/>
+                    <a:lstStyle/>
+                    <a:p>
+                      <a:pPr marL="0" marR="0">
+                        <a:spcAft>
+                          <a:spcPts val="500"/>
+                        </a:spcAft>
+                        <a:buNone/>
+                      </a:pPr>
+                      <a:r>
+                        <a:rPr lang="en-US" sz="1200" b="1" dirty="0">
+                          <a:solidFill>
+                            <a:srgbClr val="111111"/>
+                          </a:solidFill>
+                          <a:effectLst/>
+                          <a:latin typeface="Cambria" panose="02040503050406030204" pitchFamily="18" charset="0"/>
+                          <a:ea typeface="Arial" panose="020B0604020202020204" pitchFamily="34" charset="0"/>
+                          <a:cs typeface="Arial" panose="020B0604020202020204" pitchFamily="34" charset="0"/>
+                        </a:rPr>
+                        <a:t>Intent</a:t>
+                      </a:r>
+                      <a:endParaRPr lang="en-US" sz="1200" dirty="0">
+                        <a:effectLst/>
+                        <a:latin typeface="Cambria" panose="02040503050406030204" pitchFamily="18" charset="0"/>
+                        <a:ea typeface="Arial" panose="020B0604020202020204" pitchFamily="34" charset="0"/>
+                        <a:cs typeface="Vrinda" panose="020B0502040204020203" pitchFamily="34" charset="0"/>
+                      </a:endParaRPr>
+                    </a:p>
+                  </a:txBody>
+                  <a:tcPr marL="57150" marR="50800" marT="44450" marB="44450">
+                    <a:lnL w="12700" cap="flat" cmpd="sng" algn="ctr">
+                      <a:solidFill>
+                        <a:srgbClr val="CCCCCC"/>
+                      </a:solidFill>
+                      <a:prstDash val="solid"/>
+                      <a:round/>
+                      <a:headEnd type="none" w="med" len="med"/>
+                      <a:tailEnd type="none" w="med" len="med"/>
+                    </a:lnL>
+                    <a:lnR w="12700" cap="flat" cmpd="sng" algn="ctr">
+                      <a:solidFill>
+                        <a:srgbClr val="CCCCCC"/>
+                      </a:solidFill>
+                      <a:prstDash val="solid"/>
+                      <a:round/>
+                      <a:headEnd type="none" w="med" len="med"/>
+                      <a:tailEnd type="none" w="med" len="med"/>
+                    </a:lnR>
+                    <a:lnT w="12700" cap="flat" cmpd="sng" algn="ctr">
+                      <a:solidFill>
+                        <a:srgbClr val="CCCCCC"/>
+                      </a:solidFill>
+                      <a:prstDash val="solid"/>
+                      <a:round/>
+                      <a:headEnd type="none" w="med" len="med"/>
+                      <a:tailEnd type="none" w="med" len="med"/>
+                    </a:lnT>
+                    <a:lnB w="12700" cap="flat" cmpd="sng" algn="ctr">
+                      <a:solidFill>
+                        <a:srgbClr val="CCCCCC"/>
                       </a:solidFill>
                       <a:prstDash val="solid"/>
                       <a:round/>
@@ -18808,58 +19234,63 @@
                     <a:bodyPr/>
                     <a:lstStyle/>
                     <a:p>
-                      <a:pPr marL="0" indent="0" algn="l">
+                      <a:pPr marL="0" marR="0">
+                        <a:spcAft>
+                          <a:spcPts val="500"/>
+                        </a:spcAft>
                         <a:buNone/>
                       </a:pPr>
                       <a:r>
-                        <a:rPr lang="en-US" sz="1200" dirty="0">
+                        <a:rPr lang="en-US" sz="1200">
                           <a:solidFill>
-                            <a:srgbClr val="1A1A1A"/>
+                            <a:srgbClr val="111111"/>
                           </a:solidFill>
+                          <a:effectLst/>
                           <a:latin typeface="Cambria" panose="02040503050406030204" pitchFamily="18" charset="0"/>
-                          <a:ea typeface="Calibri" pitchFamily="34" charset="-122"/>
-                          <a:cs typeface="Calibri" pitchFamily="34" charset="-120"/>
+                          <a:ea typeface="Arial" panose="020B0604020202020204" pitchFamily="34" charset="0"/>
+                          <a:cs typeface="Arial" panose="020B0604020202020204" pitchFamily="34" charset="0"/>
                         </a:rPr>
                         <a:t>One instance, global access.</a:t>
                       </a:r>
-                      <a:endParaRPr lang="en-US" sz="1200" dirty="0">
+                      <a:endParaRPr lang="en-US" sz="1200">
+                        <a:effectLst/>
                         <a:latin typeface="Cambria" panose="02040503050406030204" pitchFamily="18" charset="0"/>
-                        <a:ea typeface="Calibri" charset="0"/>
-                        <a:cs typeface="Calibri" charset="0"/>
+                        <a:ea typeface="Arial" panose="020B0604020202020204" pitchFamily="34" charset="0"/>
+                        <a:cs typeface="Vrinda" panose="020B0502040204020203" pitchFamily="34" charset="0"/>
                       </a:endParaRPr>
                     </a:p>
                   </a:txBody>
-                  <a:tcPr marL="76200" marR="63500" marT="38100" marB="38100">
-                    <a:lnL w="9525" cap="flat" cmpd="sng" algn="ctr">
+                  <a:tcPr marL="57150" marR="50800" marT="44450" marB="44450">
+                    <a:lnL w="12700" cap="flat" cmpd="sng" algn="ctr">
                       <a:solidFill>
-                        <a:srgbClr val="D4D7DF"/>
+                        <a:srgbClr val="CCCCCC"/>
                       </a:solidFill>
                       <a:prstDash val="solid"/>
                       <a:round/>
                       <a:headEnd type="none" w="med" len="med"/>
                       <a:tailEnd type="none" w="med" len="med"/>
                     </a:lnL>
-                    <a:lnR w="9525" cap="flat" cmpd="sng" algn="ctr">
+                    <a:lnR w="12700" cap="flat" cmpd="sng" algn="ctr">
                       <a:solidFill>
-                        <a:srgbClr val="D4D7DF"/>
+                        <a:srgbClr val="CCCCCC"/>
                       </a:solidFill>
                       <a:prstDash val="solid"/>
                       <a:round/>
                       <a:headEnd type="none" w="med" len="med"/>
                       <a:tailEnd type="none" w="med" len="med"/>
                     </a:lnR>
-                    <a:lnT w="9525" cap="flat" cmpd="sng" algn="ctr">
+                    <a:lnT w="12700" cap="flat" cmpd="sng" algn="ctr">
                       <a:solidFill>
-                        <a:srgbClr val="D4D7DF"/>
+                        <a:srgbClr val="CCCCCC"/>
                       </a:solidFill>
                       <a:prstDash val="solid"/>
                       <a:round/>
                       <a:headEnd type="none" w="med" len="med"/>
                       <a:tailEnd type="none" w="med" len="med"/>
                     </a:lnT>
-                    <a:lnB w="9525" cap="flat" cmpd="sng" algn="ctr">
+                    <a:lnB w="12700" cap="flat" cmpd="sng" algn="ctr">
                       <a:solidFill>
-                        <a:srgbClr val="D4D7DF"/>
+                        <a:srgbClr val="CCCCCC"/>
                       </a:solidFill>
                       <a:prstDash val="solid"/>
                       <a:round/>
@@ -18876,58 +19307,63 @@
                     <a:bodyPr/>
                     <a:lstStyle/>
                     <a:p>
-                      <a:pPr marL="0" indent="0" algn="l">
+                      <a:pPr marL="0" marR="0">
+                        <a:spcAft>
+                          <a:spcPts val="500"/>
+                        </a:spcAft>
                         <a:buNone/>
                       </a:pPr>
                       <a:r>
-                        <a:rPr lang="en-US" sz="1200" dirty="0">
+                        <a:rPr lang="en-US" sz="1200">
                           <a:solidFill>
-                            <a:srgbClr val="1A1A1A"/>
+                            <a:srgbClr val="111111"/>
                           </a:solidFill>
+                          <a:effectLst/>
                           <a:latin typeface="Cambria" panose="02040503050406030204" pitchFamily="18" charset="0"/>
-                          <a:ea typeface="Calibri" pitchFamily="34" charset="-122"/>
-                          <a:cs typeface="Calibri" pitchFamily="34" charset="-120"/>
+                          <a:ea typeface="Arial" panose="020B0604020202020204" pitchFamily="34" charset="0"/>
+                          <a:cs typeface="Arial" panose="020B0604020202020204" pitchFamily="34" charset="0"/>
                         </a:rPr>
-                        <a:t>Subclass picks the class.</a:t>
+                        <a:t>Subclass decides which class to create.</a:t>
                       </a:r>
-                      <a:endParaRPr lang="en-US" sz="1200" dirty="0">
+                      <a:endParaRPr lang="en-US" sz="1200">
+                        <a:effectLst/>
                         <a:latin typeface="Cambria" panose="02040503050406030204" pitchFamily="18" charset="0"/>
-                        <a:ea typeface="Calibri" charset="0"/>
-                        <a:cs typeface="Calibri" charset="0"/>
+                        <a:ea typeface="Arial" panose="020B0604020202020204" pitchFamily="34" charset="0"/>
+                        <a:cs typeface="Vrinda" panose="020B0502040204020203" pitchFamily="34" charset="0"/>
                       </a:endParaRPr>
                     </a:p>
                   </a:txBody>
-                  <a:tcPr marL="76200" marR="63500" marT="38100" marB="38100">
-                    <a:lnL w="9525" cap="flat" cmpd="sng" algn="ctr">
+                  <a:tcPr marL="57150" marR="50800" marT="44450" marB="44450">
+                    <a:lnL w="12700" cap="flat" cmpd="sng" algn="ctr">
                       <a:solidFill>
-                        <a:srgbClr val="D4D7DF"/>
+                        <a:srgbClr val="CCCCCC"/>
                       </a:solidFill>
                       <a:prstDash val="solid"/>
                       <a:round/>
                       <a:headEnd type="none" w="med" len="med"/>
                       <a:tailEnd type="none" w="med" len="med"/>
                     </a:lnL>
-                    <a:lnR w="9525" cap="flat" cmpd="sng" algn="ctr">
+                    <a:lnR w="12700" cap="flat" cmpd="sng" algn="ctr">
                       <a:solidFill>
-                        <a:srgbClr val="D4D7DF"/>
+                        <a:srgbClr val="CCCCCC"/>
                       </a:solidFill>
                       <a:prstDash val="solid"/>
                       <a:round/>
                       <a:headEnd type="none" w="med" len="med"/>
                       <a:tailEnd type="none" w="med" len="med"/>
                     </a:lnR>
-                    <a:lnT w="9525" cap="flat" cmpd="sng" algn="ctr">
+                    <a:lnT w="12700" cap="flat" cmpd="sng" algn="ctr">
                       <a:solidFill>
-                        <a:srgbClr val="D4D7DF"/>
+                        <a:srgbClr val="CCCCCC"/>
                       </a:solidFill>
                       <a:prstDash val="solid"/>
                       <a:round/>
                       <a:headEnd type="none" w="med" len="med"/>
                       <a:tailEnd type="none" w="med" len="med"/>
                     </a:lnT>
-                    <a:lnB w="9525" cap="flat" cmpd="sng" algn="ctr">
+                    <a:lnB w="12700" cap="flat" cmpd="sng" algn="ctr">
                       <a:solidFill>
-                        <a:srgbClr val="D4D7DF"/>
+                        <a:srgbClr val="CCCCCC"/>
                       </a:solidFill>
                       <a:prstDash val="solid"/>
                       <a:round/>
@@ -18944,58 +19380,63 @@
                     <a:bodyPr/>
                     <a:lstStyle/>
                     <a:p>
-                      <a:pPr marL="0" indent="0" algn="l">
+                      <a:pPr marL="0" marR="0">
+                        <a:spcAft>
+                          <a:spcPts val="500"/>
+                        </a:spcAft>
                         <a:buNone/>
                       </a:pPr>
                       <a:r>
-                        <a:rPr lang="en-US" sz="1200" dirty="0">
+                        <a:rPr lang="en-US" sz="1200">
                           <a:solidFill>
-                            <a:srgbClr val="1A1A1A"/>
+                            <a:srgbClr val="111111"/>
                           </a:solidFill>
+                          <a:effectLst/>
                           <a:latin typeface="Cambria" panose="02040503050406030204" pitchFamily="18" charset="0"/>
-                          <a:ea typeface="Calibri" pitchFamily="34" charset="-122"/>
-                          <a:cs typeface="Calibri" pitchFamily="34" charset="-120"/>
+                          <a:ea typeface="Arial" panose="020B0604020202020204" pitchFamily="34" charset="0"/>
+                          <a:cs typeface="Arial" panose="020B0604020202020204" pitchFamily="34" charset="0"/>
                         </a:rPr>
-                        <a:t>Consistent family of objects.</a:t>
+                        <a:t>Consistent family of related objects.</a:t>
                       </a:r>
-                      <a:endParaRPr lang="en-US" sz="1200" dirty="0">
+                      <a:endParaRPr lang="en-US" sz="1200">
+                        <a:effectLst/>
                         <a:latin typeface="Cambria" panose="02040503050406030204" pitchFamily="18" charset="0"/>
-                        <a:ea typeface="Calibri" charset="0"/>
-                        <a:cs typeface="Calibri" charset="0"/>
+                        <a:ea typeface="Arial" panose="020B0604020202020204" pitchFamily="34" charset="0"/>
+                        <a:cs typeface="Vrinda" panose="020B0502040204020203" pitchFamily="34" charset="0"/>
                       </a:endParaRPr>
                     </a:p>
                   </a:txBody>
-                  <a:tcPr marL="76200" marR="63500" marT="38100" marB="38100">
-                    <a:lnL w="9525" cap="flat" cmpd="sng" algn="ctr">
+                  <a:tcPr marL="57150" marR="50800" marT="44450" marB="44450">
+                    <a:lnL w="12700" cap="flat" cmpd="sng" algn="ctr">
                       <a:solidFill>
-                        <a:srgbClr val="D4D7DF"/>
+                        <a:srgbClr val="CCCCCC"/>
                       </a:solidFill>
                       <a:prstDash val="solid"/>
                       <a:round/>
                       <a:headEnd type="none" w="med" len="med"/>
                       <a:tailEnd type="none" w="med" len="med"/>
                     </a:lnL>
-                    <a:lnR w="9525" cap="flat" cmpd="sng" algn="ctr">
+                    <a:lnR w="12700" cap="flat" cmpd="sng" algn="ctr">
                       <a:solidFill>
-                        <a:srgbClr val="D4D7DF"/>
+                        <a:srgbClr val="CCCCCC"/>
                       </a:solidFill>
                       <a:prstDash val="solid"/>
                       <a:round/>
                       <a:headEnd type="none" w="med" len="med"/>
                       <a:tailEnd type="none" w="med" len="med"/>
                     </a:lnR>
-                    <a:lnT w="9525" cap="flat" cmpd="sng" algn="ctr">
+                    <a:lnT w="12700" cap="flat" cmpd="sng" algn="ctr">
                       <a:solidFill>
-                        <a:srgbClr val="D4D7DF"/>
+                        <a:srgbClr val="CCCCCC"/>
                       </a:solidFill>
                       <a:prstDash val="solid"/>
                       <a:round/>
                       <a:headEnd type="none" w="med" len="med"/>
                       <a:tailEnd type="none" w="med" len="med"/>
                     </a:lnT>
-                    <a:lnB w="9525" cap="flat" cmpd="sng" algn="ctr">
+                    <a:lnB w="12700" cap="flat" cmpd="sng" algn="ctr">
                       <a:solidFill>
-                        <a:srgbClr val="D4D7DF"/>
+                        <a:srgbClr val="CCCCCC"/>
                       </a:solidFill>
                       <a:prstDash val="solid"/>
                       <a:round/>
@@ -19012,58 +19453,63 @@
                     <a:bodyPr/>
                     <a:lstStyle/>
                     <a:p>
-                      <a:pPr marL="0" indent="0" algn="l">
+                      <a:pPr marL="0" marR="0">
+                        <a:spcAft>
+                          <a:spcPts val="500"/>
+                        </a:spcAft>
                         <a:buNone/>
                       </a:pPr>
                       <a:r>
-                        <a:rPr lang="en-US" sz="1200" dirty="0">
+                        <a:rPr lang="en-US" sz="1200">
                           <a:solidFill>
-                            <a:srgbClr val="1A1A1A"/>
+                            <a:srgbClr val="111111"/>
                           </a:solidFill>
+                          <a:effectLst/>
                           <a:latin typeface="Cambria" panose="02040503050406030204" pitchFamily="18" charset="0"/>
-                          <a:ea typeface="Calibri" pitchFamily="34" charset="-122"/>
-                          <a:cs typeface="Calibri" pitchFamily="34" charset="-120"/>
+                          <a:ea typeface="Arial" panose="020B0604020202020204" pitchFamily="34" charset="0"/>
+                          <a:cs typeface="Arial" panose="020B0604020202020204" pitchFamily="34" charset="0"/>
                         </a:rPr>
-                        <a:t>Step-by-step construction.</a:t>
+                        <a:t>Step-by-step complex object construction.</a:t>
                       </a:r>
-                      <a:endParaRPr lang="en-US" sz="1200" dirty="0">
+                      <a:endParaRPr lang="en-US" sz="1200">
+                        <a:effectLst/>
                         <a:latin typeface="Cambria" panose="02040503050406030204" pitchFamily="18" charset="0"/>
-                        <a:ea typeface="Calibri" charset="0"/>
-                        <a:cs typeface="Calibri" charset="0"/>
+                        <a:ea typeface="Arial" panose="020B0604020202020204" pitchFamily="34" charset="0"/>
+                        <a:cs typeface="Vrinda" panose="020B0502040204020203" pitchFamily="34" charset="0"/>
                       </a:endParaRPr>
                     </a:p>
                   </a:txBody>
-                  <a:tcPr marL="76200" marR="63500" marT="38100" marB="38100">
-                    <a:lnL w="9525" cap="flat" cmpd="sng" algn="ctr">
+                  <a:tcPr marL="57150" marR="50800" marT="44450" marB="44450">
+                    <a:lnL w="12700" cap="flat" cmpd="sng" algn="ctr">
                       <a:solidFill>
-                        <a:srgbClr val="D4D7DF"/>
+                        <a:srgbClr val="CCCCCC"/>
                       </a:solidFill>
                       <a:prstDash val="solid"/>
                       <a:round/>
                       <a:headEnd type="none" w="med" len="med"/>
                       <a:tailEnd type="none" w="med" len="med"/>
                     </a:lnL>
-                    <a:lnR w="9525" cap="flat" cmpd="sng" algn="ctr">
+                    <a:lnR w="12700" cap="flat" cmpd="sng" algn="ctr">
                       <a:solidFill>
-                        <a:srgbClr val="D4D7DF"/>
+                        <a:srgbClr val="CCCCCC"/>
                       </a:solidFill>
                       <a:prstDash val="solid"/>
                       <a:round/>
                       <a:headEnd type="none" w="med" len="med"/>
                       <a:tailEnd type="none" w="med" len="med"/>
                     </a:lnR>
-                    <a:lnT w="9525" cap="flat" cmpd="sng" algn="ctr">
+                    <a:lnT w="12700" cap="flat" cmpd="sng" algn="ctr">
                       <a:solidFill>
-                        <a:srgbClr val="D4D7DF"/>
+                        <a:srgbClr val="CCCCCC"/>
                       </a:solidFill>
                       <a:prstDash val="solid"/>
                       <a:round/>
                       <a:headEnd type="none" w="med" len="med"/>
                       <a:tailEnd type="none" w="med" len="med"/>
                     </a:lnT>
-                    <a:lnB w="9525" cap="flat" cmpd="sng" algn="ctr">
+                    <a:lnB w="12700" cap="flat" cmpd="sng" algn="ctr">
                       <a:solidFill>
-                        <a:srgbClr val="D4D7DF"/>
+                        <a:srgbClr val="CCCCCC"/>
                       </a:solidFill>
                       <a:prstDash val="solid"/>
                       <a:round/>
@@ -19077,68 +19523,73 @@
                 </a:tc>
                 <a:extLst>
                   <a:ext uri="{0D108BD9-81ED-4DB2-BD59-A6C34878D82A}">
-                    <a16:rowId xmlns:a16="http://schemas.microsoft.com/office/drawing/2014/main" val="10001"/>
+                    <a16:rowId xmlns:a16="http://schemas.microsoft.com/office/drawing/2014/main" val="2645269041"/>
                   </a:ext>
                 </a:extLst>
               </a:tr>
-              <a:tr h="0">
+              <a:tr h="618635">
                 <a:tc>
                   <a:txBody>
                     <a:bodyPr/>
                     <a:lstStyle/>
                     <a:p>
-                      <a:pPr marL="0" indent="0" algn="l">
+                      <a:pPr marL="0" marR="0">
+                        <a:spcAft>
+                          <a:spcPts val="500"/>
+                        </a:spcAft>
                         <a:buNone/>
                       </a:pPr>
                       <a:r>
-                        <a:rPr lang="en-US" sz="1200" b="1" dirty="0">
+                        <a:rPr lang="en-US" sz="1200" b="1">
                           <a:solidFill>
-                            <a:srgbClr val="1A1A1A"/>
+                            <a:srgbClr val="111111"/>
                           </a:solidFill>
+                          <a:effectLst/>
                           <a:latin typeface="Cambria" panose="02040503050406030204" pitchFamily="18" charset="0"/>
-                          <a:ea typeface="Calibri" pitchFamily="34" charset="-122"/>
-                          <a:cs typeface="Calibri" pitchFamily="34" charset="-120"/>
+                          <a:ea typeface="Arial" panose="020B0604020202020204" pitchFamily="34" charset="0"/>
+                          <a:cs typeface="Arial" panose="020B0604020202020204" pitchFamily="34" charset="0"/>
                         </a:rPr>
-                        <a:t># Products</a:t>
+                        <a:t>Number of products</a:t>
                       </a:r>
-                      <a:endParaRPr lang="en-US" sz="1200" dirty="0">
+                      <a:endParaRPr lang="en-US" sz="1200">
+                        <a:effectLst/>
                         <a:latin typeface="Cambria" panose="02040503050406030204" pitchFamily="18" charset="0"/>
-                        <a:ea typeface="Calibri" charset="0"/>
-                        <a:cs typeface="Calibri" charset="0"/>
+                        <a:ea typeface="Arial" panose="020B0604020202020204" pitchFamily="34" charset="0"/>
+                        <a:cs typeface="Vrinda" panose="020B0502040204020203" pitchFamily="34" charset="0"/>
                       </a:endParaRPr>
                     </a:p>
                   </a:txBody>
-                  <a:tcPr marL="76200" marR="63500" marT="38100" marB="38100">
-                    <a:lnL w="9525" cap="flat" cmpd="sng" algn="ctr">
+                  <a:tcPr marL="57150" marR="50800" marT="44450" marB="44450">
+                    <a:lnL w="12700" cap="flat" cmpd="sng" algn="ctr">
                       <a:solidFill>
-                        <a:srgbClr val="D4D7DF"/>
+                        <a:srgbClr val="CCCCCC"/>
                       </a:solidFill>
                       <a:prstDash val="solid"/>
                       <a:round/>
                       <a:headEnd type="none" w="med" len="med"/>
                       <a:tailEnd type="none" w="med" len="med"/>
                     </a:lnL>
-                    <a:lnR w="9525" cap="flat" cmpd="sng" algn="ctr">
+                    <a:lnR w="12700" cap="flat" cmpd="sng" algn="ctr">
                       <a:solidFill>
-                        <a:srgbClr val="D4D7DF"/>
+                        <a:srgbClr val="CCCCCC"/>
                       </a:solidFill>
                       <a:prstDash val="solid"/>
                       <a:round/>
                       <a:headEnd type="none" w="med" len="med"/>
                       <a:tailEnd type="none" w="med" len="med"/>
                     </a:lnR>
-                    <a:lnT w="9525" cap="flat" cmpd="sng" algn="ctr">
+                    <a:lnT w="12700" cap="flat" cmpd="sng" algn="ctr">
                       <a:solidFill>
-                        <a:srgbClr val="D4D7DF"/>
+                        <a:srgbClr val="CCCCCC"/>
                       </a:solidFill>
                       <a:prstDash val="solid"/>
                       <a:round/>
                       <a:headEnd type="none" w="med" len="med"/>
                       <a:tailEnd type="none" w="med" len="med"/>
                     </a:lnT>
-                    <a:lnB w="9525" cap="flat" cmpd="sng" algn="ctr">
+                    <a:lnB w="12700" cap="flat" cmpd="sng" algn="ctr">
                       <a:solidFill>
-                        <a:srgbClr val="D4D7DF"/>
+                        <a:srgbClr val="CCCCCC"/>
                       </a:solidFill>
                       <a:prstDash val="solid"/>
                       <a:round/>
@@ -19146,7 +19597,7 @@
                       <a:tailEnd type="none" w="med" len="med"/>
                     </a:lnB>
                     <a:solidFill>
-                      <a:srgbClr val="EDF2FA"/>
+                      <a:srgbClr val="EBF4FF"/>
                     </a:solidFill>
                   </a:tcPr>
                 </a:tc>
@@ -19155,58 +19606,63 @@
                     <a:bodyPr/>
                     <a:lstStyle/>
                     <a:p>
-                      <a:pPr marL="0" indent="0" algn="l">
+                      <a:pPr marL="0" marR="0">
+                        <a:spcAft>
+                          <a:spcPts val="500"/>
+                        </a:spcAft>
                         <a:buNone/>
                       </a:pPr>
                       <a:r>
-                        <a:rPr lang="en-US" sz="1200" dirty="0">
+                        <a:rPr lang="en-US" sz="1200">
                           <a:solidFill>
-                            <a:srgbClr val="1A1A1A"/>
+                            <a:srgbClr val="111111"/>
                           </a:solidFill>
+                          <a:effectLst/>
                           <a:latin typeface="Cambria" panose="02040503050406030204" pitchFamily="18" charset="0"/>
-                          <a:ea typeface="Calibri" pitchFamily="34" charset="-122"/>
-                          <a:cs typeface="Calibri" pitchFamily="34" charset="-120"/>
+                          <a:ea typeface="Arial" panose="020B0604020202020204" pitchFamily="34" charset="0"/>
+                          <a:cs typeface="Arial" panose="020B0604020202020204" pitchFamily="34" charset="0"/>
                         </a:rPr>
-                        <a:t>One (the instance).</a:t>
+                        <a:t>One (the instance itself).</a:t>
                       </a:r>
-                      <a:endParaRPr lang="en-US" sz="1200" dirty="0">
+                      <a:endParaRPr lang="en-US" sz="1200">
+                        <a:effectLst/>
                         <a:latin typeface="Cambria" panose="02040503050406030204" pitchFamily="18" charset="0"/>
-                        <a:ea typeface="Calibri" charset="0"/>
-                        <a:cs typeface="Calibri" charset="0"/>
+                        <a:ea typeface="Arial" panose="020B0604020202020204" pitchFamily="34" charset="0"/>
+                        <a:cs typeface="Vrinda" panose="020B0502040204020203" pitchFamily="34" charset="0"/>
                       </a:endParaRPr>
                     </a:p>
                   </a:txBody>
-                  <a:tcPr marL="76200" marR="63500" marT="38100" marB="38100">
-                    <a:lnL w="9525" cap="flat" cmpd="sng" algn="ctr">
+                  <a:tcPr marL="57150" marR="50800" marT="44450" marB="44450">
+                    <a:lnL w="12700" cap="flat" cmpd="sng" algn="ctr">
                       <a:solidFill>
-                        <a:srgbClr val="D4D7DF"/>
+                        <a:srgbClr val="CCCCCC"/>
                       </a:solidFill>
                       <a:prstDash val="solid"/>
                       <a:round/>
                       <a:headEnd type="none" w="med" len="med"/>
                       <a:tailEnd type="none" w="med" len="med"/>
                     </a:lnL>
-                    <a:lnR w="9525" cap="flat" cmpd="sng" algn="ctr">
+                    <a:lnR w="12700" cap="flat" cmpd="sng" algn="ctr">
                       <a:solidFill>
-                        <a:srgbClr val="D4D7DF"/>
+                        <a:srgbClr val="CCCCCC"/>
                       </a:solidFill>
                       <a:prstDash val="solid"/>
                       <a:round/>
                       <a:headEnd type="none" w="med" len="med"/>
                       <a:tailEnd type="none" w="med" len="med"/>
                     </a:lnR>
-                    <a:lnT w="9525" cap="flat" cmpd="sng" algn="ctr">
+                    <a:lnT w="12700" cap="flat" cmpd="sng" algn="ctr">
                       <a:solidFill>
-                        <a:srgbClr val="D4D7DF"/>
+                        <a:srgbClr val="CCCCCC"/>
                       </a:solidFill>
                       <a:prstDash val="solid"/>
                       <a:round/>
                       <a:headEnd type="none" w="med" len="med"/>
                       <a:tailEnd type="none" w="med" len="med"/>
                     </a:lnT>
-                    <a:lnB w="9525" cap="flat" cmpd="sng" algn="ctr">
+                    <a:lnB w="12700" cap="flat" cmpd="sng" algn="ctr">
                       <a:solidFill>
-                        <a:srgbClr val="D4D7DF"/>
+                        <a:srgbClr val="CCCCCC"/>
                       </a:solidFill>
                       <a:prstDash val="solid"/>
                       <a:round/>
@@ -19214,7 +19670,7 @@
                       <a:tailEnd type="none" w="med" len="med"/>
                     </a:lnB>
                     <a:solidFill>
-                      <a:srgbClr val="EDF2FA"/>
+                      <a:srgbClr val="F0F7FF"/>
                     </a:solidFill>
                   </a:tcPr>
                 </a:tc>
@@ -19223,58 +19679,63 @@
                     <a:bodyPr/>
                     <a:lstStyle/>
                     <a:p>
-                      <a:pPr marL="0" indent="0" algn="l">
+                      <a:pPr marL="0" marR="0">
+                        <a:spcAft>
+                          <a:spcPts val="500"/>
+                        </a:spcAft>
                         <a:buNone/>
                       </a:pPr>
                       <a:r>
-                        <a:rPr lang="en-US" sz="1200" dirty="0">
+                        <a:rPr lang="en-US" sz="1200">
                           <a:solidFill>
-                            <a:srgbClr val="1A1A1A"/>
+                            <a:srgbClr val="111111"/>
                           </a:solidFill>
+                          <a:effectLst/>
                           <a:latin typeface="Cambria" panose="02040503050406030204" pitchFamily="18" charset="0"/>
-                          <a:ea typeface="Calibri" pitchFamily="34" charset="-122"/>
-                          <a:cs typeface="Calibri" pitchFamily="34" charset="-120"/>
+                          <a:ea typeface="Arial" panose="020B0604020202020204" pitchFamily="34" charset="0"/>
+                          <a:cs typeface="Arial" panose="020B0604020202020204" pitchFamily="34" charset="0"/>
                         </a:rPr>
-                        <a:t>One type, many variants.</a:t>
+                        <a:t>One product type, many variants.</a:t>
                       </a:r>
-                      <a:endParaRPr lang="en-US" sz="1200" dirty="0">
+                      <a:endParaRPr lang="en-US" sz="1200">
+                        <a:effectLst/>
                         <a:latin typeface="Cambria" panose="02040503050406030204" pitchFamily="18" charset="0"/>
-                        <a:ea typeface="Calibri" charset="0"/>
-                        <a:cs typeface="Calibri" charset="0"/>
+                        <a:ea typeface="Arial" panose="020B0604020202020204" pitchFamily="34" charset="0"/>
+                        <a:cs typeface="Vrinda" panose="020B0502040204020203" pitchFamily="34" charset="0"/>
                       </a:endParaRPr>
                     </a:p>
                   </a:txBody>
-                  <a:tcPr marL="76200" marR="63500" marT="38100" marB="38100">
-                    <a:lnL w="9525" cap="flat" cmpd="sng" algn="ctr">
+                  <a:tcPr marL="57150" marR="50800" marT="44450" marB="44450">
+                    <a:lnL w="12700" cap="flat" cmpd="sng" algn="ctr">
                       <a:solidFill>
-                        <a:srgbClr val="D4D7DF"/>
+                        <a:srgbClr val="CCCCCC"/>
                       </a:solidFill>
                       <a:prstDash val="solid"/>
                       <a:round/>
                       <a:headEnd type="none" w="med" len="med"/>
                       <a:tailEnd type="none" w="med" len="med"/>
                     </a:lnL>
-                    <a:lnR w="9525" cap="flat" cmpd="sng" algn="ctr">
+                    <a:lnR w="12700" cap="flat" cmpd="sng" algn="ctr">
                       <a:solidFill>
-                        <a:srgbClr val="D4D7DF"/>
+                        <a:srgbClr val="CCCCCC"/>
                       </a:solidFill>
                       <a:prstDash val="solid"/>
                       <a:round/>
                       <a:headEnd type="none" w="med" len="med"/>
                       <a:tailEnd type="none" w="med" len="med"/>
                     </a:lnR>
-                    <a:lnT w="9525" cap="flat" cmpd="sng" algn="ctr">
+                    <a:lnT w="12700" cap="flat" cmpd="sng" algn="ctr">
                       <a:solidFill>
-                        <a:srgbClr val="D4D7DF"/>
+                        <a:srgbClr val="CCCCCC"/>
                       </a:solidFill>
                       <a:prstDash val="solid"/>
                       <a:round/>
                       <a:headEnd type="none" w="med" len="med"/>
                       <a:tailEnd type="none" w="med" len="med"/>
                     </a:lnT>
-                    <a:lnB w="9525" cap="flat" cmpd="sng" algn="ctr">
+                    <a:lnB w="12700" cap="flat" cmpd="sng" algn="ctr">
                       <a:solidFill>
-                        <a:srgbClr val="D4D7DF"/>
+                        <a:srgbClr val="CCCCCC"/>
                       </a:solidFill>
                       <a:prstDash val="solid"/>
                       <a:round/>
@@ -19282,7 +19743,7 @@
                       <a:tailEnd type="none" w="med" len="med"/>
                     </a:lnB>
                     <a:solidFill>
-                      <a:srgbClr val="EDF2FA"/>
+                      <a:srgbClr val="F0FFF0"/>
                     </a:solidFill>
                   </a:tcPr>
                 </a:tc>
@@ -19291,58 +19752,63 @@
                     <a:bodyPr/>
                     <a:lstStyle/>
                     <a:p>
-                      <a:pPr marL="0" indent="0" algn="l">
+                      <a:pPr marL="0" marR="0">
+                        <a:spcAft>
+                          <a:spcPts val="500"/>
+                        </a:spcAft>
                         <a:buNone/>
                       </a:pPr>
                       <a:r>
-                        <a:rPr lang="en-US" sz="1200" dirty="0">
+                        <a:rPr lang="en-US" sz="1200">
                           <a:solidFill>
-                            <a:srgbClr val="1A1A1A"/>
+                            <a:srgbClr val="111111"/>
                           </a:solidFill>
+                          <a:effectLst/>
                           <a:latin typeface="Cambria" panose="02040503050406030204" pitchFamily="18" charset="0"/>
-                          <a:ea typeface="Calibri" pitchFamily="34" charset="-122"/>
-                          <a:cs typeface="Calibri" pitchFamily="34" charset="-120"/>
+                          <a:ea typeface="Arial" panose="020B0604020202020204" pitchFamily="34" charset="0"/>
+                          <a:cs typeface="Arial" panose="020B0604020202020204" pitchFamily="34" charset="0"/>
                         </a:rPr>
-                        <a:t>Many types, in families.</a:t>
+                        <a:t>Multiple product types, grouped into families.</a:t>
                       </a:r>
-                      <a:endParaRPr lang="en-US" sz="1200" dirty="0">
+                      <a:endParaRPr lang="en-US" sz="1200">
+                        <a:effectLst/>
                         <a:latin typeface="Cambria" panose="02040503050406030204" pitchFamily="18" charset="0"/>
-                        <a:ea typeface="Calibri" charset="0"/>
-                        <a:cs typeface="Calibri" charset="0"/>
+                        <a:ea typeface="Arial" panose="020B0604020202020204" pitchFamily="34" charset="0"/>
+                        <a:cs typeface="Vrinda" panose="020B0502040204020203" pitchFamily="34" charset="0"/>
                       </a:endParaRPr>
                     </a:p>
                   </a:txBody>
-                  <a:tcPr marL="76200" marR="63500" marT="38100" marB="38100">
-                    <a:lnL w="9525" cap="flat" cmpd="sng" algn="ctr">
+                  <a:tcPr marL="57150" marR="50800" marT="44450" marB="44450">
+                    <a:lnL w="12700" cap="flat" cmpd="sng" algn="ctr">
                       <a:solidFill>
-                        <a:srgbClr val="D4D7DF"/>
+                        <a:srgbClr val="CCCCCC"/>
                       </a:solidFill>
                       <a:prstDash val="solid"/>
                       <a:round/>
                       <a:headEnd type="none" w="med" len="med"/>
                       <a:tailEnd type="none" w="med" len="med"/>
                     </a:lnL>
-                    <a:lnR w="9525" cap="flat" cmpd="sng" algn="ctr">
+                    <a:lnR w="12700" cap="flat" cmpd="sng" algn="ctr">
                       <a:solidFill>
-                        <a:srgbClr val="D4D7DF"/>
+                        <a:srgbClr val="CCCCCC"/>
                       </a:solidFill>
                       <a:prstDash val="solid"/>
                       <a:round/>
                       <a:headEnd type="none" w="med" len="med"/>
                       <a:tailEnd type="none" w="med" len="med"/>
                     </a:lnR>
-                    <a:lnT w="9525" cap="flat" cmpd="sng" algn="ctr">
+                    <a:lnT w="12700" cap="flat" cmpd="sng" algn="ctr">
                       <a:solidFill>
-                        <a:srgbClr val="D4D7DF"/>
+                        <a:srgbClr val="CCCCCC"/>
                       </a:solidFill>
                       <a:prstDash val="solid"/>
                       <a:round/>
                       <a:headEnd type="none" w="med" len="med"/>
                       <a:tailEnd type="none" w="med" len="med"/>
                     </a:lnT>
-                    <a:lnB w="9525" cap="flat" cmpd="sng" algn="ctr">
+                    <a:lnB w="12700" cap="flat" cmpd="sng" algn="ctr">
                       <a:solidFill>
-                        <a:srgbClr val="D4D7DF"/>
+                        <a:srgbClr val="CCCCCC"/>
                       </a:solidFill>
                       <a:prstDash val="solid"/>
                       <a:round/>
@@ -19350,7 +19816,7 @@
                       <a:tailEnd type="none" w="med" len="med"/>
                     </a:lnB>
                     <a:solidFill>
-                      <a:srgbClr val="EDF2FA"/>
+                      <a:srgbClr val="FFF8E1"/>
                     </a:solidFill>
                   </a:tcPr>
                 </a:tc>
@@ -19359,58 +19825,63 @@
                     <a:bodyPr/>
                     <a:lstStyle/>
                     <a:p>
-                      <a:pPr marL="0" indent="0" algn="l">
+                      <a:pPr marL="0" marR="0">
+                        <a:spcAft>
+                          <a:spcPts val="500"/>
+                        </a:spcAft>
                         <a:buNone/>
                       </a:pPr>
                       <a:r>
-                        <a:rPr lang="en-US" sz="1200" dirty="0">
+                        <a:rPr lang="en-US" sz="1200">
                           <a:solidFill>
-                            <a:srgbClr val="1A1A1A"/>
+                            <a:srgbClr val="111111"/>
                           </a:solidFill>
+                          <a:effectLst/>
                           <a:latin typeface="Cambria" panose="02040503050406030204" pitchFamily="18" charset="0"/>
-                          <a:ea typeface="Calibri" pitchFamily="34" charset="-122"/>
-                          <a:cs typeface="Calibri" pitchFamily="34" charset="-120"/>
+                          <a:ea typeface="Arial" panose="020B0604020202020204" pitchFamily="34" charset="0"/>
+                          <a:cs typeface="Arial" panose="020B0604020202020204" pitchFamily="34" charset="0"/>
                         </a:rPr>
-                        <a:t>One complex product.</a:t>
+                        <a:t>One complex product, assembled from parts.</a:t>
                       </a:r>
-                      <a:endParaRPr lang="en-US" sz="1200" dirty="0">
+                      <a:endParaRPr lang="en-US" sz="1200">
+                        <a:effectLst/>
                         <a:latin typeface="Cambria" panose="02040503050406030204" pitchFamily="18" charset="0"/>
-                        <a:ea typeface="Calibri" charset="0"/>
-                        <a:cs typeface="Calibri" charset="0"/>
+                        <a:ea typeface="Arial" panose="020B0604020202020204" pitchFamily="34" charset="0"/>
+                        <a:cs typeface="Vrinda" panose="020B0502040204020203" pitchFamily="34" charset="0"/>
                       </a:endParaRPr>
                     </a:p>
                   </a:txBody>
-                  <a:tcPr marL="76200" marR="63500" marT="38100" marB="38100">
-                    <a:lnL w="9525" cap="flat" cmpd="sng" algn="ctr">
+                  <a:tcPr marL="57150" marR="50800" marT="44450" marB="44450">
+                    <a:lnL w="12700" cap="flat" cmpd="sng" algn="ctr">
                       <a:solidFill>
-                        <a:srgbClr val="D4D7DF"/>
+                        <a:srgbClr val="CCCCCC"/>
                       </a:solidFill>
                       <a:prstDash val="solid"/>
                       <a:round/>
                       <a:headEnd type="none" w="med" len="med"/>
                       <a:tailEnd type="none" w="med" len="med"/>
                     </a:lnL>
-                    <a:lnR w="9525" cap="flat" cmpd="sng" algn="ctr">
+                    <a:lnR w="12700" cap="flat" cmpd="sng" algn="ctr">
                       <a:solidFill>
-                        <a:srgbClr val="D4D7DF"/>
+                        <a:srgbClr val="CCCCCC"/>
                       </a:solidFill>
                       <a:prstDash val="solid"/>
                       <a:round/>
                       <a:headEnd type="none" w="med" len="med"/>
                       <a:tailEnd type="none" w="med" len="med"/>
                     </a:lnR>
-                    <a:lnT w="9525" cap="flat" cmpd="sng" algn="ctr">
+                    <a:lnT w="12700" cap="flat" cmpd="sng" algn="ctr">
                       <a:solidFill>
-                        <a:srgbClr val="D4D7DF"/>
+                        <a:srgbClr val="CCCCCC"/>
                       </a:solidFill>
                       <a:prstDash val="solid"/>
                       <a:round/>
                       <a:headEnd type="none" w="med" len="med"/>
                       <a:tailEnd type="none" w="med" len="med"/>
                     </a:lnT>
-                    <a:lnB w="9525" cap="flat" cmpd="sng" algn="ctr">
+                    <a:lnB w="12700" cap="flat" cmpd="sng" algn="ctr">
                       <a:solidFill>
-                        <a:srgbClr val="D4D7DF"/>
+                        <a:srgbClr val="CCCCCC"/>
                       </a:solidFill>
                       <a:prstDash val="solid"/>
                       <a:round/>
@@ -19418,74 +19889,79 @@
                       <a:tailEnd type="none" w="med" len="med"/>
                     </a:lnB>
                     <a:solidFill>
-                      <a:srgbClr val="EDF2FA"/>
+                      <a:srgbClr val="FFF0FF"/>
                     </a:solidFill>
                   </a:tcPr>
                 </a:tc>
                 <a:extLst>
                   <a:ext uri="{0D108BD9-81ED-4DB2-BD59-A6C34878D82A}">
-                    <a16:rowId xmlns:a16="http://schemas.microsoft.com/office/drawing/2014/main" val="10002"/>
+                    <a16:rowId xmlns:a16="http://schemas.microsoft.com/office/drawing/2014/main" val="2081297638"/>
                   </a:ext>
                 </a:extLst>
               </a:tr>
-              <a:tr h="0">
+              <a:tr h="618635">
                 <a:tc>
                   <a:txBody>
                     <a:bodyPr/>
                     <a:lstStyle/>
                     <a:p>
-                      <a:pPr marL="0" indent="0" algn="l">
+                      <a:pPr marL="0" marR="0">
+                        <a:spcAft>
+                          <a:spcPts val="500"/>
+                        </a:spcAft>
                         <a:buNone/>
                       </a:pPr>
                       <a:r>
-                        <a:rPr lang="en-US" sz="1200" b="1" dirty="0">
+                        <a:rPr lang="en-US" sz="1200" b="1">
                           <a:solidFill>
-                            <a:srgbClr val="1A1A1A"/>
+                            <a:srgbClr val="111111"/>
                           </a:solidFill>
+                          <a:effectLst/>
                           <a:latin typeface="Cambria" panose="02040503050406030204" pitchFamily="18" charset="0"/>
-                          <a:ea typeface="Calibri" pitchFamily="34" charset="-122"/>
-                          <a:cs typeface="Calibri" pitchFamily="34" charset="-120"/>
+                          <a:ea typeface="Arial" panose="020B0604020202020204" pitchFamily="34" charset="0"/>
+                          <a:cs typeface="Arial" panose="020B0604020202020204" pitchFamily="34" charset="0"/>
                         </a:rPr>
-                        <a:t>Extend by</a:t>
+                        <a:t>Extensibility trigger</a:t>
                       </a:r>
-                      <a:endParaRPr lang="en-US" sz="1200" dirty="0">
+                      <a:endParaRPr lang="en-US" sz="1200">
+                        <a:effectLst/>
                         <a:latin typeface="Cambria" panose="02040503050406030204" pitchFamily="18" charset="0"/>
-                        <a:ea typeface="Calibri" charset="0"/>
-                        <a:cs typeface="Calibri" charset="0"/>
+                        <a:ea typeface="Arial" panose="020B0604020202020204" pitchFamily="34" charset="0"/>
+                        <a:cs typeface="Vrinda" panose="020B0502040204020203" pitchFamily="34" charset="0"/>
                       </a:endParaRPr>
                     </a:p>
                   </a:txBody>
-                  <a:tcPr marL="76200" marR="63500" marT="38100" marB="38100">
-                    <a:lnL w="9525" cap="flat" cmpd="sng" algn="ctr">
+                  <a:tcPr marL="57150" marR="50800" marT="44450" marB="44450">
+                    <a:lnL w="12700" cap="flat" cmpd="sng" algn="ctr">
                       <a:solidFill>
-                        <a:srgbClr val="D4D7DF"/>
+                        <a:srgbClr val="CCCCCC"/>
                       </a:solidFill>
                       <a:prstDash val="solid"/>
                       <a:round/>
                       <a:headEnd type="none" w="med" len="med"/>
                       <a:tailEnd type="none" w="med" len="med"/>
                     </a:lnL>
-                    <a:lnR w="9525" cap="flat" cmpd="sng" algn="ctr">
+                    <a:lnR w="12700" cap="flat" cmpd="sng" algn="ctr">
                       <a:solidFill>
-                        <a:srgbClr val="D4D7DF"/>
+                        <a:srgbClr val="CCCCCC"/>
                       </a:solidFill>
                       <a:prstDash val="solid"/>
                       <a:round/>
                       <a:headEnd type="none" w="med" len="med"/>
                       <a:tailEnd type="none" w="med" len="med"/>
                     </a:lnR>
-                    <a:lnT w="9525" cap="flat" cmpd="sng" algn="ctr">
+                    <a:lnT w="12700" cap="flat" cmpd="sng" algn="ctr">
                       <a:solidFill>
-                        <a:srgbClr val="D4D7DF"/>
+                        <a:srgbClr val="CCCCCC"/>
                       </a:solidFill>
                       <a:prstDash val="solid"/>
                       <a:round/>
                       <a:headEnd type="none" w="med" len="med"/>
                       <a:tailEnd type="none" w="med" len="med"/>
                     </a:lnT>
-                    <a:lnB w="9525" cap="flat" cmpd="sng" algn="ctr">
+                    <a:lnB w="12700" cap="flat" cmpd="sng" algn="ctr">
                       <a:solidFill>
-                        <a:srgbClr val="D4D7DF"/>
+                        <a:srgbClr val="CCCCCC"/>
                       </a:solidFill>
                       <a:prstDash val="solid"/>
                       <a:round/>
@@ -19502,58 +19978,63 @@
                     <a:bodyPr/>
                     <a:lstStyle/>
                     <a:p>
-                      <a:pPr marL="0" indent="0" algn="l">
+                      <a:pPr marL="0" marR="0">
+                        <a:spcAft>
+                          <a:spcPts val="500"/>
+                        </a:spcAft>
                         <a:buNone/>
                       </a:pPr>
                       <a:r>
-                        <a:rPr lang="en-US" sz="1200" dirty="0">
+                        <a:rPr lang="en-US" sz="1200">
                           <a:solidFill>
-                            <a:srgbClr val="1A1A1A"/>
+                            <a:srgbClr val="111111"/>
                           </a:solidFill>
+                          <a:effectLst/>
                           <a:latin typeface="Cambria" panose="02040503050406030204" pitchFamily="18" charset="0"/>
-                          <a:ea typeface="Calibri" pitchFamily="34" charset="-122"/>
-                          <a:cs typeface="Calibri" pitchFamily="34" charset="-120"/>
+                          <a:ea typeface="Arial" panose="020B0604020202020204" pitchFamily="34" charset="0"/>
+                          <a:cs typeface="Arial" panose="020B0604020202020204" pitchFamily="34" charset="0"/>
                         </a:rPr>
-                        <a:t>Rarely — point is ONE.</a:t>
+                        <a:t>Rarely needs extension — the point is ONE.</a:t>
                       </a:r>
-                      <a:endParaRPr lang="en-US" sz="1200" dirty="0">
+                      <a:endParaRPr lang="en-US" sz="1200">
+                        <a:effectLst/>
                         <a:latin typeface="Cambria" panose="02040503050406030204" pitchFamily="18" charset="0"/>
-                        <a:ea typeface="Calibri" charset="0"/>
-                        <a:cs typeface="Calibri" charset="0"/>
+                        <a:ea typeface="Arial" panose="020B0604020202020204" pitchFamily="34" charset="0"/>
+                        <a:cs typeface="Vrinda" panose="020B0502040204020203" pitchFamily="34" charset="0"/>
                       </a:endParaRPr>
                     </a:p>
                   </a:txBody>
-                  <a:tcPr marL="76200" marR="63500" marT="38100" marB="38100">
-                    <a:lnL w="9525" cap="flat" cmpd="sng" algn="ctr">
+                  <a:tcPr marL="57150" marR="50800" marT="44450" marB="44450">
+                    <a:lnL w="12700" cap="flat" cmpd="sng" algn="ctr">
                       <a:solidFill>
-                        <a:srgbClr val="D4D7DF"/>
+                        <a:srgbClr val="CCCCCC"/>
                       </a:solidFill>
                       <a:prstDash val="solid"/>
                       <a:round/>
                       <a:headEnd type="none" w="med" len="med"/>
                       <a:tailEnd type="none" w="med" len="med"/>
                     </a:lnL>
-                    <a:lnR w="9525" cap="flat" cmpd="sng" algn="ctr">
+                    <a:lnR w="12700" cap="flat" cmpd="sng" algn="ctr">
                       <a:solidFill>
-                        <a:srgbClr val="D4D7DF"/>
+                        <a:srgbClr val="CCCCCC"/>
                       </a:solidFill>
                       <a:prstDash val="solid"/>
                       <a:round/>
                       <a:headEnd type="none" w="med" len="med"/>
                       <a:tailEnd type="none" w="med" len="med"/>
                     </a:lnR>
-                    <a:lnT w="9525" cap="flat" cmpd="sng" algn="ctr">
+                    <a:lnT w="12700" cap="flat" cmpd="sng" algn="ctr">
                       <a:solidFill>
-                        <a:srgbClr val="D4D7DF"/>
+                        <a:srgbClr val="CCCCCC"/>
                       </a:solidFill>
                       <a:prstDash val="solid"/>
                       <a:round/>
                       <a:headEnd type="none" w="med" len="med"/>
                       <a:tailEnd type="none" w="med" len="med"/>
                     </a:lnT>
-                    <a:lnB w="9525" cap="flat" cmpd="sng" algn="ctr">
+                    <a:lnB w="12700" cap="flat" cmpd="sng" algn="ctr">
                       <a:solidFill>
-                        <a:srgbClr val="D4D7DF"/>
+                        <a:srgbClr val="CCCCCC"/>
                       </a:solidFill>
                       <a:prstDash val="solid"/>
                       <a:round/>
@@ -19570,58 +20051,63 @@
                     <a:bodyPr/>
                     <a:lstStyle/>
                     <a:p>
-                      <a:pPr marL="0" indent="0" algn="l">
+                      <a:pPr marL="0" marR="0">
+                        <a:spcAft>
+                          <a:spcPts val="500"/>
+                        </a:spcAft>
                         <a:buNone/>
                       </a:pPr>
                       <a:r>
-                        <a:rPr lang="en-US" sz="1200" dirty="0">
+                        <a:rPr lang="en-US" sz="1200">
                           <a:solidFill>
-                            <a:srgbClr val="1A1A1A"/>
+                            <a:srgbClr val="111111"/>
                           </a:solidFill>
+                          <a:effectLst/>
                           <a:latin typeface="Cambria" panose="02040503050406030204" pitchFamily="18" charset="0"/>
-                          <a:ea typeface="Calibri" pitchFamily="34" charset="-122"/>
-                          <a:cs typeface="Calibri" pitchFamily="34" charset="-120"/>
+                          <a:ea typeface="Arial" panose="020B0604020202020204" pitchFamily="34" charset="0"/>
+                          <a:cs typeface="Arial" panose="020B0604020202020204" pitchFamily="34" charset="0"/>
                         </a:rPr>
-                        <a:t>Add a concrete creator.</a:t>
+                        <a:t>Add a new concrete subclass + creator subclass.</a:t>
                       </a:r>
-                      <a:endParaRPr lang="en-US" sz="1200" dirty="0">
+                      <a:endParaRPr lang="en-US" sz="1200">
+                        <a:effectLst/>
                         <a:latin typeface="Cambria" panose="02040503050406030204" pitchFamily="18" charset="0"/>
-                        <a:ea typeface="Calibri" charset="0"/>
-                        <a:cs typeface="Calibri" charset="0"/>
+                        <a:ea typeface="Arial" panose="020B0604020202020204" pitchFamily="34" charset="0"/>
+                        <a:cs typeface="Vrinda" panose="020B0502040204020203" pitchFamily="34" charset="0"/>
                       </a:endParaRPr>
                     </a:p>
                   </a:txBody>
-                  <a:tcPr marL="76200" marR="63500" marT="38100" marB="38100">
-                    <a:lnL w="9525" cap="flat" cmpd="sng" algn="ctr">
+                  <a:tcPr marL="57150" marR="50800" marT="44450" marB="44450">
+                    <a:lnL w="12700" cap="flat" cmpd="sng" algn="ctr">
                       <a:solidFill>
-                        <a:srgbClr val="D4D7DF"/>
+                        <a:srgbClr val="CCCCCC"/>
                       </a:solidFill>
                       <a:prstDash val="solid"/>
                       <a:round/>
                       <a:headEnd type="none" w="med" len="med"/>
                       <a:tailEnd type="none" w="med" len="med"/>
                     </a:lnL>
-                    <a:lnR w="9525" cap="flat" cmpd="sng" algn="ctr">
+                    <a:lnR w="12700" cap="flat" cmpd="sng" algn="ctr">
                       <a:solidFill>
-                        <a:srgbClr val="D4D7DF"/>
+                        <a:srgbClr val="CCCCCC"/>
                       </a:solidFill>
                       <a:prstDash val="solid"/>
                       <a:round/>
                       <a:headEnd type="none" w="med" len="med"/>
                       <a:tailEnd type="none" w="med" len="med"/>
                     </a:lnR>
-                    <a:lnT w="9525" cap="flat" cmpd="sng" algn="ctr">
+                    <a:lnT w="12700" cap="flat" cmpd="sng" algn="ctr">
                       <a:solidFill>
-                        <a:srgbClr val="D4D7DF"/>
+                        <a:srgbClr val="CCCCCC"/>
                       </a:solidFill>
                       <a:prstDash val="solid"/>
                       <a:round/>
                       <a:headEnd type="none" w="med" len="med"/>
                       <a:tailEnd type="none" w="med" len="med"/>
                     </a:lnT>
-                    <a:lnB w="9525" cap="flat" cmpd="sng" algn="ctr">
+                    <a:lnB w="12700" cap="flat" cmpd="sng" algn="ctr">
                       <a:solidFill>
-                        <a:srgbClr val="D4D7DF"/>
+                        <a:srgbClr val="CCCCCC"/>
                       </a:solidFill>
                       <a:prstDash val="solid"/>
                       <a:round/>
@@ -19638,58 +20124,63 @@
                     <a:bodyPr/>
                     <a:lstStyle/>
                     <a:p>
-                      <a:pPr marL="0" indent="0" algn="l">
+                      <a:pPr marL="0" marR="0">
+                        <a:spcAft>
+                          <a:spcPts val="500"/>
+                        </a:spcAft>
                         <a:buNone/>
                       </a:pPr>
                       <a:r>
                         <a:rPr lang="en-US" sz="1200" dirty="0">
                           <a:solidFill>
-                            <a:srgbClr val="1A1A1A"/>
+                            <a:srgbClr val="111111"/>
                           </a:solidFill>
+                          <a:effectLst/>
                           <a:latin typeface="Cambria" panose="02040503050406030204" pitchFamily="18" charset="0"/>
-                          <a:ea typeface="Calibri" pitchFamily="34" charset="-122"/>
-                          <a:cs typeface="Calibri" pitchFamily="34" charset="-120"/>
+                          <a:ea typeface="Arial" panose="020B0604020202020204" pitchFamily="34" charset="0"/>
+                          <a:cs typeface="Arial" panose="020B0604020202020204" pitchFamily="34" charset="0"/>
                         </a:rPr>
-                        <a:t>Add a concrete factory.</a:t>
+                        <a:t>Add a new concrete factory class for the new family.</a:t>
                       </a:r>
                       <a:endParaRPr lang="en-US" sz="1200" dirty="0">
+                        <a:effectLst/>
                         <a:latin typeface="Cambria" panose="02040503050406030204" pitchFamily="18" charset="0"/>
-                        <a:ea typeface="Calibri" charset="0"/>
-                        <a:cs typeface="Calibri" charset="0"/>
+                        <a:ea typeface="Arial" panose="020B0604020202020204" pitchFamily="34" charset="0"/>
+                        <a:cs typeface="Vrinda" panose="020B0502040204020203" pitchFamily="34" charset="0"/>
                       </a:endParaRPr>
                     </a:p>
                   </a:txBody>
-                  <a:tcPr marL="76200" marR="63500" marT="38100" marB="38100">
-                    <a:lnL w="9525" cap="flat" cmpd="sng" algn="ctr">
+                  <a:tcPr marL="57150" marR="50800" marT="44450" marB="44450">
+                    <a:lnL w="12700" cap="flat" cmpd="sng" algn="ctr">
                       <a:solidFill>
-                        <a:srgbClr val="D4D7DF"/>
+                        <a:srgbClr val="CCCCCC"/>
                       </a:solidFill>
                       <a:prstDash val="solid"/>
                       <a:round/>
                       <a:headEnd type="none" w="med" len="med"/>
                       <a:tailEnd type="none" w="med" len="med"/>
                     </a:lnL>
-                    <a:lnR w="9525" cap="flat" cmpd="sng" algn="ctr">
+                    <a:lnR w="12700" cap="flat" cmpd="sng" algn="ctr">
                       <a:solidFill>
-                        <a:srgbClr val="D4D7DF"/>
+                        <a:srgbClr val="CCCCCC"/>
                       </a:solidFill>
                       <a:prstDash val="solid"/>
                       <a:round/>
                       <a:headEnd type="none" w="med" len="med"/>
                       <a:tailEnd type="none" w="med" len="med"/>
                     </a:lnR>
-                    <a:lnT w="9525" cap="flat" cmpd="sng" algn="ctr">
+                    <a:lnT w="12700" cap="flat" cmpd="sng" algn="ctr">
                       <a:solidFill>
-                        <a:srgbClr val="D4D7DF"/>
+                        <a:srgbClr val="CCCCCC"/>
                       </a:solidFill>
                       <a:prstDash val="solid"/>
                       <a:round/>
                       <a:headEnd type="none" w="med" len="med"/>
                       <a:tailEnd type="none" w="med" len="med"/>
                     </a:lnT>
-                    <a:lnB w="9525" cap="flat" cmpd="sng" algn="ctr">
+                    <a:lnB w="12700" cap="flat" cmpd="sng" algn="ctr">
                       <a:solidFill>
-                        <a:srgbClr val="D4D7DF"/>
+                        <a:srgbClr val="CCCCCC"/>
                       </a:solidFill>
                       <a:prstDash val="solid"/>
                       <a:round/>
@@ -19706,58 +20197,63 @@
                     <a:bodyPr/>
                     <a:lstStyle/>
                     <a:p>
-                      <a:pPr marL="0" indent="0" algn="l">
+                      <a:pPr marL="0" marR="0">
+                        <a:spcAft>
+                          <a:spcPts val="500"/>
+                        </a:spcAft>
                         <a:buNone/>
                       </a:pPr>
                       <a:r>
-                        <a:rPr lang="en-US" sz="1200" dirty="0">
+                        <a:rPr lang="en-US" sz="1200">
                           <a:solidFill>
-                            <a:srgbClr val="1A1A1A"/>
+                            <a:srgbClr val="111111"/>
                           </a:solidFill>
+                          <a:effectLst/>
                           <a:latin typeface="Cambria" panose="02040503050406030204" pitchFamily="18" charset="0"/>
-                          <a:ea typeface="Calibri" pitchFamily="34" charset="-122"/>
-                          <a:cs typeface="Calibri" pitchFamily="34" charset="-120"/>
+                          <a:ea typeface="Arial" panose="020B0604020202020204" pitchFamily="34" charset="0"/>
+                          <a:cs typeface="Arial" panose="020B0604020202020204" pitchFamily="34" charset="0"/>
                         </a:rPr>
-                        <a:t>Add a setter + field.</a:t>
+                        <a:t>Add a new setter method and private field.</a:t>
                       </a:r>
-                      <a:endParaRPr lang="en-US" sz="1200" dirty="0">
+                      <a:endParaRPr lang="en-US" sz="1200">
+                        <a:effectLst/>
                         <a:latin typeface="Cambria" panose="02040503050406030204" pitchFamily="18" charset="0"/>
-                        <a:ea typeface="Calibri" charset="0"/>
-                        <a:cs typeface="Calibri" charset="0"/>
+                        <a:ea typeface="Arial" panose="020B0604020202020204" pitchFamily="34" charset="0"/>
+                        <a:cs typeface="Vrinda" panose="020B0502040204020203" pitchFamily="34" charset="0"/>
                       </a:endParaRPr>
                     </a:p>
                   </a:txBody>
-                  <a:tcPr marL="76200" marR="63500" marT="38100" marB="38100">
-                    <a:lnL w="9525" cap="flat" cmpd="sng" algn="ctr">
+                  <a:tcPr marL="57150" marR="50800" marT="44450" marB="44450">
+                    <a:lnL w="12700" cap="flat" cmpd="sng" algn="ctr">
                       <a:solidFill>
-                        <a:srgbClr val="D4D7DF"/>
+                        <a:srgbClr val="CCCCCC"/>
                       </a:solidFill>
                       <a:prstDash val="solid"/>
                       <a:round/>
                       <a:headEnd type="none" w="med" len="med"/>
                       <a:tailEnd type="none" w="med" len="med"/>
                     </a:lnL>
-                    <a:lnR w="9525" cap="flat" cmpd="sng" algn="ctr">
+                    <a:lnR w="12700" cap="flat" cmpd="sng" algn="ctr">
                       <a:solidFill>
-                        <a:srgbClr val="D4D7DF"/>
+                        <a:srgbClr val="CCCCCC"/>
                       </a:solidFill>
                       <a:prstDash val="solid"/>
                       <a:round/>
                       <a:headEnd type="none" w="med" len="med"/>
                       <a:tailEnd type="none" w="med" len="med"/>
                     </a:lnR>
-                    <a:lnT w="9525" cap="flat" cmpd="sng" algn="ctr">
+                    <a:lnT w="12700" cap="flat" cmpd="sng" algn="ctr">
                       <a:solidFill>
-                        <a:srgbClr val="D4D7DF"/>
+                        <a:srgbClr val="CCCCCC"/>
                       </a:solidFill>
                       <a:prstDash val="solid"/>
                       <a:round/>
                       <a:headEnd type="none" w="med" len="med"/>
                       <a:tailEnd type="none" w="med" len="med"/>
                     </a:lnT>
-                    <a:lnB w="9525" cap="flat" cmpd="sng" algn="ctr">
+                    <a:lnB w="12700" cap="flat" cmpd="sng" algn="ctr">
                       <a:solidFill>
-                        <a:srgbClr val="D4D7DF"/>
+                        <a:srgbClr val="CCCCCC"/>
                       </a:solidFill>
                       <a:prstDash val="solid"/>
                       <a:round/>
@@ -19771,68 +20267,73 @@
                 </a:tc>
                 <a:extLst>
                   <a:ext uri="{0D108BD9-81ED-4DB2-BD59-A6C34878D82A}">
-                    <a16:rowId xmlns:a16="http://schemas.microsoft.com/office/drawing/2014/main" val="10003"/>
+                    <a16:rowId xmlns:a16="http://schemas.microsoft.com/office/drawing/2014/main" val="216708969"/>
                   </a:ext>
                 </a:extLst>
               </a:tr>
-              <a:tr h="0">
+              <a:tr h="618635">
                 <a:tc>
                   <a:txBody>
                     <a:bodyPr/>
                     <a:lstStyle/>
                     <a:p>
-                      <a:pPr marL="0" indent="0" algn="l">
+                      <a:pPr marL="0" marR="0">
+                        <a:spcAft>
+                          <a:spcPts val="500"/>
+                        </a:spcAft>
                         <a:buNone/>
                       </a:pPr>
                       <a:r>
-                        <a:rPr lang="en-US" sz="1200" b="1" dirty="0">
+                        <a:rPr lang="en-US" sz="1200" b="1">
                           <a:solidFill>
-                            <a:srgbClr val="1A1A1A"/>
+                            <a:srgbClr val="111111"/>
                           </a:solidFill>
+                          <a:effectLst/>
                           <a:latin typeface="Cambria" panose="02040503050406030204" pitchFamily="18" charset="0"/>
-                          <a:ea typeface="Calibri" pitchFamily="34" charset="-122"/>
-                          <a:cs typeface="Calibri" pitchFamily="34" charset="-120"/>
+                          <a:ea typeface="Arial" panose="020B0604020202020204" pitchFamily="34" charset="0"/>
+                          <a:cs typeface="Arial" panose="020B0604020202020204" pitchFamily="34" charset="0"/>
                         </a:rPr>
-                        <a:t>UniRide use</a:t>
+                        <a:t>OCP compliance</a:t>
                       </a:r>
-                      <a:endParaRPr lang="en-US" sz="1200" dirty="0">
+                      <a:endParaRPr lang="en-US" sz="1200">
+                        <a:effectLst/>
                         <a:latin typeface="Cambria" panose="02040503050406030204" pitchFamily="18" charset="0"/>
-                        <a:ea typeface="Calibri" charset="0"/>
-                        <a:cs typeface="Calibri" charset="0"/>
+                        <a:ea typeface="Arial" panose="020B0604020202020204" pitchFamily="34" charset="0"/>
+                        <a:cs typeface="Vrinda" panose="020B0502040204020203" pitchFamily="34" charset="0"/>
                       </a:endParaRPr>
                     </a:p>
                   </a:txBody>
-                  <a:tcPr marL="76200" marR="63500" marT="38100" marB="38100">
-                    <a:lnL w="9525" cap="flat" cmpd="sng" algn="ctr">
+                  <a:tcPr marL="57150" marR="50800" marT="44450" marB="44450">
+                    <a:lnL w="12700" cap="flat" cmpd="sng" algn="ctr">
                       <a:solidFill>
-                        <a:srgbClr val="D4D7DF"/>
+                        <a:srgbClr val="CCCCCC"/>
                       </a:solidFill>
                       <a:prstDash val="solid"/>
                       <a:round/>
                       <a:headEnd type="none" w="med" len="med"/>
                       <a:tailEnd type="none" w="med" len="med"/>
                     </a:lnL>
-                    <a:lnR w="9525" cap="flat" cmpd="sng" algn="ctr">
+                    <a:lnR w="12700" cap="flat" cmpd="sng" algn="ctr">
                       <a:solidFill>
-                        <a:srgbClr val="D4D7DF"/>
+                        <a:srgbClr val="CCCCCC"/>
                       </a:solidFill>
                       <a:prstDash val="solid"/>
                       <a:round/>
                       <a:headEnd type="none" w="med" len="med"/>
                       <a:tailEnd type="none" w="med" len="med"/>
                     </a:lnR>
-                    <a:lnT w="9525" cap="flat" cmpd="sng" algn="ctr">
+                    <a:lnT w="12700" cap="flat" cmpd="sng" algn="ctr">
                       <a:solidFill>
-                        <a:srgbClr val="D4D7DF"/>
+                        <a:srgbClr val="CCCCCC"/>
                       </a:solidFill>
                       <a:prstDash val="solid"/>
                       <a:round/>
                       <a:headEnd type="none" w="med" len="med"/>
                       <a:tailEnd type="none" w="med" len="med"/>
                     </a:lnT>
-                    <a:lnB w="9525" cap="flat" cmpd="sng" algn="ctr">
+                    <a:lnB w="12700" cap="flat" cmpd="sng" algn="ctr">
                       <a:solidFill>
-                        <a:srgbClr val="D4D7DF"/>
+                        <a:srgbClr val="CCCCCC"/>
                       </a:solidFill>
                       <a:prstDash val="solid"/>
                       <a:round/>
@@ -19840,7 +20341,7 @@
                       <a:tailEnd type="none" w="med" len="med"/>
                     </a:lnB>
                     <a:solidFill>
-                      <a:srgbClr val="EDF2FA"/>
+                      <a:srgbClr val="EBF4FF"/>
                     </a:solidFill>
                   </a:tcPr>
                 </a:tc>
@@ -19849,58 +20350,63 @@
                     <a:bodyPr/>
                     <a:lstStyle/>
                     <a:p>
-                      <a:pPr marL="0" indent="0" algn="l">
+                      <a:pPr marL="0" marR="0">
+                        <a:spcAft>
+                          <a:spcPts val="500"/>
+                        </a:spcAft>
                         <a:buNone/>
                       </a:pPr>
                       <a:r>
-                        <a:rPr lang="en-US" sz="1200" dirty="0">
+                        <a:rPr lang="en-US" sz="1200">
                           <a:solidFill>
-                            <a:srgbClr val="1A1A1A"/>
+                            <a:srgbClr val="111111"/>
                           </a:solidFill>
+                          <a:effectLst/>
                           <a:latin typeface="Cambria" panose="02040503050406030204" pitchFamily="18" charset="0"/>
-                          <a:ea typeface="Calibri" pitchFamily="34" charset="-122"/>
-                          <a:cs typeface="Calibri" pitchFamily="34" charset="-120"/>
+                          <a:ea typeface="Arial" panose="020B0604020202020204" pitchFamily="34" charset="0"/>
+                          <a:cs typeface="Arial" panose="020B0604020202020204" pitchFamily="34" charset="0"/>
                         </a:rPr>
-                        <a:t>DB connection pool.</a:t>
+                        <a:t>Not directly — the singleton IS the extension.</a:t>
                       </a:r>
-                      <a:endParaRPr lang="en-US" sz="1200" dirty="0">
+                      <a:endParaRPr lang="en-US" sz="1200">
+                        <a:effectLst/>
                         <a:latin typeface="Cambria" panose="02040503050406030204" pitchFamily="18" charset="0"/>
-                        <a:ea typeface="Calibri" charset="0"/>
-                        <a:cs typeface="Calibri" charset="0"/>
+                        <a:ea typeface="Arial" panose="020B0604020202020204" pitchFamily="34" charset="0"/>
+                        <a:cs typeface="Vrinda" panose="020B0502040204020203" pitchFamily="34" charset="0"/>
                       </a:endParaRPr>
                     </a:p>
                   </a:txBody>
-                  <a:tcPr marL="76200" marR="63500" marT="38100" marB="38100">
-                    <a:lnL w="9525" cap="flat" cmpd="sng" algn="ctr">
+                  <a:tcPr marL="57150" marR="50800" marT="44450" marB="44450">
+                    <a:lnL w="12700" cap="flat" cmpd="sng" algn="ctr">
                       <a:solidFill>
-                        <a:srgbClr val="D4D7DF"/>
+                        <a:srgbClr val="CCCCCC"/>
                       </a:solidFill>
                       <a:prstDash val="solid"/>
                       <a:round/>
                       <a:headEnd type="none" w="med" len="med"/>
                       <a:tailEnd type="none" w="med" len="med"/>
                     </a:lnL>
-                    <a:lnR w="9525" cap="flat" cmpd="sng" algn="ctr">
+                    <a:lnR w="12700" cap="flat" cmpd="sng" algn="ctr">
                       <a:solidFill>
-                        <a:srgbClr val="D4D7DF"/>
+                        <a:srgbClr val="CCCCCC"/>
                       </a:solidFill>
                       <a:prstDash val="solid"/>
                       <a:round/>
                       <a:headEnd type="none" w="med" len="med"/>
                       <a:tailEnd type="none" w="med" len="med"/>
                     </a:lnR>
-                    <a:lnT w="9525" cap="flat" cmpd="sng" algn="ctr">
+                    <a:lnT w="12700" cap="flat" cmpd="sng" algn="ctr">
                       <a:solidFill>
-                        <a:srgbClr val="D4D7DF"/>
+                        <a:srgbClr val="CCCCCC"/>
                       </a:solidFill>
                       <a:prstDash val="solid"/>
                       <a:round/>
                       <a:headEnd type="none" w="med" len="med"/>
                       <a:tailEnd type="none" w="med" len="med"/>
                     </a:lnT>
-                    <a:lnB w="9525" cap="flat" cmpd="sng" algn="ctr">
+                    <a:lnB w="12700" cap="flat" cmpd="sng" algn="ctr">
                       <a:solidFill>
-                        <a:srgbClr val="D4D7DF"/>
+                        <a:srgbClr val="CCCCCC"/>
                       </a:solidFill>
                       <a:prstDash val="solid"/>
                       <a:round/>
@@ -19908,7 +20414,7 @@
                       <a:tailEnd type="none" w="med" len="med"/>
                     </a:lnB>
                     <a:solidFill>
-                      <a:srgbClr val="EDF2FA"/>
+                      <a:srgbClr val="F0F7FF"/>
                     </a:solidFill>
                   </a:tcPr>
                 </a:tc>
@@ -19917,58 +20423,63 @@
                     <a:bodyPr/>
                     <a:lstStyle/>
                     <a:p>
-                      <a:pPr marL="0" indent="0" algn="l">
+                      <a:pPr marL="0" marR="0">
+                        <a:spcAft>
+                          <a:spcPts val="500"/>
+                        </a:spcAft>
                         <a:buNone/>
                       </a:pPr>
                       <a:r>
-                        <a:rPr lang="en-US" sz="1200" dirty="0">
+                        <a:rPr lang="en-US" sz="1200">
                           <a:solidFill>
-                            <a:srgbClr val="1A1A1A"/>
+                            <a:srgbClr val="111111"/>
                           </a:solidFill>
+                          <a:effectLst/>
                           <a:latin typeface="Cambria" panose="02040503050406030204" pitchFamily="18" charset="0"/>
-                          <a:ea typeface="Calibri" pitchFamily="34" charset="-122"/>
-                          <a:cs typeface="Calibri" pitchFamily="34" charset="-120"/>
+                          <a:ea typeface="Arial" panose="020B0604020202020204" pitchFamily="34" charset="0"/>
+                          <a:cs typeface="Arial" panose="020B0604020202020204" pitchFamily="34" charset="0"/>
                         </a:rPr>
-                        <a:t>Notification channels.</a:t>
+                        <a:t>High — new product = new file, zero old file changes.</a:t>
                       </a:r>
-                      <a:endParaRPr lang="en-US" sz="1200" dirty="0">
+                      <a:endParaRPr lang="en-US" sz="1200">
+                        <a:effectLst/>
                         <a:latin typeface="Cambria" panose="02040503050406030204" pitchFamily="18" charset="0"/>
-                        <a:ea typeface="Calibri" charset="0"/>
-                        <a:cs typeface="Calibri" charset="0"/>
+                        <a:ea typeface="Arial" panose="020B0604020202020204" pitchFamily="34" charset="0"/>
+                        <a:cs typeface="Vrinda" panose="020B0502040204020203" pitchFamily="34" charset="0"/>
                       </a:endParaRPr>
                     </a:p>
                   </a:txBody>
-                  <a:tcPr marL="76200" marR="63500" marT="38100" marB="38100">
-                    <a:lnL w="9525" cap="flat" cmpd="sng" algn="ctr">
+                  <a:tcPr marL="57150" marR="50800" marT="44450" marB="44450">
+                    <a:lnL w="12700" cap="flat" cmpd="sng" algn="ctr">
                       <a:solidFill>
-                        <a:srgbClr val="D4D7DF"/>
+                        <a:srgbClr val="CCCCCC"/>
                       </a:solidFill>
                       <a:prstDash val="solid"/>
                       <a:round/>
                       <a:headEnd type="none" w="med" len="med"/>
                       <a:tailEnd type="none" w="med" len="med"/>
                     </a:lnL>
-                    <a:lnR w="9525" cap="flat" cmpd="sng" algn="ctr">
+                    <a:lnR w="12700" cap="flat" cmpd="sng" algn="ctr">
                       <a:solidFill>
-                        <a:srgbClr val="D4D7DF"/>
+                        <a:srgbClr val="CCCCCC"/>
                       </a:solidFill>
                       <a:prstDash val="solid"/>
                       <a:round/>
                       <a:headEnd type="none" w="med" len="med"/>
                       <a:tailEnd type="none" w="med" len="med"/>
                     </a:lnR>
-                    <a:lnT w="9525" cap="flat" cmpd="sng" algn="ctr">
+                    <a:lnT w="12700" cap="flat" cmpd="sng" algn="ctr">
                       <a:solidFill>
-                        <a:srgbClr val="D4D7DF"/>
+                        <a:srgbClr val="CCCCCC"/>
                       </a:solidFill>
                       <a:prstDash val="solid"/>
                       <a:round/>
                       <a:headEnd type="none" w="med" len="med"/>
                       <a:tailEnd type="none" w="med" len="med"/>
                     </a:lnT>
-                    <a:lnB w="9525" cap="flat" cmpd="sng" algn="ctr">
+                    <a:lnB w="12700" cap="flat" cmpd="sng" algn="ctr">
                       <a:solidFill>
-                        <a:srgbClr val="D4D7DF"/>
+                        <a:srgbClr val="CCCCCC"/>
                       </a:solidFill>
                       <a:prstDash val="solid"/>
                       <a:round/>
@@ -19976,7 +20487,7 @@
                       <a:tailEnd type="none" w="med" len="med"/>
                     </a:lnB>
                     <a:solidFill>
-                      <a:srgbClr val="EDF2FA"/>
+                      <a:srgbClr val="F0FFF0"/>
                     </a:solidFill>
                   </a:tcPr>
                 </a:tc>
@@ -19985,58 +20496,63 @@
                     <a:bodyPr/>
                     <a:lstStyle/>
                     <a:p>
-                      <a:pPr marL="0" indent="0" algn="l">
+                      <a:pPr marL="0" marR="0">
+                        <a:spcAft>
+                          <a:spcPts val="500"/>
+                        </a:spcAft>
                         <a:buNone/>
                       </a:pPr>
                       <a:r>
-                        <a:rPr lang="en-US" sz="1200" dirty="0">
+                        <a:rPr lang="en-US" sz="1200">
                           <a:solidFill>
-                            <a:srgbClr val="1A1A1A"/>
+                            <a:srgbClr val="111111"/>
                           </a:solidFill>
+                          <a:effectLst/>
                           <a:latin typeface="Cambria" panose="02040503050406030204" pitchFamily="18" charset="0"/>
-                          <a:ea typeface="Calibri" pitchFamily="34" charset="-122"/>
-                          <a:cs typeface="Calibri" pitchFamily="34" charset="-120"/>
+                          <a:ea typeface="Arial" panose="020B0604020202020204" pitchFamily="34" charset="0"/>
+                          <a:cs typeface="Arial" panose="020B0604020202020204" pitchFamily="34" charset="0"/>
                         </a:rPr>
-                        <a:t>Matching strategies.</a:t>
+                        <a:t>High — new family = new factory, zero consumer changes.</a:t>
                       </a:r>
-                      <a:endParaRPr lang="en-US" sz="1200" dirty="0">
+                      <a:endParaRPr lang="en-US" sz="1200">
+                        <a:effectLst/>
                         <a:latin typeface="Cambria" panose="02040503050406030204" pitchFamily="18" charset="0"/>
-                        <a:ea typeface="Calibri" charset="0"/>
-                        <a:cs typeface="Calibri" charset="0"/>
+                        <a:ea typeface="Arial" panose="020B0604020202020204" pitchFamily="34" charset="0"/>
+                        <a:cs typeface="Vrinda" panose="020B0502040204020203" pitchFamily="34" charset="0"/>
                       </a:endParaRPr>
                     </a:p>
                   </a:txBody>
-                  <a:tcPr marL="76200" marR="63500" marT="38100" marB="38100">
-                    <a:lnL w="9525" cap="flat" cmpd="sng" algn="ctr">
+                  <a:tcPr marL="57150" marR="50800" marT="44450" marB="44450">
+                    <a:lnL w="12700" cap="flat" cmpd="sng" algn="ctr">
                       <a:solidFill>
-                        <a:srgbClr val="D4D7DF"/>
+                        <a:srgbClr val="CCCCCC"/>
                       </a:solidFill>
                       <a:prstDash val="solid"/>
                       <a:round/>
                       <a:headEnd type="none" w="med" len="med"/>
                       <a:tailEnd type="none" w="med" len="med"/>
                     </a:lnL>
-                    <a:lnR w="9525" cap="flat" cmpd="sng" algn="ctr">
+                    <a:lnR w="12700" cap="flat" cmpd="sng" algn="ctr">
                       <a:solidFill>
-                        <a:srgbClr val="D4D7DF"/>
+                        <a:srgbClr val="CCCCCC"/>
                       </a:solidFill>
                       <a:prstDash val="solid"/>
                       <a:round/>
                       <a:headEnd type="none" w="med" len="med"/>
                       <a:tailEnd type="none" w="med" len="med"/>
                     </a:lnR>
-                    <a:lnT w="9525" cap="flat" cmpd="sng" algn="ctr">
+                    <a:lnT w="12700" cap="flat" cmpd="sng" algn="ctr">
                       <a:solidFill>
-                        <a:srgbClr val="D4D7DF"/>
+                        <a:srgbClr val="CCCCCC"/>
                       </a:solidFill>
                       <a:prstDash val="solid"/>
                       <a:round/>
                       <a:headEnd type="none" w="med" len="med"/>
                       <a:tailEnd type="none" w="med" len="med"/>
                     </a:lnT>
-                    <a:lnB w="9525" cap="flat" cmpd="sng" algn="ctr">
+                    <a:lnB w="12700" cap="flat" cmpd="sng" algn="ctr">
                       <a:solidFill>
-                        <a:srgbClr val="D4D7DF"/>
+                        <a:srgbClr val="CCCCCC"/>
                       </a:solidFill>
                       <a:prstDash val="solid"/>
                       <a:round/>
@@ -20044,7 +20560,7 @@
                       <a:tailEnd type="none" w="med" len="med"/>
                     </a:lnB>
                     <a:solidFill>
-                      <a:srgbClr val="EDF2FA"/>
+                      <a:srgbClr val="FFF8E1"/>
                     </a:solidFill>
                   </a:tcPr>
                 </a:tc>
@@ -20053,58 +20569,63 @@
                     <a:bodyPr/>
                     <a:lstStyle/>
                     <a:p>
-                      <a:pPr marL="0" indent="0" algn="l">
+                      <a:pPr marL="0" marR="0">
+                        <a:spcAft>
+                          <a:spcPts val="500"/>
+                        </a:spcAft>
                         <a:buNone/>
                       </a:pPr>
                       <a:r>
-                        <a:rPr lang="en-US" sz="1200" dirty="0">
+                        <a:rPr lang="en-US" sz="1200">
                           <a:solidFill>
-                            <a:srgbClr val="1A1A1A"/>
+                            <a:srgbClr val="111111"/>
                           </a:solidFill>
+                          <a:effectLst/>
                           <a:latin typeface="Cambria" panose="02040503050406030204" pitchFamily="18" charset="0"/>
-                          <a:ea typeface="Calibri" pitchFamily="34" charset="-122"/>
-                          <a:cs typeface="Calibri" pitchFamily="34" charset="-120"/>
+                          <a:ea typeface="Arial" panose="020B0604020202020204" pitchFamily="34" charset="0"/>
+                          <a:cs typeface="Arial" panose="020B0604020202020204" pitchFamily="34" charset="0"/>
                         </a:rPr>
-                        <a:t>RideRequest construction.</a:t>
+                        <a:t>High — new option = new setter, zero callers break.</a:t>
                       </a:r>
-                      <a:endParaRPr lang="en-US" sz="1200" dirty="0">
+                      <a:endParaRPr lang="en-US" sz="1200">
+                        <a:effectLst/>
                         <a:latin typeface="Cambria" panose="02040503050406030204" pitchFamily="18" charset="0"/>
-                        <a:ea typeface="Calibri" charset="0"/>
-                        <a:cs typeface="Calibri" charset="0"/>
+                        <a:ea typeface="Arial" panose="020B0604020202020204" pitchFamily="34" charset="0"/>
+                        <a:cs typeface="Vrinda" panose="020B0502040204020203" pitchFamily="34" charset="0"/>
                       </a:endParaRPr>
                     </a:p>
                   </a:txBody>
-                  <a:tcPr marL="76200" marR="63500" marT="38100" marB="38100">
-                    <a:lnL w="9525" cap="flat" cmpd="sng" algn="ctr">
+                  <a:tcPr marL="57150" marR="50800" marT="44450" marB="44450">
+                    <a:lnL w="12700" cap="flat" cmpd="sng" algn="ctr">
                       <a:solidFill>
-                        <a:srgbClr val="D4D7DF"/>
+                        <a:srgbClr val="CCCCCC"/>
                       </a:solidFill>
                       <a:prstDash val="solid"/>
                       <a:round/>
                       <a:headEnd type="none" w="med" len="med"/>
                       <a:tailEnd type="none" w="med" len="med"/>
                     </a:lnL>
-                    <a:lnR w="9525" cap="flat" cmpd="sng" algn="ctr">
+                    <a:lnR w="12700" cap="flat" cmpd="sng" algn="ctr">
                       <a:solidFill>
-                        <a:srgbClr val="D4D7DF"/>
+                        <a:srgbClr val="CCCCCC"/>
                       </a:solidFill>
                       <a:prstDash val="solid"/>
                       <a:round/>
                       <a:headEnd type="none" w="med" len="med"/>
                       <a:tailEnd type="none" w="med" len="med"/>
                     </a:lnR>
-                    <a:lnT w="9525" cap="flat" cmpd="sng" algn="ctr">
+                    <a:lnT w="12700" cap="flat" cmpd="sng" algn="ctr">
                       <a:solidFill>
-                        <a:srgbClr val="D4D7DF"/>
+                        <a:srgbClr val="CCCCCC"/>
                       </a:solidFill>
                       <a:prstDash val="solid"/>
                       <a:round/>
                       <a:headEnd type="none" w="med" len="med"/>
                       <a:tailEnd type="none" w="med" len="med"/>
                     </a:lnT>
-                    <a:lnB w="9525" cap="flat" cmpd="sng" algn="ctr">
+                    <a:lnB w="12700" cap="flat" cmpd="sng" algn="ctr">
                       <a:solidFill>
-                        <a:srgbClr val="D4D7DF"/>
+                        <a:srgbClr val="CCCCCC"/>
                       </a:solidFill>
                       <a:prstDash val="solid"/>
                       <a:round/>
@@ -20112,74 +20633,79 @@
                       <a:tailEnd type="none" w="med" len="med"/>
                     </a:lnB>
                     <a:solidFill>
-                      <a:srgbClr val="EDF2FA"/>
+                      <a:srgbClr val="FFF0FF"/>
                     </a:solidFill>
                   </a:tcPr>
                 </a:tc>
                 <a:extLst>
                   <a:ext uri="{0D108BD9-81ED-4DB2-BD59-A6C34878D82A}">
-                    <a16:rowId xmlns:a16="http://schemas.microsoft.com/office/drawing/2014/main" val="10004"/>
+                    <a16:rowId xmlns:a16="http://schemas.microsoft.com/office/drawing/2014/main" val="3728696224"/>
                   </a:ext>
                 </a:extLst>
               </a:tr>
-              <a:tr h="0">
+              <a:tr h="789811">
                 <a:tc>
                   <a:txBody>
                     <a:bodyPr/>
                     <a:lstStyle/>
                     <a:p>
-                      <a:pPr marL="0" indent="0" algn="l">
+                      <a:pPr marL="0" marR="0">
+                        <a:spcAft>
+                          <a:spcPts val="500"/>
+                        </a:spcAft>
                         <a:buNone/>
                       </a:pPr>
                       <a:r>
-                        <a:rPr lang="en-US" sz="1200" b="1" dirty="0">
+                        <a:rPr lang="en-US" sz="1200" b="1">
                           <a:solidFill>
-                            <a:srgbClr val="1A1A1A"/>
+                            <a:srgbClr val="111111"/>
                           </a:solidFill>
+                          <a:effectLst/>
                           <a:latin typeface="Cambria" panose="02040503050406030204" pitchFamily="18" charset="0"/>
-                          <a:ea typeface="Calibri" pitchFamily="34" charset="-122"/>
-                          <a:cs typeface="Calibri" pitchFamily="34" charset="-120"/>
+                          <a:ea typeface="Arial" panose="020B0604020202020204" pitchFamily="34" charset="0"/>
+                          <a:cs typeface="Arial" panose="020B0604020202020204" pitchFamily="34" charset="0"/>
                         </a:rPr>
-                        <a:t>Anti-pattern</a:t>
+                        <a:t>UniRide use</a:t>
                       </a:r>
-                      <a:endParaRPr lang="en-US" sz="1200" dirty="0">
+                      <a:endParaRPr lang="en-US" sz="1200">
+                        <a:effectLst/>
                         <a:latin typeface="Cambria" panose="02040503050406030204" pitchFamily="18" charset="0"/>
-                        <a:ea typeface="Calibri" charset="0"/>
-                        <a:cs typeface="Calibri" charset="0"/>
+                        <a:ea typeface="Arial" panose="020B0604020202020204" pitchFamily="34" charset="0"/>
+                        <a:cs typeface="Vrinda" panose="020B0502040204020203" pitchFamily="34" charset="0"/>
                       </a:endParaRPr>
                     </a:p>
                   </a:txBody>
-                  <a:tcPr marL="76200" marR="63500" marT="38100" marB="38100">
-                    <a:lnL w="9525" cap="flat" cmpd="sng" algn="ctr">
+                  <a:tcPr marL="57150" marR="50800" marT="44450" marB="44450">
+                    <a:lnL w="12700" cap="flat" cmpd="sng" algn="ctr">
                       <a:solidFill>
-                        <a:srgbClr val="D4D7DF"/>
+                        <a:srgbClr val="CCCCCC"/>
                       </a:solidFill>
                       <a:prstDash val="solid"/>
                       <a:round/>
                       <a:headEnd type="none" w="med" len="med"/>
                       <a:tailEnd type="none" w="med" len="med"/>
                     </a:lnL>
-                    <a:lnR w="9525" cap="flat" cmpd="sng" algn="ctr">
+                    <a:lnR w="12700" cap="flat" cmpd="sng" algn="ctr">
                       <a:solidFill>
-                        <a:srgbClr val="D4D7DF"/>
+                        <a:srgbClr val="CCCCCC"/>
                       </a:solidFill>
                       <a:prstDash val="solid"/>
                       <a:round/>
                       <a:headEnd type="none" w="med" len="med"/>
                       <a:tailEnd type="none" w="med" len="med"/>
                     </a:lnR>
-                    <a:lnT w="9525" cap="flat" cmpd="sng" algn="ctr">
+                    <a:lnT w="12700" cap="flat" cmpd="sng" algn="ctr">
                       <a:solidFill>
-                        <a:srgbClr val="D4D7DF"/>
+                        <a:srgbClr val="CCCCCC"/>
                       </a:solidFill>
                       <a:prstDash val="solid"/>
                       <a:round/>
                       <a:headEnd type="none" w="med" len="med"/>
                       <a:tailEnd type="none" w="med" len="med"/>
                     </a:lnT>
-                    <a:lnB w="9525" cap="flat" cmpd="sng" algn="ctr">
+                    <a:lnB w="12700" cap="flat" cmpd="sng" algn="ctr">
                       <a:solidFill>
-                        <a:srgbClr val="D4D7DF"/>
+                        <a:srgbClr val="CCCCCC"/>
                       </a:solidFill>
                       <a:prstDash val="solid"/>
                       <a:round/>
@@ -20196,58 +20722,63 @@
                     <a:bodyPr/>
                     <a:lstStyle/>
                     <a:p>
-                      <a:pPr marL="0" indent="0" algn="l">
+                      <a:pPr marL="0" marR="0">
+                        <a:spcAft>
+                          <a:spcPts val="500"/>
+                        </a:spcAft>
                         <a:buNone/>
                       </a:pPr>
                       <a:r>
-                        <a:rPr lang="en-US" sz="1200" dirty="0">
+                        <a:rPr lang="en-US" sz="1200">
                           <a:solidFill>
-                            <a:srgbClr val="1A1A1A"/>
+                            <a:srgbClr val="111111"/>
                           </a:solidFill>
+                          <a:effectLst/>
                           <a:latin typeface="Cambria" panose="02040503050406030204" pitchFamily="18" charset="0"/>
-                          <a:ea typeface="Calibri" pitchFamily="34" charset="-122"/>
-                          <a:cs typeface="Calibri" pitchFamily="34" charset="-120"/>
+                          <a:ea typeface="Arial" panose="020B0604020202020204" pitchFamily="34" charset="0"/>
+                          <a:cs typeface="Arial" panose="020B0604020202020204" pitchFamily="34" charset="0"/>
                         </a:rPr>
-                        <a:t>Global mutable state.</a:t>
+                        <a:t>DB connection pool — one pool, always.</a:t>
                       </a:r>
-                      <a:endParaRPr lang="en-US" sz="1200" dirty="0">
+                      <a:endParaRPr lang="en-US" sz="1200">
+                        <a:effectLst/>
                         <a:latin typeface="Cambria" panose="02040503050406030204" pitchFamily="18" charset="0"/>
-                        <a:ea typeface="Calibri" charset="0"/>
-                        <a:cs typeface="Calibri" charset="0"/>
+                        <a:ea typeface="Arial" panose="020B0604020202020204" pitchFamily="34" charset="0"/>
+                        <a:cs typeface="Vrinda" panose="020B0502040204020203" pitchFamily="34" charset="0"/>
                       </a:endParaRPr>
                     </a:p>
                   </a:txBody>
-                  <a:tcPr marL="76200" marR="63500" marT="38100" marB="38100">
-                    <a:lnL w="9525" cap="flat" cmpd="sng" algn="ctr">
+                  <a:tcPr marL="57150" marR="50800" marT="44450" marB="44450">
+                    <a:lnL w="12700" cap="flat" cmpd="sng" algn="ctr">
                       <a:solidFill>
-                        <a:srgbClr val="D4D7DF"/>
+                        <a:srgbClr val="CCCCCC"/>
                       </a:solidFill>
                       <a:prstDash val="solid"/>
                       <a:round/>
                       <a:headEnd type="none" w="med" len="med"/>
                       <a:tailEnd type="none" w="med" len="med"/>
                     </a:lnL>
-                    <a:lnR w="9525" cap="flat" cmpd="sng" algn="ctr">
+                    <a:lnR w="12700" cap="flat" cmpd="sng" algn="ctr">
                       <a:solidFill>
-                        <a:srgbClr val="D4D7DF"/>
+                        <a:srgbClr val="CCCCCC"/>
                       </a:solidFill>
                       <a:prstDash val="solid"/>
                       <a:round/>
                       <a:headEnd type="none" w="med" len="med"/>
                       <a:tailEnd type="none" w="med" len="med"/>
                     </a:lnR>
-                    <a:lnT w="9525" cap="flat" cmpd="sng" algn="ctr">
+                    <a:lnT w="12700" cap="flat" cmpd="sng" algn="ctr">
                       <a:solidFill>
-                        <a:srgbClr val="D4D7DF"/>
+                        <a:srgbClr val="CCCCCC"/>
                       </a:solidFill>
                       <a:prstDash val="solid"/>
                       <a:round/>
                       <a:headEnd type="none" w="med" len="med"/>
                       <a:tailEnd type="none" w="med" len="med"/>
                     </a:lnT>
-                    <a:lnB w="9525" cap="flat" cmpd="sng" algn="ctr">
+                    <a:lnB w="12700" cap="flat" cmpd="sng" algn="ctr">
                       <a:solidFill>
-                        <a:srgbClr val="D4D7DF"/>
+                        <a:srgbClr val="CCCCCC"/>
                       </a:solidFill>
                       <a:prstDash val="solid"/>
                       <a:round/>
@@ -20264,58 +20795,63 @@
                     <a:bodyPr/>
                     <a:lstStyle/>
                     <a:p>
-                      <a:pPr marL="0" indent="0" algn="l">
+                      <a:pPr marL="0" marR="0">
+                        <a:spcAft>
+                          <a:spcPts val="500"/>
+                        </a:spcAft>
                         <a:buNone/>
                       </a:pPr>
                       <a:r>
-                        <a:rPr lang="en-US" sz="1200" dirty="0">
+                        <a:rPr lang="en-US" sz="1200">
                           <a:solidFill>
-                            <a:srgbClr val="1A1A1A"/>
+                            <a:srgbClr val="111111"/>
                           </a:solidFill>
+                          <a:effectLst/>
                           <a:latin typeface="Cambria" panose="02040503050406030204" pitchFamily="18" charset="0"/>
-                          <a:ea typeface="Calibri" pitchFamily="34" charset="-122"/>
-                          <a:cs typeface="Calibri" pitchFamily="34" charset="-120"/>
+                          <a:ea typeface="Arial" panose="020B0604020202020204" pitchFamily="34" charset="0"/>
+                          <a:cs typeface="Arial" panose="020B0604020202020204" pitchFamily="34" charset="0"/>
                         </a:rPr>
-                        <a:t>Too many subclasses.</a:t>
+                        <a:t>Notification channels: Push, SMS, Email, WhatsApp.</a:t>
                       </a:r>
-                      <a:endParaRPr lang="en-US" sz="1200" dirty="0">
+                      <a:endParaRPr lang="en-US" sz="1200">
+                        <a:effectLst/>
                         <a:latin typeface="Cambria" panose="02040503050406030204" pitchFamily="18" charset="0"/>
-                        <a:ea typeface="Calibri" charset="0"/>
-                        <a:cs typeface="Calibri" charset="0"/>
+                        <a:ea typeface="Arial" panose="020B0604020202020204" pitchFamily="34" charset="0"/>
+                        <a:cs typeface="Vrinda" panose="020B0502040204020203" pitchFamily="34" charset="0"/>
                       </a:endParaRPr>
                     </a:p>
                   </a:txBody>
-                  <a:tcPr marL="76200" marR="63500" marT="38100" marB="38100">
-                    <a:lnL w="9525" cap="flat" cmpd="sng" algn="ctr">
+                  <a:tcPr marL="57150" marR="50800" marT="44450" marB="44450">
+                    <a:lnL w="12700" cap="flat" cmpd="sng" algn="ctr">
                       <a:solidFill>
-                        <a:srgbClr val="D4D7DF"/>
+                        <a:srgbClr val="CCCCCC"/>
                       </a:solidFill>
                       <a:prstDash val="solid"/>
                       <a:round/>
                       <a:headEnd type="none" w="med" len="med"/>
                       <a:tailEnd type="none" w="med" len="med"/>
                     </a:lnL>
-                    <a:lnR w="9525" cap="flat" cmpd="sng" algn="ctr">
+                    <a:lnR w="12700" cap="flat" cmpd="sng" algn="ctr">
                       <a:solidFill>
-                        <a:srgbClr val="D4D7DF"/>
+                        <a:srgbClr val="CCCCCC"/>
                       </a:solidFill>
                       <a:prstDash val="solid"/>
                       <a:round/>
                       <a:headEnd type="none" w="med" len="med"/>
                       <a:tailEnd type="none" w="med" len="med"/>
                     </a:lnR>
-                    <a:lnT w="9525" cap="flat" cmpd="sng" algn="ctr">
+                    <a:lnT w="12700" cap="flat" cmpd="sng" algn="ctr">
                       <a:solidFill>
-                        <a:srgbClr val="D4D7DF"/>
+                        <a:srgbClr val="CCCCCC"/>
                       </a:solidFill>
                       <a:prstDash val="solid"/>
                       <a:round/>
                       <a:headEnd type="none" w="med" len="med"/>
                       <a:tailEnd type="none" w="med" len="med"/>
                     </a:lnT>
-                    <a:lnB w="9525" cap="flat" cmpd="sng" algn="ctr">
+                    <a:lnB w="12700" cap="flat" cmpd="sng" algn="ctr">
                       <a:solidFill>
-                        <a:srgbClr val="D4D7DF"/>
+                        <a:srgbClr val="CCCCCC"/>
                       </a:solidFill>
                       <a:prstDash val="solid"/>
                       <a:round/>
@@ -20332,58 +20868,63 @@
                     <a:bodyPr/>
                     <a:lstStyle/>
                     <a:p>
-                      <a:pPr marL="0" indent="0" algn="l">
+                      <a:pPr marL="0" marR="0">
+                        <a:spcAft>
+                          <a:spcPts val="500"/>
+                        </a:spcAft>
                         <a:buNone/>
                       </a:pPr>
                       <a:r>
-                        <a:rPr lang="en-US" sz="1200" dirty="0">
+                        <a:rPr lang="en-US" sz="1200">
                           <a:solidFill>
-                            <a:srgbClr val="1A1A1A"/>
+                            <a:srgbClr val="111111"/>
                           </a:solidFill>
+                          <a:effectLst/>
                           <a:latin typeface="Cambria" panose="02040503050406030204" pitchFamily="18" charset="0"/>
-                          <a:ea typeface="Calibri" pitchFamily="34" charset="-122"/>
-                          <a:cs typeface="Calibri" pitchFamily="34" charset="-120"/>
+                          <a:ea typeface="Arial" panose="020B0604020202020204" pitchFamily="34" charset="0"/>
+                          <a:cs typeface="Arial" panose="020B0604020202020204" pitchFamily="34" charset="0"/>
                         </a:rPr>
-                        <a:t>Factory explosion.</a:t>
+                        <a:t>Matching strategies: NearestDriver, HighestRated, etc.</a:t>
                       </a:r>
-                      <a:endParaRPr lang="en-US" sz="1200" dirty="0">
+                      <a:endParaRPr lang="en-US" sz="1200">
+                        <a:effectLst/>
                         <a:latin typeface="Cambria" panose="02040503050406030204" pitchFamily="18" charset="0"/>
-                        <a:ea typeface="Calibri" charset="0"/>
-                        <a:cs typeface="Calibri" charset="0"/>
+                        <a:ea typeface="Arial" panose="020B0604020202020204" pitchFamily="34" charset="0"/>
+                        <a:cs typeface="Vrinda" panose="020B0502040204020203" pitchFamily="34" charset="0"/>
                       </a:endParaRPr>
                     </a:p>
                   </a:txBody>
-                  <a:tcPr marL="76200" marR="63500" marT="38100" marB="38100">
-                    <a:lnL w="9525" cap="flat" cmpd="sng" algn="ctr">
+                  <a:tcPr marL="57150" marR="50800" marT="44450" marB="44450">
+                    <a:lnL w="12700" cap="flat" cmpd="sng" algn="ctr">
                       <a:solidFill>
-                        <a:srgbClr val="D4D7DF"/>
+                        <a:srgbClr val="CCCCCC"/>
                       </a:solidFill>
                       <a:prstDash val="solid"/>
                       <a:round/>
                       <a:headEnd type="none" w="med" len="med"/>
                       <a:tailEnd type="none" w="med" len="med"/>
                     </a:lnL>
-                    <a:lnR w="9525" cap="flat" cmpd="sng" algn="ctr">
+                    <a:lnR w="12700" cap="flat" cmpd="sng" algn="ctr">
                       <a:solidFill>
-                        <a:srgbClr val="D4D7DF"/>
+                        <a:srgbClr val="CCCCCC"/>
                       </a:solidFill>
                       <a:prstDash val="solid"/>
                       <a:round/>
                       <a:headEnd type="none" w="med" len="med"/>
                       <a:tailEnd type="none" w="med" len="med"/>
                     </a:lnR>
-                    <a:lnT w="9525" cap="flat" cmpd="sng" algn="ctr">
+                    <a:lnT w="12700" cap="flat" cmpd="sng" algn="ctr">
                       <a:solidFill>
-                        <a:srgbClr val="D4D7DF"/>
+                        <a:srgbClr val="CCCCCC"/>
                       </a:solidFill>
                       <a:prstDash val="solid"/>
                       <a:round/>
                       <a:headEnd type="none" w="med" len="med"/>
                       <a:tailEnd type="none" w="med" len="med"/>
                     </a:lnT>
-                    <a:lnB w="9525" cap="flat" cmpd="sng" algn="ctr">
+                    <a:lnB w="12700" cap="flat" cmpd="sng" algn="ctr">
                       <a:solidFill>
-                        <a:srgbClr val="D4D7DF"/>
+                        <a:srgbClr val="CCCCCC"/>
                       </a:solidFill>
                       <a:prstDash val="solid"/>
                       <a:round/>
@@ -20400,58 +20941,63 @@
                     <a:bodyPr/>
                     <a:lstStyle/>
                     <a:p>
-                      <a:pPr marL="0" indent="0" algn="l">
+                      <a:pPr marL="0" marR="0">
+                        <a:spcAft>
+                          <a:spcPts val="500"/>
+                        </a:spcAft>
                         <a:buNone/>
                       </a:pPr>
                       <a:r>
-                        <a:rPr lang="en-US" sz="1200" dirty="0">
+                        <a:rPr lang="en-US" sz="1200">
                           <a:solidFill>
-                            <a:srgbClr val="1A1A1A"/>
+                            <a:srgbClr val="111111"/>
                           </a:solidFill>
+                          <a:effectLst/>
                           <a:latin typeface="Cambria" panose="02040503050406030204" pitchFamily="18" charset="0"/>
-                          <a:ea typeface="Calibri" pitchFamily="34" charset="-122"/>
-                          <a:cs typeface="Calibri" pitchFamily="34" charset="-120"/>
+                          <a:ea typeface="Arial" panose="020B0604020202020204" pitchFamily="34" charset="0"/>
+                          <a:cs typeface="Arial" panose="020B0604020202020204" pitchFamily="34" charset="0"/>
                         </a:rPr>
-                        <a:t>Builder for 2–3 fields.</a:t>
+                        <a:t>RideRequest construction with optional fields.</a:t>
                       </a:r>
-                      <a:endParaRPr lang="en-US" sz="1200" dirty="0">
+                      <a:endParaRPr lang="en-US" sz="1200">
+                        <a:effectLst/>
                         <a:latin typeface="Cambria" panose="02040503050406030204" pitchFamily="18" charset="0"/>
-                        <a:ea typeface="Calibri" charset="0"/>
-                        <a:cs typeface="Calibri" charset="0"/>
+                        <a:ea typeface="Arial" panose="020B0604020202020204" pitchFamily="34" charset="0"/>
+                        <a:cs typeface="Vrinda" panose="020B0502040204020203" pitchFamily="34" charset="0"/>
                       </a:endParaRPr>
                     </a:p>
                   </a:txBody>
-                  <a:tcPr marL="76200" marR="63500" marT="38100" marB="38100">
-                    <a:lnL w="9525" cap="flat" cmpd="sng" algn="ctr">
+                  <a:tcPr marL="57150" marR="50800" marT="44450" marB="44450">
+                    <a:lnL w="12700" cap="flat" cmpd="sng" algn="ctr">
                       <a:solidFill>
-                        <a:srgbClr val="D4D7DF"/>
+                        <a:srgbClr val="CCCCCC"/>
                       </a:solidFill>
                       <a:prstDash val="solid"/>
                       <a:round/>
                       <a:headEnd type="none" w="med" len="med"/>
                       <a:tailEnd type="none" w="med" len="med"/>
                     </a:lnL>
-                    <a:lnR w="9525" cap="flat" cmpd="sng" algn="ctr">
+                    <a:lnR w="12700" cap="flat" cmpd="sng" algn="ctr">
                       <a:solidFill>
-                        <a:srgbClr val="D4D7DF"/>
+                        <a:srgbClr val="CCCCCC"/>
                       </a:solidFill>
                       <a:prstDash val="solid"/>
                       <a:round/>
                       <a:headEnd type="none" w="med" len="med"/>
                       <a:tailEnd type="none" w="med" len="med"/>
                     </a:lnR>
-                    <a:lnT w="9525" cap="flat" cmpd="sng" algn="ctr">
+                    <a:lnT w="12700" cap="flat" cmpd="sng" algn="ctr">
                       <a:solidFill>
-                        <a:srgbClr val="D4D7DF"/>
+                        <a:srgbClr val="CCCCCC"/>
                       </a:solidFill>
                       <a:prstDash val="solid"/>
                       <a:round/>
                       <a:headEnd type="none" w="med" len="med"/>
                       <a:tailEnd type="none" w="med" len="med"/>
                     </a:lnT>
-                    <a:lnB w="9525" cap="flat" cmpd="sng" algn="ctr">
+                    <a:lnB w="12700" cap="flat" cmpd="sng" algn="ctr">
                       <a:solidFill>
-                        <a:srgbClr val="D4D7DF"/>
+                        <a:srgbClr val="CCCCCC"/>
                       </a:solidFill>
                       <a:prstDash val="solid"/>
                       <a:round/>
@@ -20465,7 +21011,379 @@
                 </a:tc>
                 <a:extLst>
                   <a:ext uri="{0D108BD9-81ED-4DB2-BD59-A6C34878D82A}">
-                    <a16:rowId xmlns:a16="http://schemas.microsoft.com/office/drawing/2014/main" val="10005"/>
+                    <a16:rowId xmlns:a16="http://schemas.microsoft.com/office/drawing/2014/main" val="145543633"/>
+                  </a:ext>
+                </a:extLst>
+              </a:tr>
+              <a:tr h="618635">
+                <a:tc>
+                  <a:txBody>
+                    <a:bodyPr/>
+                    <a:lstStyle/>
+                    <a:p>
+                      <a:pPr marL="0" marR="0">
+                        <a:spcAft>
+                          <a:spcPts val="500"/>
+                        </a:spcAft>
+                        <a:buNone/>
+                      </a:pPr>
+                      <a:r>
+                        <a:rPr lang="en-US" sz="1200" b="1">
+                          <a:solidFill>
+                            <a:srgbClr val="111111"/>
+                          </a:solidFill>
+                          <a:effectLst/>
+                          <a:latin typeface="Cambria" panose="02040503050406030204" pitchFamily="18" charset="0"/>
+                          <a:ea typeface="Arial" panose="020B0604020202020204" pitchFamily="34" charset="0"/>
+                          <a:cs typeface="Arial" panose="020B0604020202020204" pitchFamily="34" charset="0"/>
+                        </a:rPr>
+                        <a:t>Anti-pattern warning</a:t>
+                      </a:r>
+                      <a:endParaRPr lang="en-US" sz="1200">
+                        <a:effectLst/>
+                        <a:latin typeface="Cambria" panose="02040503050406030204" pitchFamily="18" charset="0"/>
+                        <a:ea typeface="Arial" panose="020B0604020202020204" pitchFamily="34" charset="0"/>
+                        <a:cs typeface="Vrinda" panose="020B0502040204020203" pitchFamily="34" charset="0"/>
+                      </a:endParaRPr>
+                    </a:p>
+                  </a:txBody>
+                  <a:tcPr marL="57150" marR="50800" marT="44450" marB="44450">
+                    <a:lnL w="12700" cap="flat" cmpd="sng" algn="ctr">
+                      <a:solidFill>
+                        <a:srgbClr val="CCCCCC"/>
+                      </a:solidFill>
+                      <a:prstDash val="solid"/>
+                      <a:round/>
+                      <a:headEnd type="none" w="med" len="med"/>
+                      <a:tailEnd type="none" w="med" len="med"/>
+                    </a:lnL>
+                    <a:lnR w="12700" cap="flat" cmpd="sng" algn="ctr">
+                      <a:solidFill>
+                        <a:srgbClr val="CCCCCC"/>
+                      </a:solidFill>
+                      <a:prstDash val="solid"/>
+                      <a:round/>
+                      <a:headEnd type="none" w="med" len="med"/>
+                      <a:tailEnd type="none" w="med" len="med"/>
+                    </a:lnR>
+                    <a:lnT w="12700" cap="flat" cmpd="sng" algn="ctr">
+                      <a:solidFill>
+                        <a:srgbClr val="CCCCCC"/>
+                      </a:solidFill>
+                      <a:prstDash val="solid"/>
+                      <a:round/>
+                      <a:headEnd type="none" w="med" len="med"/>
+                      <a:tailEnd type="none" w="med" len="med"/>
+                    </a:lnT>
+                    <a:lnB w="12700" cap="flat" cmpd="sng" algn="ctr">
+                      <a:solidFill>
+                        <a:srgbClr val="CCCCCC"/>
+                      </a:solidFill>
+                      <a:prstDash val="solid"/>
+                      <a:round/>
+                      <a:headEnd type="none" w="med" len="med"/>
+                      <a:tailEnd type="none" w="med" len="med"/>
+                    </a:lnB>
+                    <a:solidFill>
+                      <a:srgbClr val="EBF4FF"/>
+                    </a:solidFill>
+                  </a:tcPr>
+                </a:tc>
+                <a:tc>
+                  <a:txBody>
+                    <a:bodyPr/>
+                    <a:lstStyle/>
+                    <a:p>
+                      <a:pPr marL="0" marR="0">
+                        <a:spcAft>
+                          <a:spcPts val="500"/>
+                        </a:spcAft>
+                        <a:buNone/>
+                      </a:pPr>
+                      <a:r>
+                        <a:rPr lang="en-US" sz="1200">
+                          <a:solidFill>
+                            <a:srgbClr val="111111"/>
+                          </a:solidFill>
+                          <a:effectLst/>
+                          <a:latin typeface="Cambria" panose="02040503050406030204" pitchFamily="18" charset="0"/>
+                          <a:ea typeface="Arial" panose="020B0604020202020204" pitchFamily="34" charset="0"/>
+                          <a:cs typeface="Arial" panose="020B0604020202020204" pitchFamily="34" charset="0"/>
+                        </a:rPr>
+                        <a:t>Global mutable state — disguised global variable.</a:t>
+                      </a:r>
+                      <a:endParaRPr lang="en-US" sz="1200">
+                        <a:effectLst/>
+                        <a:latin typeface="Cambria" panose="02040503050406030204" pitchFamily="18" charset="0"/>
+                        <a:ea typeface="Arial" panose="020B0604020202020204" pitchFamily="34" charset="0"/>
+                        <a:cs typeface="Vrinda" panose="020B0502040204020203" pitchFamily="34" charset="0"/>
+                      </a:endParaRPr>
+                    </a:p>
+                  </a:txBody>
+                  <a:tcPr marL="57150" marR="50800" marT="44450" marB="44450">
+                    <a:lnL w="12700" cap="flat" cmpd="sng" algn="ctr">
+                      <a:solidFill>
+                        <a:srgbClr val="CCCCCC"/>
+                      </a:solidFill>
+                      <a:prstDash val="solid"/>
+                      <a:round/>
+                      <a:headEnd type="none" w="med" len="med"/>
+                      <a:tailEnd type="none" w="med" len="med"/>
+                    </a:lnL>
+                    <a:lnR w="12700" cap="flat" cmpd="sng" algn="ctr">
+                      <a:solidFill>
+                        <a:srgbClr val="CCCCCC"/>
+                      </a:solidFill>
+                      <a:prstDash val="solid"/>
+                      <a:round/>
+                      <a:headEnd type="none" w="med" len="med"/>
+                      <a:tailEnd type="none" w="med" len="med"/>
+                    </a:lnR>
+                    <a:lnT w="12700" cap="flat" cmpd="sng" algn="ctr">
+                      <a:solidFill>
+                        <a:srgbClr val="CCCCCC"/>
+                      </a:solidFill>
+                      <a:prstDash val="solid"/>
+                      <a:round/>
+                      <a:headEnd type="none" w="med" len="med"/>
+                      <a:tailEnd type="none" w="med" len="med"/>
+                    </a:lnT>
+                    <a:lnB w="12700" cap="flat" cmpd="sng" algn="ctr">
+                      <a:solidFill>
+                        <a:srgbClr val="CCCCCC"/>
+                      </a:solidFill>
+                      <a:prstDash val="solid"/>
+                      <a:round/>
+                      <a:headEnd type="none" w="med" len="med"/>
+                      <a:tailEnd type="none" w="med" len="med"/>
+                    </a:lnB>
+                    <a:solidFill>
+                      <a:srgbClr val="F0F7FF"/>
+                    </a:solidFill>
+                  </a:tcPr>
+                </a:tc>
+                <a:tc>
+                  <a:txBody>
+                    <a:bodyPr/>
+                    <a:lstStyle/>
+                    <a:p>
+                      <a:pPr marL="0" marR="0">
+                        <a:spcAft>
+                          <a:spcPts val="500"/>
+                        </a:spcAft>
+                        <a:buNone/>
+                      </a:pPr>
+                      <a:r>
+                        <a:rPr lang="en-US" sz="1200">
+                          <a:solidFill>
+                            <a:srgbClr val="111111"/>
+                          </a:solidFill>
+                          <a:effectLst/>
+                          <a:latin typeface="Cambria" panose="02040503050406030204" pitchFamily="18" charset="0"/>
+                          <a:ea typeface="Arial" panose="020B0604020202020204" pitchFamily="34" charset="0"/>
+                          <a:cs typeface="Arial" panose="020B0604020202020204" pitchFamily="34" charset="0"/>
+                        </a:rPr>
+                        <a:t>Too many subclasses — use config instead.</a:t>
+                      </a:r>
+                      <a:endParaRPr lang="en-US" sz="1200">
+                        <a:effectLst/>
+                        <a:latin typeface="Cambria" panose="02040503050406030204" pitchFamily="18" charset="0"/>
+                        <a:ea typeface="Arial" panose="020B0604020202020204" pitchFamily="34" charset="0"/>
+                        <a:cs typeface="Vrinda" panose="020B0502040204020203" pitchFamily="34" charset="0"/>
+                      </a:endParaRPr>
+                    </a:p>
+                  </a:txBody>
+                  <a:tcPr marL="57150" marR="50800" marT="44450" marB="44450">
+                    <a:lnL w="12700" cap="flat" cmpd="sng" algn="ctr">
+                      <a:solidFill>
+                        <a:srgbClr val="CCCCCC"/>
+                      </a:solidFill>
+                      <a:prstDash val="solid"/>
+                      <a:round/>
+                      <a:headEnd type="none" w="med" len="med"/>
+                      <a:tailEnd type="none" w="med" len="med"/>
+                    </a:lnL>
+                    <a:lnR w="12700" cap="flat" cmpd="sng" algn="ctr">
+                      <a:solidFill>
+                        <a:srgbClr val="CCCCCC"/>
+                      </a:solidFill>
+                      <a:prstDash val="solid"/>
+                      <a:round/>
+                      <a:headEnd type="none" w="med" len="med"/>
+                      <a:tailEnd type="none" w="med" len="med"/>
+                    </a:lnR>
+                    <a:lnT w="12700" cap="flat" cmpd="sng" algn="ctr">
+                      <a:solidFill>
+                        <a:srgbClr val="CCCCCC"/>
+                      </a:solidFill>
+                      <a:prstDash val="solid"/>
+                      <a:round/>
+                      <a:headEnd type="none" w="med" len="med"/>
+                      <a:tailEnd type="none" w="med" len="med"/>
+                    </a:lnT>
+                    <a:lnB w="12700" cap="flat" cmpd="sng" algn="ctr">
+                      <a:solidFill>
+                        <a:srgbClr val="CCCCCC"/>
+                      </a:solidFill>
+                      <a:prstDash val="solid"/>
+                      <a:round/>
+                      <a:headEnd type="none" w="med" len="med"/>
+                      <a:tailEnd type="none" w="med" len="med"/>
+                    </a:lnB>
+                    <a:solidFill>
+                      <a:srgbClr val="F0FFF0"/>
+                    </a:solidFill>
+                  </a:tcPr>
+                </a:tc>
+                <a:tc>
+                  <a:txBody>
+                    <a:bodyPr/>
+                    <a:lstStyle/>
+                    <a:p>
+                      <a:pPr marL="0" marR="0">
+                        <a:spcAft>
+                          <a:spcPts val="500"/>
+                        </a:spcAft>
+                        <a:buNone/>
+                      </a:pPr>
+                      <a:r>
+                        <a:rPr lang="en-US" sz="1200">
+                          <a:solidFill>
+                            <a:srgbClr val="111111"/>
+                          </a:solidFill>
+                          <a:effectLst/>
+                          <a:latin typeface="Cambria" panose="02040503050406030204" pitchFamily="18" charset="0"/>
+                          <a:ea typeface="Arial" panose="020B0604020202020204" pitchFamily="34" charset="0"/>
+                          <a:cs typeface="Arial" panose="020B0604020202020204" pitchFamily="34" charset="0"/>
+                        </a:rPr>
+                        <a:t>Factory explosion — too many families × products.</a:t>
+                      </a:r>
+                      <a:endParaRPr lang="en-US" sz="1200">
+                        <a:effectLst/>
+                        <a:latin typeface="Cambria" panose="02040503050406030204" pitchFamily="18" charset="0"/>
+                        <a:ea typeface="Arial" panose="020B0604020202020204" pitchFamily="34" charset="0"/>
+                        <a:cs typeface="Vrinda" panose="020B0502040204020203" pitchFamily="34" charset="0"/>
+                      </a:endParaRPr>
+                    </a:p>
+                  </a:txBody>
+                  <a:tcPr marL="57150" marR="50800" marT="44450" marB="44450">
+                    <a:lnL w="12700" cap="flat" cmpd="sng" algn="ctr">
+                      <a:solidFill>
+                        <a:srgbClr val="CCCCCC"/>
+                      </a:solidFill>
+                      <a:prstDash val="solid"/>
+                      <a:round/>
+                      <a:headEnd type="none" w="med" len="med"/>
+                      <a:tailEnd type="none" w="med" len="med"/>
+                    </a:lnL>
+                    <a:lnR w="12700" cap="flat" cmpd="sng" algn="ctr">
+                      <a:solidFill>
+                        <a:srgbClr val="CCCCCC"/>
+                      </a:solidFill>
+                      <a:prstDash val="solid"/>
+                      <a:round/>
+                      <a:headEnd type="none" w="med" len="med"/>
+                      <a:tailEnd type="none" w="med" len="med"/>
+                    </a:lnR>
+                    <a:lnT w="12700" cap="flat" cmpd="sng" algn="ctr">
+                      <a:solidFill>
+                        <a:srgbClr val="CCCCCC"/>
+                      </a:solidFill>
+                      <a:prstDash val="solid"/>
+                      <a:round/>
+                      <a:headEnd type="none" w="med" len="med"/>
+                      <a:tailEnd type="none" w="med" len="med"/>
+                    </a:lnT>
+                    <a:lnB w="12700" cap="flat" cmpd="sng" algn="ctr">
+                      <a:solidFill>
+                        <a:srgbClr val="CCCCCC"/>
+                      </a:solidFill>
+                      <a:prstDash val="solid"/>
+                      <a:round/>
+                      <a:headEnd type="none" w="med" len="med"/>
+                      <a:tailEnd type="none" w="med" len="med"/>
+                    </a:lnB>
+                    <a:solidFill>
+                      <a:srgbClr val="FFF8E1"/>
+                    </a:solidFill>
+                  </a:tcPr>
+                </a:tc>
+                <a:tc>
+                  <a:txBody>
+                    <a:bodyPr/>
+                    <a:lstStyle/>
+                    <a:p>
+                      <a:pPr marL="0" marR="0">
+                        <a:spcAft>
+                          <a:spcPts val="500"/>
+                        </a:spcAft>
+                        <a:buNone/>
+                      </a:pPr>
+                      <a:r>
+                        <a:rPr lang="en-US" sz="1200" dirty="0">
+                          <a:solidFill>
+                            <a:srgbClr val="111111"/>
+                          </a:solidFill>
+                          <a:effectLst/>
+                          <a:latin typeface="Cambria" panose="02040503050406030204" pitchFamily="18" charset="0"/>
+                          <a:ea typeface="Arial" panose="020B0604020202020204" pitchFamily="34" charset="0"/>
+                          <a:cs typeface="Arial" panose="020B0604020202020204" pitchFamily="34" charset="0"/>
+                        </a:rPr>
+                        <a:t>Builder for simple 2-3 field objects — overkill.</a:t>
+                      </a:r>
+                      <a:endParaRPr lang="en-US" sz="1200" dirty="0">
+                        <a:effectLst/>
+                        <a:latin typeface="Cambria" panose="02040503050406030204" pitchFamily="18" charset="0"/>
+                        <a:ea typeface="Arial" panose="020B0604020202020204" pitchFamily="34" charset="0"/>
+                        <a:cs typeface="Vrinda" panose="020B0502040204020203" pitchFamily="34" charset="0"/>
+                      </a:endParaRPr>
+                    </a:p>
+                  </a:txBody>
+                  <a:tcPr marL="57150" marR="50800" marT="44450" marB="44450">
+                    <a:lnL w="12700" cap="flat" cmpd="sng" algn="ctr">
+                      <a:solidFill>
+                        <a:srgbClr val="CCCCCC"/>
+                      </a:solidFill>
+                      <a:prstDash val="solid"/>
+                      <a:round/>
+                      <a:headEnd type="none" w="med" len="med"/>
+                      <a:tailEnd type="none" w="med" len="med"/>
+                    </a:lnL>
+                    <a:lnR w="12700" cap="flat" cmpd="sng" algn="ctr">
+                      <a:solidFill>
+                        <a:srgbClr val="CCCCCC"/>
+                      </a:solidFill>
+                      <a:prstDash val="solid"/>
+                      <a:round/>
+                      <a:headEnd type="none" w="med" len="med"/>
+                      <a:tailEnd type="none" w="med" len="med"/>
+                    </a:lnR>
+                    <a:lnT w="12700" cap="flat" cmpd="sng" algn="ctr">
+                      <a:solidFill>
+                        <a:srgbClr val="CCCCCC"/>
+                      </a:solidFill>
+                      <a:prstDash val="solid"/>
+                      <a:round/>
+                      <a:headEnd type="none" w="med" len="med"/>
+                      <a:tailEnd type="none" w="med" len="med"/>
+                    </a:lnT>
+                    <a:lnB w="12700" cap="flat" cmpd="sng" algn="ctr">
+                      <a:solidFill>
+                        <a:srgbClr val="CCCCCC"/>
+                      </a:solidFill>
+                      <a:prstDash val="solid"/>
+                      <a:round/>
+                      <a:headEnd type="none" w="med" len="med"/>
+                      <a:tailEnd type="none" w="med" len="med"/>
+                    </a:lnB>
+                    <a:solidFill>
+                      <a:srgbClr val="FFF0FF"/>
+                    </a:solidFill>
+                  </a:tcPr>
+                </a:tc>
+                <a:extLst>
+                  <a:ext uri="{0D108BD9-81ED-4DB2-BD59-A6C34878D82A}">
+                    <a16:rowId xmlns:a16="http://schemas.microsoft.com/office/drawing/2014/main" val="2190024288"/>
                   </a:ext>
                 </a:extLst>
               </a:tr>
